--- a/GACI FORUM SUR L’APPRENTISSAGE DU frame work boostrap.pptx
+++ b/GACI FORUM SUR L’APPRENTISSAGE DU frame work boostrap.pptx
@@ -1694,13 +1694,18 @@
         <a:p>
           <a:pPr rtl="0"/>
           <a:r>
-            <a:rPr lang="fr" dirty="0">
+            <a:rPr lang="fr" dirty="0" smtClean="0">
               <a:latin typeface="Tahoma" panose="020B0604030504040204" pitchFamily="34" charset="0"/>
               <a:ea typeface="Tahoma" panose="020B0604030504040204" pitchFamily="34" charset="0"/>
               <a:cs typeface="Tahoma" panose="020B0604030504040204" pitchFamily="34" charset="0"/>
             </a:rPr>
-            <a:t>Qui rencontre ce problème ?</a:t>
+            <a:t>A quoi sert Boostrap</a:t>
           </a:r>
+          <a:endParaRPr lang="fr" dirty="0">
+            <a:latin typeface="Tahoma" panose="020B0604030504040204" pitchFamily="34" charset="0"/>
+            <a:ea typeface="Tahoma" panose="020B0604030504040204" pitchFamily="34" charset="0"/>
+            <a:cs typeface="Tahoma" panose="020B0604030504040204" pitchFamily="34" charset="0"/>
+          </a:endParaRPr>
         </a:p>
       </dgm:t>
     </dgm:pt>
@@ -1737,13 +1742,18 @@
         <a:p>
           <a:pPr rtl="0"/>
           <a:r>
-            <a:rPr lang="fr" sz="2400">
+            <a:rPr lang="fr" sz="2400" dirty="0" smtClean="0">
               <a:latin typeface="Tahoma" panose="020B0604030504040204" pitchFamily="34" charset="0"/>
               <a:ea typeface="Tahoma" panose="020B0604030504040204" pitchFamily="34" charset="0"/>
               <a:cs typeface="Tahoma" panose="020B0604030504040204" pitchFamily="34" charset="0"/>
             </a:rPr>
-            <a:t>[Texte]</a:t>
+            <a:t>Boostrap nous aide à faire des design web plus facile et rapide.</a:t>
           </a:r>
+          <a:endParaRPr lang="fr" sz="2400" dirty="0">
+            <a:latin typeface="Tahoma" panose="020B0604030504040204" pitchFamily="34" charset="0"/>
+            <a:ea typeface="Tahoma" panose="020B0604030504040204" pitchFamily="34" charset="0"/>
+            <a:cs typeface="Tahoma" panose="020B0604030504040204" pitchFamily="34" charset="0"/>
+          </a:endParaRPr>
         </a:p>
       </dgm:t>
     </dgm:pt>
@@ -1780,13 +1790,18 @@
         <a:p>
           <a:pPr rtl="0"/>
           <a:r>
-            <a:rPr lang="fr">
+            <a:rPr lang="fr" dirty="0" smtClean="0">
               <a:latin typeface="Tahoma" panose="020B0604030504040204" pitchFamily="34" charset="0"/>
               <a:ea typeface="Tahoma" panose="020B0604030504040204" pitchFamily="34" charset="0"/>
               <a:cs typeface="Tahoma" panose="020B0604030504040204" pitchFamily="34" charset="0"/>
             </a:rPr>
-            <a:t>Pourquoi faut-il résoudre ce problème ?</a:t>
+            <a:t>Comment fonctionne Boostrapp</a:t>
           </a:r>
+          <a:endParaRPr lang="fr" dirty="0">
+            <a:latin typeface="Tahoma" panose="020B0604030504040204" pitchFamily="34" charset="0"/>
+            <a:ea typeface="Tahoma" panose="020B0604030504040204" pitchFamily="34" charset="0"/>
+            <a:cs typeface="Tahoma" panose="020B0604030504040204" pitchFamily="34" charset="0"/>
+          </a:endParaRPr>
         </a:p>
       </dgm:t>
     </dgm:pt>
@@ -1814,49 +1829,6 @@
         </a:p>
       </dgm:t>
     </dgm:pt>
-    <dgm:pt modelId="{2A9B6C90-9B70-4ED8-9084-8651413BB905}">
-      <dgm:prSet phldrT="[Text]" custT="1"/>
-      <dgm:spPr/>
-      <dgm:t>
-        <a:bodyPr rtlCol="0"/>
-        <a:lstStyle/>
-        <a:p>
-          <a:pPr rtl="0"/>
-          <a:r>
-            <a:rPr lang="fr" sz="2400">
-              <a:latin typeface="Tahoma" panose="020B0604030504040204" pitchFamily="34" charset="0"/>
-              <a:ea typeface="Tahoma" panose="020B0604030504040204" pitchFamily="34" charset="0"/>
-              <a:cs typeface="Tahoma" panose="020B0604030504040204" pitchFamily="34" charset="0"/>
-            </a:rPr>
-            <a:t>[Texte]</a:t>
-          </a:r>
-        </a:p>
-      </dgm:t>
-    </dgm:pt>
-    <dgm:pt modelId="{47C005B7-F5AA-4111-A87D-782B117A0259}" type="parTrans" cxnId="{1D59D94A-4BF7-417E-B49B-225C005839A9}">
-      <dgm:prSet/>
-      <dgm:spPr/>
-      <dgm:t>
-        <a:bodyPr rtlCol="0"/>
-        <a:lstStyle/>
-        <a:p>
-          <a:pPr rtl="0"/>
-          <a:endParaRPr lang="en-US"/>
-        </a:p>
-      </dgm:t>
-    </dgm:pt>
-    <dgm:pt modelId="{54109FB3-0563-4B2C-BFF0-181E047427F8}" type="sibTrans" cxnId="{1D59D94A-4BF7-417E-B49B-225C005839A9}">
-      <dgm:prSet/>
-      <dgm:spPr/>
-      <dgm:t>
-        <a:bodyPr rtlCol="0"/>
-        <a:lstStyle/>
-        <a:p>
-          <a:pPr rtl="0"/>
-          <a:endParaRPr lang="en-US"/>
-        </a:p>
-      </dgm:t>
-    </dgm:pt>
     <dgm:pt modelId="{928B5CB8-3545-4EE5-8BED-981D3C6157A5}">
       <dgm:prSet phldrT="[Text]"/>
       <dgm:spPr/>
@@ -1866,13 +1838,18 @@
         <a:p>
           <a:pPr rtl="0"/>
           <a:r>
-            <a:rPr lang="fr">
+            <a:rPr lang="fr" dirty="0" smtClean="0">
               <a:latin typeface="Tahoma" panose="020B0604030504040204" pitchFamily="34" charset="0"/>
               <a:ea typeface="Tahoma" panose="020B0604030504040204" pitchFamily="34" charset="0"/>
               <a:cs typeface="Tahoma" panose="020B0604030504040204" pitchFamily="34" charset="0"/>
             </a:rPr>
-            <a:t>Comment savoir que ce problème a été résolu ?</a:t>
+            <a:t>Boostrap a il un concurent ?</a:t>
           </a:r>
+          <a:endParaRPr lang="fr" dirty="0">
+            <a:latin typeface="Tahoma" panose="020B0604030504040204" pitchFamily="34" charset="0"/>
+            <a:ea typeface="Tahoma" panose="020B0604030504040204" pitchFamily="34" charset="0"/>
+            <a:cs typeface="Tahoma" panose="020B0604030504040204" pitchFamily="34" charset="0"/>
+          </a:endParaRPr>
         </a:p>
       </dgm:t>
     </dgm:pt>
@@ -1909,13 +1886,18 @@
         <a:p>
           <a:pPr rtl="0"/>
           <a:r>
-            <a:rPr lang="fr" sz="2400">
+            <a:rPr lang="fr" sz="2400" dirty="0" smtClean="0">
               <a:latin typeface="Tahoma" panose="020B0604030504040204" pitchFamily="34" charset="0"/>
               <a:ea typeface="Tahoma" panose="020B0604030504040204" pitchFamily="34" charset="0"/>
               <a:cs typeface="Tahoma" panose="020B0604030504040204" pitchFamily="34" charset="0"/>
             </a:rPr>
-            <a:t>[Texte]</a:t>
+            <a:t>Oui les framework Css web sont plus nombreux.</a:t>
           </a:r>
+          <a:endParaRPr lang="fr" sz="2400" dirty="0">
+            <a:latin typeface="Tahoma" panose="020B0604030504040204" pitchFamily="34" charset="0"/>
+            <a:ea typeface="Tahoma" panose="020B0604030504040204" pitchFamily="34" charset="0"/>
+            <a:cs typeface="Tahoma" panose="020B0604030504040204" pitchFamily="34" charset="0"/>
+          </a:endParaRPr>
         </a:p>
       </dgm:t>
     </dgm:pt>
@@ -1980,6 +1962,54 @@
       </dgm:t>
     </dgm:pt>
     <dgm:pt modelId="{85FA6A33-9FA9-4134-A6A3-A5D4748A1779}" type="parTrans" cxnId="{A316347C-9D1A-43C6-BE2B-DC184440E1C9}">
+      <dgm:prSet/>
+      <dgm:spPr/>
+      <dgm:t>
+        <a:bodyPr rtlCol="0"/>
+        <a:lstStyle/>
+        <a:p>
+          <a:pPr rtl="0"/>
+          <a:endParaRPr lang="en-US"/>
+        </a:p>
+      </dgm:t>
+    </dgm:pt>
+    <dgm:pt modelId="{2A9B6C90-9B70-4ED8-9084-8651413BB905}">
+      <dgm:prSet phldrT="[Text]" custT="1"/>
+      <dgm:spPr/>
+      <dgm:t>
+        <a:bodyPr rtlCol="0"/>
+        <a:lstStyle/>
+        <a:p>
+          <a:pPr rtl="0"/>
+          <a:r>
+            <a:rPr lang="fr" sz="2400" dirty="0" smtClean="0">
+              <a:latin typeface="Tahoma" panose="020B0604030504040204" pitchFamily="34" charset="0"/>
+              <a:ea typeface="Tahoma" panose="020B0604030504040204" pitchFamily="34" charset="0"/>
+              <a:cs typeface="Tahoma" panose="020B0604030504040204" pitchFamily="34" charset="0"/>
+            </a:rPr>
+            <a:t>En local et en Ligne via CDN </a:t>
+          </a:r>
+          <a:endParaRPr lang="fr" sz="2400" dirty="0">
+            <a:latin typeface="Tahoma" panose="020B0604030504040204" pitchFamily="34" charset="0"/>
+            <a:ea typeface="Tahoma" panose="020B0604030504040204" pitchFamily="34" charset="0"/>
+            <a:cs typeface="Tahoma" panose="020B0604030504040204" pitchFamily="34" charset="0"/>
+          </a:endParaRPr>
+        </a:p>
+      </dgm:t>
+    </dgm:pt>
+    <dgm:pt modelId="{54109FB3-0563-4B2C-BFF0-181E047427F8}" type="sibTrans" cxnId="{1D59D94A-4BF7-417E-B49B-225C005839A9}">
+      <dgm:prSet/>
+      <dgm:spPr/>
+      <dgm:t>
+        <a:bodyPr rtlCol="0"/>
+        <a:lstStyle/>
+        <a:p>
+          <a:pPr rtl="0"/>
+          <a:endParaRPr lang="en-US"/>
+        </a:p>
+      </dgm:t>
+    </dgm:pt>
+    <dgm:pt modelId="{47C005B7-F5AA-4111-A87D-782B117A0259}" type="parTrans" cxnId="{1D59D94A-4BF7-417E-B49B-225C005839A9}">
       <dgm:prSet/>
       <dgm:spPr/>
       <dgm:t>
@@ -2146,7 +2176,7 @@
       </dgm:t>
     </dgm:pt>
     <dgm:pt modelId="{95E0557D-F0A1-4F38-8083-55DE7503164F}" type="pres">
-      <dgm:prSet presAssocID="{928B5CB8-3545-4EE5-8BED-981D3C6157A5}" presName="descendantText" presStyleLbl="alignAccFollowNode1" presStyleIdx="3" presStyleCnt="4">
+      <dgm:prSet presAssocID="{928B5CB8-3545-4EE5-8BED-981D3C6157A5}" presName="descendantText" presStyleLbl="alignAccFollowNode1" presStyleIdx="3" presStyleCnt="4" custLinFactNeighborX="0">
         <dgm:presLayoutVars>
           <dgm:bulletEnabled val="1"/>
         </dgm:presLayoutVars>
@@ -2177,8 +2207,8 @@
     <dgm:cxn modelId="{A44DF6E5-2150-478D-AAB9-24BC6742BCEE}" type="presOf" srcId="{928B5CB8-3545-4EE5-8BED-981D3C6157A5}" destId="{B9324B26-5FF5-4FF7-9073-66103CBE8481}" srcOrd="0" destOrd="0" presId="urn:microsoft.com/office/officeart/2005/8/layout/vList5"/>
     <dgm:cxn modelId="{02B1C3C3-F2D2-4C80-8962-E0C9B39A6EF4}" type="presOf" srcId="{0D51337A-31FA-4717-B2BF-9243F96D2B9B}" destId="{3230722F-B757-4673-BD2F-9D4BAB5CEE8D}" srcOrd="0" destOrd="0" presId="urn:microsoft.com/office/officeart/2005/8/layout/vList5"/>
     <dgm:cxn modelId="{56052809-46E4-4445-B520-94004C28BB9D}" srcId="{A7F7584C-6CC5-40A2-9566-2842A5DEA97A}" destId="{9D8DAFB6-C744-4BD6-B757-393BF647EBB6}" srcOrd="0" destOrd="0" parTransId="{17C1C47E-8D1A-404A-B227-B017391CB5F6}" sibTransId="{C9B44773-68B1-427B-B9CA-0AEA186B621E}"/>
+    <dgm:cxn modelId="{66EBA0EC-F77C-4ABE-8815-8C8F4F6ACAB5}" type="presOf" srcId="{95A524E6-8A71-49A1-AF74-29696A02028A}" destId="{95E0557D-F0A1-4F38-8083-55DE7503164F}" srcOrd="0" destOrd="0" presId="urn:microsoft.com/office/officeart/2005/8/layout/vList5"/>
     <dgm:cxn modelId="{C65EFE7A-5430-4917-89D2-D70BAF0289E3}" type="presOf" srcId="{2A9B6C90-9B70-4ED8-9084-8651413BB905}" destId="{A66EBD3D-E7C5-421C-B8B5-728648057DDC}" srcOrd="0" destOrd="0" presId="urn:microsoft.com/office/officeart/2005/8/layout/vList5"/>
-    <dgm:cxn modelId="{66EBA0EC-F77C-4ABE-8815-8C8F4F6ACAB5}" type="presOf" srcId="{95A524E6-8A71-49A1-AF74-29696A02028A}" destId="{95E0557D-F0A1-4F38-8083-55DE7503164F}" srcOrd="0" destOrd="0" presId="urn:microsoft.com/office/officeart/2005/8/layout/vList5"/>
     <dgm:cxn modelId="{45435F90-22A5-4C03-B101-FD4577E8A794}" type="presParOf" srcId="{99FD7F24-5BB9-46E8-BB7C-4B477B73B815}" destId="{BBAB8945-0B00-4547-92CF-AE59FDD0EF39}" srcOrd="0" destOrd="0" presId="urn:microsoft.com/office/officeart/2005/8/layout/vList5"/>
     <dgm:cxn modelId="{B399DCC2-FF40-4D75-A2A7-A495D4AF2387}" type="presParOf" srcId="{BBAB8945-0B00-4547-92CF-AE59FDD0EF39}" destId="{3230722F-B757-4673-BD2F-9D4BAB5CEE8D}" srcOrd="0" destOrd="0" presId="urn:microsoft.com/office/officeart/2005/8/layout/vList5"/>
     <dgm:cxn modelId="{4A0749A4-83B7-4DF9-BA0E-5506B76F10A1}" type="presParOf" srcId="{BBAB8945-0B00-4547-92CF-AE59FDD0EF39}" destId="{6FB9694A-6C63-4B23-90F6-4F208C00D399}" srcOrd="1" destOrd="0" presId="urn:microsoft.com/office/officeart/2005/8/layout/vList5"/>
@@ -3195,13 +3225,18 @@
             <a:buChar char="••"/>
           </a:pPr>
           <a:r>
-            <a:rPr lang="fr" sz="2400" kern="1200">
+            <a:rPr lang="fr" sz="2400" kern="1200" dirty="0" smtClean="0">
               <a:latin typeface="Tahoma" panose="020B0604030504040204" pitchFamily="34" charset="0"/>
               <a:ea typeface="Tahoma" panose="020B0604030504040204" pitchFamily="34" charset="0"/>
               <a:cs typeface="Tahoma" panose="020B0604030504040204" pitchFamily="34" charset="0"/>
             </a:rPr>
-            <a:t>[Texte]</a:t>
+            <a:t>Boostrap nous aide à faire des design web plus facile et rapide.</a:t>
           </a:r>
+          <a:endParaRPr lang="fr" sz="2400" kern="1200" dirty="0">
+            <a:latin typeface="Tahoma" panose="020B0604030504040204" pitchFamily="34" charset="0"/>
+            <a:ea typeface="Tahoma" panose="020B0604030504040204" pitchFamily="34" charset="0"/>
+            <a:cs typeface="Tahoma" panose="020B0604030504040204" pitchFamily="34" charset="0"/>
+          </a:endParaRPr>
         </a:p>
       </dsp:txBody>
       <dsp:txXfrm rot="-5400000">
@@ -3275,13 +3310,18 @@
             </a:spcAft>
           </a:pPr>
           <a:r>
-            <a:rPr lang="fr" sz="2400" kern="1200" dirty="0">
+            <a:rPr lang="fr" sz="2400" kern="1200" dirty="0" smtClean="0">
               <a:latin typeface="Tahoma" panose="020B0604030504040204" pitchFamily="34" charset="0"/>
               <a:ea typeface="Tahoma" panose="020B0604030504040204" pitchFamily="34" charset="0"/>
               <a:cs typeface="Tahoma" panose="020B0604030504040204" pitchFamily="34" charset="0"/>
             </a:rPr>
-            <a:t>Qui rencontre ce problème ?</a:t>
+            <a:t>A quoi sert Boostrap</a:t>
           </a:r>
+          <a:endParaRPr lang="fr" sz="2400" kern="1200" dirty="0">
+            <a:latin typeface="Tahoma" panose="020B0604030504040204" pitchFamily="34" charset="0"/>
+            <a:ea typeface="Tahoma" panose="020B0604030504040204" pitchFamily="34" charset="0"/>
+            <a:cs typeface="Tahoma" panose="020B0604030504040204" pitchFamily="34" charset="0"/>
+          </a:endParaRPr>
         </a:p>
       </dsp:txBody>
       <dsp:txXfrm>
@@ -3358,13 +3398,18 @@
             <a:buChar char="••"/>
           </a:pPr>
           <a:r>
-            <a:rPr lang="fr" sz="2400" kern="1200">
+            <a:rPr lang="fr" sz="2400" kern="1200" dirty="0" smtClean="0">
               <a:latin typeface="Tahoma" panose="020B0604030504040204" pitchFamily="34" charset="0"/>
               <a:ea typeface="Tahoma" panose="020B0604030504040204" pitchFamily="34" charset="0"/>
               <a:cs typeface="Tahoma" panose="020B0604030504040204" pitchFamily="34" charset="0"/>
             </a:rPr>
-            <a:t>[Texte]</a:t>
+            <a:t>En local et en Ligne via CDN </a:t>
           </a:r>
+          <a:endParaRPr lang="fr" sz="2400" kern="1200" dirty="0">
+            <a:latin typeface="Tahoma" panose="020B0604030504040204" pitchFamily="34" charset="0"/>
+            <a:ea typeface="Tahoma" panose="020B0604030504040204" pitchFamily="34" charset="0"/>
+            <a:cs typeface="Tahoma" panose="020B0604030504040204" pitchFamily="34" charset="0"/>
+          </a:endParaRPr>
         </a:p>
       </dsp:txBody>
       <dsp:txXfrm rot="-5400000">
@@ -3438,13 +3483,18 @@
             </a:spcAft>
           </a:pPr>
           <a:r>
-            <a:rPr lang="fr" sz="2400" kern="1200">
+            <a:rPr lang="fr" sz="2400" kern="1200" dirty="0" smtClean="0">
               <a:latin typeface="Tahoma" panose="020B0604030504040204" pitchFamily="34" charset="0"/>
               <a:ea typeface="Tahoma" panose="020B0604030504040204" pitchFamily="34" charset="0"/>
               <a:cs typeface="Tahoma" panose="020B0604030504040204" pitchFamily="34" charset="0"/>
             </a:rPr>
-            <a:t>Pourquoi faut-il résoudre ce problème ?</a:t>
+            <a:t>Comment fonctionne Boostrapp</a:t>
           </a:r>
+          <a:endParaRPr lang="fr" sz="2400" kern="1200" dirty="0">
+            <a:latin typeface="Tahoma" panose="020B0604030504040204" pitchFamily="34" charset="0"/>
+            <a:ea typeface="Tahoma" panose="020B0604030504040204" pitchFamily="34" charset="0"/>
+            <a:cs typeface="Tahoma" panose="020B0604030504040204" pitchFamily="34" charset="0"/>
+          </a:endParaRPr>
         </a:p>
       </dsp:txBody>
       <dsp:txXfrm>
@@ -3521,13 +3571,18 @@
             <a:buChar char="••"/>
           </a:pPr>
           <a:r>
-            <a:rPr lang="fr" sz="2400" kern="1200">
+            <a:rPr lang="fr" sz="2400" kern="1200" dirty="0" smtClean="0">
               <a:latin typeface="Tahoma" panose="020B0604030504040204" pitchFamily="34" charset="0"/>
               <a:ea typeface="Tahoma" panose="020B0604030504040204" pitchFamily="34" charset="0"/>
               <a:cs typeface="Tahoma" panose="020B0604030504040204" pitchFamily="34" charset="0"/>
             </a:rPr>
-            <a:t>[Texte]</a:t>
+            <a:t>Oui les framework Css web sont plus nombreux.</a:t>
           </a:r>
+          <a:endParaRPr lang="fr" sz="2400" kern="1200" dirty="0">
+            <a:latin typeface="Tahoma" panose="020B0604030504040204" pitchFamily="34" charset="0"/>
+            <a:ea typeface="Tahoma" panose="020B0604030504040204" pitchFamily="34" charset="0"/>
+            <a:cs typeface="Tahoma" panose="020B0604030504040204" pitchFamily="34" charset="0"/>
+          </a:endParaRPr>
         </a:p>
       </dsp:txBody>
       <dsp:txXfrm rot="-5400000">
@@ -3601,13 +3656,18 @@
             </a:spcAft>
           </a:pPr>
           <a:r>
-            <a:rPr lang="fr" sz="2400" kern="1200">
+            <a:rPr lang="fr" sz="2400" kern="1200" dirty="0" smtClean="0">
               <a:latin typeface="Tahoma" panose="020B0604030504040204" pitchFamily="34" charset="0"/>
               <a:ea typeface="Tahoma" panose="020B0604030504040204" pitchFamily="34" charset="0"/>
               <a:cs typeface="Tahoma" panose="020B0604030504040204" pitchFamily="34" charset="0"/>
             </a:rPr>
-            <a:t>Comment savoir que ce problème a été résolu ?</a:t>
+            <a:t>Boostrap a il un concurent ?</a:t>
           </a:r>
+          <a:endParaRPr lang="fr" sz="2400" kern="1200" dirty="0">
+            <a:latin typeface="Tahoma" panose="020B0604030504040204" pitchFamily="34" charset="0"/>
+            <a:ea typeface="Tahoma" panose="020B0604030504040204" pitchFamily="34" charset="0"/>
+            <a:cs typeface="Tahoma" panose="020B0604030504040204" pitchFamily="34" charset="0"/>
+          </a:endParaRPr>
         </a:p>
       </dsp:txBody>
       <dsp:txXfrm>
@@ -6873,7 +6933,7 @@
           <a:p>
             <a:fld id="{8A502FC4-2826-4189-9A5A-4802B82D90F9}" type="datetimeFigureOut">
               <a:rPr lang="fr-FR" smtClean="0"/>
-              <a:t>19/03/2026</a:t>
+              <a:t>23/03/2026</a:t>
             </a:fld>
             <a:endParaRPr lang="fr-FR"/>
           </a:p>
@@ -7051,7 +7111,7 @@
           <a:p>
             <a:fld id="{9AEA84B2-E620-4EFC-AE95-6DDE4155F805}" type="datetimeFigureOut">
               <a:rPr lang="fr-FR" noProof="0" smtClean="0"/>
-              <a:t>19/03/2026</a:t>
+              <a:t>23/03/2026</a:t>
             </a:fld>
             <a:endParaRPr lang="fr-FR" noProof="0"/>
           </a:p>
@@ -8048,7 +8108,7 @@
           <a:noFill/>
           <a:extLst>
             <a:ext uri="{909E8E84-426E-40dd-AFC4-6F175D3DCCD1}">
-              <a14:hiddenFill xmlns="" xmlns:a14="http://schemas.microsoft.com/office/drawing/2010/main">
+              <a14:hiddenFill xmlns:a14="http://schemas.microsoft.com/office/drawing/2010/main" xmlns="">
                 <a:solidFill>
                   <a:srgbClr val="FFFFFF"/>
                 </a:solidFill>
@@ -8107,7 +8167,7 @@
             </a:ln>
             <a:extLst>
               <a:ext uri="{91240B29-F687-4f45-9708-019B960494DF}">
-                <a14:hiddenLine xmlns="" xmlns:a14="http://schemas.microsoft.com/office/drawing/2010/main" w="9525">
+                <a14:hiddenLine xmlns:a14="http://schemas.microsoft.com/office/drawing/2010/main" xmlns="" w="9525">
                   <a:solidFill>
                     <a:srgbClr val="000000"/>
                   </a:solidFill>
@@ -8197,7 +8257,7 @@
             </a:ln>
             <a:extLst>
               <a:ext uri="{91240B29-F687-4f45-9708-019B960494DF}">
-                <a14:hiddenLine xmlns="" xmlns:a14="http://schemas.microsoft.com/office/drawing/2010/main" w="9525">
+                <a14:hiddenLine xmlns:a14="http://schemas.microsoft.com/office/drawing/2010/main" xmlns="" w="9525">
                   <a:solidFill>
                     <a:srgbClr val="000000"/>
                   </a:solidFill>
@@ -8287,7 +8347,7 @@
             </a:ln>
             <a:extLst>
               <a:ext uri="{91240B29-F687-4f45-9708-019B960494DF}">
-                <a14:hiddenLine xmlns="" xmlns:a14="http://schemas.microsoft.com/office/drawing/2010/main" w="9525">
+                <a14:hiddenLine xmlns:a14="http://schemas.microsoft.com/office/drawing/2010/main" xmlns="" w="9525">
                   <a:solidFill>
                     <a:srgbClr val="000000"/>
                   </a:solidFill>
@@ -8321,7 +8381,7 @@
             </a:ln>
             <a:extLst>
               <a:ext uri="{91240B29-F687-4f45-9708-019B960494DF}">
-                <a14:hiddenLine xmlns="" xmlns:a14="http://schemas.microsoft.com/office/drawing/2010/main" w="9525">
+                <a14:hiddenLine xmlns:a14="http://schemas.microsoft.com/office/drawing/2010/main" xmlns="" w="9525">
                   <a:solidFill>
                     <a:srgbClr val="000000"/>
                   </a:solidFill>
@@ -8411,7 +8471,7 @@
             </a:ln>
             <a:extLst>
               <a:ext uri="{91240B29-F687-4f45-9708-019B960494DF}">
-                <a14:hiddenLine xmlns="" xmlns:a14="http://schemas.microsoft.com/office/drawing/2010/main" w="9525">
+                <a14:hiddenLine xmlns:a14="http://schemas.microsoft.com/office/drawing/2010/main" xmlns="" w="9525">
                   <a:solidFill>
                     <a:srgbClr val="000000"/>
                   </a:solidFill>
@@ -8473,7 +8533,7 @@
             </a:ln>
             <a:extLst>
               <a:ext uri="{91240B29-F687-4f45-9708-019B960494DF}">
-                <a14:hiddenLine xmlns="" xmlns:a14="http://schemas.microsoft.com/office/drawing/2010/main" w="9525">
+                <a14:hiddenLine xmlns:a14="http://schemas.microsoft.com/office/drawing/2010/main" xmlns="" w="9525">
                   <a:solidFill>
                     <a:srgbClr val="000000"/>
                   </a:solidFill>
@@ -8535,7 +8595,7 @@
             </a:ln>
             <a:extLst>
               <a:ext uri="{91240B29-F687-4f45-9708-019B960494DF}">
-                <a14:hiddenLine xmlns="" xmlns:a14="http://schemas.microsoft.com/office/drawing/2010/main" w="9525">
+                <a14:hiddenLine xmlns:a14="http://schemas.microsoft.com/office/drawing/2010/main" xmlns="" w="9525">
                   <a:solidFill>
                     <a:srgbClr val="000000"/>
                   </a:solidFill>
@@ -8625,7 +8685,7 @@
             </a:ln>
             <a:extLst>
               <a:ext uri="{91240B29-F687-4f45-9708-019B960494DF}">
-                <a14:hiddenLine xmlns="" xmlns:a14="http://schemas.microsoft.com/office/drawing/2010/main" w="9525">
+                <a14:hiddenLine xmlns:a14="http://schemas.microsoft.com/office/drawing/2010/main" xmlns="" w="9525">
                   <a:solidFill>
                     <a:srgbClr val="000000"/>
                   </a:solidFill>
@@ -8687,7 +8747,7 @@
             </a:ln>
             <a:extLst>
               <a:ext uri="{91240B29-F687-4f45-9708-019B960494DF}">
-                <a14:hiddenLine xmlns="" xmlns:a14="http://schemas.microsoft.com/office/drawing/2010/main" w="9525">
+                <a14:hiddenLine xmlns:a14="http://schemas.microsoft.com/office/drawing/2010/main" xmlns="" w="9525">
                   <a:solidFill>
                     <a:srgbClr val="000000"/>
                   </a:solidFill>
@@ -8749,7 +8809,7 @@
             </a:ln>
             <a:extLst>
               <a:ext uri="{91240B29-F687-4f45-9708-019B960494DF}">
-                <a14:hiddenLine xmlns="" xmlns:a14="http://schemas.microsoft.com/office/drawing/2010/main" w="9525">
+                <a14:hiddenLine xmlns:a14="http://schemas.microsoft.com/office/drawing/2010/main" xmlns="" w="9525">
                   <a:solidFill>
                     <a:srgbClr val="000000"/>
                   </a:solidFill>
@@ -8839,7 +8899,7 @@
             </a:ln>
             <a:extLst>
               <a:ext uri="{91240B29-F687-4f45-9708-019B960494DF}">
-                <a14:hiddenLine xmlns="" xmlns:a14="http://schemas.microsoft.com/office/drawing/2010/main" w="9525">
+                <a14:hiddenLine xmlns:a14="http://schemas.microsoft.com/office/drawing/2010/main" xmlns="" w="9525">
                   <a:solidFill>
                     <a:srgbClr val="000000"/>
                   </a:solidFill>
@@ -8929,7 +8989,7 @@
             </a:ln>
             <a:extLst>
               <a:ext uri="{91240B29-F687-4f45-9708-019B960494DF}">
-                <a14:hiddenLine xmlns="" xmlns:a14="http://schemas.microsoft.com/office/drawing/2010/main" w="9525">
+                <a14:hiddenLine xmlns:a14="http://schemas.microsoft.com/office/drawing/2010/main" xmlns="" w="9525">
                   <a:solidFill>
                     <a:srgbClr val="000000"/>
                   </a:solidFill>
@@ -8991,7 +9051,7 @@
             </a:ln>
             <a:extLst>
               <a:ext uri="{91240B29-F687-4f45-9708-019B960494DF}">
-                <a14:hiddenLine xmlns="" xmlns:a14="http://schemas.microsoft.com/office/drawing/2010/main" w="9525">
+                <a14:hiddenLine xmlns:a14="http://schemas.microsoft.com/office/drawing/2010/main" xmlns="" w="9525">
                   <a:solidFill>
                     <a:srgbClr val="000000"/>
                   </a:solidFill>
@@ -9101,7 +9161,7 @@
             </a:ln>
             <a:extLst>
               <a:ext uri="{91240B29-F687-4f45-9708-019B960494DF}">
-                <a14:hiddenLine xmlns="" xmlns:a14="http://schemas.microsoft.com/office/drawing/2010/main" w="9525">
+                <a14:hiddenLine xmlns:a14="http://schemas.microsoft.com/office/drawing/2010/main" xmlns="" w="9525">
                   <a:solidFill>
                     <a:srgbClr val="000000"/>
                   </a:solidFill>
@@ -9163,7 +9223,7 @@
             </a:ln>
             <a:extLst>
               <a:ext uri="{91240B29-F687-4f45-9708-019B960494DF}">
-                <a14:hiddenLine xmlns="" xmlns:a14="http://schemas.microsoft.com/office/drawing/2010/main" w="9525">
+                <a14:hiddenLine xmlns:a14="http://schemas.microsoft.com/office/drawing/2010/main" xmlns="" w="9525">
                   <a:solidFill>
                     <a:srgbClr val="000000"/>
                   </a:solidFill>
@@ -9253,7 +9313,7 @@
             </a:ln>
             <a:extLst>
               <a:ext uri="{91240B29-F687-4f45-9708-019B960494DF}">
-                <a14:hiddenLine xmlns="" xmlns:a14="http://schemas.microsoft.com/office/drawing/2010/main" w="9525">
+                <a14:hiddenLine xmlns:a14="http://schemas.microsoft.com/office/drawing/2010/main" xmlns="" w="9525">
                   <a:solidFill>
                     <a:srgbClr val="000000"/>
                   </a:solidFill>
@@ -9343,7 +9403,7 @@
             </a:ln>
             <a:extLst>
               <a:ext uri="{91240B29-F687-4f45-9708-019B960494DF}">
-                <a14:hiddenLine xmlns="" xmlns:a14="http://schemas.microsoft.com/office/drawing/2010/main" w="9525">
+                <a14:hiddenLine xmlns:a14="http://schemas.microsoft.com/office/drawing/2010/main" xmlns="" w="9525">
                   <a:solidFill>
                     <a:srgbClr val="000000"/>
                   </a:solidFill>
@@ -9405,7 +9465,7 @@
             </a:ln>
             <a:extLst>
               <a:ext uri="{91240B29-F687-4f45-9708-019B960494DF}">
-                <a14:hiddenLine xmlns="" xmlns:a14="http://schemas.microsoft.com/office/drawing/2010/main" w="9525">
+                <a14:hiddenLine xmlns:a14="http://schemas.microsoft.com/office/drawing/2010/main" xmlns="" w="9525">
                   <a:solidFill>
                     <a:srgbClr val="000000"/>
                   </a:solidFill>
@@ -9495,7 +9555,7 @@
             </a:ln>
             <a:extLst>
               <a:ext uri="{91240B29-F687-4f45-9708-019B960494DF}">
-                <a14:hiddenLine xmlns="" xmlns:a14="http://schemas.microsoft.com/office/drawing/2010/main" w="9525">
+                <a14:hiddenLine xmlns:a14="http://schemas.microsoft.com/office/drawing/2010/main" xmlns="" w="9525">
                   <a:solidFill>
                     <a:srgbClr val="000000"/>
                   </a:solidFill>
@@ -9585,7 +9645,7 @@
             </a:ln>
             <a:extLst>
               <a:ext uri="{91240B29-F687-4f45-9708-019B960494DF}">
-                <a14:hiddenLine xmlns="" xmlns:a14="http://schemas.microsoft.com/office/drawing/2010/main" w="9525">
+                <a14:hiddenLine xmlns:a14="http://schemas.microsoft.com/office/drawing/2010/main" xmlns="" w="9525">
                   <a:solidFill>
                     <a:srgbClr val="000000"/>
                   </a:solidFill>
@@ -9641,7 +9701,7 @@
             </a:ln>
             <a:extLst>
               <a:ext uri="{91240B29-F687-4f45-9708-019B960494DF}">
-                <a14:hiddenLine xmlns="" xmlns:a14="http://schemas.microsoft.com/office/drawing/2010/main" w="9525">
+                <a14:hiddenLine xmlns:a14="http://schemas.microsoft.com/office/drawing/2010/main" xmlns="" w="9525">
                   <a:solidFill>
                     <a:srgbClr val="000000"/>
                   </a:solidFill>
@@ -9731,7 +9791,7 @@
             </a:ln>
             <a:extLst>
               <a:ext uri="{91240B29-F687-4f45-9708-019B960494DF}">
-                <a14:hiddenLine xmlns="" xmlns:a14="http://schemas.microsoft.com/office/drawing/2010/main" w="9525">
+                <a14:hiddenLine xmlns:a14="http://schemas.microsoft.com/office/drawing/2010/main" xmlns="" w="9525">
                   <a:solidFill>
                     <a:srgbClr val="000000"/>
                   </a:solidFill>
@@ -9787,7 +9847,7 @@
             </a:ln>
             <a:extLst>
               <a:ext uri="{91240B29-F687-4f45-9708-019B960494DF}">
-                <a14:hiddenLine xmlns="" xmlns:a14="http://schemas.microsoft.com/office/drawing/2010/main" w="9525">
+                <a14:hiddenLine xmlns:a14="http://schemas.microsoft.com/office/drawing/2010/main" xmlns="" w="9525">
                   <a:solidFill>
                     <a:srgbClr val="000000"/>
                   </a:solidFill>
@@ -9877,7 +9937,7 @@
             </a:ln>
             <a:extLst>
               <a:ext uri="{91240B29-F687-4f45-9708-019B960494DF}">
-                <a14:hiddenLine xmlns="" xmlns:a14="http://schemas.microsoft.com/office/drawing/2010/main" w="9525">
+                <a14:hiddenLine xmlns:a14="http://schemas.microsoft.com/office/drawing/2010/main" xmlns="" w="9525">
                   <a:solidFill>
                     <a:srgbClr val="000000"/>
                   </a:solidFill>
@@ -9945,7 +10005,7 @@
             </a:ln>
             <a:extLst>
               <a:ext uri="{91240B29-F687-4f45-9708-019B960494DF}">
-                <a14:hiddenLine xmlns="" xmlns:a14="http://schemas.microsoft.com/office/drawing/2010/main" w="9525">
+                <a14:hiddenLine xmlns:a14="http://schemas.microsoft.com/office/drawing/2010/main" xmlns="" w="9525">
                   <a:solidFill>
                     <a:srgbClr val="000000"/>
                   </a:solidFill>
@@ -10035,7 +10095,7 @@
             </a:ln>
             <a:extLst>
               <a:ext uri="{91240B29-F687-4f45-9708-019B960494DF}">
-                <a14:hiddenLine xmlns="" xmlns:a14="http://schemas.microsoft.com/office/drawing/2010/main" w="9525">
+                <a14:hiddenLine xmlns:a14="http://schemas.microsoft.com/office/drawing/2010/main" xmlns="" w="9525">
                   <a:solidFill>
                     <a:srgbClr val="000000"/>
                   </a:solidFill>
@@ -10103,7 +10163,7 @@
             </a:ln>
             <a:extLst>
               <a:ext uri="{91240B29-F687-4f45-9708-019B960494DF}">
-                <a14:hiddenLine xmlns="" xmlns:a14="http://schemas.microsoft.com/office/drawing/2010/main" w="9525">
+                <a14:hiddenLine xmlns:a14="http://schemas.microsoft.com/office/drawing/2010/main" xmlns="" w="9525">
                   <a:solidFill>
                     <a:srgbClr val="000000"/>
                   </a:solidFill>
@@ -10193,7 +10253,7 @@
             </a:ln>
             <a:extLst>
               <a:ext uri="{91240B29-F687-4f45-9708-019B960494DF}">
-                <a14:hiddenLine xmlns="" xmlns:a14="http://schemas.microsoft.com/office/drawing/2010/main" w="9525">
+                <a14:hiddenLine xmlns:a14="http://schemas.microsoft.com/office/drawing/2010/main" xmlns="" w="9525">
                   <a:solidFill>
                     <a:srgbClr val="000000"/>
                   </a:solidFill>
@@ -10227,7 +10287,7 @@
             </a:ln>
             <a:extLst>
               <a:ext uri="{91240B29-F687-4f45-9708-019B960494DF}">
-                <a14:hiddenLine xmlns="" xmlns:a14="http://schemas.microsoft.com/office/drawing/2010/main" w="9525">
+                <a14:hiddenLine xmlns:a14="http://schemas.microsoft.com/office/drawing/2010/main" xmlns="" w="9525">
                   <a:solidFill>
                     <a:srgbClr val="000000"/>
                   </a:solidFill>
@@ -10317,7 +10377,7 @@
             </a:ln>
             <a:extLst>
               <a:ext uri="{91240B29-F687-4f45-9708-019B960494DF}">
-                <a14:hiddenLine xmlns="" xmlns:a14="http://schemas.microsoft.com/office/drawing/2010/main" w="9525">
+                <a14:hiddenLine xmlns:a14="http://schemas.microsoft.com/office/drawing/2010/main" xmlns="" w="9525">
                   <a:solidFill>
                     <a:srgbClr val="000000"/>
                   </a:solidFill>
@@ -10379,7 +10439,7 @@
             </a:ln>
             <a:extLst>
               <a:ext uri="{91240B29-F687-4f45-9708-019B960494DF}">
-                <a14:hiddenLine xmlns="" xmlns:a14="http://schemas.microsoft.com/office/drawing/2010/main" w="9525">
+                <a14:hiddenLine xmlns:a14="http://schemas.microsoft.com/office/drawing/2010/main" xmlns="" w="9525">
                   <a:solidFill>
                     <a:srgbClr val="000000"/>
                   </a:solidFill>
@@ -10441,7 +10501,7 @@
             </a:ln>
             <a:extLst>
               <a:ext uri="{91240B29-F687-4f45-9708-019B960494DF}">
-                <a14:hiddenLine xmlns="" xmlns:a14="http://schemas.microsoft.com/office/drawing/2010/main" w="9525">
+                <a14:hiddenLine xmlns:a14="http://schemas.microsoft.com/office/drawing/2010/main" xmlns="" w="9525">
                   <a:solidFill>
                     <a:srgbClr val="000000"/>
                   </a:solidFill>
@@ -10531,7 +10591,7 @@
             </a:ln>
             <a:extLst>
               <a:ext uri="{91240B29-F687-4f45-9708-019B960494DF}">
-                <a14:hiddenLine xmlns="" xmlns:a14="http://schemas.microsoft.com/office/drawing/2010/main" w="9525">
+                <a14:hiddenLine xmlns:a14="http://schemas.microsoft.com/office/drawing/2010/main" xmlns="" w="9525">
                   <a:solidFill>
                     <a:srgbClr val="000000"/>
                   </a:solidFill>
@@ -10599,7 +10659,7 @@
             </a:ln>
             <a:extLst>
               <a:ext uri="{91240B29-F687-4f45-9708-019B960494DF}">
-                <a14:hiddenLine xmlns="" xmlns:a14="http://schemas.microsoft.com/office/drawing/2010/main" w="9525">
+                <a14:hiddenLine xmlns:a14="http://schemas.microsoft.com/office/drawing/2010/main" xmlns="" w="9525">
                   <a:solidFill>
                     <a:srgbClr val="000000"/>
                   </a:solidFill>
@@ -10661,7 +10721,7 @@
             </a:ln>
             <a:extLst>
               <a:ext uri="{91240B29-F687-4f45-9708-019B960494DF}">
-                <a14:hiddenLine xmlns="" xmlns:a14="http://schemas.microsoft.com/office/drawing/2010/main" w="9525">
+                <a14:hiddenLine xmlns:a14="http://schemas.microsoft.com/office/drawing/2010/main" xmlns="" w="9525">
                   <a:solidFill>
                     <a:srgbClr val="000000"/>
                   </a:solidFill>
@@ -10751,7 +10811,7 @@
             </a:ln>
             <a:extLst>
               <a:ext uri="{91240B29-F687-4f45-9708-019B960494DF}">
-                <a14:hiddenLine xmlns="" xmlns:a14="http://schemas.microsoft.com/office/drawing/2010/main" w="9525">
+                <a14:hiddenLine xmlns:a14="http://schemas.microsoft.com/office/drawing/2010/main" xmlns="" w="9525">
                   <a:solidFill>
                     <a:srgbClr val="000000"/>
                   </a:solidFill>
@@ -10813,7 +10873,7 @@
             </a:ln>
             <a:extLst>
               <a:ext uri="{91240B29-F687-4f45-9708-019B960494DF}">
-                <a14:hiddenLine xmlns="" xmlns:a14="http://schemas.microsoft.com/office/drawing/2010/main" w="9525">
+                <a14:hiddenLine xmlns:a14="http://schemas.microsoft.com/office/drawing/2010/main" xmlns="" w="9525">
                   <a:solidFill>
                     <a:srgbClr val="000000"/>
                   </a:solidFill>
@@ -10903,7 +10963,7 @@
             </a:ln>
             <a:extLst>
               <a:ext uri="{91240B29-F687-4f45-9708-019B960494DF}">
-                <a14:hiddenLine xmlns="" xmlns:a14="http://schemas.microsoft.com/office/drawing/2010/main" w="9525">
+                <a14:hiddenLine xmlns:a14="http://schemas.microsoft.com/office/drawing/2010/main" xmlns="" w="9525">
                   <a:solidFill>
                     <a:srgbClr val="000000"/>
                   </a:solidFill>
@@ -10965,7 +11025,7 @@
             </a:ln>
             <a:extLst>
               <a:ext uri="{91240B29-F687-4f45-9708-019B960494DF}">
-                <a14:hiddenLine xmlns="" xmlns:a14="http://schemas.microsoft.com/office/drawing/2010/main" w="9525">
+                <a14:hiddenLine xmlns:a14="http://schemas.microsoft.com/office/drawing/2010/main" xmlns="" w="9525">
                   <a:solidFill>
                     <a:srgbClr val="000000"/>
                   </a:solidFill>
@@ -11055,7 +11115,7 @@
             </a:ln>
             <a:extLst>
               <a:ext uri="{91240B29-F687-4f45-9708-019B960494DF}">
-                <a14:hiddenLine xmlns="" xmlns:a14="http://schemas.microsoft.com/office/drawing/2010/main" w="9525">
+                <a14:hiddenLine xmlns:a14="http://schemas.microsoft.com/office/drawing/2010/main" xmlns="" w="9525">
                   <a:solidFill>
                     <a:srgbClr val="000000"/>
                   </a:solidFill>
@@ -11089,7 +11149,7 @@
             </a:ln>
             <a:extLst>
               <a:ext uri="{91240B29-F687-4f45-9708-019B960494DF}">
-                <a14:hiddenLine xmlns="" xmlns:a14="http://schemas.microsoft.com/office/drawing/2010/main" w="9525">
+                <a14:hiddenLine xmlns:a14="http://schemas.microsoft.com/office/drawing/2010/main" xmlns="" w="9525">
                   <a:solidFill>
                     <a:srgbClr val="000000"/>
                   </a:solidFill>
@@ -11154,7 +11214,7 @@
             </a:ln>
             <a:extLst>
               <a:ext uri="{91240B29-F687-4f45-9708-019B960494DF}">
-                <a14:hiddenLine xmlns="" xmlns:a14="http://schemas.microsoft.com/office/drawing/2010/main" w="9525">
+                <a14:hiddenLine xmlns:a14="http://schemas.microsoft.com/office/drawing/2010/main" xmlns="" w="9525">
                   <a:solidFill>
                     <a:srgbClr val="000000"/>
                   </a:solidFill>
@@ -11244,7 +11304,7 @@
             </a:ln>
             <a:extLst>
               <a:ext uri="{91240B29-F687-4f45-9708-019B960494DF}">
-                <a14:hiddenLine xmlns="" xmlns:a14="http://schemas.microsoft.com/office/drawing/2010/main" w="9525">
+                <a14:hiddenLine xmlns:a14="http://schemas.microsoft.com/office/drawing/2010/main" xmlns="" w="9525">
                   <a:solidFill>
                     <a:srgbClr val="000000"/>
                   </a:solidFill>
@@ -11306,7 +11366,7 @@
             </a:ln>
             <a:extLst>
               <a:ext uri="{91240B29-F687-4f45-9708-019B960494DF}">
-                <a14:hiddenLine xmlns="" xmlns:a14="http://schemas.microsoft.com/office/drawing/2010/main" w="9525">
+                <a14:hiddenLine xmlns:a14="http://schemas.microsoft.com/office/drawing/2010/main" xmlns="" w="9525">
                   <a:solidFill>
                     <a:srgbClr val="000000"/>
                   </a:solidFill>
@@ -11396,7 +11456,7 @@
             </a:ln>
             <a:extLst>
               <a:ext uri="{91240B29-F687-4f45-9708-019B960494DF}">
-                <a14:hiddenLine xmlns="" xmlns:a14="http://schemas.microsoft.com/office/drawing/2010/main" w="9525">
+                <a14:hiddenLine xmlns:a14="http://schemas.microsoft.com/office/drawing/2010/main" xmlns="" w="9525">
                   <a:solidFill>
                     <a:srgbClr val="000000"/>
                   </a:solidFill>
@@ -11486,7 +11546,7 @@
             </a:ln>
             <a:extLst>
               <a:ext uri="{91240B29-F687-4f45-9708-019B960494DF}">
-                <a14:hiddenLine xmlns="" xmlns:a14="http://schemas.microsoft.com/office/drawing/2010/main" w="9525">
+                <a14:hiddenLine xmlns:a14="http://schemas.microsoft.com/office/drawing/2010/main" xmlns="" w="9525">
                   <a:solidFill>
                     <a:srgbClr val="000000"/>
                   </a:solidFill>
@@ -11551,7 +11611,7 @@
             </a:ln>
             <a:extLst>
               <a:ext uri="{91240B29-F687-4f45-9708-019B960494DF}">
-                <a14:hiddenLine xmlns="" xmlns:a14="http://schemas.microsoft.com/office/drawing/2010/main" w="9525">
+                <a14:hiddenLine xmlns:a14="http://schemas.microsoft.com/office/drawing/2010/main" xmlns="" w="9525">
                   <a:solidFill>
                     <a:srgbClr val="000000"/>
                   </a:solidFill>
@@ -11613,7 +11673,7 @@
             </a:ln>
             <a:extLst>
               <a:ext uri="{91240B29-F687-4f45-9708-019B960494DF}">
-                <a14:hiddenLine xmlns="" xmlns:a14="http://schemas.microsoft.com/office/drawing/2010/main" w="9525">
+                <a14:hiddenLine xmlns:a14="http://schemas.microsoft.com/office/drawing/2010/main" xmlns="" w="9525">
                   <a:solidFill>
                     <a:srgbClr val="000000"/>
                   </a:solidFill>
@@ -11703,7 +11763,7 @@
             </a:ln>
             <a:extLst>
               <a:ext uri="{91240B29-F687-4f45-9708-019B960494DF}">
-                <a14:hiddenLine xmlns="" xmlns:a14="http://schemas.microsoft.com/office/drawing/2010/main" w="9525">
+                <a14:hiddenLine xmlns:a14="http://schemas.microsoft.com/office/drawing/2010/main" xmlns="" w="9525">
                   <a:solidFill>
                     <a:srgbClr val="000000"/>
                   </a:solidFill>
@@ -11793,7 +11853,7 @@
             </a:ln>
             <a:extLst>
               <a:ext uri="{91240B29-F687-4f45-9708-019B960494DF}">
-                <a14:hiddenLine xmlns="" xmlns:a14="http://schemas.microsoft.com/office/drawing/2010/main" w="9525">
+                <a14:hiddenLine xmlns:a14="http://schemas.microsoft.com/office/drawing/2010/main" xmlns="" w="9525">
                   <a:solidFill>
                     <a:srgbClr val="000000"/>
                   </a:solidFill>
@@ -11855,7 +11915,7 @@
             </a:ln>
             <a:extLst>
               <a:ext uri="{91240B29-F687-4f45-9708-019B960494DF}">
-                <a14:hiddenLine xmlns="" xmlns:a14="http://schemas.microsoft.com/office/drawing/2010/main" w="9525">
+                <a14:hiddenLine xmlns:a14="http://schemas.microsoft.com/office/drawing/2010/main" xmlns="" w="9525">
                   <a:solidFill>
                     <a:srgbClr val="000000"/>
                   </a:solidFill>
@@ -11975,7 +12035,7 @@
             </a:ln>
             <a:extLst>
               <a:ext uri="{91240B29-F687-4f45-9708-019B960494DF}">
-                <a14:hiddenLine xmlns="" xmlns:a14="http://schemas.microsoft.com/office/drawing/2010/main" w="9525">
+                <a14:hiddenLine xmlns:a14="http://schemas.microsoft.com/office/drawing/2010/main" xmlns="" w="9525">
                   <a:solidFill>
                     <a:srgbClr val="000000"/>
                   </a:solidFill>
@@ -12043,7 +12103,7 @@
             </a:ln>
             <a:extLst>
               <a:ext uri="{91240B29-F687-4f45-9708-019B960494DF}">
-                <a14:hiddenLine xmlns="" xmlns:a14="http://schemas.microsoft.com/office/drawing/2010/main" w="9525">
+                <a14:hiddenLine xmlns:a14="http://schemas.microsoft.com/office/drawing/2010/main" xmlns="" w="9525">
                   <a:solidFill>
                     <a:srgbClr val="000000"/>
                   </a:solidFill>
@@ -12133,7 +12193,7 @@
             </a:ln>
             <a:extLst>
               <a:ext uri="{91240B29-F687-4f45-9708-019B960494DF}">
-                <a14:hiddenLine xmlns="" xmlns:a14="http://schemas.microsoft.com/office/drawing/2010/main" w="9525">
+                <a14:hiddenLine xmlns:a14="http://schemas.microsoft.com/office/drawing/2010/main" xmlns="" w="9525">
                   <a:solidFill>
                     <a:srgbClr val="000000"/>
                   </a:solidFill>
@@ -12276,7 +12336,7 @@
             <a:pPr rtl="0"/>
             <a:fld id="{A02EAC81-5C99-4864-A0E8-CFA5C9ABA6C2}" type="datetime1">
               <a:rPr lang="fr-FR" noProof="0" smtClean="0"/>
-              <a:t>19/03/2026</a:t>
+              <a:t>23/03/2026</a:t>
             </a:fld>
             <a:endParaRPr lang="fr-FR" noProof="0"/>
           </a:p>
@@ -12546,7 +12606,7 @@
             <a:pPr rtl="0"/>
             <a:fld id="{0ACE44FF-5CD6-4B82-B1F5-6AE86C9907EB}" type="datetime1">
               <a:rPr lang="fr-FR" noProof="0" smtClean="0"/>
-              <a:t>19/03/2026</a:t>
+              <a:t>23/03/2026</a:t>
             </a:fld>
             <a:endParaRPr lang="fr-FR" noProof="0"/>
           </a:p>
@@ -12746,7 +12806,7 @@
             <a:pPr rtl="0"/>
             <a:fld id="{9B3B6F96-1DBA-403E-937D-37819E106CA7}" type="datetime1">
               <a:rPr lang="fr-FR" noProof="0" smtClean="0"/>
-              <a:t>19/03/2026</a:t>
+              <a:t>23/03/2026</a:t>
             </a:fld>
             <a:endParaRPr lang="fr-FR" noProof="0"/>
           </a:p>
@@ -13013,7 +13073,7 @@
             <a:pPr rtl="0"/>
             <a:fld id="{55413907-E3EB-48AE-AB86-05A8E02730C7}" type="datetime1">
               <a:rPr lang="fr-FR" noProof="0" smtClean="0"/>
-              <a:t>19/03/2026</a:t>
+              <a:t>23/03/2026</a:t>
             </a:fld>
             <a:endParaRPr lang="fr-FR" noProof="0"/>
           </a:p>
@@ -13451,7 +13511,7 @@
             <a:pPr rtl="0"/>
             <a:fld id="{72A7BD87-4162-417A-9B5A-2932BA9F7490}" type="datetime1">
               <a:rPr lang="fr-FR" noProof="0" smtClean="0"/>
-              <a:t>19/03/2026</a:t>
+              <a:t>23/03/2026</a:t>
             </a:fld>
             <a:endParaRPr lang="fr-FR" noProof="0"/>
           </a:p>
@@ -14001,7 +14061,7 @@
             <a:pPr rtl="0"/>
             <a:fld id="{20004DDE-15BB-4C4D-B4EA-C083161A9948}" type="datetime1">
               <a:rPr lang="fr-FR" noProof="0" smtClean="0"/>
-              <a:t>19/03/2026</a:t>
+              <a:t>23/03/2026</a:t>
             </a:fld>
             <a:endParaRPr lang="fr-FR" noProof="0"/>
           </a:p>
@@ -14722,7 +14782,7 @@
             <a:pPr rtl="0"/>
             <a:fld id="{9E1F3B7E-0513-428C-82D7-BDF3AA9A4EA5}" type="datetime1">
               <a:rPr lang="fr-FR" noProof="0" smtClean="0"/>
-              <a:t>19/03/2026</a:t>
+              <a:t>23/03/2026</a:t>
             </a:fld>
             <a:endParaRPr lang="fr-FR" noProof="0"/>
           </a:p>
@@ -14895,7 +14955,7 @@
             <a:pPr rtl="0"/>
             <a:fld id="{F2372795-7EAB-4160-A1B0-2F422ABD8E89}" type="datetime1">
               <a:rPr lang="fr-FR" noProof="0" smtClean="0"/>
-              <a:t>19/03/2026</a:t>
+              <a:t>23/03/2026</a:t>
             </a:fld>
             <a:endParaRPr lang="fr-FR" noProof="0"/>
           </a:p>
@@ -15078,7 +15138,7 @@
             <a:pPr rtl="0"/>
             <a:fld id="{4C2BF765-708F-4989-AE14-BAB9493E4588}" type="datetime1">
               <a:rPr lang="fr-FR" noProof="0" smtClean="0"/>
-              <a:t>19/03/2026</a:t>
+              <a:t>23/03/2026</a:t>
             </a:fld>
             <a:endParaRPr lang="fr-FR" noProof="0"/>
           </a:p>
@@ -15251,7 +15311,7 @@
             <a:pPr rtl="0"/>
             <a:fld id="{601D7A6B-BCC2-4C21-BAE3-6AF1B840E56D}" type="datetime1">
               <a:rPr lang="fr-FR" noProof="0" smtClean="0"/>
-              <a:t>19/03/2026</a:t>
+              <a:t>23/03/2026</a:t>
             </a:fld>
             <a:endParaRPr lang="fr-FR" noProof="0"/>
           </a:p>
@@ -15505,7 +15565,7 @@
             <a:pPr rtl="0"/>
             <a:fld id="{0635DD21-33A0-42C5-A2E5-7493465514B7}" type="datetime1">
               <a:rPr lang="fr-FR" noProof="0" smtClean="0"/>
-              <a:t>19/03/2026</a:t>
+              <a:t>23/03/2026</a:t>
             </a:fld>
             <a:endParaRPr lang="fr-FR" noProof="0"/>
           </a:p>
@@ -15739,7 +15799,7 @@
             <a:pPr rtl="0"/>
             <a:fld id="{E8BC33FA-CEBE-4502-9F9B-2F0989154353}" type="datetime1">
               <a:rPr lang="fr-FR" noProof="0" smtClean="0"/>
-              <a:t>19/03/2026</a:t>
+              <a:t>23/03/2026</a:t>
             </a:fld>
             <a:endParaRPr lang="fr-FR" noProof="0"/>
           </a:p>
@@ -16122,7 +16182,7 @@
             <a:pPr rtl="0"/>
             <a:fld id="{B3ECB3ED-4851-4DE7-9A6A-4D7485AC63E3}" type="datetime1">
               <a:rPr lang="fr-FR" noProof="0" smtClean="0"/>
-              <a:t>19/03/2026</a:t>
+              <a:t>23/03/2026</a:t>
             </a:fld>
             <a:endParaRPr lang="fr-FR" noProof="0"/>
           </a:p>
@@ -16244,7 +16304,7 @@
             <a:pPr rtl="0"/>
             <a:fld id="{DBDFEB93-A53E-490C-AF00-EDE3AFF9A36D}" type="datetime1">
               <a:rPr lang="fr-FR" noProof="0" smtClean="0"/>
-              <a:t>19/03/2026</a:t>
+              <a:t>23/03/2026</a:t>
             </a:fld>
             <a:endParaRPr lang="fr-FR" noProof="0"/>
           </a:p>
@@ -16342,7 +16402,7 @@
             <a:pPr rtl="0"/>
             <a:fld id="{969093F2-5574-4FF9-B1D2-E15C695A74EF}" type="datetime1">
               <a:rPr lang="fr-FR" noProof="0" smtClean="0"/>
-              <a:t>19/03/2026</a:t>
+              <a:t>23/03/2026</a:t>
             </a:fld>
             <a:endParaRPr lang="fr-FR" noProof="0"/>
           </a:p>
@@ -16594,7 +16654,7 @@
             <a:pPr rtl="0"/>
             <a:fld id="{575F6C24-568D-4917-863C-3B89D44003D5}" type="datetime1">
               <a:rPr lang="fr-FR" noProof="0" smtClean="0"/>
-              <a:t>19/03/2026</a:t>
+              <a:t>23/03/2026</a:t>
             </a:fld>
             <a:endParaRPr lang="fr-FR" noProof="0"/>
           </a:p>
@@ -16878,7 +16938,7 @@
             <a:pPr rtl="0"/>
             <a:fld id="{7A202532-655D-448B-BCCD-E52581A788ED}" type="datetime1">
               <a:rPr lang="fr-FR" noProof="0" smtClean="0"/>
-              <a:t>19/03/2026</a:t>
+              <a:t>23/03/2026</a:t>
             </a:fld>
             <a:endParaRPr lang="fr-FR" noProof="0"/>
           </a:p>
@@ -17003,7 +17063,7 @@
           <a:noFill/>
           <a:extLst>
             <a:ext uri="{909E8E84-426E-40dd-AFC4-6F175D3DCCD1}">
-              <a14:hiddenFill xmlns="" xmlns:a14="http://schemas.microsoft.com/office/drawing/2010/main">
+              <a14:hiddenFill xmlns:a14="http://schemas.microsoft.com/office/drawing/2010/main" xmlns="">
                 <a:solidFill>
                   <a:srgbClr val="FFFFFF"/>
                 </a:solidFill>
@@ -17077,7 +17137,7 @@
               </a:ln>
               <a:extLst>
                 <a:ext uri="{91240B29-F687-4f45-9708-019B960494DF}">
-                  <a14:hiddenLine xmlns="" xmlns:a14="http://schemas.microsoft.com/office/drawing/2010/main" w="9525">
+                  <a14:hiddenLine xmlns:a14="http://schemas.microsoft.com/office/drawing/2010/main" xmlns="" w="9525">
                     <a:solidFill>
                       <a:srgbClr val="000000"/>
                     </a:solidFill>
@@ -17167,7 +17227,7 @@
               </a:ln>
               <a:extLst>
                 <a:ext uri="{91240B29-F687-4f45-9708-019B960494DF}">
-                  <a14:hiddenLine xmlns="" xmlns:a14="http://schemas.microsoft.com/office/drawing/2010/main" w="9525">
+                  <a14:hiddenLine xmlns:a14="http://schemas.microsoft.com/office/drawing/2010/main" xmlns="" w="9525">
                     <a:solidFill>
                       <a:srgbClr val="000000"/>
                     </a:solidFill>
@@ -17257,7 +17317,7 @@
               </a:ln>
               <a:extLst>
                 <a:ext uri="{91240B29-F687-4f45-9708-019B960494DF}">
-                  <a14:hiddenLine xmlns="" xmlns:a14="http://schemas.microsoft.com/office/drawing/2010/main" w="9525">
+                  <a14:hiddenLine xmlns:a14="http://schemas.microsoft.com/office/drawing/2010/main" xmlns="" w="9525">
                     <a:solidFill>
                       <a:srgbClr val="000000"/>
                     </a:solidFill>
@@ -17319,7 +17379,7 @@
               </a:ln>
               <a:extLst>
                 <a:ext uri="{91240B29-F687-4f45-9708-019B960494DF}">
-                  <a14:hiddenLine xmlns="" xmlns:a14="http://schemas.microsoft.com/office/drawing/2010/main" w="9525">
+                  <a14:hiddenLine xmlns:a14="http://schemas.microsoft.com/office/drawing/2010/main" xmlns="" w="9525">
                     <a:solidFill>
                       <a:srgbClr val="000000"/>
                     </a:solidFill>
@@ -17409,7 +17469,7 @@
               </a:ln>
               <a:extLst>
                 <a:ext uri="{91240B29-F687-4f45-9708-019B960494DF}">
-                  <a14:hiddenLine xmlns="" xmlns:a14="http://schemas.microsoft.com/office/drawing/2010/main" w="9525">
+                  <a14:hiddenLine xmlns:a14="http://schemas.microsoft.com/office/drawing/2010/main" xmlns="" w="9525">
                     <a:solidFill>
                       <a:srgbClr val="000000"/>
                     </a:solidFill>
@@ -17471,7 +17531,7 @@
               </a:ln>
               <a:extLst>
                 <a:ext uri="{91240B29-F687-4f45-9708-019B960494DF}">
-                  <a14:hiddenLine xmlns="" xmlns:a14="http://schemas.microsoft.com/office/drawing/2010/main" w="9525">
+                  <a14:hiddenLine xmlns:a14="http://schemas.microsoft.com/office/drawing/2010/main" xmlns="" w="9525">
                     <a:solidFill>
                       <a:srgbClr val="000000"/>
                     </a:solidFill>
@@ -17533,7 +17593,7 @@
               </a:ln>
               <a:extLst>
                 <a:ext uri="{91240B29-F687-4f45-9708-019B960494DF}">
-                  <a14:hiddenLine xmlns="" xmlns:a14="http://schemas.microsoft.com/office/drawing/2010/main" w="9525">
+                  <a14:hiddenLine xmlns:a14="http://schemas.microsoft.com/office/drawing/2010/main" xmlns="" w="9525">
                     <a:solidFill>
                       <a:srgbClr val="000000"/>
                     </a:solidFill>
@@ -17623,7 +17683,7 @@
               </a:ln>
               <a:extLst>
                 <a:ext uri="{91240B29-F687-4f45-9708-019B960494DF}">
-                  <a14:hiddenLine xmlns="" xmlns:a14="http://schemas.microsoft.com/office/drawing/2010/main" w="9525">
+                  <a14:hiddenLine xmlns:a14="http://schemas.microsoft.com/office/drawing/2010/main" xmlns="" w="9525">
                     <a:solidFill>
                       <a:srgbClr val="000000"/>
                     </a:solidFill>
@@ -17713,7 +17773,7 @@
               </a:ln>
               <a:extLst>
                 <a:ext uri="{91240B29-F687-4f45-9708-019B960494DF}">
-                  <a14:hiddenLine xmlns="" xmlns:a14="http://schemas.microsoft.com/office/drawing/2010/main" w="9525">
+                  <a14:hiddenLine xmlns:a14="http://schemas.microsoft.com/office/drawing/2010/main" xmlns="" w="9525">
                     <a:solidFill>
                       <a:srgbClr val="000000"/>
                     </a:solidFill>
@@ -17775,7 +17835,7 @@
               </a:ln>
               <a:extLst>
                 <a:ext uri="{91240B29-F687-4f45-9708-019B960494DF}">
-                  <a14:hiddenLine xmlns="" xmlns:a14="http://schemas.microsoft.com/office/drawing/2010/main" w="9525">
+                  <a14:hiddenLine xmlns:a14="http://schemas.microsoft.com/office/drawing/2010/main" xmlns="" w="9525">
                     <a:solidFill>
                       <a:srgbClr val="000000"/>
                     </a:solidFill>
@@ -17885,7 +17945,7 @@
               </a:ln>
               <a:extLst>
                 <a:ext uri="{91240B29-F687-4f45-9708-019B960494DF}">
-                  <a14:hiddenLine xmlns="" xmlns:a14="http://schemas.microsoft.com/office/drawing/2010/main" w="9525">
+                  <a14:hiddenLine xmlns:a14="http://schemas.microsoft.com/office/drawing/2010/main" xmlns="" w="9525">
                     <a:solidFill>
                       <a:srgbClr val="000000"/>
                     </a:solidFill>
@@ -17969,7 +18029,7 @@
               </a:ln>
               <a:extLst>
                 <a:ext uri="{91240B29-F687-4f45-9708-019B960494DF}">
-                  <a14:hiddenLine xmlns="" xmlns:a14="http://schemas.microsoft.com/office/drawing/2010/main" w="9525">
+                  <a14:hiddenLine xmlns:a14="http://schemas.microsoft.com/office/drawing/2010/main" xmlns="" w="9525">
                     <a:solidFill>
                       <a:srgbClr val="000000"/>
                     </a:solidFill>
@@ -18031,7 +18091,7 @@
               </a:ln>
               <a:extLst>
                 <a:ext uri="{91240B29-F687-4f45-9708-019B960494DF}">
-                  <a14:hiddenLine xmlns="" xmlns:a14="http://schemas.microsoft.com/office/drawing/2010/main" w="9525">
+                  <a14:hiddenLine xmlns:a14="http://schemas.microsoft.com/office/drawing/2010/main" xmlns="" w="9525">
                     <a:solidFill>
                       <a:srgbClr val="000000"/>
                     </a:solidFill>
@@ -18093,7 +18153,7 @@
               </a:ln>
               <a:extLst>
                 <a:ext uri="{91240B29-F687-4f45-9708-019B960494DF}">
-                  <a14:hiddenLine xmlns="" xmlns:a14="http://schemas.microsoft.com/office/drawing/2010/main" w="9525">
+                  <a14:hiddenLine xmlns:a14="http://schemas.microsoft.com/office/drawing/2010/main" xmlns="" w="9525">
                     <a:solidFill>
                       <a:srgbClr val="000000"/>
                     </a:solidFill>
@@ -18183,7 +18243,7 @@
               </a:ln>
               <a:extLst>
                 <a:ext uri="{91240B29-F687-4f45-9708-019B960494DF}">
-                  <a14:hiddenLine xmlns="" xmlns:a14="http://schemas.microsoft.com/office/drawing/2010/main" w="9525">
+                  <a14:hiddenLine xmlns:a14="http://schemas.microsoft.com/office/drawing/2010/main" xmlns="" w="9525">
                     <a:solidFill>
                       <a:srgbClr val="000000"/>
                     </a:solidFill>
@@ -18217,7 +18277,7 @@
               </a:ln>
               <a:extLst>
                 <a:ext uri="{91240B29-F687-4f45-9708-019B960494DF}">
-                  <a14:hiddenLine xmlns="" xmlns:a14="http://schemas.microsoft.com/office/drawing/2010/main" w="9525">
+                  <a14:hiddenLine xmlns:a14="http://schemas.microsoft.com/office/drawing/2010/main" xmlns="" w="9525">
                     <a:solidFill>
                       <a:srgbClr val="000000"/>
                     </a:solidFill>
@@ -18282,7 +18342,7 @@
               </a:ln>
               <a:extLst>
                 <a:ext uri="{91240B29-F687-4f45-9708-019B960494DF}">
-                  <a14:hiddenLine xmlns="" xmlns:a14="http://schemas.microsoft.com/office/drawing/2010/main" w="9525">
+                  <a14:hiddenLine xmlns:a14="http://schemas.microsoft.com/office/drawing/2010/main" xmlns="" w="9525">
                     <a:solidFill>
                       <a:srgbClr val="000000"/>
                     </a:solidFill>
@@ -18372,7 +18432,7 @@
               </a:ln>
               <a:extLst>
                 <a:ext uri="{91240B29-F687-4f45-9708-019B960494DF}">
-                  <a14:hiddenLine xmlns="" xmlns:a14="http://schemas.microsoft.com/office/drawing/2010/main" w="9525">
+                  <a14:hiddenLine xmlns:a14="http://schemas.microsoft.com/office/drawing/2010/main" xmlns="" w="9525">
                     <a:solidFill>
                       <a:srgbClr val="000000"/>
                     </a:solidFill>
@@ -18434,7 +18494,7 @@
               </a:ln>
               <a:extLst>
                 <a:ext uri="{91240B29-F687-4f45-9708-019B960494DF}">
-                  <a14:hiddenLine xmlns="" xmlns:a14="http://schemas.microsoft.com/office/drawing/2010/main" w="9525">
+                  <a14:hiddenLine xmlns:a14="http://schemas.microsoft.com/office/drawing/2010/main" xmlns="" w="9525">
                     <a:solidFill>
                       <a:srgbClr val="000000"/>
                     </a:solidFill>
@@ -18524,7 +18584,7 @@
               </a:ln>
               <a:extLst>
                 <a:ext uri="{91240B29-F687-4f45-9708-019B960494DF}">
-                  <a14:hiddenLine xmlns="" xmlns:a14="http://schemas.microsoft.com/office/drawing/2010/main" w="9525">
+                  <a14:hiddenLine xmlns:a14="http://schemas.microsoft.com/office/drawing/2010/main" xmlns="" w="9525">
                     <a:solidFill>
                       <a:srgbClr val="000000"/>
                     </a:solidFill>
@@ -18589,7 +18649,7 @@
               </a:ln>
               <a:extLst>
                 <a:ext uri="{91240B29-F687-4f45-9708-019B960494DF}">
-                  <a14:hiddenLine xmlns="" xmlns:a14="http://schemas.microsoft.com/office/drawing/2010/main" w="9525">
+                  <a14:hiddenLine xmlns:a14="http://schemas.microsoft.com/office/drawing/2010/main" xmlns="" w="9525">
                     <a:solidFill>
                       <a:srgbClr val="000000"/>
                     </a:solidFill>
@@ -18651,7 +18711,7 @@
               </a:ln>
               <a:extLst>
                 <a:ext uri="{91240B29-F687-4f45-9708-019B960494DF}">
-                  <a14:hiddenLine xmlns="" xmlns:a14="http://schemas.microsoft.com/office/drawing/2010/main" w="9525">
+                  <a14:hiddenLine xmlns:a14="http://schemas.microsoft.com/office/drawing/2010/main" xmlns="" w="9525">
                     <a:solidFill>
                       <a:srgbClr val="000000"/>
                     </a:solidFill>
@@ -18741,7 +18801,7 @@
               </a:ln>
               <a:extLst>
                 <a:ext uri="{91240B29-F687-4f45-9708-019B960494DF}">
-                  <a14:hiddenLine xmlns="" xmlns:a14="http://schemas.microsoft.com/office/drawing/2010/main" w="9525">
+                  <a14:hiddenLine xmlns:a14="http://schemas.microsoft.com/office/drawing/2010/main" xmlns="" w="9525">
                     <a:solidFill>
                       <a:srgbClr val="000000"/>
                     </a:solidFill>
@@ -18831,7 +18891,7 @@
               </a:ln>
               <a:extLst>
                 <a:ext uri="{91240B29-F687-4f45-9708-019B960494DF}">
-                  <a14:hiddenLine xmlns="" xmlns:a14="http://schemas.microsoft.com/office/drawing/2010/main" w="9525">
+                  <a14:hiddenLine xmlns:a14="http://schemas.microsoft.com/office/drawing/2010/main" xmlns="" w="9525">
                     <a:solidFill>
                       <a:srgbClr val="000000"/>
                     </a:solidFill>
@@ -18896,7 +18956,7 @@
               </a:ln>
               <a:extLst>
                 <a:ext uri="{91240B29-F687-4f45-9708-019B960494DF}">
-                  <a14:hiddenLine xmlns="" xmlns:a14="http://schemas.microsoft.com/office/drawing/2010/main" w="9525">
+                  <a14:hiddenLine xmlns:a14="http://schemas.microsoft.com/office/drawing/2010/main" xmlns="" w="9525">
                     <a:solidFill>
                       <a:srgbClr val="000000"/>
                     </a:solidFill>
@@ -19016,7 +19076,7 @@
               </a:ln>
               <a:extLst>
                 <a:ext uri="{91240B29-F687-4f45-9708-019B960494DF}">
-                  <a14:hiddenLine xmlns="" xmlns:a14="http://schemas.microsoft.com/office/drawing/2010/main" w="9525">
+                  <a14:hiddenLine xmlns:a14="http://schemas.microsoft.com/office/drawing/2010/main" xmlns="" w="9525">
                     <a:solidFill>
                       <a:srgbClr val="000000"/>
                     </a:solidFill>
@@ -19097,7 +19157,7 @@
               </a:ln>
               <a:extLst>
                 <a:ext uri="{91240B29-F687-4f45-9708-019B960494DF}">
-                  <a14:hiddenLine xmlns="" xmlns:a14="http://schemas.microsoft.com/office/drawing/2010/main" w="9525">
+                  <a14:hiddenLine xmlns:a14="http://schemas.microsoft.com/office/drawing/2010/main" xmlns="" w="9525">
                     <a:solidFill>
                       <a:srgbClr val="000000"/>
                     </a:solidFill>
@@ -19212,7 +19272,7 @@
               </a:ln>
               <a:extLst>
                 <a:ext uri="{91240B29-F687-4f45-9708-019B960494DF}">
-                  <a14:hiddenLine xmlns="" xmlns:a14="http://schemas.microsoft.com/office/drawing/2010/main" w="9525">
+                  <a14:hiddenLine xmlns:a14="http://schemas.microsoft.com/office/drawing/2010/main" xmlns="" w="9525">
                     <a:solidFill>
                       <a:srgbClr val="000000"/>
                     </a:solidFill>
@@ -19302,7 +19362,7 @@
               </a:ln>
               <a:extLst>
                 <a:ext uri="{91240B29-F687-4f45-9708-019B960494DF}">
-                  <a14:hiddenLine xmlns="" xmlns:a14="http://schemas.microsoft.com/office/drawing/2010/main" w="9525">
+                  <a14:hiddenLine xmlns:a14="http://schemas.microsoft.com/office/drawing/2010/main" xmlns="" w="9525">
                     <a:solidFill>
                       <a:srgbClr val="000000"/>
                     </a:solidFill>
@@ -19367,7 +19427,7 @@
               </a:ln>
               <a:extLst>
                 <a:ext uri="{91240B29-F687-4f45-9708-019B960494DF}">
-                  <a14:hiddenLine xmlns="" xmlns:a14="http://schemas.microsoft.com/office/drawing/2010/main" w="9525">
+                  <a14:hiddenLine xmlns:a14="http://schemas.microsoft.com/office/drawing/2010/main" xmlns="" w="9525">
                     <a:solidFill>
                       <a:srgbClr val="000000"/>
                     </a:solidFill>
@@ -19457,7 +19517,7 @@
               </a:ln>
               <a:extLst>
                 <a:ext uri="{91240B29-F687-4f45-9708-019B960494DF}">
-                  <a14:hiddenLine xmlns="" xmlns:a14="http://schemas.microsoft.com/office/drawing/2010/main" w="9525">
+                  <a14:hiddenLine xmlns:a14="http://schemas.microsoft.com/office/drawing/2010/main" xmlns="" w="9525">
                     <a:solidFill>
                       <a:srgbClr val="000000"/>
                     </a:solidFill>
@@ -19525,7 +19585,7 @@
               </a:ln>
               <a:extLst>
                 <a:ext uri="{91240B29-F687-4f45-9708-019B960494DF}">
-                  <a14:hiddenLine xmlns="" xmlns:a14="http://schemas.microsoft.com/office/drawing/2010/main" w="9525">
+                  <a14:hiddenLine xmlns:a14="http://schemas.microsoft.com/office/drawing/2010/main" xmlns="" w="9525">
                     <a:solidFill>
                       <a:srgbClr val="000000"/>
                     </a:solidFill>
@@ -19615,7 +19675,7 @@
               </a:ln>
               <a:extLst>
                 <a:ext uri="{91240B29-F687-4f45-9708-019B960494DF}">
-                  <a14:hiddenLine xmlns="" xmlns:a14="http://schemas.microsoft.com/office/drawing/2010/main" w="9525">
+                  <a14:hiddenLine xmlns:a14="http://schemas.microsoft.com/office/drawing/2010/main" xmlns="" w="9525">
                     <a:solidFill>
                       <a:srgbClr val="000000"/>
                     </a:solidFill>
@@ -19683,7 +19743,7 @@
               </a:ln>
               <a:extLst>
                 <a:ext uri="{91240B29-F687-4f45-9708-019B960494DF}">
-                  <a14:hiddenLine xmlns="" xmlns:a14="http://schemas.microsoft.com/office/drawing/2010/main" w="9525">
+                  <a14:hiddenLine xmlns:a14="http://schemas.microsoft.com/office/drawing/2010/main" xmlns="" w="9525">
                     <a:solidFill>
                       <a:srgbClr val="000000"/>
                     </a:solidFill>
@@ -19773,7 +19833,7 @@
               </a:ln>
               <a:extLst>
                 <a:ext uri="{91240B29-F687-4f45-9708-019B960494DF}">
-                  <a14:hiddenLine xmlns="" xmlns:a14="http://schemas.microsoft.com/office/drawing/2010/main" w="9525">
+                  <a14:hiddenLine xmlns:a14="http://schemas.microsoft.com/office/drawing/2010/main" xmlns="" w="9525">
                     <a:solidFill>
                       <a:srgbClr val="000000"/>
                     </a:solidFill>
@@ -19807,7 +19867,7 @@
               </a:ln>
               <a:extLst>
                 <a:ext uri="{91240B29-F687-4f45-9708-019B960494DF}">
-                  <a14:hiddenLine xmlns="" xmlns:a14="http://schemas.microsoft.com/office/drawing/2010/main" w="9525">
+                  <a14:hiddenLine xmlns:a14="http://schemas.microsoft.com/office/drawing/2010/main" xmlns="" w="9525">
                     <a:solidFill>
                       <a:srgbClr val="000000"/>
                     </a:solidFill>
@@ -19948,7 +20008,7 @@
             <a:pPr rtl="0"/>
             <a:fld id="{CD282D03-1B0F-4808-A039-91C9E6CB118E}" type="datetime1">
               <a:rPr lang="fr-FR" noProof="0" smtClean="0"/>
-              <a:t>19/03/2026</a:t>
+              <a:t>23/03/2026</a:t>
             </a:fld>
             <a:endParaRPr lang="fr-FR" noProof="0" dirty="0"/>
           </a:p>
@@ -20566,7 +20626,7 @@
                 <a16:creationId xmlns:a16="http://schemas.microsoft.com/office/drawing/2014/main" id="{8D4F1745-A55E-4835-88EB-BC637121B608}"/>
               </a:ext>
               <a:ext uri="{C183D7F6-B498-43B3-948B-1728B52AA6E4}">
-                <adec:decorative xmlns:adec="http://schemas.microsoft.com/office/drawing/2017/decorative" xmlns="" val="1"/>
+                <adec:decorative xmlns="" xmlns:adec="http://schemas.microsoft.com/office/drawing/2017/decorative" val="1"/>
               </a:ext>
             </a:extLst>
           </p:cNvPr>
@@ -20577,7 +20637,7 @@
             <p:ph idx="1"/>
             <p:extLst>
               <p:ext uri="{D42A27DB-BD31-4B8C-83A1-F6EECF244321}">
-                <p14:modId xmlns:p14="http://schemas.microsoft.com/office/powerpoint/2010/main" val="2990942507"/>
+                <p14:modId xmlns:p14="http://schemas.microsoft.com/office/powerpoint/2010/main" val="1082450892"/>
               </p:ext>
             </p:extLst>
           </p:nvPr>
@@ -20825,7 +20885,7 @@
                 <a16:creationId xmlns:a16="http://schemas.microsoft.com/office/drawing/2014/main" id="{242FA989-6B7C-488C-85ED-CB8D01BA3254}"/>
               </a:ext>
               <a:ext uri="{C183D7F6-B498-43B3-948B-1728B52AA6E4}">
-                <adec:decorative xmlns:adec="http://schemas.microsoft.com/office/drawing/2017/decorative" xmlns="" val="1"/>
+                <adec:decorative xmlns="" xmlns:adec="http://schemas.microsoft.com/office/drawing/2017/decorative" val="1"/>
               </a:ext>
             </a:extLst>
           </p:cNvPr>

--- a/GACI FORUM SUR L’APPRENTISSAGE DU frame work boostrap.pptx
+++ b/GACI FORUM SUR L’APPRENTISSAGE DU frame work boostrap.pptx
@@ -2207,8 +2207,8 @@
     <dgm:cxn modelId="{A44DF6E5-2150-478D-AAB9-24BC6742BCEE}" type="presOf" srcId="{928B5CB8-3545-4EE5-8BED-981D3C6157A5}" destId="{B9324B26-5FF5-4FF7-9073-66103CBE8481}" srcOrd="0" destOrd="0" presId="urn:microsoft.com/office/officeart/2005/8/layout/vList5"/>
     <dgm:cxn modelId="{02B1C3C3-F2D2-4C80-8962-E0C9B39A6EF4}" type="presOf" srcId="{0D51337A-31FA-4717-B2BF-9243F96D2B9B}" destId="{3230722F-B757-4673-BD2F-9D4BAB5CEE8D}" srcOrd="0" destOrd="0" presId="urn:microsoft.com/office/officeart/2005/8/layout/vList5"/>
     <dgm:cxn modelId="{56052809-46E4-4445-B520-94004C28BB9D}" srcId="{A7F7584C-6CC5-40A2-9566-2842A5DEA97A}" destId="{9D8DAFB6-C744-4BD6-B757-393BF647EBB6}" srcOrd="0" destOrd="0" parTransId="{17C1C47E-8D1A-404A-B227-B017391CB5F6}" sibTransId="{C9B44773-68B1-427B-B9CA-0AEA186B621E}"/>
+    <dgm:cxn modelId="{C65EFE7A-5430-4917-89D2-D70BAF0289E3}" type="presOf" srcId="{2A9B6C90-9B70-4ED8-9084-8651413BB905}" destId="{A66EBD3D-E7C5-421C-B8B5-728648057DDC}" srcOrd="0" destOrd="0" presId="urn:microsoft.com/office/officeart/2005/8/layout/vList5"/>
     <dgm:cxn modelId="{66EBA0EC-F77C-4ABE-8815-8C8F4F6ACAB5}" type="presOf" srcId="{95A524E6-8A71-49A1-AF74-29696A02028A}" destId="{95E0557D-F0A1-4F38-8083-55DE7503164F}" srcOrd="0" destOrd="0" presId="urn:microsoft.com/office/officeart/2005/8/layout/vList5"/>
-    <dgm:cxn modelId="{C65EFE7A-5430-4917-89D2-D70BAF0289E3}" type="presOf" srcId="{2A9B6C90-9B70-4ED8-9084-8651413BB905}" destId="{A66EBD3D-E7C5-421C-B8B5-728648057DDC}" srcOrd="0" destOrd="0" presId="urn:microsoft.com/office/officeart/2005/8/layout/vList5"/>
     <dgm:cxn modelId="{45435F90-22A5-4C03-B101-FD4577E8A794}" type="presParOf" srcId="{99FD7F24-5BB9-46E8-BB7C-4B477B73B815}" destId="{BBAB8945-0B00-4547-92CF-AE59FDD0EF39}" srcOrd="0" destOrd="0" presId="urn:microsoft.com/office/officeart/2005/8/layout/vList5"/>
     <dgm:cxn modelId="{B399DCC2-FF40-4D75-A2A7-A495D4AF2387}" type="presParOf" srcId="{BBAB8945-0B00-4547-92CF-AE59FDD0EF39}" destId="{3230722F-B757-4673-BD2F-9D4BAB5CEE8D}" srcOrd="0" destOrd="0" presId="urn:microsoft.com/office/officeart/2005/8/layout/vList5"/>
     <dgm:cxn modelId="{4A0749A4-83B7-4DF9-BA0E-5506B76F10A1}" type="presParOf" srcId="{BBAB8945-0B00-4547-92CF-AE59FDD0EF39}" destId="{6FB9694A-6C63-4B23-90F6-4F208C00D399}" srcOrd="1" destOrd="0" presId="urn:microsoft.com/office/officeart/2005/8/layout/vList5"/>
@@ -6933,7 +6933,7 @@
           <a:p>
             <a:fld id="{8A502FC4-2826-4189-9A5A-4802B82D90F9}" type="datetimeFigureOut">
               <a:rPr lang="fr-FR" smtClean="0"/>
-              <a:t>23/03/2026</a:t>
+              <a:t>24/03/2026</a:t>
             </a:fld>
             <a:endParaRPr lang="fr-FR"/>
           </a:p>
@@ -7111,7 +7111,7 @@
           <a:p>
             <a:fld id="{9AEA84B2-E620-4EFC-AE95-6DDE4155F805}" type="datetimeFigureOut">
               <a:rPr lang="fr-FR" noProof="0" smtClean="0"/>
-              <a:t>23/03/2026</a:t>
+              <a:t>24/03/2026</a:t>
             </a:fld>
             <a:endParaRPr lang="fr-FR" noProof="0"/>
           </a:p>
@@ -8108,7 +8108,7 @@
           <a:noFill/>
           <a:extLst>
             <a:ext uri="{909E8E84-426E-40dd-AFC4-6F175D3DCCD1}">
-              <a14:hiddenFill xmlns:a14="http://schemas.microsoft.com/office/drawing/2010/main" xmlns="">
+              <a14:hiddenFill xmlns="" xmlns:a14="http://schemas.microsoft.com/office/drawing/2010/main">
                 <a:solidFill>
                   <a:srgbClr val="FFFFFF"/>
                 </a:solidFill>
@@ -8167,7 +8167,7 @@
             </a:ln>
             <a:extLst>
               <a:ext uri="{91240B29-F687-4f45-9708-019B960494DF}">
-                <a14:hiddenLine xmlns:a14="http://schemas.microsoft.com/office/drawing/2010/main" xmlns="" w="9525">
+                <a14:hiddenLine xmlns="" xmlns:a14="http://schemas.microsoft.com/office/drawing/2010/main" w="9525">
                   <a:solidFill>
                     <a:srgbClr val="000000"/>
                   </a:solidFill>
@@ -8257,7 +8257,7 @@
             </a:ln>
             <a:extLst>
               <a:ext uri="{91240B29-F687-4f45-9708-019B960494DF}">
-                <a14:hiddenLine xmlns:a14="http://schemas.microsoft.com/office/drawing/2010/main" xmlns="" w="9525">
+                <a14:hiddenLine xmlns="" xmlns:a14="http://schemas.microsoft.com/office/drawing/2010/main" w="9525">
                   <a:solidFill>
                     <a:srgbClr val="000000"/>
                   </a:solidFill>
@@ -8347,7 +8347,7 @@
             </a:ln>
             <a:extLst>
               <a:ext uri="{91240B29-F687-4f45-9708-019B960494DF}">
-                <a14:hiddenLine xmlns:a14="http://schemas.microsoft.com/office/drawing/2010/main" xmlns="" w="9525">
+                <a14:hiddenLine xmlns="" xmlns:a14="http://schemas.microsoft.com/office/drawing/2010/main" w="9525">
                   <a:solidFill>
                     <a:srgbClr val="000000"/>
                   </a:solidFill>
@@ -8381,7 +8381,7 @@
             </a:ln>
             <a:extLst>
               <a:ext uri="{91240B29-F687-4f45-9708-019B960494DF}">
-                <a14:hiddenLine xmlns:a14="http://schemas.microsoft.com/office/drawing/2010/main" xmlns="" w="9525">
+                <a14:hiddenLine xmlns="" xmlns:a14="http://schemas.microsoft.com/office/drawing/2010/main" w="9525">
                   <a:solidFill>
                     <a:srgbClr val="000000"/>
                   </a:solidFill>
@@ -8471,7 +8471,7 @@
             </a:ln>
             <a:extLst>
               <a:ext uri="{91240B29-F687-4f45-9708-019B960494DF}">
-                <a14:hiddenLine xmlns:a14="http://schemas.microsoft.com/office/drawing/2010/main" xmlns="" w="9525">
+                <a14:hiddenLine xmlns="" xmlns:a14="http://schemas.microsoft.com/office/drawing/2010/main" w="9525">
                   <a:solidFill>
                     <a:srgbClr val="000000"/>
                   </a:solidFill>
@@ -8533,7 +8533,7 @@
             </a:ln>
             <a:extLst>
               <a:ext uri="{91240B29-F687-4f45-9708-019B960494DF}">
-                <a14:hiddenLine xmlns:a14="http://schemas.microsoft.com/office/drawing/2010/main" xmlns="" w="9525">
+                <a14:hiddenLine xmlns="" xmlns:a14="http://schemas.microsoft.com/office/drawing/2010/main" w="9525">
                   <a:solidFill>
                     <a:srgbClr val="000000"/>
                   </a:solidFill>
@@ -8595,7 +8595,7 @@
             </a:ln>
             <a:extLst>
               <a:ext uri="{91240B29-F687-4f45-9708-019B960494DF}">
-                <a14:hiddenLine xmlns:a14="http://schemas.microsoft.com/office/drawing/2010/main" xmlns="" w="9525">
+                <a14:hiddenLine xmlns="" xmlns:a14="http://schemas.microsoft.com/office/drawing/2010/main" w="9525">
                   <a:solidFill>
                     <a:srgbClr val="000000"/>
                   </a:solidFill>
@@ -8685,7 +8685,7 @@
             </a:ln>
             <a:extLst>
               <a:ext uri="{91240B29-F687-4f45-9708-019B960494DF}">
-                <a14:hiddenLine xmlns:a14="http://schemas.microsoft.com/office/drawing/2010/main" xmlns="" w="9525">
+                <a14:hiddenLine xmlns="" xmlns:a14="http://schemas.microsoft.com/office/drawing/2010/main" w="9525">
                   <a:solidFill>
                     <a:srgbClr val="000000"/>
                   </a:solidFill>
@@ -8747,7 +8747,7 @@
             </a:ln>
             <a:extLst>
               <a:ext uri="{91240B29-F687-4f45-9708-019B960494DF}">
-                <a14:hiddenLine xmlns:a14="http://schemas.microsoft.com/office/drawing/2010/main" xmlns="" w="9525">
+                <a14:hiddenLine xmlns="" xmlns:a14="http://schemas.microsoft.com/office/drawing/2010/main" w="9525">
                   <a:solidFill>
                     <a:srgbClr val="000000"/>
                   </a:solidFill>
@@ -8809,7 +8809,7 @@
             </a:ln>
             <a:extLst>
               <a:ext uri="{91240B29-F687-4f45-9708-019B960494DF}">
-                <a14:hiddenLine xmlns:a14="http://schemas.microsoft.com/office/drawing/2010/main" xmlns="" w="9525">
+                <a14:hiddenLine xmlns="" xmlns:a14="http://schemas.microsoft.com/office/drawing/2010/main" w="9525">
                   <a:solidFill>
                     <a:srgbClr val="000000"/>
                   </a:solidFill>
@@ -8899,7 +8899,7 @@
             </a:ln>
             <a:extLst>
               <a:ext uri="{91240B29-F687-4f45-9708-019B960494DF}">
-                <a14:hiddenLine xmlns:a14="http://schemas.microsoft.com/office/drawing/2010/main" xmlns="" w="9525">
+                <a14:hiddenLine xmlns="" xmlns:a14="http://schemas.microsoft.com/office/drawing/2010/main" w="9525">
                   <a:solidFill>
                     <a:srgbClr val="000000"/>
                   </a:solidFill>
@@ -8989,7 +8989,7 @@
             </a:ln>
             <a:extLst>
               <a:ext uri="{91240B29-F687-4f45-9708-019B960494DF}">
-                <a14:hiddenLine xmlns:a14="http://schemas.microsoft.com/office/drawing/2010/main" xmlns="" w="9525">
+                <a14:hiddenLine xmlns="" xmlns:a14="http://schemas.microsoft.com/office/drawing/2010/main" w="9525">
                   <a:solidFill>
                     <a:srgbClr val="000000"/>
                   </a:solidFill>
@@ -9051,7 +9051,7 @@
             </a:ln>
             <a:extLst>
               <a:ext uri="{91240B29-F687-4f45-9708-019B960494DF}">
-                <a14:hiddenLine xmlns:a14="http://schemas.microsoft.com/office/drawing/2010/main" xmlns="" w="9525">
+                <a14:hiddenLine xmlns="" xmlns:a14="http://schemas.microsoft.com/office/drawing/2010/main" w="9525">
                   <a:solidFill>
                     <a:srgbClr val="000000"/>
                   </a:solidFill>
@@ -9161,7 +9161,7 @@
             </a:ln>
             <a:extLst>
               <a:ext uri="{91240B29-F687-4f45-9708-019B960494DF}">
-                <a14:hiddenLine xmlns:a14="http://schemas.microsoft.com/office/drawing/2010/main" xmlns="" w="9525">
+                <a14:hiddenLine xmlns="" xmlns:a14="http://schemas.microsoft.com/office/drawing/2010/main" w="9525">
                   <a:solidFill>
                     <a:srgbClr val="000000"/>
                   </a:solidFill>
@@ -9223,7 +9223,7 @@
             </a:ln>
             <a:extLst>
               <a:ext uri="{91240B29-F687-4f45-9708-019B960494DF}">
-                <a14:hiddenLine xmlns:a14="http://schemas.microsoft.com/office/drawing/2010/main" xmlns="" w="9525">
+                <a14:hiddenLine xmlns="" xmlns:a14="http://schemas.microsoft.com/office/drawing/2010/main" w="9525">
                   <a:solidFill>
                     <a:srgbClr val="000000"/>
                   </a:solidFill>
@@ -9313,7 +9313,7 @@
             </a:ln>
             <a:extLst>
               <a:ext uri="{91240B29-F687-4f45-9708-019B960494DF}">
-                <a14:hiddenLine xmlns:a14="http://schemas.microsoft.com/office/drawing/2010/main" xmlns="" w="9525">
+                <a14:hiddenLine xmlns="" xmlns:a14="http://schemas.microsoft.com/office/drawing/2010/main" w="9525">
                   <a:solidFill>
                     <a:srgbClr val="000000"/>
                   </a:solidFill>
@@ -9403,7 +9403,7 @@
             </a:ln>
             <a:extLst>
               <a:ext uri="{91240B29-F687-4f45-9708-019B960494DF}">
-                <a14:hiddenLine xmlns:a14="http://schemas.microsoft.com/office/drawing/2010/main" xmlns="" w="9525">
+                <a14:hiddenLine xmlns="" xmlns:a14="http://schemas.microsoft.com/office/drawing/2010/main" w="9525">
                   <a:solidFill>
                     <a:srgbClr val="000000"/>
                   </a:solidFill>
@@ -9465,7 +9465,7 @@
             </a:ln>
             <a:extLst>
               <a:ext uri="{91240B29-F687-4f45-9708-019B960494DF}">
-                <a14:hiddenLine xmlns:a14="http://schemas.microsoft.com/office/drawing/2010/main" xmlns="" w="9525">
+                <a14:hiddenLine xmlns="" xmlns:a14="http://schemas.microsoft.com/office/drawing/2010/main" w="9525">
                   <a:solidFill>
                     <a:srgbClr val="000000"/>
                   </a:solidFill>
@@ -9555,7 +9555,7 @@
             </a:ln>
             <a:extLst>
               <a:ext uri="{91240B29-F687-4f45-9708-019B960494DF}">
-                <a14:hiddenLine xmlns:a14="http://schemas.microsoft.com/office/drawing/2010/main" xmlns="" w="9525">
+                <a14:hiddenLine xmlns="" xmlns:a14="http://schemas.microsoft.com/office/drawing/2010/main" w="9525">
                   <a:solidFill>
                     <a:srgbClr val="000000"/>
                   </a:solidFill>
@@ -9645,7 +9645,7 @@
             </a:ln>
             <a:extLst>
               <a:ext uri="{91240B29-F687-4f45-9708-019B960494DF}">
-                <a14:hiddenLine xmlns:a14="http://schemas.microsoft.com/office/drawing/2010/main" xmlns="" w="9525">
+                <a14:hiddenLine xmlns="" xmlns:a14="http://schemas.microsoft.com/office/drawing/2010/main" w="9525">
                   <a:solidFill>
                     <a:srgbClr val="000000"/>
                   </a:solidFill>
@@ -9701,7 +9701,7 @@
             </a:ln>
             <a:extLst>
               <a:ext uri="{91240B29-F687-4f45-9708-019B960494DF}">
-                <a14:hiddenLine xmlns:a14="http://schemas.microsoft.com/office/drawing/2010/main" xmlns="" w="9525">
+                <a14:hiddenLine xmlns="" xmlns:a14="http://schemas.microsoft.com/office/drawing/2010/main" w="9525">
                   <a:solidFill>
                     <a:srgbClr val="000000"/>
                   </a:solidFill>
@@ -9791,7 +9791,7 @@
             </a:ln>
             <a:extLst>
               <a:ext uri="{91240B29-F687-4f45-9708-019B960494DF}">
-                <a14:hiddenLine xmlns:a14="http://schemas.microsoft.com/office/drawing/2010/main" xmlns="" w="9525">
+                <a14:hiddenLine xmlns="" xmlns:a14="http://schemas.microsoft.com/office/drawing/2010/main" w="9525">
                   <a:solidFill>
                     <a:srgbClr val="000000"/>
                   </a:solidFill>
@@ -9847,7 +9847,7 @@
             </a:ln>
             <a:extLst>
               <a:ext uri="{91240B29-F687-4f45-9708-019B960494DF}">
-                <a14:hiddenLine xmlns:a14="http://schemas.microsoft.com/office/drawing/2010/main" xmlns="" w="9525">
+                <a14:hiddenLine xmlns="" xmlns:a14="http://schemas.microsoft.com/office/drawing/2010/main" w="9525">
                   <a:solidFill>
                     <a:srgbClr val="000000"/>
                   </a:solidFill>
@@ -9937,7 +9937,7 @@
             </a:ln>
             <a:extLst>
               <a:ext uri="{91240B29-F687-4f45-9708-019B960494DF}">
-                <a14:hiddenLine xmlns:a14="http://schemas.microsoft.com/office/drawing/2010/main" xmlns="" w="9525">
+                <a14:hiddenLine xmlns="" xmlns:a14="http://schemas.microsoft.com/office/drawing/2010/main" w="9525">
                   <a:solidFill>
                     <a:srgbClr val="000000"/>
                   </a:solidFill>
@@ -10005,7 +10005,7 @@
             </a:ln>
             <a:extLst>
               <a:ext uri="{91240B29-F687-4f45-9708-019B960494DF}">
-                <a14:hiddenLine xmlns:a14="http://schemas.microsoft.com/office/drawing/2010/main" xmlns="" w="9525">
+                <a14:hiddenLine xmlns="" xmlns:a14="http://schemas.microsoft.com/office/drawing/2010/main" w="9525">
                   <a:solidFill>
                     <a:srgbClr val="000000"/>
                   </a:solidFill>
@@ -10095,7 +10095,7 @@
             </a:ln>
             <a:extLst>
               <a:ext uri="{91240B29-F687-4f45-9708-019B960494DF}">
-                <a14:hiddenLine xmlns:a14="http://schemas.microsoft.com/office/drawing/2010/main" xmlns="" w="9525">
+                <a14:hiddenLine xmlns="" xmlns:a14="http://schemas.microsoft.com/office/drawing/2010/main" w="9525">
                   <a:solidFill>
                     <a:srgbClr val="000000"/>
                   </a:solidFill>
@@ -10163,7 +10163,7 @@
             </a:ln>
             <a:extLst>
               <a:ext uri="{91240B29-F687-4f45-9708-019B960494DF}">
-                <a14:hiddenLine xmlns:a14="http://schemas.microsoft.com/office/drawing/2010/main" xmlns="" w="9525">
+                <a14:hiddenLine xmlns="" xmlns:a14="http://schemas.microsoft.com/office/drawing/2010/main" w="9525">
                   <a:solidFill>
                     <a:srgbClr val="000000"/>
                   </a:solidFill>
@@ -10253,7 +10253,7 @@
             </a:ln>
             <a:extLst>
               <a:ext uri="{91240B29-F687-4f45-9708-019B960494DF}">
-                <a14:hiddenLine xmlns:a14="http://schemas.microsoft.com/office/drawing/2010/main" xmlns="" w="9525">
+                <a14:hiddenLine xmlns="" xmlns:a14="http://schemas.microsoft.com/office/drawing/2010/main" w="9525">
                   <a:solidFill>
                     <a:srgbClr val="000000"/>
                   </a:solidFill>
@@ -10287,7 +10287,7 @@
             </a:ln>
             <a:extLst>
               <a:ext uri="{91240B29-F687-4f45-9708-019B960494DF}">
-                <a14:hiddenLine xmlns:a14="http://schemas.microsoft.com/office/drawing/2010/main" xmlns="" w="9525">
+                <a14:hiddenLine xmlns="" xmlns:a14="http://schemas.microsoft.com/office/drawing/2010/main" w="9525">
                   <a:solidFill>
                     <a:srgbClr val="000000"/>
                   </a:solidFill>
@@ -10377,7 +10377,7 @@
             </a:ln>
             <a:extLst>
               <a:ext uri="{91240B29-F687-4f45-9708-019B960494DF}">
-                <a14:hiddenLine xmlns:a14="http://schemas.microsoft.com/office/drawing/2010/main" xmlns="" w="9525">
+                <a14:hiddenLine xmlns="" xmlns:a14="http://schemas.microsoft.com/office/drawing/2010/main" w="9525">
                   <a:solidFill>
                     <a:srgbClr val="000000"/>
                   </a:solidFill>
@@ -10439,7 +10439,7 @@
             </a:ln>
             <a:extLst>
               <a:ext uri="{91240B29-F687-4f45-9708-019B960494DF}">
-                <a14:hiddenLine xmlns:a14="http://schemas.microsoft.com/office/drawing/2010/main" xmlns="" w="9525">
+                <a14:hiddenLine xmlns="" xmlns:a14="http://schemas.microsoft.com/office/drawing/2010/main" w="9525">
                   <a:solidFill>
                     <a:srgbClr val="000000"/>
                   </a:solidFill>
@@ -10501,7 +10501,7 @@
             </a:ln>
             <a:extLst>
               <a:ext uri="{91240B29-F687-4f45-9708-019B960494DF}">
-                <a14:hiddenLine xmlns:a14="http://schemas.microsoft.com/office/drawing/2010/main" xmlns="" w="9525">
+                <a14:hiddenLine xmlns="" xmlns:a14="http://schemas.microsoft.com/office/drawing/2010/main" w="9525">
                   <a:solidFill>
                     <a:srgbClr val="000000"/>
                   </a:solidFill>
@@ -10591,7 +10591,7 @@
             </a:ln>
             <a:extLst>
               <a:ext uri="{91240B29-F687-4f45-9708-019B960494DF}">
-                <a14:hiddenLine xmlns:a14="http://schemas.microsoft.com/office/drawing/2010/main" xmlns="" w="9525">
+                <a14:hiddenLine xmlns="" xmlns:a14="http://schemas.microsoft.com/office/drawing/2010/main" w="9525">
                   <a:solidFill>
                     <a:srgbClr val="000000"/>
                   </a:solidFill>
@@ -10659,7 +10659,7 @@
             </a:ln>
             <a:extLst>
               <a:ext uri="{91240B29-F687-4f45-9708-019B960494DF}">
-                <a14:hiddenLine xmlns:a14="http://schemas.microsoft.com/office/drawing/2010/main" xmlns="" w="9525">
+                <a14:hiddenLine xmlns="" xmlns:a14="http://schemas.microsoft.com/office/drawing/2010/main" w="9525">
                   <a:solidFill>
                     <a:srgbClr val="000000"/>
                   </a:solidFill>
@@ -10721,7 +10721,7 @@
             </a:ln>
             <a:extLst>
               <a:ext uri="{91240B29-F687-4f45-9708-019B960494DF}">
-                <a14:hiddenLine xmlns:a14="http://schemas.microsoft.com/office/drawing/2010/main" xmlns="" w="9525">
+                <a14:hiddenLine xmlns="" xmlns:a14="http://schemas.microsoft.com/office/drawing/2010/main" w="9525">
                   <a:solidFill>
                     <a:srgbClr val="000000"/>
                   </a:solidFill>
@@ -10811,7 +10811,7 @@
             </a:ln>
             <a:extLst>
               <a:ext uri="{91240B29-F687-4f45-9708-019B960494DF}">
-                <a14:hiddenLine xmlns:a14="http://schemas.microsoft.com/office/drawing/2010/main" xmlns="" w="9525">
+                <a14:hiddenLine xmlns="" xmlns:a14="http://schemas.microsoft.com/office/drawing/2010/main" w="9525">
                   <a:solidFill>
                     <a:srgbClr val="000000"/>
                   </a:solidFill>
@@ -10873,7 +10873,7 @@
             </a:ln>
             <a:extLst>
               <a:ext uri="{91240B29-F687-4f45-9708-019B960494DF}">
-                <a14:hiddenLine xmlns:a14="http://schemas.microsoft.com/office/drawing/2010/main" xmlns="" w="9525">
+                <a14:hiddenLine xmlns="" xmlns:a14="http://schemas.microsoft.com/office/drawing/2010/main" w="9525">
                   <a:solidFill>
                     <a:srgbClr val="000000"/>
                   </a:solidFill>
@@ -10963,7 +10963,7 @@
             </a:ln>
             <a:extLst>
               <a:ext uri="{91240B29-F687-4f45-9708-019B960494DF}">
-                <a14:hiddenLine xmlns:a14="http://schemas.microsoft.com/office/drawing/2010/main" xmlns="" w="9525">
+                <a14:hiddenLine xmlns="" xmlns:a14="http://schemas.microsoft.com/office/drawing/2010/main" w="9525">
                   <a:solidFill>
                     <a:srgbClr val="000000"/>
                   </a:solidFill>
@@ -11025,7 +11025,7 @@
             </a:ln>
             <a:extLst>
               <a:ext uri="{91240B29-F687-4f45-9708-019B960494DF}">
-                <a14:hiddenLine xmlns:a14="http://schemas.microsoft.com/office/drawing/2010/main" xmlns="" w="9525">
+                <a14:hiddenLine xmlns="" xmlns:a14="http://schemas.microsoft.com/office/drawing/2010/main" w="9525">
                   <a:solidFill>
                     <a:srgbClr val="000000"/>
                   </a:solidFill>
@@ -11115,7 +11115,7 @@
             </a:ln>
             <a:extLst>
               <a:ext uri="{91240B29-F687-4f45-9708-019B960494DF}">
-                <a14:hiddenLine xmlns:a14="http://schemas.microsoft.com/office/drawing/2010/main" xmlns="" w="9525">
+                <a14:hiddenLine xmlns="" xmlns:a14="http://schemas.microsoft.com/office/drawing/2010/main" w="9525">
                   <a:solidFill>
                     <a:srgbClr val="000000"/>
                   </a:solidFill>
@@ -11149,7 +11149,7 @@
             </a:ln>
             <a:extLst>
               <a:ext uri="{91240B29-F687-4f45-9708-019B960494DF}">
-                <a14:hiddenLine xmlns:a14="http://schemas.microsoft.com/office/drawing/2010/main" xmlns="" w="9525">
+                <a14:hiddenLine xmlns="" xmlns:a14="http://schemas.microsoft.com/office/drawing/2010/main" w="9525">
                   <a:solidFill>
                     <a:srgbClr val="000000"/>
                   </a:solidFill>
@@ -11214,7 +11214,7 @@
             </a:ln>
             <a:extLst>
               <a:ext uri="{91240B29-F687-4f45-9708-019B960494DF}">
-                <a14:hiddenLine xmlns:a14="http://schemas.microsoft.com/office/drawing/2010/main" xmlns="" w="9525">
+                <a14:hiddenLine xmlns="" xmlns:a14="http://schemas.microsoft.com/office/drawing/2010/main" w="9525">
                   <a:solidFill>
                     <a:srgbClr val="000000"/>
                   </a:solidFill>
@@ -11304,7 +11304,7 @@
             </a:ln>
             <a:extLst>
               <a:ext uri="{91240B29-F687-4f45-9708-019B960494DF}">
-                <a14:hiddenLine xmlns:a14="http://schemas.microsoft.com/office/drawing/2010/main" xmlns="" w="9525">
+                <a14:hiddenLine xmlns="" xmlns:a14="http://schemas.microsoft.com/office/drawing/2010/main" w="9525">
                   <a:solidFill>
                     <a:srgbClr val="000000"/>
                   </a:solidFill>
@@ -11366,7 +11366,7 @@
             </a:ln>
             <a:extLst>
               <a:ext uri="{91240B29-F687-4f45-9708-019B960494DF}">
-                <a14:hiddenLine xmlns:a14="http://schemas.microsoft.com/office/drawing/2010/main" xmlns="" w="9525">
+                <a14:hiddenLine xmlns="" xmlns:a14="http://schemas.microsoft.com/office/drawing/2010/main" w="9525">
                   <a:solidFill>
                     <a:srgbClr val="000000"/>
                   </a:solidFill>
@@ -11456,7 +11456,7 @@
             </a:ln>
             <a:extLst>
               <a:ext uri="{91240B29-F687-4f45-9708-019B960494DF}">
-                <a14:hiddenLine xmlns:a14="http://schemas.microsoft.com/office/drawing/2010/main" xmlns="" w="9525">
+                <a14:hiddenLine xmlns="" xmlns:a14="http://schemas.microsoft.com/office/drawing/2010/main" w="9525">
                   <a:solidFill>
                     <a:srgbClr val="000000"/>
                   </a:solidFill>
@@ -11546,7 +11546,7 @@
             </a:ln>
             <a:extLst>
               <a:ext uri="{91240B29-F687-4f45-9708-019B960494DF}">
-                <a14:hiddenLine xmlns:a14="http://schemas.microsoft.com/office/drawing/2010/main" xmlns="" w="9525">
+                <a14:hiddenLine xmlns="" xmlns:a14="http://schemas.microsoft.com/office/drawing/2010/main" w="9525">
                   <a:solidFill>
                     <a:srgbClr val="000000"/>
                   </a:solidFill>
@@ -11611,7 +11611,7 @@
             </a:ln>
             <a:extLst>
               <a:ext uri="{91240B29-F687-4f45-9708-019B960494DF}">
-                <a14:hiddenLine xmlns:a14="http://schemas.microsoft.com/office/drawing/2010/main" xmlns="" w="9525">
+                <a14:hiddenLine xmlns="" xmlns:a14="http://schemas.microsoft.com/office/drawing/2010/main" w="9525">
                   <a:solidFill>
                     <a:srgbClr val="000000"/>
                   </a:solidFill>
@@ -11673,7 +11673,7 @@
             </a:ln>
             <a:extLst>
               <a:ext uri="{91240B29-F687-4f45-9708-019B960494DF}">
-                <a14:hiddenLine xmlns:a14="http://schemas.microsoft.com/office/drawing/2010/main" xmlns="" w="9525">
+                <a14:hiddenLine xmlns="" xmlns:a14="http://schemas.microsoft.com/office/drawing/2010/main" w="9525">
                   <a:solidFill>
                     <a:srgbClr val="000000"/>
                   </a:solidFill>
@@ -11763,7 +11763,7 @@
             </a:ln>
             <a:extLst>
               <a:ext uri="{91240B29-F687-4f45-9708-019B960494DF}">
-                <a14:hiddenLine xmlns:a14="http://schemas.microsoft.com/office/drawing/2010/main" xmlns="" w="9525">
+                <a14:hiddenLine xmlns="" xmlns:a14="http://schemas.microsoft.com/office/drawing/2010/main" w="9525">
                   <a:solidFill>
                     <a:srgbClr val="000000"/>
                   </a:solidFill>
@@ -11853,7 +11853,7 @@
             </a:ln>
             <a:extLst>
               <a:ext uri="{91240B29-F687-4f45-9708-019B960494DF}">
-                <a14:hiddenLine xmlns:a14="http://schemas.microsoft.com/office/drawing/2010/main" xmlns="" w="9525">
+                <a14:hiddenLine xmlns="" xmlns:a14="http://schemas.microsoft.com/office/drawing/2010/main" w="9525">
                   <a:solidFill>
                     <a:srgbClr val="000000"/>
                   </a:solidFill>
@@ -11915,7 +11915,7 @@
             </a:ln>
             <a:extLst>
               <a:ext uri="{91240B29-F687-4f45-9708-019B960494DF}">
-                <a14:hiddenLine xmlns:a14="http://schemas.microsoft.com/office/drawing/2010/main" xmlns="" w="9525">
+                <a14:hiddenLine xmlns="" xmlns:a14="http://schemas.microsoft.com/office/drawing/2010/main" w="9525">
                   <a:solidFill>
                     <a:srgbClr val="000000"/>
                   </a:solidFill>
@@ -12035,7 +12035,7 @@
             </a:ln>
             <a:extLst>
               <a:ext uri="{91240B29-F687-4f45-9708-019B960494DF}">
-                <a14:hiddenLine xmlns:a14="http://schemas.microsoft.com/office/drawing/2010/main" xmlns="" w="9525">
+                <a14:hiddenLine xmlns="" xmlns:a14="http://schemas.microsoft.com/office/drawing/2010/main" w="9525">
                   <a:solidFill>
                     <a:srgbClr val="000000"/>
                   </a:solidFill>
@@ -12103,7 +12103,7 @@
             </a:ln>
             <a:extLst>
               <a:ext uri="{91240B29-F687-4f45-9708-019B960494DF}">
-                <a14:hiddenLine xmlns:a14="http://schemas.microsoft.com/office/drawing/2010/main" xmlns="" w="9525">
+                <a14:hiddenLine xmlns="" xmlns:a14="http://schemas.microsoft.com/office/drawing/2010/main" w="9525">
                   <a:solidFill>
                     <a:srgbClr val="000000"/>
                   </a:solidFill>
@@ -12193,7 +12193,7 @@
             </a:ln>
             <a:extLst>
               <a:ext uri="{91240B29-F687-4f45-9708-019B960494DF}">
-                <a14:hiddenLine xmlns:a14="http://schemas.microsoft.com/office/drawing/2010/main" xmlns="" w="9525">
+                <a14:hiddenLine xmlns="" xmlns:a14="http://schemas.microsoft.com/office/drawing/2010/main" w="9525">
                   <a:solidFill>
                     <a:srgbClr val="000000"/>
                   </a:solidFill>
@@ -12336,7 +12336,7 @@
             <a:pPr rtl="0"/>
             <a:fld id="{A02EAC81-5C99-4864-A0E8-CFA5C9ABA6C2}" type="datetime1">
               <a:rPr lang="fr-FR" noProof="0" smtClean="0"/>
-              <a:t>23/03/2026</a:t>
+              <a:t>24/03/2026</a:t>
             </a:fld>
             <a:endParaRPr lang="fr-FR" noProof="0"/>
           </a:p>
@@ -12606,7 +12606,7 @@
             <a:pPr rtl="0"/>
             <a:fld id="{0ACE44FF-5CD6-4B82-B1F5-6AE86C9907EB}" type="datetime1">
               <a:rPr lang="fr-FR" noProof="0" smtClean="0"/>
-              <a:t>23/03/2026</a:t>
+              <a:t>24/03/2026</a:t>
             </a:fld>
             <a:endParaRPr lang="fr-FR" noProof="0"/>
           </a:p>
@@ -12806,7 +12806,7 @@
             <a:pPr rtl="0"/>
             <a:fld id="{9B3B6F96-1DBA-403E-937D-37819E106CA7}" type="datetime1">
               <a:rPr lang="fr-FR" noProof="0" smtClean="0"/>
-              <a:t>23/03/2026</a:t>
+              <a:t>24/03/2026</a:t>
             </a:fld>
             <a:endParaRPr lang="fr-FR" noProof="0"/>
           </a:p>
@@ -13073,7 +13073,7 @@
             <a:pPr rtl="0"/>
             <a:fld id="{55413907-E3EB-48AE-AB86-05A8E02730C7}" type="datetime1">
               <a:rPr lang="fr-FR" noProof="0" smtClean="0"/>
-              <a:t>23/03/2026</a:t>
+              <a:t>24/03/2026</a:t>
             </a:fld>
             <a:endParaRPr lang="fr-FR" noProof="0"/>
           </a:p>
@@ -13511,7 +13511,7 @@
             <a:pPr rtl="0"/>
             <a:fld id="{72A7BD87-4162-417A-9B5A-2932BA9F7490}" type="datetime1">
               <a:rPr lang="fr-FR" noProof="0" smtClean="0"/>
-              <a:t>23/03/2026</a:t>
+              <a:t>24/03/2026</a:t>
             </a:fld>
             <a:endParaRPr lang="fr-FR" noProof="0"/>
           </a:p>
@@ -14061,7 +14061,7 @@
             <a:pPr rtl="0"/>
             <a:fld id="{20004DDE-15BB-4C4D-B4EA-C083161A9948}" type="datetime1">
               <a:rPr lang="fr-FR" noProof="0" smtClean="0"/>
-              <a:t>23/03/2026</a:t>
+              <a:t>24/03/2026</a:t>
             </a:fld>
             <a:endParaRPr lang="fr-FR" noProof="0"/>
           </a:p>
@@ -14782,7 +14782,7 @@
             <a:pPr rtl="0"/>
             <a:fld id="{9E1F3B7E-0513-428C-82D7-BDF3AA9A4EA5}" type="datetime1">
               <a:rPr lang="fr-FR" noProof="0" smtClean="0"/>
-              <a:t>23/03/2026</a:t>
+              <a:t>24/03/2026</a:t>
             </a:fld>
             <a:endParaRPr lang="fr-FR" noProof="0"/>
           </a:p>
@@ -14955,7 +14955,7 @@
             <a:pPr rtl="0"/>
             <a:fld id="{F2372795-7EAB-4160-A1B0-2F422ABD8E89}" type="datetime1">
               <a:rPr lang="fr-FR" noProof="0" smtClean="0"/>
-              <a:t>23/03/2026</a:t>
+              <a:t>24/03/2026</a:t>
             </a:fld>
             <a:endParaRPr lang="fr-FR" noProof="0"/>
           </a:p>
@@ -15138,7 +15138,7 @@
             <a:pPr rtl="0"/>
             <a:fld id="{4C2BF765-708F-4989-AE14-BAB9493E4588}" type="datetime1">
               <a:rPr lang="fr-FR" noProof="0" smtClean="0"/>
-              <a:t>23/03/2026</a:t>
+              <a:t>24/03/2026</a:t>
             </a:fld>
             <a:endParaRPr lang="fr-FR" noProof="0"/>
           </a:p>
@@ -15311,7 +15311,7 @@
             <a:pPr rtl="0"/>
             <a:fld id="{601D7A6B-BCC2-4C21-BAE3-6AF1B840E56D}" type="datetime1">
               <a:rPr lang="fr-FR" noProof="0" smtClean="0"/>
-              <a:t>23/03/2026</a:t>
+              <a:t>24/03/2026</a:t>
             </a:fld>
             <a:endParaRPr lang="fr-FR" noProof="0"/>
           </a:p>
@@ -15565,7 +15565,7 @@
             <a:pPr rtl="0"/>
             <a:fld id="{0635DD21-33A0-42C5-A2E5-7493465514B7}" type="datetime1">
               <a:rPr lang="fr-FR" noProof="0" smtClean="0"/>
-              <a:t>23/03/2026</a:t>
+              <a:t>24/03/2026</a:t>
             </a:fld>
             <a:endParaRPr lang="fr-FR" noProof="0"/>
           </a:p>
@@ -15799,7 +15799,7 @@
             <a:pPr rtl="0"/>
             <a:fld id="{E8BC33FA-CEBE-4502-9F9B-2F0989154353}" type="datetime1">
               <a:rPr lang="fr-FR" noProof="0" smtClean="0"/>
-              <a:t>23/03/2026</a:t>
+              <a:t>24/03/2026</a:t>
             </a:fld>
             <a:endParaRPr lang="fr-FR" noProof="0"/>
           </a:p>
@@ -16182,7 +16182,7 @@
             <a:pPr rtl="0"/>
             <a:fld id="{B3ECB3ED-4851-4DE7-9A6A-4D7485AC63E3}" type="datetime1">
               <a:rPr lang="fr-FR" noProof="0" smtClean="0"/>
-              <a:t>23/03/2026</a:t>
+              <a:t>24/03/2026</a:t>
             </a:fld>
             <a:endParaRPr lang="fr-FR" noProof="0"/>
           </a:p>
@@ -16304,7 +16304,7 @@
             <a:pPr rtl="0"/>
             <a:fld id="{DBDFEB93-A53E-490C-AF00-EDE3AFF9A36D}" type="datetime1">
               <a:rPr lang="fr-FR" noProof="0" smtClean="0"/>
-              <a:t>23/03/2026</a:t>
+              <a:t>24/03/2026</a:t>
             </a:fld>
             <a:endParaRPr lang="fr-FR" noProof="0"/>
           </a:p>
@@ -16402,7 +16402,7 @@
             <a:pPr rtl="0"/>
             <a:fld id="{969093F2-5574-4FF9-B1D2-E15C695A74EF}" type="datetime1">
               <a:rPr lang="fr-FR" noProof="0" smtClean="0"/>
-              <a:t>23/03/2026</a:t>
+              <a:t>24/03/2026</a:t>
             </a:fld>
             <a:endParaRPr lang="fr-FR" noProof="0"/>
           </a:p>
@@ -16654,7 +16654,7 @@
             <a:pPr rtl="0"/>
             <a:fld id="{575F6C24-568D-4917-863C-3B89D44003D5}" type="datetime1">
               <a:rPr lang="fr-FR" noProof="0" smtClean="0"/>
-              <a:t>23/03/2026</a:t>
+              <a:t>24/03/2026</a:t>
             </a:fld>
             <a:endParaRPr lang="fr-FR" noProof="0"/>
           </a:p>
@@ -16938,7 +16938,7 @@
             <a:pPr rtl="0"/>
             <a:fld id="{7A202532-655D-448B-BCCD-E52581A788ED}" type="datetime1">
               <a:rPr lang="fr-FR" noProof="0" smtClean="0"/>
-              <a:t>23/03/2026</a:t>
+              <a:t>24/03/2026</a:t>
             </a:fld>
             <a:endParaRPr lang="fr-FR" noProof="0"/>
           </a:p>
@@ -17063,7 +17063,7 @@
           <a:noFill/>
           <a:extLst>
             <a:ext uri="{909E8E84-426E-40dd-AFC4-6F175D3DCCD1}">
-              <a14:hiddenFill xmlns:a14="http://schemas.microsoft.com/office/drawing/2010/main" xmlns="">
+              <a14:hiddenFill xmlns="" xmlns:a14="http://schemas.microsoft.com/office/drawing/2010/main">
                 <a:solidFill>
                   <a:srgbClr val="FFFFFF"/>
                 </a:solidFill>
@@ -17137,7 +17137,7 @@
               </a:ln>
               <a:extLst>
                 <a:ext uri="{91240B29-F687-4f45-9708-019B960494DF}">
-                  <a14:hiddenLine xmlns:a14="http://schemas.microsoft.com/office/drawing/2010/main" xmlns="" w="9525">
+                  <a14:hiddenLine xmlns="" xmlns:a14="http://schemas.microsoft.com/office/drawing/2010/main" w="9525">
                     <a:solidFill>
                       <a:srgbClr val="000000"/>
                     </a:solidFill>
@@ -17227,7 +17227,7 @@
               </a:ln>
               <a:extLst>
                 <a:ext uri="{91240B29-F687-4f45-9708-019B960494DF}">
-                  <a14:hiddenLine xmlns:a14="http://schemas.microsoft.com/office/drawing/2010/main" xmlns="" w="9525">
+                  <a14:hiddenLine xmlns="" xmlns:a14="http://schemas.microsoft.com/office/drawing/2010/main" w="9525">
                     <a:solidFill>
                       <a:srgbClr val="000000"/>
                     </a:solidFill>
@@ -17317,7 +17317,7 @@
               </a:ln>
               <a:extLst>
                 <a:ext uri="{91240B29-F687-4f45-9708-019B960494DF}">
-                  <a14:hiddenLine xmlns:a14="http://schemas.microsoft.com/office/drawing/2010/main" xmlns="" w="9525">
+                  <a14:hiddenLine xmlns="" xmlns:a14="http://schemas.microsoft.com/office/drawing/2010/main" w="9525">
                     <a:solidFill>
                       <a:srgbClr val="000000"/>
                     </a:solidFill>
@@ -17379,7 +17379,7 @@
               </a:ln>
               <a:extLst>
                 <a:ext uri="{91240B29-F687-4f45-9708-019B960494DF}">
-                  <a14:hiddenLine xmlns:a14="http://schemas.microsoft.com/office/drawing/2010/main" xmlns="" w="9525">
+                  <a14:hiddenLine xmlns="" xmlns:a14="http://schemas.microsoft.com/office/drawing/2010/main" w="9525">
                     <a:solidFill>
                       <a:srgbClr val="000000"/>
                     </a:solidFill>
@@ -17469,7 +17469,7 @@
               </a:ln>
               <a:extLst>
                 <a:ext uri="{91240B29-F687-4f45-9708-019B960494DF}">
-                  <a14:hiddenLine xmlns:a14="http://schemas.microsoft.com/office/drawing/2010/main" xmlns="" w="9525">
+                  <a14:hiddenLine xmlns="" xmlns:a14="http://schemas.microsoft.com/office/drawing/2010/main" w="9525">
                     <a:solidFill>
                       <a:srgbClr val="000000"/>
                     </a:solidFill>
@@ -17531,7 +17531,7 @@
               </a:ln>
               <a:extLst>
                 <a:ext uri="{91240B29-F687-4f45-9708-019B960494DF}">
-                  <a14:hiddenLine xmlns:a14="http://schemas.microsoft.com/office/drawing/2010/main" xmlns="" w="9525">
+                  <a14:hiddenLine xmlns="" xmlns:a14="http://schemas.microsoft.com/office/drawing/2010/main" w="9525">
                     <a:solidFill>
                       <a:srgbClr val="000000"/>
                     </a:solidFill>
@@ -17593,7 +17593,7 @@
               </a:ln>
               <a:extLst>
                 <a:ext uri="{91240B29-F687-4f45-9708-019B960494DF}">
-                  <a14:hiddenLine xmlns:a14="http://schemas.microsoft.com/office/drawing/2010/main" xmlns="" w="9525">
+                  <a14:hiddenLine xmlns="" xmlns:a14="http://schemas.microsoft.com/office/drawing/2010/main" w="9525">
                     <a:solidFill>
                       <a:srgbClr val="000000"/>
                     </a:solidFill>
@@ -17683,7 +17683,7 @@
               </a:ln>
               <a:extLst>
                 <a:ext uri="{91240B29-F687-4f45-9708-019B960494DF}">
-                  <a14:hiddenLine xmlns:a14="http://schemas.microsoft.com/office/drawing/2010/main" xmlns="" w="9525">
+                  <a14:hiddenLine xmlns="" xmlns:a14="http://schemas.microsoft.com/office/drawing/2010/main" w="9525">
                     <a:solidFill>
                       <a:srgbClr val="000000"/>
                     </a:solidFill>
@@ -17773,7 +17773,7 @@
               </a:ln>
               <a:extLst>
                 <a:ext uri="{91240B29-F687-4f45-9708-019B960494DF}">
-                  <a14:hiddenLine xmlns:a14="http://schemas.microsoft.com/office/drawing/2010/main" xmlns="" w="9525">
+                  <a14:hiddenLine xmlns="" xmlns:a14="http://schemas.microsoft.com/office/drawing/2010/main" w="9525">
                     <a:solidFill>
                       <a:srgbClr val="000000"/>
                     </a:solidFill>
@@ -17835,7 +17835,7 @@
               </a:ln>
               <a:extLst>
                 <a:ext uri="{91240B29-F687-4f45-9708-019B960494DF}">
-                  <a14:hiddenLine xmlns:a14="http://schemas.microsoft.com/office/drawing/2010/main" xmlns="" w="9525">
+                  <a14:hiddenLine xmlns="" xmlns:a14="http://schemas.microsoft.com/office/drawing/2010/main" w="9525">
                     <a:solidFill>
                       <a:srgbClr val="000000"/>
                     </a:solidFill>
@@ -17945,7 +17945,7 @@
               </a:ln>
               <a:extLst>
                 <a:ext uri="{91240B29-F687-4f45-9708-019B960494DF}">
-                  <a14:hiddenLine xmlns:a14="http://schemas.microsoft.com/office/drawing/2010/main" xmlns="" w="9525">
+                  <a14:hiddenLine xmlns="" xmlns:a14="http://schemas.microsoft.com/office/drawing/2010/main" w="9525">
                     <a:solidFill>
                       <a:srgbClr val="000000"/>
                     </a:solidFill>
@@ -18029,7 +18029,7 @@
               </a:ln>
               <a:extLst>
                 <a:ext uri="{91240B29-F687-4f45-9708-019B960494DF}">
-                  <a14:hiddenLine xmlns:a14="http://schemas.microsoft.com/office/drawing/2010/main" xmlns="" w="9525">
+                  <a14:hiddenLine xmlns="" xmlns:a14="http://schemas.microsoft.com/office/drawing/2010/main" w="9525">
                     <a:solidFill>
                       <a:srgbClr val="000000"/>
                     </a:solidFill>
@@ -18091,7 +18091,7 @@
               </a:ln>
               <a:extLst>
                 <a:ext uri="{91240B29-F687-4f45-9708-019B960494DF}">
-                  <a14:hiddenLine xmlns:a14="http://schemas.microsoft.com/office/drawing/2010/main" xmlns="" w="9525">
+                  <a14:hiddenLine xmlns="" xmlns:a14="http://schemas.microsoft.com/office/drawing/2010/main" w="9525">
                     <a:solidFill>
                       <a:srgbClr val="000000"/>
                     </a:solidFill>
@@ -18153,7 +18153,7 @@
               </a:ln>
               <a:extLst>
                 <a:ext uri="{91240B29-F687-4f45-9708-019B960494DF}">
-                  <a14:hiddenLine xmlns:a14="http://schemas.microsoft.com/office/drawing/2010/main" xmlns="" w="9525">
+                  <a14:hiddenLine xmlns="" xmlns:a14="http://schemas.microsoft.com/office/drawing/2010/main" w="9525">
                     <a:solidFill>
                       <a:srgbClr val="000000"/>
                     </a:solidFill>
@@ -18243,7 +18243,7 @@
               </a:ln>
               <a:extLst>
                 <a:ext uri="{91240B29-F687-4f45-9708-019B960494DF}">
-                  <a14:hiddenLine xmlns:a14="http://schemas.microsoft.com/office/drawing/2010/main" xmlns="" w="9525">
+                  <a14:hiddenLine xmlns="" xmlns:a14="http://schemas.microsoft.com/office/drawing/2010/main" w="9525">
                     <a:solidFill>
                       <a:srgbClr val="000000"/>
                     </a:solidFill>
@@ -18277,7 +18277,7 @@
               </a:ln>
               <a:extLst>
                 <a:ext uri="{91240B29-F687-4f45-9708-019B960494DF}">
-                  <a14:hiddenLine xmlns:a14="http://schemas.microsoft.com/office/drawing/2010/main" xmlns="" w="9525">
+                  <a14:hiddenLine xmlns="" xmlns:a14="http://schemas.microsoft.com/office/drawing/2010/main" w="9525">
                     <a:solidFill>
                       <a:srgbClr val="000000"/>
                     </a:solidFill>
@@ -18342,7 +18342,7 @@
               </a:ln>
               <a:extLst>
                 <a:ext uri="{91240B29-F687-4f45-9708-019B960494DF}">
-                  <a14:hiddenLine xmlns:a14="http://schemas.microsoft.com/office/drawing/2010/main" xmlns="" w="9525">
+                  <a14:hiddenLine xmlns="" xmlns:a14="http://schemas.microsoft.com/office/drawing/2010/main" w="9525">
                     <a:solidFill>
                       <a:srgbClr val="000000"/>
                     </a:solidFill>
@@ -18432,7 +18432,7 @@
               </a:ln>
               <a:extLst>
                 <a:ext uri="{91240B29-F687-4f45-9708-019B960494DF}">
-                  <a14:hiddenLine xmlns:a14="http://schemas.microsoft.com/office/drawing/2010/main" xmlns="" w="9525">
+                  <a14:hiddenLine xmlns="" xmlns:a14="http://schemas.microsoft.com/office/drawing/2010/main" w="9525">
                     <a:solidFill>
                       <a:srgbClr val="000000"/>
                     </a:solidFill>
@@ -18494,7 +18494,7 @@
               </a:ln>
               <a:extLst>
                 <a:ext uri="{91240B29-F687-4f45-9708-019B960494DF}">
-                  <a14:hiddenLine xmlns:a14="http://schemas.microsoft.com/office/drawing/2010/main" xmlns="" w="9525">
+                  <a14:hiddenLine xmlns="" xmlns:a14="http://schemas.microsoft.com/office/drawing/2010/main" w="9525">
                     <a:solidFill>
                       <a:srgbClr val="000000"/>
                     </a:solidFill>
@@ -18584,7 +18584,7 @@
               </a:ln>
               <a:extLst>
                 <a:ext uri="{91240B29-F687-4f45-9708-019B960494DF}">
-                  <a14:hiddenLine xmlns:a14="http://schemas.microsoft.com/office/drawing/2010/main" xmlns="" w="9525">
+                  <a14:hiddenLine xmlns="" xmlns:a14="http://schemas.microsoft.com/office/drawing/2010/main" w="9525">
                     <a:solidFill>
                       <a:srgbClr val="000000"/>
                     </a:solidFill>
@@ -18649,7 +18649,7 @@
               </a:ln>
               <a:extLst>
                 <a:ext uri="{91240B29-F687-4f45-9708-019B960494DF}">
-                  <a14:hiddenLine xmlns:a14="http://schemas.microsoft.com/office/drawing/2010/main" xmlns="" w="9525">
+                  <a14:hiddenLine xmlns="" xmlns:a14="http://schemas.microsoft.com/office/drawing/2010/main" w="9525">
                     <a:solidFill>
                       <a:srgbClr val="000000"/>
                     </a:solidFill>
@@ -18711,7 +18711,7 @@
               </a:ln>
               <a:extLst>
                 <a:ext uri="{91240B29-F687-4f45-9708-019B960494DF}">
-                  <a14:hiddenLine xmlns:a14="http://schemas.microsoft.com/office/drawing/2010/main" xmlns="" w="9525">
+                  <a14:hiddenLine xmlns="" xmlns:a14="http://schemas.microsoft.com/office/drawing/2010/main" w="9525">
                     <a:solidFill>
                       <a:srgbClr val="000000"/>
                     </a:solidFill>
@@ -18801,7 +18801,7 @@
               </a:ln>
               <a:extLst>
                 <a:ext uri="{91240B29-F687-4f45-9708-019B960494DF}">
-                  <a14:hiddenLine xmlns:a14="http://schemas.microsoft.com/office/drawing/2010/main" xmlns="" w="9525">
+                  <a14:hiddenLine xmlns="" xmlns:a14="http://schemas.microsoft.com/office/drawing/2010/main" w="9525">
                     <a:solidFill>
                       <a:srgbClr val="000000"/>
                     </a:solidFill>
@@ -18891,7 +18891,7 @@
               </a:ln>
               <a:extLst>
                 <a:ext uri="{91240B29-F687-4f45-9708-019B960494DF}">
-                  <a14:hiddenLine xmlns:a14="http://schemas.microsoft.com/office/drawing/2010/main" xmlns="" w="9525">
+                  <a14:hiddenLine xmlns="" xmlns:a14="http://schemas.microsoft.com/office/drawing/2010/main" w="9525">
                     <a:solidFill>
                       <a:srgbClr val="000000"/>
                     </a:solidFill>
@@ -18956,7 +18956,7 @@
               </a:ln>
               <a:extLst>
                 <a:ext uri="{91240B29-F687-4f45-9708-019B960494DF}">
-                  <a14:hiddenLine xmlns:a14="http://schemas.microsoft.com/office/drawing/2010/main" xmlns="" w="9525">
+                  <a14:hiddenLine xmlns="" xmlns:a14="http://schemas.microsoft.com/office/drawing/2010/main" w="9525">
                     <a:solidFill>
                       <a:srgbClr val="000000"/>
                     </a:solidFill>
@@ -19076,7 +19076,7 @@
               </a:ln>
               <a:extLst>
                 <a:ext uri="{91240B29-F687-4f45-9708-019B960494DF}">
-                  <a14:hiddenLine xmlns:a14="http://schemas.microsoft.com/office/drawing/2010/main" xmlns="" w="9525">
+                  <a14:hiddenLine xmlns="" xmlns:a14="http://schemas.microsoft.com/office/drawing/2010/main" w="9525">
                     <a:solidFill>
                       <a:srgbClr val="000000"/>
                     </a:solidFill>
@@ -19157,7 +19157,7 @@
               </a:ln>
               <a:extLst>
                 <a:ext uri="{91240B29-F687-4f45-9708-019B960494DF}">
-                  <a14:hiddenLine xmlns:a14="http://schemas.microsoft.com/office/drawing/2010/main" xmlns="" w="9525">
+                  <a14:hiddenLine xmlns="" xmlns:a14="http://schemas.microsoft.com/office/drawing/2010/main" w="9525">
                     <a:solidFill>
                       <a:srgbClr val="000000"/>
                     </a:solidFill>
@@ -19272,7 +19272,7 @@
               </a:ln>
               <a:extLst>
                 <a:ext uri="{91240B29-F687-4f45-9708-019B960494DF}">
-                  <a14:hiddenLine xmlns:a14="http://schemas.microsoft.com/office/drawing/2010/main" xmlns="" w="9525">
+                  <a14:hiddenLine xmlns="" xmlns:a14="http://schemas.microsoft.com/office/drawing/2010/main" w="9525">
                     <a:solidFill>
                       <a:srgbClr val="000000"/>
                     </a:solidFill>
@@ -19362,7 +19362,7 @@
               </a:ln>
               <a:extLst>
                 <a:ext uri="{91240B29-F687-4f45-9708-019B960494DF}">
-                  <a14:hiddenLine xmlns:a14="http://schemas.microsoft.com/office/drawing/2010/main" xmlns="" w="9525">
+                  <a14:hiddenLine xmlns="" xmlns:a14="http://schemas.microsoft.com/office/drawing/2010/main" w="9525">
                     <a:solidFill>
                       <a:srgbClr val="000000"/>
                     </a:solidFill>
@@ -19427,7 +19427,7 @@
               </a:ln>
               <a:extLst>
                 <a:ext uri="{91240B29-F687-4f45-9708-019B960494DF}">
-                  <a14:hiddenLine xmlns:a14="http://schemas.microsoft.com/office/drawing/2010/main" xmlns="" w="9525">
+                  <a14:hiddenLine xmlns="" xmlns:a14="http://schemas.microsoft.com/office/drawing/2010/main" w="9525">
                     <a:solidFill>
                       <a:srgbClr val="000000"/>
                     </a:solidFill>
@@ -19517,7 +19517,7 @@
               </a:ln>
               <a:extLst>
                 <a:ext uri="{91240B29-F687-4f45-9708-019B960494DF}">
-                  <a14:hiddenLine xmlns:a14="http://schemas.microsoft.com/office/drawing/2010/main" xmlns="" w="9525">
+                  <a14:hiddenLine xmlns="" xmlns:a14="http://schemas.microsoft.com/office/drawing/2010/main" w="9525">
                     <a:solidFill>
                       <a:srgbClr val="000000"/>
                     </a:solidFill>
@@ -19585,7 +19585,7 @@
               </a:ln>
               <a:extLst>
                 <a:ext uri="{91240B29-F687-4f45-9708-019B960494DF}">
-                  <a14:hiddenLine xmlns:a14="http://schemas.microsoft.com/office/drawing/2010/main" xmlns="" w="9525">
+                  <a14:hiddenLine xmlns="" xmlns:a14="http://schemas.microsoft.com/office/drawing/2010/main" w="9525">
                     <a:solidFill>
                       <a:srgbClr val="000000"/>
                     </a:solidFill>
@@ -19675,7 +19675,7 @@
               </a:ln>
               <a:extLst>
                 <a:ext uri="{91240B29-F687-4f45-9708-019B960494DF}">
-                  <a14:hiddenLine xmlns:a14="http://schemas.microsoft.com/office/drawing/2010/main" xmlns="" w="9525">
+                  <a14:hiddenLine xmlns="" xmlns:a14="http://schemas.microsoft.com/office/drawing/2010/main" w="9525">
                     <a:solidFill>
                       <a:srgbClr val="000000"/>
                     </a:solidFill>
@@ -19743,7 +19743,7 @@
               </a:ln>
               <a:extLst>
                 <a:ext uri="{91240B29-F687-4f45-9708-019B960494DF}">
-                  <a14:hiddenLine xmlns:a14="http://schemas.microsoft.com/office/drawing/2010/main" xmlns="" w="9525">
+                  <a14:hiddenLine xmlns="" xmlns:a14="http://schemas.microsoft.com/office/drawing/2010/main" w="9525">
                     <a:solidFill>
                       <a:srgbClr val="000000"/>
                     </a:solidFill>
@@ -19833,7 +19833,7 @@
               </a:ln>
               <a:extLst>
                 <a:ext uri="{91240B29-F687-4f45-9708-019B960494DF}">
-                  <a14:hiddenLine xmlns:a14="http://schemas.microsoft.com/office/drawing/2010/main" xmlns="" w="9525">
+                  <a14:hiddenLine xmlns="" xmlns:a14="http://schemas.microsoft.com/office/drawing/2010/main" w="9525">
                     <a:solidFill>
                       <a:srgbClr val="000000"/>
                     </a:solidFill>
@@ -19867,7 +19867,7 @@
               </a:ln>
               <a:extLst>
                 <a:ext uri="{91240B29-F687-4f45-9708-019B960494DF}">
-                  <a14:hiddenLine xmlns:a14="http://schemas.microsoft.com/office/drawing/2010/main" xmlns="" w="9525">
+                  <a14:hiddenLine xmlns="" xmlns:a14="http://schemas.microsoft.com/office/drawing/2010/main" w="9525">
                     <a:solidFill>
                       <a:srgbClr val="000000"/>
                     </a:solidFill>
@@ -20008,7 +20008,7 @@
             <a:pPr rtl="0"/>
             <a:fld id="{CD282D03-1B0F-4808-A039-91C9E6CB118E}" type="datetime1">
               <a:rPr lang="fr-FR" noProof="0" smtClean="0"/>
-              <a:t>23/03/2026</a:t>
+              <a:t>24/03/2026</a:t>
             </a:fld>
             <a:endParaRPr lang="fr-FR" noProof="0" dirty="0"/>
           </a:p>
@@ -20626,7 +20626,7 @@
                 <a16:creationId xmlns:a16="http://schemas.microsoft.com/office/drawing/2014/main" id="{8D4F1745-A55E-4835-88EB-BC637121B608}"/>
               </a:ext>
               <a:ext uri="{C183D7F6-B498-43B3-948B-1728B52AA6E4}">
-                <adec:decorative xmlns="" xmlns:adec="http://schemas.microsoft.com/office/drawing/2017/decorative" val="1"/>
+                <adec:decorative xmlns:adec="http://schemas.microsoft.com/office/drawing/2017/decorative" xmlns="" val="1"/>
               </a:ext>
             </a:extLst>
           </p:cNvPr>
@@ -20738,79 +20738,112 @@
           <a:p>
             <a:pPr rtl="0"/>
             <a:r>
-              <a:rPr lang="fr-FR">
+              <a:rPr lang="fr-FR" dirty="0">
                 <a:latin typeface="Tahoma" panose="020B0604030504040204" pitchFamily="34" charset="0"/>
                 <a:ea typeface="Tahoma" panose="020B0604030504040204" pitchFamily="34" charset="0"/>
                 <a:cs typeface="Tahoma" panose="020B0604030504040204" pitchFamily="34" charset="0"/>
               </a:rPr>
-              <a:t>Quel est l’objet de vos recherches ?</a:t>
+              <a:t>Quel est </a:t>
             </a:r>
-          </a:p>
-          <a:p>
-            <a:pPr lvl="1" rtl="0"/>
             <a:r>
-              <a:rPr lang="fr-FR">
+              <a:rPr lang="fr-FR" dirty="0" smtClean="0">
                 <a:latin typeface="Tahoma" panose="020B0604030504040204" pitchFamily="34" charset="0"/>
                 <a:ea typeface="Tahoma" panose="020B0604030504040204" pitchFamily="34" charset="0"/>
                 <a:cs typeface="Tahoma" panose="020B0604030504040204" pitchFamily="34" charset="0"/>
               </a:rPr>
-              <a:t>Comment avez-vous découvert ce problème ?</a:t>
+              <a:t>l’objectif de notre apprentissage</a:t>
             </a:r>
-          </a:p>
-          <a:p>
-            <a:pPr lvl="1" rtl="0"/>
             <a:r>
-              <a:rPr lang="fr-FR">
+              <a:rPr lang="fr-FR" dirty="0">
                 <a:latin typeface="Tahoma" panose="020B0604030504040204" pitchFamily="34" charset="0"/>
                 <a:ea typeface="Tahoma" panose="020B0604030504040204" pitchFamily="34" charset="0"/>
                 <a:cs typeface="Tahoma" panose="020B0604030504040204" pitchFamily="34" charset="0"/>
               </a:rPr>
-              <a:t>Comment avez-vous récupéré des informations afin d’effectuer des recherches sur ce problème et tenter de le résoudre ?</a:t>
+              <a:t> </a:t>
             </a:r>
-          </a:p>
-          <a:p>
-            <a:pPr lvl="2" rtl="0"/>
             <a:r>
-              <a:rPr lang="fr-FR">
+              <a:rPr lang="fr-FR" dirty="0" smtClean="0">
                 <a:latin typeface="Tahoma" panose="020B0604030504040204" pitchFamily="34" charset="0"/>
                 <a:ea typeface="Tahoma" panose="020B0604030504040204" pitchFamily="34" charset="0"/>
                 <a:cs typeface="Tahoma" panose="020B0604030504040204" pitchFamily="34" charset="0"/>
               </a:rPr>
-              <a:t>Entretiens ?</a:t>
+              <a:t>?</a:t>
             </a:r>
           </a:p>
           <a:p>
-            <a:pPr lvl="2" rtl="0"/>
+            <a:pPr rtl="0"/>
             <a:r>
-              <a:rPr lang="fr-FR">
+              <a:rPr lang="fr-FR" dirty="0" smtClean="0">
                 <a:latin typeface="Tahoma" panose="020B0604030504040204" pitchFamily="34" charset="0"/>
                 <a:ea typeface="Tahoma" panose="020B0604030504040204" pitchFamily="34" charset="0"/>
                 <a:cs typeface="Tahoma" panose="020B0604030504040204" pitchFamily="34" charset="0"/>
               </a:rPr>
-              <a:t>Expérience personnelle ?</a:t>
+              <a:t>Ce cours est un atout pour l’apprentissage de </a:t>
             </a:r>
-          </a:p>
-          <a:p>
-            <a:pPr lvl="2" rtl="0"/>
             <a:r>
-              <a:rPr lang="fr-FR">
+              <a:rPr lang="fr-FR" dirty="0" err="1" smtClean="0">
                 <a:latin typeface="Tahoma" panose="020B0604030504040204" pitchFamily="34" charset="0"/>
                 <a:ea typeface="Tahoma" panose="020B0604030504040204" pitchFamily="34" charset="0"/>
                 <a:cs typeface="Tahoma" panose="020B0604030504040204" pitchFamily="34" charset="0"/>
               </a:rPr>
-              <a:t>Internet/Livres ?</a:t>
+              <a:t>Boostrapp</a:t>
             </a:r>
-          </a:p>
-          <a:p>
-            <a:pPr lvl="2" rtl="0"/>
             <a:r>
-              <a:rPr lang="fr-FR">
+              <a:rPr lang="fr-FR" dirty="0" smtClean="0">
                 <a:latin typeface="Tahoma" panose="020B0604030504040204" pitchFamily="34" charset="0"/>
                 <a:ea typeface="Tahoma" panose="020B0604030504040204" pitchFamily="34" charset="0"/>
                 <a:cs typeface="Tahoma" panose="020B0604030504040204" pitchFamily="34" charset="0"/>
               </a:rPr>
-              <a:t>Autres méthodes ?</a:t>
+              <a:t> </a:t>
             </a:r>
+          </a:p>
+          <a:p>
+            <a:pPr rtl="0"/>
+            <a:r>
+              <a:rPr lang="fr-FR" dirty="0" smtClean="0">
+                <a:latin typeface="Tahoma" panose="020B0604030504040204" pitchFamily="34" charset="0"/>
+                <a:ea typeface="Tahoma" panose="020B0604030504040204" pitchFamily="34" charset="0"/>
+                <a:cs typeface="Tahoma" panose="020B0604030504040204" pitchFamily="34" charset="0"/>
+              </a:rPr>
+              <a:t>Nous allons utilisé le CDN </a:t>
+            </a:r>
+            <a:r>
+              <a:rPr lang="fr-FR" dirty="0" err="1" smtClean="0">
+                <a:latin typeface="Tahoma" panose="020B0604030504040204" pitchFamily="34" charset="0"/>
+                <a:ea typeface="Tahoma" panose="020B0604030504040204" pitchFamily="34" charset="0"/>
+                <a:cs typeface="Tahoma" panose="020B0604030504040204" pitchFamily="34" charset="0"/>
+              </a:rPr>
+              <a:t>clouds</a:t>
+            </a:r>
+            <a:r>
+              <a:rPr lang="fr-FR" dirty="0" smtClean="0">
+                <a:latin typeface="Tahoma" panose="020B0604030504040204" pitchFamily="34" charset="0"/>
+                <a:ea typeface="Tahoma" panose="020B0604030504040204" pitchFamily="34" charset="0"/>
+                <a:cs typeface="Tahoma" panose="020B0604030504040204" pitchFamily="34" charset="0"/>
+              </a:rPr>
+              <a:t> donc qui fonctionne </a:t>
+            </a:r>
+            <a:r>
+              <a:rPr lang="fr-FR" smtClean="0">
+                <a:latin typeface="Tahoma" panose="020B0604030504040204" pitchFamily="34" charset="0"/>
+                <a:ea typeface="Tahoma" panose="020B0604030504040204" pitchFamily="34" charset="0"/>
+                <a:cs typeface="Tahoma" panose="020B0604030504040204" pitchFamily="34" charset="0"/>
+              </a:rPr>
+              <a:t>en ligne</a:t>
+            </a:r>
+            <a:r>
+              <a:rPr lang="fr-FR" dirty="0">
+                <a:latin typeface="Tahoma" panose="020B0604030504040204" pitchFamily="34" charset="0"/>
+                <a:ea typeface="Tahoma" panose="020B0604030504040204" pitchFamily="34" charset="0"/>
+                <a:cs typeface="Tahoma" panose="020B0604030504040204" pitchFamily="34" charset="0"/>
+              </a:rPr>
+              <a:t>.</a:t>
+            </a:r>
+            <a:endParaRPr lang="fr-FR" dirty="0" smtClean="0">
+              <a:latin typeface="Tahoma" panose="020B0604030504040204" pitchFamily="34" charset="0"/>
+              <a:ea typeface="Tahoma" panose="020B0604030504040204" pitchFamily="34" charset="0"/>
+              <a:cs typeface="Tahoma" panose="020B0604030504040204" pitchFamily="34" charset="0"/>
+            </a:endParaRPr>
           </a:p>
         </p:txBody>
       </p:sp>
@@ -20885,7 +20918,7 @@
                 <a16:creationId xmlns:a16="http://schemas.microsoft.com/office/drawing/2014/main" id="{242FA989-6B7C-488C-85ED-CB8D01BA3254}"/>
               </a:ext>
               <a:ext uri="{C183D7F6-B498-43B3-948B-1728B52AA6E4}">
-                <adec:decorative xmlns="" xmlns:adec="http://schemas.microsoft.com/office/drawing/2017/decorative" val="1"/>
+                <adec:decorative xmlns:adec="http://schemas.microsoft.com/office/drawing/2017/decorative" xmlns="" val="1"/>
               </a:ext>
             </a:extLst>
           </p:cNvPr>

--- a/GACI FORUM SUR L’APPRENTISSAGE DU frame work boostrap.pptx
+++ b/GACI FORUM SUR L’APPRENTISSAGE DU frame work boostrap.pptx
@@ -5,20 +5,19 @@
     <p:sldMasterId id="2147483669" r:id="rId1"/>
   </p:sldMasterIdLst>
   <p:notesMasterIdLst>
-    <p:notesMasterId r:id="rId10"/>
+    <p:notesMasterId r:id="rId9"/>
   </p:notesMasterIdLst>
   <p:handoutMasterIdLst>
-    <p:handoutMasterId r:id="rId11"/>
+    <p:handoutMasterId r:id="rId10"/>
   </p:handoutMasterIdLst>
   <p:sldIdLst>
     <p:sldId id="256" r:id="rId2"/>
     <p:sldId id="257" r:id="rId3"/>
     <p:sldId id="258" r:id="rId4"/>
-    <p:sldId id="259" r:id="rId5"/>
-    <p:sldId id="260" r:id="rId6"/>
-    <p:sldId id="261" r:id="rId7"/>
-    <p:sldId id="262" r:id="rId8"/>
-    <p:sldId id="263" r:id="rId9"/>
+    <p:sldId id="260" r:id="rId5"/>
+    <p:sldId id="261" r:id="rId6"/>
+    <p:sldId id="262" r:id="rId7"/>
+    <p:sldId id="263" r:id="rId8"/>
   </p:sldIdLst>
   <p:sldSz cx="12192000" cy="6858000"/>
   <p:notesSz cx="6858000" cy="9144000"/>
@@ -129,753 +128,6 @@
 </file>
 
 <file path=ppt/diagrams/colors1.xml><?xml version="1.0" encoding="utf-8"?>
-<dgm:colorsDef xmlns:dgm="http://schemas.openxmlformats.org/drawingml/2006/diagram" xmlns:a="http://schemas.openxmlformats.org/drawingml/2006/main" uniqueId="urn:microsoft.com/office/officeart/2005/8/colors/accent1_2">
-  <dgm:title val=""/>
-  <dgm:desc val=""/>
-  <dgm:catLst>
-    <dgm:cat type="accent1" pri="11200"/>
-  </dgm:catLst>
-  <dgm:styleLbl name="node0">
-    <dgm:fillClrLst meth="repeat">
-      <a:schemeClr val="accent1"/>
-    </dgm:fillClrLst>
-    <dgm:linClrLst meth="repeat">
-      <a:schemeClr val="lt1"/>
-    </dgm:linClrLst>
-    <dgm:effectClrLst/>
-    <dgm:txLinClrLst/>
-    <dgm:txFillClrLst/>
-    <dgm:txEffectClrLst/>
-  </dgm:styleLbl>
-  <dgm:styleLbl name="alignNode1">
-    <dgm:fillClrLst meth="repeat">
-      <a:schemeClr val="accent1"/>
-    </dgm:fillClrLst>
-    <dgm:linClrLst meth="repeat">
-      <a:schemeClr val="accent1"/>
-    </dgm:linClrLst>
-    <dgm:effectClrLst/>
-    <dgm:txLinClrLst/>
-    <dgm:txFillClrLst/>
-    <dgm:txEffectClrLst/>
-  </dgm:styleLbl>
-  <dgm:styleLbl name="node1">
-    <dgm:fillClrLst meth="repeat">
-      <a:schemeClr val="accent1"/>
-    </dgm:fillClrLst>
-    <dgm:linClrLst meth="repeat">
-      <a:schemeClr val="lt1"/>
-    </dgm:linClrLst>
-    <dgm:effectClrLst/>
-    <dgm:txLinClrLst/>
-    <dgm:txFillClrLst/>
-    <dgm:txEffectClrLst/>
-  </dgm:styleLbl>
-  <dgm:styleLbl name="lnNode1">
-    <dgm:fillClrLst meth="repeat">
-      <a:schemeClr val="accent1"/>
-    </dgm:fillClrLst>
-    <dgm:linClrLst meth="repeat">
-      <a:schemeClr val="lt1"/>
-    </dgm:linClrLst>
-    <dgm:effectClrLst/>
-    <dgm:txLinClrLst/>
-    <dgm:txFillClrLst/>
-    <dgm:txEffectClrLst/>
-  </dgm:styleLbl>
-  <dgm:styleLbl name="vennNode1">
-    <dgm:fillClrLst meth="repeat">
-      <a:schemeClr val="accent1">
-        <a:alpha val="50000"/>
-      </a:schemeClr>
-    </dgm:fillClrLst>
-    <dgm:linClrLst meth="repeat">
-      <a:schemeClr val="lt1"/>
-    </dgm:linClrLst>
-    <dgm:effectClrLst/>
-    <dgm:txLinClrLst/>
-    <dgm:txFillClrLst/>
-    <dgm:txEffectClrLst/>
-  </dgm:styleLbl>
-  <dgm:styleLbl name="node2">
-    <dgm:fillClrLst meth="repeat">
-      <a:schemeClr val="accent1"/>
-    </dgm:fillClrLst>
-    <dgm:linClrLst meth="repeat">
-      <a:schemeClr val="lt1"/>
-    </dgm:linClrLst>
-    <dgm:effectClrLst/>
-    <dgm:txLinClrLst/>
-    <dgm:txFillClrLst/>
-    <dgm:txEffectClrLst/>
-  </dgm:styleLbl>
-  <dgm:styleLbl name="node3">
-    <dgm:fillClrLst meth="repeat">
-      <a:schemeClr val="accent1"/>
-    </dgm:fillClrLst>
-    <dgm:linClrLst meth="repeat">
-      <a:schemeClr val="lt1"/>
-    </dgm:linClrLst>
-    <dgm:effectClrLst/>
-    <dgm:txLinClrLst/>
-    <dgm:txFillClrLst/>
-    <dgm:txEffectClrLst/>
-  </dgm:styleLbl>
-  <dgm:styleLbl name="node4">
-    <dgm:fillClrLst meth="repeat">
-      <a:schemeClr val="accent1"/>
-    </dgm:fillClrLst>
-    <dgm:linClrLst meth="repeat">
-      <a:schemeClr val="lt1"/>
-    </dgm:linClrLst>
-    <dgm:effectClrLst/>
-    <dgm:txLinClrLst/>
-    <dgm:txFillClrLst/>
-    <dgm:txEffectClrLst/>
-  </dgm:styleLbl>
-  <dgm:styleLbl name="fgImgPlace1">
-    <dgm:fillClrLst meth="repeat">
-      <a:schemeClr val="accent1">
-        <a:tint val="50000"/>
-      </a:schemeClr>
-    </dgm:fillClrLst>
-    <dgm:linClrLst meth="repeat">
-      <a:schemeClr val="lt1"/>
-    </dgm:linClrLst>
-    <dgm:effectClrLst/>
-    <dgm:txLinClrLst/>
-    <dgm:txFillClrLst meth="repeat">
-      <a:schemeClr val="lt1"/>
-    </dgm:txFillClrLst>
-    <dgm:txEffectClrLst/>
-  </dgm:styleLbl>
-  <dgm:styleLbl name="alignImgPlace1">
-    <dgm:fillClrLst meth="repeat">
-      <a:schemeClr val="accent1">
-        <a:tint val="50000"/>
-      </a:schemeClr>
-    </dgm:fillClrLst>
-    <dgm:linClrLst meth="repeat">
-      <a:schemeClr val="lt1"/>
-    </dgm:linClrLst>
-    <dgm:effectClrLst/>
-    <dgm:txLinClrLst/>
-    <dgm:txFillClrLst meth="repeat">
-      <a:schemeClr val="lt1"/>
-    </dgm:txFillClrLst>
-    <dgm:txEffectClrLst/>
-  </dgm:styleLbl>
-  <dgm:styleLbl name="bgImgPlace1">
-    <dgm:fillClrLst meth="repeat">
-      <a:schemeClr val="accent1">
-        <a:tint val="50000"/>
-      </a:schemeClr>
-    </dgm:fillClrLst>
-    <dgm:linClrLst meth="repeat">
-      <a:schemeClr val="lt1"/>
-    </dgm:linClrLst>
-    <dgm:effectClrLst/>
-    <dgm:txLinClrLst/>
-    <dgm:txFillClrLst meth="repeat">
-      <a:schemeClr val="lt1"/>
-    </dgm:txFillClrLst>
-    <dgm:txEffectClrLst/>
-  </dgm:styleLbl>
-  <dgm:styleLbl name="sibTrans2D1">
-    <dgm:fillClrLst meth="repeat">
-      <a:schemeClr val="accent1">
-        <a:tint val="60000"/>
-      </a:schemeClr>
-    </dgm:fillClrLst>
-    <dgm:linClrLst meth="repeat">
-      <a:schemeClr val="accent1">
-        <a:tint val="60000"/>
-      </a:schemeClr>
-    </dgm:linClrLst>
-    <dgm:effectClrLst/>
-    <dgm:txLinClrLst/>
-    <dgm:txFillClrLst/>
-    <dgm:txEffectClrLst/>
-  </dgm:styleLbl>
-  <dgm:styleLbl name="fgSibTrans2D1">
-    <dgm:fillClrLst meth="repeat">
-      <a:schemeClr val="accent1">
-        <a:tint val="60000"/>
-      </a:schemeClr>
-    </dgm:fillClrLst>
-    <dgm:linClrLst meth="repeat">
-      <a:schemeClr val="accent1">
-        <a:tint val="60000"/>
-      </a:schemeClr>
-    </dgm:linClrLst>
-    <dgm:effectClrLst/>
-    <dgm:txLinClrLst/>
-    <dgm:txFillClrLst/>
-    <dgm:txEffectClrLst/>
-  </dgm:styleLbl>
-  <dgm:styleLbl name="bgSibTrans2D1">
-    <dgm:fillClrLst meth="repeat">
-      <a:schemeClr val="accent1">
-        <a:tint val="60000"/>
-      </a:schemeClr>
-    </dgm:fillClrLst>
-    <dgm:linClrLst meth="repeat">
-      <a:schemeClr val="accent1">
-        <a:tint val="60000"/>
-      </a:schemeClr>
-    </dgm:linClrLst>
-    <dgm:effectClrLst/>
-    <dgm:txLinClrLst/>
-    <dgm:txFillClrLst/>
-    <dgm:txEffectClrLst/>
-  </dgm:styleLbl>
-  <dgm:styleLbl name="sibTrans1D1">
-    <dgm:fillClrLst meth="repeat">
-      <a:schemeClr val="accent1"/>
-    </dgm:fillClrLst>
-    <dgm:linClrLst meth="repeat">
-      <a:schemeClr val="accent1"/>
-    </dgm:linClrLst>
-    <dgm:effectClrLst/>
-    <dgm:txLinClrLst/>
-    <dgm:txFillClrLst meth="repeat">
-      <a:schemeClr val="tx1"/>
-    </dgm:txFillClrLst>
-    <dgm:txEffectClrLst/>
-  </dgm:styleLbl>
-  <dgm:styleLbl name="callout">
-    <dgm:fillClrLst meth="repeat">
-      <a:schemeClr val="accent1"/>
-    </dgm:fillClrLst>
-    <dgm:linClrLst meth="repeat">
-      <a:schemeClr val="accent1">
-        <a:tint val="50000"/>
-      </a:schemeClr>
-    </dgm:linClrLst>
-    <dgm:effectClrLst/>
-    <dgm:txLinClrLst/>
-    <dgm:txFillClrLst meth="repeat">
-      <a:schemeClr val="tx1"/>
-    </dgm:txFillClrLst>
-    <dgm:txEffectClrLst/>
-  </dgm:styleLbl>
-  <dgm:styleLbl name="asst0">
-    <dgm:fillClrLst meth="repeat">
-      <a:schemeClr val="accent1"/>
-    </dgm:fillClrLst>
-    <dgm:linClrLst meth="repeat">
-      <a:schemeClr val="lt1"/>
-    </dgm:linClrLst>
-    <dgm:effectClrLst/>
-    <dgm:txLinClrLst/>
-    <dgm:txFillClrLst/>
-    <dgm:txEffectClrLst/>
-  </dgm:styleLbl>
-  <dgm:styleLbl name="asst1">
-    <dgm:fillClrLst meth="repeat">
-      <a:schemeClr val="accent1"/>
-    </dgm:fillClrLst>
-    <dgm:linClrLst meth="repeat">
-      <a:schemeClr val="lt1"/>
-    </dgm:linClrLst>
-    <dgm:effectClrLst/>
-    <dgm:txLinClrLst/>
-    <dgm:txFillClrLst/>
-    <dgm:txEffectClrLst/>
-  </dgm:styleLbl>
-  <dgm:styleLbl name="asst2">
-    <dgm:fillClrLst meth="repeat">
-      <a:schemeClr val="accent1"/>
-    </dgm:fillClrLst>
-    <dgm:linClrLst meth="repeat">
-      <a:schemeClr val="lt1"/>
-    </dgm:linClrLst>
-    <dgm:effectClrLst/>
-    <dgm:txLinClrLst/>
-    <dgm:txFillClrLst/>
-    <dgm:txEffectClrLst/>
-  </dgm:styleLbl>
-  <dgm:styleLbl name="asst3">
-    <dgm:fillClrLst meth="repeat">
-      <a:schemeClr val="accent1"/>
-    </dgm:fillClrLst>
-    <dgm:linClrLst meth="repeat">
-      <a:schemeClr val="lt1"/>
-    </dgm:linClrLst>
-    <dgm:effectClrLst/>
-    <dgm:txLinClrLst/>
-    <dgm:txFillClrLst/>
-    <dgm:txEffectClrLst/>
-  </dgm:styleLbl>
-  <dgm:styleLbl name="asst4">
-    <dgm:fillClrLst meth="repeat">
-      <a:schemeClr val="accent1"/>
-    </dgm:fillClrLst>
-    <dgm:linClrLst meth="repeat">
-      <a:schemeClr val="lt1"/>
-    </dgm:linClrLst>
-    <dgm:effectClrLst/>
-    <dgm:txLinClrLst/>
-    <dgm:txFillClrLst/>
-    <dgm:txEffectClrLst/>
-  </dgm:styleLbl>
-  <dgm:styleLbl name="parChTrans2D1">
-    <dgm:fillClrLst meth="repeat">
-      <a:schemeClr val="accent1">
-        <a:tint val="60000"/>
-      </a:schemeClr>
-    </dgm:fillClrLst>
-    <dgm:linClrLst meth="repeat">
-      <a:schemeClr val="accent1">
-        <a:tint val="60000"/>
-      </a:schemeClr>
-    </dgm:linClrLst>
-    <dgm:effectClrLst/>
-    <dgm:txLinClrLst/>
-    <dgm:txFillClrLst meth="repeat">
-      <a:schemeClr val="lt1"/>
-    </dgm:txFillClrLst>
-    <dgm:txEffectClrLst/>
-  </dgm:styleLbl>
-  <dgm:styleLbl name="parChTrans2D2">
-    <dgm:fillClrLst meth="repeat">
-      <a:schemeClr val="accent1"/>
-    </dgm:fillClrLst>
-    <dgm:linClrLst meth="repeat">
-      <a:schemeClr val="accent1"/>
-    </dgm:linClrLst>
-    <dgm:effectClrLst/>
-    <dgm:txLinClrLst/>
-    <dgm:txFillClrLst meth="repeat">
-      <a:schemeClr val="lt1"/>
-    </dgm:txFillClrLst>
-    <dgm:txEffectClrLst/>
-  </dgm:styleLbl>
-  <dgm:styleLbl name="parChTrans2D3">
-    <dgm:fillClrLst meth="repeat">
-      <a:schemeClr val="accent1"/>
-    </dgm:fillClrLst>
-    <dgm:linClrLst meth="repeat">
-      <a:schemeClr val="accent1"/>
-    </dgm:linClrLst>
-    <dgm:effectClrLst/>
-    <dgm:txLinClrLst/>
-    <dgm:txFillClrLst meth="repeat">
-      <a:schemeClr val="lt1"/>
-    </dgm:txFillClrLst>
-    <dgm:txEffectClrLst/>
-  </dgm:styleLbl>
-  <dgm:styleLbl name="parChTrans2D4">
-    <dgm:fillClrLst meth="repeat">
-      <a:schemeClr val="accent1"/>
-    </dgm:fillClrLst>
-    <dgm:linClrLst meth="repeat">
-      <a:schemeClr val="accent1"/>
-    </dgm:linClrLst>
-    <dgm:effectClrLst/>
-    <dgm:txLinClrLst/>
-    <dgm:txFillClrLst meth="repeat">
-      <a:schemeClr val="lt1"/>
-    </dgm:txFillClrLst>
-    <dgm:txEffectClrLst/>
-  </dgm:styleLbl>
-  <dgm:styleLbl name="parChTrans1D1">
-    <dgm:fillClrLst meth="repeat">
-      <a:schemeClr val="accent1"/>
-    </dgm:fillClrLst>
-    <dgm:linClrLst meth="repeat">
-      <a:schemeClr val="accent1">
-        <a:shade val="60000"/>
-      </a:schemeClr>
-    </dgm:linClrLst>
-    <dgm:effectClrLst/>
-    <dgm:txLinClrLst/>
-    <dgm:txFillClrLst meth="repeat">
-      <a:schemeClr val="tx1"/>
-    </dgm:txFillClrLst>
-    <dgm:txEffectClrLst/>
-  </dgm:styleLbl>
-  <dgm:styleLbl name="parChTrans1D2">
-    <dgm:fillClrLst meth="repeat">
-      <a:schemeClr val="accent1"/>
-    </dgm:fillClrLst>
-    <dgm:linClrLst meth="repeat">
-      <a:schemeClr val="accent1">
-        <a:shade val="60000"/>
-      </a:schemeClr>
-    </dgm:linClrLst>
-    <dgm:effectClrLst/>
-    <dgm:txLinClrLst/>
-    <dgm:txFillClrLst meth="repeat">
-      <a:schemeClr val="tx1"/>
-    </dgm:txFillClrLst>
-    <dgm:txEffectClrLst/>
-  </dgm:styleLbl>
-  <dgm:styleLbl name="parChTrans1D3">
-    <dgm:fillClrLst meth="repeat">
-      <a:schemeClr val="accent1"/>
-    </dgm:fillClrLst>
-    <dgm:linClrLst meth="repeat">
-      <a:schemeClr val="accent1">
-        <a:shade val="80000"/>
-      </a:schemeClr>
-    </dgm:linClrLst>
-    <dgm:effectClrLst/>
-    <dgm:txLinClrLst/>
-    <dgm:txFillClrLst meth="repeat">
-      <a:schemeClr val="tx1"/>
-    </dgm:txFillClrLst>
-    <dgm:txEffectClrLst/>
-  </dgm:styleLbl>
-  <dgm:styleLbl name="parChTrans1D4">
-    <dgm:fillClrLst meth="repeat">
-      <a:schemeClr val="accent1"/>
-    </dgm:fillClrLst>
-    <dgm:linClrLst meth="repeat">
-      <a:schemeClr val="accent1">
-        <a:shade val="80000"/>
-      </a:schemeClr>
-    </dgm:linClrLst>
-    <dgm:effectClrLst/>
-    <dgm:txLinClrLst/>
-    <dgm:txFillClrLst meth="repeat">
-      <a:schemeClr val="tx1"/>
-    </dgm:txFillClrLst>
-    <dgm:txEffectClrLst/>
-  </dgm:styleLbl>
-  <dgm:styleLbl name="fgAcc1">
-    <dgm:fillClrLst meth="repeat">
-      <a:schemeClr val="lt1">
-        <a:alpha val="90000"/>
-      </a:schemeClr>
-    </dgm:fillClrLst>
-    <dgm:linClrLst meth="repeat">
-      <a:schemeClr val="accent1"/>
-    </dgm:linClrLst>
-    <dgm:effectClrLst/>
-    <dgm:txLinClrLst/>
-    <dgm:txFillClrLst meth="repeat">
-      <a:schemeClr val="dk1"/>
-    </dgm:txFillClrLst>
-    <dgm:txEffectClrLst/>
-  </dgm:styleLbl>
-  <dgm:styleLbl name="conFgAcc1">
-    <dgm:fillClrLst meth="repeat">
-      <a:schemeClr val="lt1">
-        <a:alpha val="90000"/>
-      </a:schemeClr>
-    </dgm:fillClrLst>
-    <dgm:linClrLst meth="repeat">
-      <a:schemeClr val="accent1"/>
-    </dgm:linClrLst>
-    <dgm:effectClrLst/>
-    <dgm:txLinClrLst/>
-    <dgm:txFillClrLst meth="repeat">
-      <a:schemeClr val="dk1"/>
-    </dgm:txFillClrLst>
-    <dgm:txEffectClrLst/>
-  </dgm:styleLbl>
-  <dgm:styleLbl name="alignAcc1">
-    <dgm:fillClrLst meth="repeat">
-      <a:schemeClr val="lt1">
-        <a:alpha val="90000"/>
-      </a:schemeClr>
-    </dgm:fillClrLst>
-    <dgm:linClrLst meth="repeat">
-      <a:schemeClr val="accent1"/>
-    </dgm:linClrLst>
-    <dgm:effectClrLst/>
-    <dgm:txLinClrLst/>
-    <dgm:txFillClrLst meth="repeat">
-      <a:schemeClr val="dk1"/>
-    </dgm:txFillClrLst>
-    <dgm:txEffectClrLst/>
-  </dgm:styleLbl>
-  <dgm:styleLbl name="trAlignAcc1">
-    <dgm:fillClrLst meth="repeat">
-      <a:schemeClr val="lt1">
-        <a:alpha val="40000"/>
-      </a:schemeClr>
-    </dgm:fillClrLst>
-    <dgm:linClrLst meth="repeat">
-      <a:schemeClr val="accent1"/>
-    </dgm:linClrLst>
-    <dgm:effectClrLst/>
-    <dgm:txLinClrLst/>
-    <dgm:txFillClrLst meth="repeat">
-      <a:schemeClr val="dk1"/>
-    </dgm:txFillClrLst>
-    <dgm:txEffectClrLst/>
-  </dgm:styleLbl>
-  <dgm:styleLbl name="bgAcc1">
-    <dgm:fillClrLst meth="repeat">
-      <a:schemeClr val="lt1">
-        <a:alpha val="90000"/>
-      </a:schemeClr>
-    </dgm:fillClrLst>
-    <dgm:linClrLst meth="repeat">
-      <a:schemeClr val="accent1"/>
-    </dgm:linClrLst>
-    <dgm:effectClrLst/>
-    <dgm:txLinClrLst/>
-    <dgm:txFillClrLst meth="repeat">
-      <a:schemeClr val="dk1"/>
-    </dgm:txFillClrLst>
-    <dgm:txEffectClrLst/>
-  </dgm:styleLbl>
-  <dgm:styleLbl name="solidFgAcc1">
-    <dgm:fillClrLst meth="repeat">
-      <a:schemeClr val="lt1"/>
-    </dgm:fillClrLst>
-    <dgm:linClrLst meth="repeat">
-      <a:schemeClr val="accent1"/>
-    </dgm:linClrLst>
-    <dgm:effectClrLst/>
-    <dgm:txLinClrLst/>
-    <dgm:txFillClrLst meth="repeat">
-      <a:schemeClr val="dk1"/>
-    </dgm:txFillClrLst>
-    <dgm:txEffectClrLst/>
-  </dgm:styleLbl>
-  <dgm:styleLbl name="solidAlignAcc1">
-    <dgm:fillClrLst meth="repeat">
-      <a:schemeClr val="lt1"/>
-    </dgm:fillClrLst>
-    <dgm:linClrLst meth="repeat">
-      <a:schemeClr val="accent1"/>
-    </dgm:linClrLst>
-    <dgm:effectClrLst/>
-    <dgm:txLinClrLst/>
-    <dgm:txFillClrLst meth="repeat">
-      <a:schemeClr val="dk1"/>
-    </dgm:txFillClrLst>
-    <dgm:txEffectClrLst/>
-  </dgm:styleLbl>
-  <dgm:styleLbl name="solidBgAcc1">
-    <dgm:fillClrLst meth="repeat">
-      <a:schemeClr val="lt1"/>
-    </dgm:fillClrLst>
-    <dgm:linClrLst meth="repeat">
-      <a:schemeClr val="accent1"/>
-    </dgm:linClrLst>
-    <dgm:effectClrLst/>
-    <dgm:txLinClrLst/>
-    <dgm:txFillClrLst meth="repeat">
-      <a:schemeClr val="dk1"/>
-    </dgm:txFillClrLst>
-    <dgm:txEffectClrLst/>
-  </dgm:styleLbl>
-  <dgm:styleLbl name="fgAccFollowNode1">
-    <dgm:fillClrLst meth="repeat">
-      <a:schemeClr val="accent1">
-        <a:alpha val="90000"/>
-        <a:tint val="40000"/>
-      </a:schemeClr>
-    </dgm:fillClrLst>
-    <dgm:linClrLst meth="repeat">
-      <a:schemeClr val="accent1">
-        <a:alpha val="90000"/>
-        <a:tint val="40000"/>
-      </a:schemeClr>
-    </dgm:linClrLst>
-    <dgm:effectClrLst/>
-    <dgm:txLinClrLst/>
-    <dgm:txFillClrLst meth="repeat">
-      <a:schemeClr val="dk1"/>
-    </dgm:txFillClrLst>
-    <dgm:txEffectClrLst/>
-  </dgm:styleLbl>
-  <dgm:styleLbl name="alignAccFollowNode1">
-    <dgm:fillClrLst meth="repeat">
-      <a:schemeClr val="accent1">
-        <a:alpha val="90000"/>
-        <a:tint val="40000"/>
-      </a:schemeClr>
-    </dgm:fillClrLst>
-    <dgm:linClrLst meth="repeat">
-      <a:schemeClr val="accent1">
-        <a:alpha val="90000"/>
-        <a:tint val="40000"/>
-      </a:schemeClr>
-    </dgm:linClrLst>
-    <dgm:effectClrLst/>
-    <dgm:txLinClrLst/>
-    <dgm:txFillClrLst meth="repeat">
-      <a:schemeClr val="dk1"/>
-    </dgm:txFillClrLst>
-    <dgm:txEffectClrLst/>
-  </dgm:styleLbl>
-  <dgm:styleLbl name="bgAccFollowNode1">
-    <dgm:fillClrLst meth="repeat">
-      <a:schemeClr val="accent1">
-        <a:alpha val="90000"/>
-        <a:tint val="40000"/>
-      </a:schemeClr>
-    </dgm:fillClrLst>
-    <dgm:linClrLst meth="repeat">
-      <a:schemeClr val="accent1">
-        <a:alpha val="90000"/>
-        <a:tint val="40000"/>
-      </a:schemeClr>
-    </dgm:linClrLst>
-    <dgm:effectClrLst/>
-    <dgm:txLinClrLst/>
-    <dgm:txFillClrLst meth="repeat">
-      <a:schemeClr val="dk1"/>
-    </dgm:txFillClrLst>
-    <dgm:txEffectClrLst/>
-  </dgm:styleLbl>
-  <dgm:styleLbl name="fgAcc0">
-    <dgm:fillClrLst meth="repeat">
-      <a:schemeClr val="lt1">
-        <a:alpha val="90000"/>
-      </a:schemeClr>
-    </dgm:fillClrLst>
-    <dgm:linClrLst meth="repeat">
-      <a:schemeClr val="accent1"/>
-    </dgm:linClrLst>
-    <dgm:effectClrLst/>
-    <dgm:txLinClrLst/>
-    <dgm:txFillClrLst meth="repeat">
-      <a:schemeClr val="dk1"/>
-    </dgm:txFillClrLst>
-    <dgm:txEffectClrLst/>
-  </dgm:styleLbl>
-  <dgm:styleLbl name="fgAcc2">
-    <dgm:fillClrLst meth="repeat">
-      <a:schemeClr val="lt1">
-        <a:alpha val="90000"/>
-      </a:schemeClr>
-    </dgm:fillClrLst>
-    <dgm:linClrLst meth="repeat">
-      <a:schemeClr val="accent1"/>
-    </dgm:linClrLst>
-    <dgm:effectClrLst/>
-    <dgm:txLinClrLst/>
-    <dgm:txFillClrLst meth="repeat">
-      <a:schemeClr val="dk1"/>
-    </dgm:txFillClrLst>
-    <dgm:txEffectClrLst/>
-  </dgm:styleLbl>
-  <dgm:styleLbl name="fgAcc3">
-    <dgm:fillClrLst meth="repeat">
-      <a:schemeClr val="lt1">
-        <a:alpha val="90000"/>
-      </a:schemeClr>
-    </dgm:fillClrLst>
-    <dgm:linClrLst meth="repeat">
-      <a:schemeClr val="accent1"/>
-    </dgm:linClrLst>
-    <dgm:effectClrLst/>
-    <dgm:txLinClrLst/>
-    <dgm:txFillClrLst meth="repeat">
-      <a:schemeClr val="dk1"/>
-    </dgm:txFillClrLst>
-    <dgm:txEffectClrLst/>
-  </dgm:styleLbl>
-  <dgm:styleLbl name="fgAcc4">
-    <dgm:fillClrLst meth="repeat">
-      <a:schemeClr val="lt1">
-        <a:alpha val="90000"/>
-      </a:schemeClr>
-    </dgm:fillClrLst>
-    <dgm:linClrLst meth="repeat">
-      <a:schemeClr val="accent1"/>
-    </dgm:linClrLst>
-    <dgm:effectClrLst/>
-    <dgm:txLinClrLst/>
-    <dgm:txFillClrLst meth="repeat">
-      <a:schemeClr val="dk1"/>
-    </dgm:txFillClrLst>
-    <dgm:txEffectClrLst/>
-  </dgm:styleLbl>
-  <dgm:styleLbl name="bgShp">
-    <dgm:fillClrLst meth="repeat">
-      <a:schemeClr val="accent1">
-        <a:tint val="40000"/>
-      </a:schemeClr>
-    </dgm:fillClrLst>
-    <dgm:linClrLst meth="repeat">
-      <a:schemeClr val="accent1"/>
-    </dgm:linClrLst>
-    <dgm:effectClrLst/>
-    <dgm:txLinClrLst/>
-    <dgm:txFillClrLst meth="repeat">
-      <a:schemeClr val="dk1"/>
-    </dgm:txFillClrLst>
-    <dgm:txEffectClrLst/>
-  </dgm:styleLbl>
-  <dgm:styleLbl name="dkBgShp">
-    <dgm:fillClrLst meth="repeat">
-      <a:schemeClr val="accent1">
-        <a:shade val="80000"/>
-      </a:schemeClr>
-    </dgm:fillClrLst>
-    <dgm:linClrLst meth="repeat">
-      <a:schemeClr val="accent1"/>
-    </dgm:linClrLst>
-    <dgm:effectClrLst/>
-    <dgm:txLinClrLst/>
-    <dgm:txFillClrLst meth="repeat">
-      <a:schemeClr val="lt1"/>
-    </dgm:txFillClrLst>
-    <dgm:txEffectClrLst/>
-  </dgm:styleLbl>
-  <dgm:styleLbl name="trBgShp">
-    <dgm:fillClrLst meth="repeat">
-      <a:schemeClr val="accent1">
-        <a:tint val="50000"/>
-        <a:alpha val="40000"/>
-      </a:schemeClr>
-    </dgm:fillClrLst>
-    <dgm:linClrLst meth="repeat">
-      <a:schemeClr val="accent1"/>
-    </dgm:linClrLst>
-    <dgm:effectClrLst/>
-    <dgm:txLinClrLst/>
-    <dgm:txFillClrLst meth="repeat">
-      <a:schemeClr val="lt1"/>
-    </dgm:txFillClrLst>
-    <dgm:txEffectClrLst/>
-  </dgm:styleLbl>
-  <dgm:styleLbl name="fgShp">
-    <dgm:fillClrLst meth="repeat">
-      <a:schemeClr val="accent1">
-        <a:tint val="60000"/>
-      </a:schemeClr>
-    </dgm:fillClrLst>
-    <dgm:linClrLst meth="repeat">
-      <a:schemeClr val="lt1"/>
-    </dgm:linClrLst>
-    <dgm:effectClrLst/>
-    <dgm:txLinClrLst/>
-    <dgm:txFillClrLst meth="repeat">
-      <a:schemeClr val="dk1"/>
-    </dgm:txFillClrLst>
-    <dgm:txEffectClrLst/>
-  </dgm:styleLbl>
-  <dgm:styleLbl name="revTx">
-    <dgm:fillClrLst meth="repeat">
-      <a:schemeClr val="lt1">
-        <a:alpha val="0"/>
-      </a:schemeClr>
-    </dgm:fillClrLst>
-    <dgm:linClrLst meth="repeat">
-      <a:schemeClr val="dk1">
-        <a:alpha val="0"/>
-      </a:schemeClr>
-    </dgm:linClrLst>
-    <dgm:effectClrLst/>
-    <dgm:txLinClrLst/>
-    <dgm:txFillClrLst meth="repeat">
-      <a:schemeClr val="tx1"/>
-    </dgm:txFillClrLst>
-    <dgm:txEffectClrLst/>
-  </dgm:styleLbl>
-</dgm:colorsDef>
-</file>
-
-<file path=ppt/diagrams/colors2.xml><?xml version="1.0" encoding="utf-8"?>
 <dgm:colorsDef xmlns:dgm="http://schemas.openxmlformats.org/drawingml/2006/diagram" xmlns:a="http://schemas.openxmlformats.org/drawingml/2006/main" uniqueId="urn:microsoft.com/office/officeart/2005/8/colors/accent1_2">
   <dgm:title val=""/>
   <dgm:desc val=""/>
@@ -2235,746 +1487,6 @@
 </dgm:dataModel>
 </file>
 
-<file path=ppt/diagrams/data2.xml><?xml version="1.0" encoding="utf-8"?>
-<dgm:dataModel xmlns:dgm="http://schemas.openxmlformats.org/drawingml/2006/diagram" xmlns:a="http://schemas.openxmlformats.org/drawingml/2006/main">
-  <dgm:ptLst>
-    <dgm:pt modelId="{CF9FC193-7A05-4631-B681-B56EAB543D38}" type="doc">
-      <dgm:prSet loTypeId="urn:microsoft.com/office/officeart/2005/8/layout/hList1" loCatId="list" qsTypeId="urn:microsoft.com/office/officeart/2005/8/quickstyle/simple1" qsCatId="simple" csTypeId="urn:microsoft.com/office/officeart/2005/8/colors/accent1_2" csCatId="accent1" phldr="1"/>
-      <dgm:spPr/>
-      <dgm:t>
-        <a:bodyPr rtlCol="0"/>
-        <a:lstStyle/>
-        <a:p>
-          <a:pPr rtl="0"/>
-          <a:endParaRPr lang="en-US"/>
-        </a:p>
-      </dgm:t>
-    </dgm:pt>
-    <dgm:pt modelId="{6857B86A-DEC1-407C-A1BB-5BF9ACCBCA6A}">
-      <dgm:prSet phldrT="[Text]"/>
-      <dgm:spPr/>
-      <dgm:t>
-        <a:bodyPr rtlCol="0"/>
-        <a:lstStyle/>
-        <a:p>
-          <a:pPr rtl="0"/>
-          <a:r>
-            <a:rPr lang="fr">
-              <a:latin typeface="Tahoma" panose="020B0604030504040204" pitchFamily="34" charset="0"/>
-              <a:ea typeface="Tahoma" panose="020B0604030504040204" pitchFamily="34" charset="0"/>
-              <a:cs typeface="Tahoma" panose="020B0604030504040204" pitchFamily="34" charset="0"/>
-            </a:rPr>
-            <a:t>Solution 1</a:t>
-          </a:r>
-        </a:p>
-      </dgm:t>
-    </dgm:pt>
-    <dgm:pt modelId="{8CA7BF9B-8199-4683-AD57-CB0086659013}" type="parTrans" cxnId="{B12F0503-977A-4B5D-8CB7-420B041FF863}">
-      <dgm:prSet/>
-      <dgm:spPr/>
-      <dgm:t>
-        <a:bodyPr rtlCol="0"/>
-        <a:lstStyle/>
-        <a:p>
-          <a:pPr rtl="0"/>
-          <a:endParaRPr lang="en-US"/>
-        </a:p>
-      </dgm:t>
-    </dgm:pt>
-    <dgm:pt modelId="{F087F24E-A7D7-4DCE-B2A7-9B941289621A}" type="sibTrans" cxnId="{B12F0503-977A-4B5D-8CB7-420B041FF863}">
-      <dgm:prSet/>
-      <dgm:spPr/>
-      <dgm:t>
-        <a:bodyPr rtlCol="0"/>
-        <a:lstStyle/>
-        <a:p>
-          <a:pPr rtl="0"/>
-          <a:endParaRPr lang="en-US"/>
-        </a:p>
-      </dgm:t>
-    </dgm:pt>
-    <dgm:pt modelId="{4C8BFA56-3F75-4CAD-90A3-2F214D699322}">
-      <dgm:prSet phldrT="[Text]"/>
-      <dgm:spPr/>
-      <dgm:t>
-        <a:bodyPr rtlCol="0"/>
-        <a:lstStyle/>
-        <a:p>
-          <a:pPr rtl="0">
-            <a:buFont typeface="Wingdings" panose="05000000000000000000" pitchFamily="2" charset="2"/>
-            <a:buChar char=""/>
-          </a:pPr>
-          <a:r>
-            <a:rPr lang="fr">
-              <a:latin typeface="Tahoma" panose="020B0604030504040204" pitchFamily="34" charset="0"/>
-              <a:ea typeface="Tahoma" panose="020B0604030504040204" pitchFamily="34" charset="0"/>
-              <a:cs typeface="Tahoma" panose="020B0604030504040204" pitchFamily="34" charset="0"/>
-            </a:rPr>
-            <a:t>Quels matériaux cette solution requiert-elle ?</a:t>
-          </a:r>
-        </a:p>
-      </dgm:t>
-    </dgm:pt>
-    <dgm:pt modelId="{9A6E3B20-A734-4412-84CF-0134D93D4B28}" type="parTrans" cxnId="{4CD5FCDD-1F8A-43A3-BD77-CBE3B3864C41}">
-      <dgm:prSet/>
-      <dgm:spPr/>
-      <dgm:t>
-        <a:bodyPr rtlCol="0"/>
-        <a:lstStyle/>
-        <a:p>
-          <a:pPr rtl="0"/>
-          <a:endParaRPr lang="en-US"/>
-        </a:p>
-      </dgm:t>
-    </dgm:pt>
-    <dgm:pt modelId="{7B50916F-B8BA-427F-B9F0-A301E54D7FB3}" type="sibTrans" cxnId="{4CD5FCDD-1F8A-43A3-BD77-CBE3B3864C41}">
-      <dgm:prSet/>
-      <dgm:spPr/>
-      <dgm:t>
-        <a:bodyPr rtlCol="0"/>
-        <a:lstStyle/>
-        <a:p>
-          <a:pPr rtl="0"/>
-          <a:endParaRPr lang="en-US"/>
-        </a:p>
-      </dgm:t>
-    </dgm:pt>
-    <dgm:pt modelId="{B6B39D33-D046-47BE-829F-7DE9C1355A93}">
-      <dgm:prSet phldrT="[Text]"/>
-      <dgm:spPr/>
-      <dgm:t>
-        <a:bodyPr rtlCol="0"/>
-        <a:lstStyle/>
-        <a:p>
-          <a:pPr rtl="0">
-            <a:buFont typeface="Wingdings" panose="05000000000000000000" pitchFamily="2" charset="2"/>
-            <a:buChar char=""/>
-          </a:pPr>
-          <a:r>
-            <a:rPr lang="fr">
-              <a:latin typeface="Tahoma" panose="020B0604030504040204" pitchFamily="34" charset="0"/>
-              <a:ea typeface="Tahoma" panose="020B0604030504040204" pitchFamily="34" charset="0"/>
-              <a:cs typeface="Tahoma" panose="020B0604030504040204" pitchFamily="34" charset="0"/>
-            </a:rPr>
-            <a:t>À quoi cette solution ressemblera-t-elle (dessin, images, texte, etc.) ?</a:t>
-          </a:r>
-        </a:p>
-      </dgm:t>
-    </dgm:pt>
-    <dgm:pt modelId="{E15A7BCB-F8C9-469E-AAD5-364C09881B8A}" type="parTrans" cxnId="{877B3C1A-839E-4419-A916-B4E946768D4D}">
-      <dgm:prSet/>
-      <dgm:spPr/>
-      <dgm:t>
-        <a:bodyPr rtlCol="0"/>
-        <a:lstStyle/>
-        <a:p>
-          <a:pPr rtl="0"/>
-          <a:endParaRPr lang="en-US"/>
-        </a:p>
-      </dgm:t>
-    </dgm:pt>
-    <dgm:pt modelId="{AC756B1C-E9B8-4AF1-AAAF-F8402FE8B80B}" type="sibTrans" cxnId="{877B3C1A-839E-4419-A916-B4E946768D4D}">
-      <dgm:prSet/>
-      <dgm:spPr/>
-      <dgm:t>
-        <a:bodyPr rtlCol="0"/>
-        <a:lstStyle/>
-        <a:p>
-          <a:pPr rtl="0"/>
-          <a:endParaRPr lang="en-US"/>
-        </a:p>
-      </dgm:t>
-    </dgm:pt>
-    <dgm:pt modelId="{ABA77F75-8642-4931-8D7E-BE6C6DB9940D}">
-      <dgm:prSet phldrT="[Text]"/>
-      <dgm:spPr/>
-      <dgm:t>
-        <a:bodyPr rtlCol="0"/>
-        <a:lstStyle/>
-        <a:p>
-          <a:pPr rtl="0"/>
-          <a:r>
-            <a:rPr lang="fr">
-              <a:latin typeface="Tahoma" panose="020B0604030504040204" pitchFamily="34" charset="0"/>
-              <a:ea typeface="Tahoma" panose="020B0604030504040204" pitchFamily="34" charset="0"/>
-              <a:cs typeface="Tahoma" panose="020B0604030504040204" pitchFamily="34" charset="0"/>
-            </a:rPr>
-            <a:t>Solution 2</a:t>
-          </a:r>
-        </a:p>
-      </dgm:t>
-    </dgm:pt>
-    <dgm:pt modelId="{FCF9AE1B-B22B-4F91-BFD8-DDBBF762F128}" type="parTrans" cxnId="{D959B3EA-A66A-4B40-901C-93ECD4985A93}">
-      <dgm:prSet/>
-      <dgm:spPr/>
-      <dgm:t>
-        <a:bodyPr rtlCol="0"/>
-        <a:lstStyle/>
-        <a:p>
-          <a:pPr rtl="0"/>
-          <a:endParaRPr lang="en-US"/>
-        </a:p>
-      </dgm:t>
-    </dgm:pt>
-    <dgm:pt modelId="{1A095211-ADB0-42CA-9F24-F1BC942872F3}" type="sibTrans" cxnId="{D959B3EA-A66A-4B40-901C-93ECD4985A93}">
-      <dgm:prSet/>
-      <dgm:spPr/>
-      <dgm:t>
-        <a:bodyPr rtlCol="0"/>
-        <a:lstStyle/>
-        <a:p>
-          <a:pPr rtl="0"/>
-          <a:endParaRPr lang="en-US"/>
-        </a:p>
-      </dgm:t>
-    </dgm:pt>
-    <dgm:pt modelId="{611C3B18-07F8-4A66-9682-97E24AEF6014}">
-      <dgm:prSet phldrT="[Text]"/>
-      <dgm:spPr/>
-      <dgm:t>
-        <a:bodyPr rtlCol="0"/>
-        <a:lstStyle/>
-        <a:p>
-          <a:pPr rtl="0">
-            <a:buFont typeface="Wingdings" panose="05000000000000000000" pitchFamily="2" charset="2"/>
-            <a:buChar char=""/>
-          </a:pPr>
-          <a:r>
-            <a:rPr lang="fr">
-              <a:latin typeface="Tahoma" panose="020B0604030504040204" pitchFamily="34" charset="0"/>
-              <a:ea typeface="Tahoma" panose="020B0604030504040204" pitchFamily="34" charset="0"/>
-              <a:cs typeface="Tahoma" panose="020B0604030504040204" pitchFamily="34" charset="0"/>
-            </a:rPr>
-            <a:t>Quels matériaux cette solution requiert-elle ?</a:t>
-          </a:r>
-        </a:p>
-      </dgm:t>
-    </dgm:pt>
-    <dgm:pt modelId="{5940BF2D-F08A-4150-9A86-173D9242DE8C}" type="parTrans" cxnId="{D5D61B4C-1312-427C-BDCC-013237D8A488}">
-      <dgm:prSet/>
-      <dgm:spPr/>
-      <dgm:t>
-        <a:bodyPr rtlCol="0"/>
-        <a:lstStyle/>
-        <a:p>
-          <a:pPr rtl="0"/>
-          <a:endParaRPr lang="en-US"/>
-        </a:p>
-      </dgm:t>
-    </dgm:pt>
-    <dgm:pt modelId="{477660C6-2B6D-4FB8-B9A3-D555E2082C2A}" type="sibTrans" cxnId="{D5D61B4C-1312-427C-BDCC-013237D8A488}">
-      <dgm:prSet/>
-      <dgm:spPr/>
-      <dgm:t>
-        <a:bodyPr rtlCol="0"/>
-        <a:lstStyle/>
-        <a:p>
-          <a:pPr rtl="0"/>
-          <a:endParaRPr lang="en-US"/>
-        </a:p>
-      </dgm:t>
-    </dgm:pt>
-    <dgm:pt modelId="{A84AA4D5-2E69-4308-B848-AF7C866DBA37}">
-      <dgm:prSet phldrT="[Text]"/>
-      <dgm:spPr/>
-      <dgm:t>
-        <a:bodyPr rtlCol="0"/>
-        <a:lstStyle/>
-        <a:p>
-          <a:pPr rtl="0">
-            <a:buFont typeface="Wingdings" panose="05000000000000000000" pitchFamily="2" charset="2"/>
-            <a:buChar char=""/>
-          </a:pPr>
-          <a:r>
-            <a:rPr lang="fr">
-              <a:latin typeface="Tahoma" panose="020B0604030504040204" pitchFamily="34" charset="0"/>
-              <a:ea typeface="Tahoma" panose="020B0604030504040204" pitchFamily="34" charset="0"/>
-              <a:cs typeface="Tahoma" panose="020B0604030504040204" pitchFamily="34" charset="0"/>
-            </a:rPr>
-            <a:t>À quoi cette solution ressemblera-t-elle (dessin, images, texte, etc.) ?</a:t>
-          </a:r>
-        </a:p>
-      </dgm:t>
-    </dgm:pt>
-    <dgm:pt modelId="{5AA60D0F-7C99-4FA0-90CA-9CD92DBEF3B7}" type="parTrans" cxnId="{E785B928-0A23-43BA-9D0D-4355335BED79}">
-      <dgm:prSet/>
-      <dgm:spPr/>
-      <dgm:t>
-        <a:bodyPr rtlCol="0"/>
-        <a:lstStyle/>
-        <a:p>
-          <a:pPr rtl="0"/>
-          <a:endParaRPr lang="en-US"/>
-        </a:p>
-      </dgm:t>
-    </dgm:pt>
-    <dgm:pt modelId="{195A1AC7-FDFE-47D0-B6D9-46AB9BA4736B}" type="sibTrans" cxnId="{E785B928-0A23-43BA-9D0D-4355335BED79}">
-      <dgm:prSet/>
-      <dgm:spPr/>
-      <dgm:t>
-        <a:bodyPr rtlCol="0"/>
-        <a:lstStyle/>
-        <a:p>
-          <a:pPr rtl="0"/>
-          <a:endParaRPr lang="en-US"/>
-        </a:p>
-      </dgm:t>
-    </dgm:pt>
-    <dgm:pt modelId="{DA5DFAD8-E443-4F53-9341-A0903BBBD378}">
-      <dgm:prSet phldrT="[Text]"/>
-      <dgm:spPr/>
-      <dgm:t>
-        <a:bodyPr rtlCol="0"/>
-        <a:lstStyle/>
-        <a:p>
-          <a:pPr rtl="0"/>
-          <a:r>
-            <a:rPr lang="fr">
-              <a:latin typeface="Tahoma" panose="020B0604030504040204" pitchFamily="34" charset="0"/>
-              <a:ea typeface="Tahoma" panose="020B0604030504040204" pitchFamily="34" charset="0"/>
-              <a:cs typeface="Tahoma" panose="020B0604030504040204" pitchFamily="34" charset="0"/>
-            </a:rPr>
-            <a:t>Solution 3</a:t>
-          </a:r>
-        </a:p>
-      </dgm:t>
-    </dgm:pt>
-    <dgm:pt modelId="{F6012B3B-01B0-4E7C-A363-0177B95D3DD8}" type="parTrans" cxnId="{0073D4C3-F488-4F79-B637-186FAECF6BAD}">
-      <dgm:prSet/>
-      <dgm:spPr/>
-      <dgm:t>
-        <a:bodyPr rtlCol="0"/>
-        <a:lstStyle/>
-        <a:p>
-          <a:pPr rtl="0"/>
-          <a:endParaRPr lang="en-US"/>
-        </a:p>
-      </dgm:t>
-    </dgm:pt>
-    <dgm:pt modelId="{76D9F54E-47B3-4FE0-B465-AD673964072E}" type="sibTrans" cxnId="{0073D4C3-F488-4F79-B637-186FAECF6BAD}">
-      <dgm:prSet/>
-      <dgm:spPr/>
-      <dgm:t>
-        <a:bodyPr rtlCol="0"/>
-        <a:lstStyle/>
-        <a:p>
-          <a:pPr rtl="0"/>
-          <a:endParaRPr lang="en-US"/>
-        </a:p>
-      </dgm:t>
-    </dgm:pt>
-    <dgm:pt modelId="{6EE89B4E-BAED-4A90-B29D-70AF11256801}">
-      <dgm:prSet phldrT="[Text]"/>
-      <dgm:spPr/>
-      <dgm:t>
-        <a:bodyPr rtlCol="0"/>
-        <a:lstStyle/>
-        <a:p>
-          <a:pPr rtl="0">
-            <a:buFont typeface="Wingdings" panose="05000000000000000000" pitchFamily="2" charset="2"/>
-            <a:buChar char=""/>
-          </a:pPr>
-          <a:r>
-            <a:rPr lang="fr">
-              <a:latin typeface="Tahoma" panose="020B0604030504040204" pitchFamily="34" charset="0"/>
-              <a:ea typeface="Tahoma" panose="020B0604030504040204" pitchFamily="34" charset="0"/>
-              <a:cs typeface="Tahoma" panose="020B0604030504040204" pitchFamily="34" charset="0"/>
-            </a:rPr>
-            <a:t>Quels matériaux cette solution requiert-elle ?</a:t>
-          </a:r>
-        </a:p>
-      </dgm:t>
-    </dgm:pt>
-    <dgm:pt modelId="{39BF20C7-31E5-452B-8EA2-17224A13C7FB}" type="parTrans" cxnId="{CA949A5F-9945-4C59-A233-D70AFFF70BDA}">
-      <dgm:prSet/>
-      <dgm:spPr/>
-      <dgm:t>
-        <a:bodyPr rtlCol="0"/>
-        <a:lstStyle/>
-        <a:p>
-          <a:pPr rtl="0"/>
-          <a:endParaRPr lang="en-US"/>
-        </a:p>
-      </dgm:t>
-    </dgm:pt>
-    <dgm:pt modelId="{E71503C3-CFB7-4144-AD9F-7A42A87A3A6B}" type="sibTrans" cxnId="{CA949A5F-9945-4C59-A233-D70AFFF70BDA}">
-      <dgm:prSet/>
-      <dgm:spPr/>
-      <dgm:t>
-        <a:bodyPr rtlCol="0"/>
-        <a:lstStyle/>
-        <a:p>
-          <a:pPr rtl="0"/>
-          <a:endParaRPr lang="en-US"/>
-        </a:p>
-      </dgm:t>
-    </dgm:pt>
-    <dgm:pt modelId="{4EA3F7C2-8BCE-45BE-A919-CBBB33285BD0}">
-      <dgm:prSet phldrT="[Text]"/>
-      <dgm:spPr/>
-      <dgm:t>
-        <a:bodyPr rtlCol="0"/>
-        <a:lstStyle/>
-        <a:p>
-          <a:pPr rtl="0">
-            <a:buFont typeface="Wingdings" panose="05000000000000000000" pitchFamily="2" charset="2"/>
-            <a:buChar char=""/>
-          </a:pPr>
-          <a:r>
-            <a:rPr lang="fr">
-              <a:latin typeface="Tahoma" panose="020B0604030504040204" pitchFamily="34" charset="0"/>
-              <a:ea typeface="Tahoma" panose="020B0604030504040204" pitchFamily="34" charset="0"/>
-              <a:cs typeface="Tahoma" panose="020B0604030504040204" pitchFamily="34" charset="0"/>
-            </a:rPr>
-            <a:t>À quoi cette solution ressemblera-t-elle (dessin, images, texte, etc.) ?</a:t>
-          </a:r>
-        </a:p>
-      </dgm:t>
-    </dgm:pt>
-    <dgm:pt modelId="{E5A5DB8F-AE1A-4DCD-9400-C8317BA7D81B}" type="parTrans" cxnId="{496CC152-66F4-4FEB-99ED-C8BD1F8A40F9}">
-      <dgm:prSet/>
-      <dgm:spPr/>
-      <dgm:t>
-        <a:bodyPr rtlCol="0"/>
-        <a:lstStyle/>
-        <a:p>
-          <a:pPr rtl="0"/>
-          <a:endParaRPr lang="en-US"/>
-        </a:p>
-      </dgm:t>
-    </dgm:pt>
-    <dgm:pt modelId="{BC932F0D-8B77-458E-AF60-BC2FDCBE0C75}" type="sibTrans" cxnId="{496CC152-66F4-4FEB-99ED-C8BD1F8A40F9}">
-      <dgm:prSet/>
-      <dgm:spPr/>
-      <dgm:t>
-        <a:bodyPr rtlCol="0"/>
-        <a:lstStyle/>
-        <a:p>
-          <a:pPr rtl="0"/>
-          <a:endParaRPr lang="en-US"/>
-        </a:p>
-      </dgm:t>
-    </dgm:pt>
-    <dgm:pt modelId="{F82601E6-6FF6-41B5-BDEF-C0E73D0B30BE}">
-      <dgm:prSet phldrT="[Text]"/>
-      <dgm:spPr/>
-      <dgm:t>
-        <a:bodyPr rtlCol="0"/>
-        <a:lstStyle/>
-        <a:p>
-          <a:pPr rtl="0">
-            <a:buFont typeface="Wingdings" panose="05000000000000000000" pitchFamily="2" charset="2"/>
-            <a:buChar char=""/>
-          </a:pPr>
-          <a:r>
-            <a:rPr lang="fr">
-              <a:latin typeface="Tahoma" panose="020B0604030504040204" pitchFamily="34" charset="0"/>
-              <a:ea typeface="Tahoma" panose="020B0604030504040204" pitchFamily="34" charset="0"/>
-              <a:cs typeface="Tahoma" panose="020B0604030504040204" pitchFamily="34" charset="0"/>
-            </a:rPr>
-            <a:t>Quels obstacles pouvez-vous rencontrer avec cette solution ?</a:t>
-          </a:r>
-        </a:p>
-      </dgm:t>
-    </dgm:pt>
-    <dgm:pt modelId="{936C8FEA-0125-468F-AC7E-0D933F696D03}" type="parTrans" cxnId="{1FCB23E5-E983-4435-8A6F-78F13DE6D873}">
-      <dgm:prSet/>
-      <dgm:spPr/>
-      <dgm:t>
-        <a:bodyPr rtlCol="0"/>
-        <a:lstStyle/>
-        <a:p>
-          <a:pPr rtl="0"/>
-          <a:endParaRPr lang="en-US"/>
-        </a:p>
-      </dgm:t>
-    </dgm:pt>
-    <dgm:pt modelId="{EAEC7697-68BC-4B26-A3B6-9BD23217CF44}" type="sibTrans" cxnId="{1FCB23E5-E983-4435-8A6F-78F13DE6D873}">
-      <dgm:prSet/>
-      <dgm:spPr/>
-      <dgm:t>
-        <a:bodyPr rtlCol="0"/>
-        <a:lstStyle/>
-        <a:p>
-          <a:pPr rtl="0"/>
-          <a:endParaRPr lang="en-US"/>
-        </a:p>
-      </dgm:t>
-    </dgm:pt>
-    <dgm:pt modelId="{26ECA639-0A60-4D96-A34B-F5ACC75DAA0C}">
-      <dgm:prSet phldrT="[Text]"/>
-      <dgm:spPr/>
-      <dgm:t>
-        <a:bodyPr rtlCol="0"/>
-        <a:lstStyle/>
-        <a:p>
-          <a:pPr rtl="0">
-            <a:buFont typeface="Wingdings" panose="05000000000000000000" pitchFamily="2" charset="2"/>
-            <a:buChar char=""/>
-          </a:pPr>
-          <a:r>
-            <a:rPr lang="fr">
-              <a:latin typeface="Tahoma" panose="020B0604030504040204" pitchFamily="34" charset="0"/>
-              <a:ea typeface="Tahoma" panose="020B0604030504040204" pitchFamily="34" charset="0"/>
-              <a:cs typeface="Tahoma" panose="020B0604030504040204" pitchFamily="34" charset="0"/>
-            </a:rPr>
-            <a:t>Quels obstacles pouvez-vous rencontrer avec cette solution ?</a:t>
-          </a:r>
-        </a:p>
-      </dgm:t>
-    </dgm:pt>
-    <dgm:pt modelId="{C4856BF6-9736-45B2-AF8E-AA325F8A725C}" type="parTrans" cxnId="{F270B5BD-559B-4711-AB5A-FD85478BE916}">
-      <dgm:prSet/>
-      <dgm:spPr/>
-      <dgm:t>
-        <a:bodyPr rtlCol="0"/>
-        <a:lstStyle/>
-        <a:p>
-          <a:pPr rtl="0"/>
-          <a:endParaRPr lang="en-US"/>
-        </a:p>
-      </dgm:t>
-    </dgm:pt>
-    <dgm:pt modelId="{DA3F4B23-A392-40BF-A1BD-D150AE345EB0}" type="sibTrans" cxnId="{F270B5BD-559B-4711-AB5A-FD85478BE916}">
-      <dgm:prSet/>
-      <dgm:spPr/>
-      <dgm:t>
-        <a:bodyPr rtlCol="0"/>
-        <a:lstStyle/>
-        <a:p>
-          <a:pPr rtl="0"/>
-          <a:endParaRPr lang="en-US"/>
-        </a:p>
-      </dgm:t>
-    </dgm:pt>
-    <dgm:pt modelId="{388D911F-5131-4B95-8FCA-44355C31A787}">
-      <dgm:prSet phldrT="[Text]"/>
-      <dgm:spPr/>
-      <dgm:t>
-        <a:bodyPr rtlCol="0"/>
-        <a:lstStyle/>
-        <a:p>
-          <a:pPr rtl="0">
-            <a:buFont typeface="Wingdings" panose="05000000000000000000" pitchFamily="2" charset="2"/>
-            <a:buChar char=""/>
-          </a:pPr>
-          <a:r>
-            <a:rPr lang="fr">
-              <a:latin typeface="Tahoma" panose="020B0604030504040204" pitchFamily="34" charset="0"/>
-              <a:ea typeface="Tahoma" panose="020B0604030504040204" pitchFamily="34" charset="0"/>
-              <a:cs typeface="Tahoma" panose="020B0604030504040204" pitchFamily="34" charset="0"/>
-            </a:rPr>
-            <a:t>Quels obstacles pouvez-vous rencontrer avec cette solution ?</a:t>
-          </a:r>
-        </a:p>
-      </dgm:t>
-    </dgm:pt>
-    <dgm:pt modelId="{90DE3C42-B930-4A61-B78B-7BCFF7A9C3BC}" type="parTrans" cxnId="{64A00AFB-D909-4E4F-881C-95919A0EED97}">
-      <dgm:prSet/>
-      <dgm:spPr/>
-      <dgm:t>
-        <a:bodyPr rtlCol="0"/>
-        <a:lstStyle/>
-        <a:p>
-          <a:pPr rtl="0"/>
-          <a:endParaRPr lang="en-US"/>
-        </a:p>
-      </dgm:t>
-    </dgm:pt>
-    <dgm:pt modelId="{6C88182B-48B6-413C-BAE8-817D076D6F78}" type="sibTrans" cxnId="{64A00AFB-D909-4E4F-881C-95919A0EED97}">
-      <dgm:prSet/>
-      <dgm:spPr/>
-      <dgm:t>
-        <a:bodyPr rtlCol="0"/>
-        <a:lstStyle/>
-        <a:p>
-          <a:pPr rtl="0"/>
-          <a:endParaRPr lang="en-US"/>
-        </a:p>
-      </dgm:t>
-    </dgm:pt>
-    <dgm:pt modelId="{DE3F77CF-6A8C-4783-A2CE-00E88C4199CB}" type="pres">
-      <dgm:prSet presAssocID="{CF9FC193-7A05-4631-B681-B56EAB543D38}" presName="Name0" presStyleCnt="0">
-        <dgm:presLayoutVars>
-          <dgm:dir/>
-          <dgm:animLvl val="lvl"/>
-          <dgm:resizeHandles val="exact"/>
-        </dgm:presLayoutVars>
-      </dgm:prSet>
-      <dgm:spPr/>
-      <dgm:t>
-        <a:bodyPr/>
-        <a:lstStyle/>
-        <a:p>
-          <a:endParaRPr lang="fr-FR"/>
-        </a:p>
-      </dgm:t>
-    </dgm:pt>
-    <dgm:pt modelId="{4E69B62D-7E76-4E06-9330-583771E53BDE}" type="pres">
-      <dgm:prSet presAssocID="{6857B86A-DEC1-407C-A1BB-5BF9ACCBCA6A}" presName="composite" presStyleCnt="0"/>
-      <dgm:spPr/>
-    </dgm:pt>
-    <dgm:pt modelId="{F0C1B2C7-0B23-4FE8-AB0F-5877B88532DB}" type="pres">
-      <dgm:prSet presAssocID="{6857B86A-DEC1-407C-A1BB-5BF9ACCBCA6A}" presName="parTx" presStyleLbl="alignNode1" presStyleIdx="0" presStyleCnt="3">
-        <dgm:presLayoutVars>
-          <dgm:chMax val="0"/>
-          <dgm:chPref val="0"/>
-          <dgm:bulletEnabled val="1"/>
-        </dgm:presLayoutVars>
-      </dgm:prSet>
-      <dgm:spPr/>
-      <dgm:t>
-        <a:bodyPr/>
-        <a:lstStyle/>
-        <a:p>
-          <a:endParaRPr lang="fr-FR"/>
-        </a:p>
-      </dgm:t>
-    </dgm:pt>
-    <dgm:pt modelId="{17CA1487-CDD9-4364-92F6-A11DBDAFE16C}" type="pres">
-      <dgm:prSet presAssocID="{6857B86A-DEC1-407C-A1BB-5BF9ACCBCA6A}" presName="desTx" presStyleLbl="alignAccFollowNode1" presStyleIdx="0" presStyleCnt="3">
-        <dgm:presLayoutVars>
-          <dgm:bulletEnabled val="1"/>
-        </dgm:presLayoutVars>
-      </dgm:prSet>
-      <dgm:spPr/>
-      <dgm:t>
-        <a:bodyPr/>
-        <a:lstStyle/>
-        <a:p>
-          <a:endParaRPr lang="fr-FR"/>
-        </a:p>
-      </dgm:t>
-    </dgm:pt>
-    <dgm:pt modelId="{3FA24A66-31D3-4A69-B628-8BE88627B97D}" type="pres">
-      <dgm:prSet presAssocID="{F087F24E-A7D7-4DCE-B2A7-9B941289621A}" presName="space" presStyleCnt="0"/>
-      <dgm:spPr/>
-    </dgm:pt>
-    <dgm:pt modelId="{3B158D6E-E3AA-49BB-988A-758B59ED8F3B}" type="pres">
-      <dgm:prSet presAssocID="{ABA77F75-8642-4931-8D7E-BE6C6DB9940D}" presName="composite" presStyleCnt="0"/>
-      <dgm:spPr/>
-    </dgm:pt>
-    <dgm:pt modelId="{055A5EAB-EAE0-4501-8649-31F112FF9AD5}" type="pres">
-      <dgm:prSet presAssocID="{ABA77F75-8642-4931-8D7E-BE6C6DB9940D}" presName="parTx" presStyleLbl="alignNode1" presStyleIdx="1" presStyleCnt="3">
-        <dgm:presLayoutVars>
-          <dgm:chMax val="0"/>
-          <dgm:chPref val="0"/>
-          <dgm:bulletEnabled val="1"/>
-        </dgm:presLayoutVars>
-      </dgm:prSet>
-      <dgm:spPr/>
-      <dgm:t>
-        <a:bodyPr/>
-        <a:lstStyle/>
-        <a:p>
-          <a:endParaRPr lang="fr-FR"/>
-        </a:p>
-      </dgm:t>
-    </dgm:pt>
-    <dgm:pt modelId="{E4FD5043-5612-43C5-B6AE-CCD431549399}" type="pres">
-      <dgm:prSet presAssocID="{ABA77F75-8642-4931-8D7E-BE6C6DB9940D}" presName="desTx" presStyleLbl="alignAccFollowNode1" presStyleIdx="1" presStyleCnt="3">
-        <dgm:presLayoutVars>
-          <dgm:bulletEnabled val="1"/>
-        </dgm:presLayoutVars>
-      </dgm:prSet>
-      <dgm:spPr/>
-      <dgm:t>
-        <a:bodyPr/>
-        <a:lstStyle/>
-        <a:p>
-          <a:endParaRPr lang="fr-FR"/>
-        </a:p>
-      </dgm:t>
-    </dgm:pt>
-    <dgm:pt modelId="{3E20F600-AFBC-427F-8295-F096F694BC17}" type="pres">
-      <dgm:prSet presAssocID="{1A095211-ADB0-42CA-9F24-F1BC942872F3}" presName="space" presStyleCnt="0"/>
-      <dgm:spPr/>
-    </dgm:pt>
-    <dgm:pt modelId="{173DA3A6-F783-42D4-9ED8-FD330979BCEA}" type="pres">
-      <dgm:prSet presAssocID="{DA5DFAD8-E443-4F53-9341-A0903BBBD378}" presName="composite" presStyleCnt="0"/>
-      <dgm:spPr/>
-    </dgm:pt>
-    <dgm:pt modelId="{23D06E36-F688-4B37-8BB8-73015E665B0E}" type="pres">
-      <dgm:prSet presAssocID="{DA5DFAD8-E443-4F53-9341-A0903BBBD378}" presName="parTx" presStyleLbl="alignNode1" presStyleIdx="2" presStyleCnt="3">
-        <dgm:presLayoutVars>
-          <dgm:chMax val="0"/>
-          <dgm:chPref val="0"/>
-          <dgm:bulletEnabled val="1"/>
-        </dgm:presLayoutVars>
-      </dgm:prSet>
-      <dgm:spPr/>
-      <dgm:t>
-        <a:bodyPr/>
-        <a:lstStyle/>
-        <a:p>
-          <a:endParaRPr lang="fr-FR"/>
-        </a:p>
-      </dgm:t>
-    </dgm:pt>
-    <dgm:pt modelId="{EA81ED6A-A7EA-4137-A3DC-D16E79F1B938}" type="pres">
-      <dgm:prSet presAssocID="{DA5DFAD8-E443-4F53-9341-A0903BBBD378}" presName="desTx" presStyleLbl="alignAccFollowNode1" presStyleIdx="2" presStyleCnt="3">
-        <dgm:presLayoutVars>
-          <dgm:bulletEnabled val="1"/>
-        </dgm:presLayoutVars>
-      </dgm:prSet>
-      <dgm:spPr/>
-      <dgm:t>
-        <a:bodyPr/>
-        <a:lstStyle/>
-        <a:p>
-          <a:endParaRPr lang="fr-FR"/>
-        </a:p>
-      </dgm:t>
-    </dgm:pt>
-  </dgm:ptLst>
-  <dgm:cxnLst>
-    <dgm:cxn modelId="{D959B3EA-A66A-4B40-901C-93ECD4985A93}" srcId="{CF9FC193-7A05-4631-B681-B56EAB543D38}" destId="{ABA77F75-8642-4931-8D7E-BE6C6DB9940D}" srcOrd="1" destOrd="0" parTransId="{FCF9AE1B-B22B-4F91-BFD8-DDBBF762F128}" sibTransId="{1A095211-ADB0-42CA-9F24-F1BC942872F3}"/>
-    <dgm:cxn modelId="{4CD5FCDD-1F8A-43A3-BD77-CBE3B3864C41}" srcId="{6857B86A-DEC1-407C-A1BB-5BF9ACCBCA6A}" destId="{4C8BFA56-3F75-4CAD-90A3-2F214D699322}" srcOrd="0" destOrd="0" parTransId="{9A6E3B20-A734-4412-84CF-0134D93D4B28}" sibTransId="{7B50916F-B8BA-427F-B9F0-A301E54D7FB3}"/>
-    <dgm:cxn modelId="{765D4AFC-C3A4-4F8B-A000-988DC6C44800}" type="presOf" srcId="{6EE89B4E-BAED-4A90-B29D-70AF11256801}" destId="{EA81ED6A-A7EA-4137-A3DC-D16E79F1B938}" srcOrd="0" destOrd="0" presId="urn:microsoft.com/office/officeart/2005/8/layout/hList1"/>
-    <dgm:cxn modelId="{4BF1EEA1-6E89-4F91-BAE8-11038685C515}" type="presOf" srcId="{4C8BFA56-3F75-4CAD-90A3-2F214D699322}" destId="{17CA1487-CDD9-4364-92F6-A11DBDAFE16C}" srcOrd="0" destOrd="0" presId="urn:microsoft.com/office/officeart/2005/8/layout/hList1"/>
-    <dgm:cxn modelId="{877B3C1A-839E-4419-A916-B4E946768D4D}" srcId="{6857B86A-DEC1-407C-A1BB-5BF9ACCBCA6A}" destId="{B6B39D33-D046-47BE-829F-7DE9C1355A93}" srcOrd="1" destOrd="0" parTransId="{E15A7BCB-F8C9-469E-AAD5-364C09881B8A}" sibTransId="{AC756B1C-E9B8-4AF1-AAAF-F8402FE8B80B}"/>
-    <dgm:cxn modelId="{AE6FB6CA-9639-462E-96F4-59A30B62D0EB}" type="presOf" srcId="{F82601E6-6FF6-41B5-BDEF-C0E73D0B30BE}" destId="{17CA1487-CDD9-4364-92F6-A11DBDAFE16C}" srcOrd="0" destOrd="2" presId="urn:microsoft.com/office/officeart/2005/8/layout/hList1"/>
-    <dgm:cxn modelId="{CA949A5F-9945-4C59-A233-D70AFFF70BDA}" srcId="{DA5DFAD8-E443-4F53-9341-A0903BBBD378}" destId="{6EE89B4E-BAED-4A90-B29D-70AF11256801}" srcOrd="0" destOrd="0" parTransId="{39BF20C7-31E5-452B-8EA2-17224A13C7FB}" sibTransId="{E71503C3-CFB7-4144-AD9F-7A42A87A3A6B}"/>
-    <dgm:cxn modelId="{B12F0503-977A-4B5D-8CB7-420B041FF863}" srcId="{CF9FC193-7A05-4631-B681-B56EAB543D38}" destId="{6857B86A-DEC1-407C-A1BB-5BF9ACCBCA6A}" srcOrd="0" destOrd="0" parTransId="{8CA7BF9B-8199-4683-AD57-CB0086659013}" sibTransId="{F087F24E-A7D7-4DCE-B2A7-9B941289621A}"/>
-    <dgm:cxn modelId="{4E21C5D3-FA97-4E62-8CC9-01B68E76021E}" type="presOf" srcId="{ABA77F75-8642-4931-8D7E-BE6C6DB9940D}" destId="{055A5EAB-EAE0-4501-8649-31F112FF9AD5}" srcOrd="0" destOrd="0" presId="urn:microsoft.com/office/officeart/2005/8/layout/hList1"/>
-    <dgm:cxn modelId="{2A048A8A-D3E9-4D78-97F5-CDA37AB1D412}" type="presOf" srcId="{DA5DFAD8-E443-4F53-9341-A0903BBBD378}" destId="{23D06E36-F688-4B37-8BB8-73015E665B0E}" srcOrd="0" destOrd="0" presId="urn:microsoft.com/office/officeart/2005/8/layout/hList1"/>
-    <dgm:cxn modelId="{0073D4C3-F488-4F79-B637-186FAECF6BAD}" srcId="{CF9FC193-7A05-4631-B681-B56EAB543D38}" destId="{DA5DFAD8-E443-4F53-9341-A0903BBBD378}" srcOrd="2" destOrd="0" parTransId="{F6012B3B-01B0-4E7C-A363-0177B95D3DD8}" sibTransId="{76D9F54E-47B3-4FE0-B465-AD673964072E}"/>
-    <dgm:cxn modelId="{F270B5BD-559B-4711-AB5A-FD85478BE916}" srcId="{ABA77F75-8642-4931-8D7E-BE6C6DB9940D}" destId="{26ECA639-0A60-4D96-A34B-F5ACC75DAA0C}" srcOrd="2" destOrd="0" parTransId="{C4856BF6-9736-45B2-AF8E-AA325F8A725C}" sibTransId="{DA3F4B23-A392-40BF-A1BD-D150AE345EB0}"/>
-    <dgm:cxn modelId="{496CC152-66F4-4FEB-99ED-C8BD1F8A40F9}" srcId="{DA5DFAD8-E443-4F53-9341-A0903BBBD378}" destId="{4EA3F7C2-8BCE-45BE-A919-CBBB33285BD0}" srcOrd="1" destOrd="0" parTransId="{E5A5DB8F-AE1A-4DCD-9400-C8317BA7D81B}" sibTransId="{BC932F0D-8B77-458E-AF60-BC2FDCBE0C75}"/>
-    <dgm:cxn modelId="{052CD662-FA04-4C38-BDDB-2453E96D014D}" type="presOf" srcId="{B6B39D33-D046-47BE-829F-7DE9C1355A93}" destId="{17CA1487-CDD9-4364-92F6-A11DBDAFE16C}" srcOrd="0" destOrd="1" presId="urn:microsoft.com/office/officeart/2005/8/layout/hList1"/>
-    <dgm:cxn modelId="{5F12E8B9-000C-441B-B9E7-99ED7A20363B}" type="presOf" srcId="{6857B86A-DEC1-407C-A1BB-5BF9ACCBCA6A}" destId="{F0C1B2C7-0B23-4FE8-AB0F-5877B88532DB}" srcOrd="0" destOrd="0" presId="urn:microsoft.com/office/officeart/2005/8/layout/hList1"/>
-    <dgm:cxn modelId="{A1C8977F-9410-43CB-98CB-34EEA3A0F02D}" type="presOf" srcId="{4EA3F7C2-8BCE-45BE-A919-CBBB33285BD0}" destId="{EA81ED6A-A7EA-4137-A3DC-D16E79F1B938}" srcOrd="0" destOrd="1" presId="urn:microsoft.com/office/officeart/2005/8/layout/hList1"/>
-    <dgm:cxn modelId="{64A00AFB-D909-4E4F-881C-95919A0EED97}" srcId="{DA5DFAD8-E443-4F53-9341-A0903BBBD378}" destId="{388D911F-5131-4B95-8FCA-44355C31A787}" srcOrd="2" destOrd="0" parTransId="{90DE3C42-B930-4A61-B78B-7BCFF7A9C3BC}" sibTransId="{6C88182B-48B6-413C-BAE8-817D076D6F78}"/>
-    <dgm:cxn modelId="{E785B928-0A23-43BA-9D0D-4355335BED79}" srcId="{ABA77F75-8642-4931-8D7E-BE6C6DB9940D}" destId="{A84AA4D5-2E69-4308-B848-AF7C866DBA37}" srcOrd="1" destOrd="0" parTransId="{5AA60D0F-7C99-4FA0-90CA-9CD92DBEF3B7}" sibTransId="{195A1AC7-FDFE-47D0-B6D9-46AB9BA4736B}"/>
-    <dgm:cxn modelId="{F791BDAD-3CBB-4228-AE46-C0CD336D9884}" type="presOf" srcId="{26ECA639-0A60-4D96-A34B-F5ACC75DAA0C}" destId="{E4FD5043-5612-43C5-B6AE-CCD431549399}" srcOrd="0" destOrd="2" presId="urn:microsoft.com/office/officeart/2005/8/layout/hList1"/>
-    <dgm:cxn modelId="{F6983BDE-0D2B-4BD0-8BD5-4647B42A264E}" type="presOf" srcId="{388D911F-5131-4B95-8FCA-44355C31A787}" destId="{EA81ED6A-A7EA-4137-A3DC-D16E79F1B938}" srcOrd="0" destOrd="2" presId="urn:microsoft.com/office/officeart/2005/8/layout/hList1"/>
-    <dgm:cxn modelId="{D5D61B4C-1312-427C-BDCC-013237D8A488}" srcId="{ABA77F75-8642-4931-8D7E-BE6C6DB9940D}" destId="{611C3B18-07F8-4A66-9682-97E24AEF6014}" srcOrd="0" destOrd="0" parTransId="{5940BF2D-F08A-4150-9A86-173D9242DE8C}" sibTransId="{477660C6-2B6D-4FB8-B9A3-D555E2082C2A}"/>
-    <dgm:cxn modelId="{1FCB23E5-E983-4435-8A6F-78F13DE6D873}" srcId="{6857B86A-DEC1-407C-A1BB-5BF9ACCBCA6A}" destId="{F82601E6-6FF6-41B5-BDEF-C0E73D0B30BE}" srcOrd="2" destOrd="0" parTransId="{936C8FEA-0125-468F-AC7E-0D933F696D03}" sibTransId="{EAEC7697-68BC-4B26-A3B6-9BD23217CF44}"/>
-    <dgm:cxn modelId="{58D887E9-04DA-4285-827F-DA6F12BD080E}" type="presOf" srcId="{611C3B18-07F8-4A66-9682-97E24AEF6014}" destId="{E4FD5043-5612-43C5-B6AE-CCD431549399}" srcOrd="0" destOrd="0" presId="urn:microsoft.com/office/officeart/2005/8/layout/hList1"/>
-    <dgm:cxn modelId="{AAECF784-8F1D-4908-B93D-837F49AB8751}" type="presOf" srcId="{CF9FC193-7A05-4631-B681-B56EAB543D38}" destId="{DE3F77CF-6A8C-4783-A2CE-00E88C4199CB}" srcOrd="0" destOrd="0" presId="urn:microsoft.com/office/officeart/2005/8/layout/hList1"/>
-    <dgm:cxn modelId="{15558403-8721-4CBE-97C1-25F56F385AD1}" type="presOf" srcId="{A84AA4D5-2E69-4308-B848-AF7C866DBA37}" destId="{E4FD5043-5612-43C5-B6AE-CCD431549399}" srcOrd="0" destOrd="1" presId="urn:microsoft.com/office/officeart/2005/8/layout/hList1"/>
-    <dgm:cxn modelId="{1F4D79B9-0A03-4486-BB92-D4BA991ED70D}" type="presParOf" srcId="{DE3F77CF-6A8C-4783-A2CE-00E88C4199CB}" destId="{4E69B62D-7E76-4E06-9330-583771E53BDE}" srcOrd="0" destOrd="0" presId="urn:microsoft.com/office/officeart/2005/8/layout/hList1"/>
-    <dgm:cxn modelId="{EFFE150E-7CB3-4A38-AC57-820444F8E7BA}" type="presParOf" srcId="{4E69B62D-7E76-4E06-9330-583771E53BDE}" destId="{F0C1B2C7-0B23-4FE8-AB0F-5877B88532DB}" srcOrd="0" destOrd="0" presId="urn:microsoft.com/office/officeart/2005/8/layout/hList1"/>
-    <dgm:cxn modelId="{332F5817-5A55-4FC1-BA35-DBB23A0AD13C}" type="presParOf" srcId="{4E69B62D-7E76-4E06-9330-583771E53BDE}" destId="{17CA1487-CDD9-4364-92F6-A11DBDAFE16C}" srcOrd="1" destOrd="0" presId="urn:microsoft.com/office/officeart/2005/8/layout/hList1"/>
-    <dgm:cxn modelId="{697E9D8E-F51C-4123-B62B-291815C4E7C1}" type="presParOf" srcId="{DE3F77CF-6A8C-4783-A2CE-00E88C4199CB}" destId="{3FA24A66-31D3-4A69-B628-8BE88627B97D}" srcOrd="1" destOrd="0" presId="urn:microsoft.com/office/officeart/2005/8/layout/hList1"/>
-    <dgm:cxn modelId="{A09CCE6C-77C7-4B5A-B9DA-7E705F8B286E}" type="presParOf" srcId="{DE3F77CF-6A8C-4783-A2CE-00E88C4199CB}" destId="{3B158D6E-E3AA-49BB-988A-758B59ED8F3B}" srcOrd="2" destOrd="0" presId="urn:microsoft.com/office/officeart/2005/8/layout/hList1"/>
-    <dgm:cxn modelId="{817F5423-5421-4F7E-968E-B3D3A624058B}" type="presParOf" srcId="{3B158D6E-E3AA-49BB-988A-758B59ED8F3B}" destId="{055A5EAB-EAE0-4501-8649-31F112FF9AD5}" srcOrd="0" destOrd="0" presId="urn:microsoft.com/office/officeart/2005/8/layout/hList1"/>
-    <dgm:cxn modelId="{63113D3E-83F3-4A52-BAD6-246138FEC15C}" type="presParOf" srcId="{3B158D6E-E3AA-49BB-988A-758B59ED8F3B}" destId="{E4FD5043-5612-43C5-B6AE-CCD431549399}" srcOrd="1" destOrd="0" presId="urn:microsoft.com/office/officeart/2005/8/layout/hList1"/>
-    <dgm:cxn modelId="{6DF49720-E4F0-4625-B768-1FADCBFE92E0}" type="presParOf" srcId="{DE3F77CF-6A8C-4783-A2CE-00E88C4199CB}" destId="{3E20F600-AFBC-427F-8295-F096F694BC17}" srcOrd="3" destOrd="0" presId="urn:microsoft.com/office/officeart/2005/8/layout/hList1"/>
-    <dgm:cxn modelId="{C0F7FF12-72ED-4C65-8A42-67FCEE3903CF}" type="presParOf" srcId="{DE3F77CF-6A8C-4783-A2CE-00E88C4199CB}" destId="{173DA3A6-F783-42D4-9ED8-FD330979BCEA}" srcOrd="4" destOrd="0" presId="urn:microsoft.com/office/officeart/2005/8/layout/hList1"/>
-    <dgm:cxn modelId="{67AEDA95-4E81-49EB-9136-C42824BC288A}" type="presParOf" srcId="{173DA3A6-F783-42D4-9ED8-FD330979BCEA}" destId="{23D06E36-F688-4B37-8BB8-73015E665B0E}" srcOrd="0" destOrd="0" presId="urn:microsoft.com/office/officeart/2005/8/layout/hList1"/>
-    <dgm:cxn modelId="{190091E1-69E5-482F-89E9-B5A6338D6BCD}" type="presParOf" srcId="{173DA3A6-F783-42D4-9ED8-FD330979BCEA}" destId="{EA81ED6A-A7EA-4137-A3DC-D16E79F1B938}" srcOrd="1" destOrd="0" presId="urn:microsoft.com/office/officeart/2005/8/layout/hList1"/>
-  </dgm:cxnLst>
-  <dgm:bg/>
-  <dgm:whole/>
-  <dgm:extLst>
-    <a:ext uri="http://schemas.microsoft.com/office/drawing/2008/diagram">
-      <dsp:dataModelExt xmlns:dsp="http://schemas.microsoft.com/office/drawing/2008/diagram" relId="rId7" minVer="http://schemas.openxmlformats.org/drawingml/2006/diagram"/>
-    </a:ext>
-  </dgm:extLst>
-</dgm:dataModel>
-</file>
-
 <file path=ppt/diagrams/drawing1.xml><?xml version="1.0" encoding="utf-8"?>
 <dsp:drawing xmlns:dgm="http://schemas.openxmlformats.org/drawingml/2006/diagram" xmlns:dsp="http://schemas.microsoft.com/office/drawing/2008/diagram" xmlns:a="http://schemas.openxmlformats.org/drawingml/2006/main">
   <dsp:spTree>
@@ -3679,648 +2191,6 @@
 </dsp:drawing>
 </file>
 
-<file path=ppt/diagrams/drawing2.xml><?xml version="1.0" encoding="utf-8"?>
-<dsp:drawing xmlns:dgm="http://schemas.openxmlformats.org/drawingml/2006/diagram" xmlns:dsp="http://schemas.microsoft.com/office/drawing/2008/diagram" xmlns:a="http://schemas.openxmlformats.org/drawingml/2006/main">
-  <dsp:spTree>
-    <dsp:nvGrpSpPr>
-      <dsp:cNvPr id="0" name=""/>
-      <dsp:cNvGrpSpPr/>
-    </dsp:nvGrpSpPr>
-    <dsp:grpSpPr/>
-    <dsp:sp modelId="{F0C1B2C7-0B23-4FE8-AB0F-5877B88532DB}">
-      <dsp:nvSpPr>
-        <dsp:cNvPr id="0" name=""/>
-        <dsp:cNvSpPr/>
-      </dsp:nvSpPr>
-      <dsp:spPr>
-        <a:xfrm>
-          <a:off x="3535" y="115580"/>
-          <a:ext cx="3447370" cy="662400"/>
-        </a:xfrm>
-        <a:prstGeom prst="rect">
-          <a:avLst/>
-        </a:prstGeom>
-        <a:solidFill>
-          <a:schemeClr val="accent1">
-            <a:hueOff val="0"/>
-            <a:satOff val="0"/>
-            <a:lumOff val="0"/>
-            <a:alphaOff val="0"/>
-          </a:schemeClr>
-        </a:solidFill>
-        <a:ln w="15875" cap="flat" cmpd="sng" algn="ctr">
-          <a:solidFill>
-            <a:schemeClr val="accent1">
-              <a:hueOff val="0"/>
-              <a:satOff val="0"/>
-              <a:lumOff val="0"/>
-              <a:alphaOff val="0"/>
-            </a:schemeClr>
-          </a:solidFill>
-          <a:prstDash val="solid"/>
-        </a:ln>
-        <a:effectLst/>
-      </dsp:spPr>
-      <dsp:style>
-        <a:lnRef idx="2">
-          <a:scrgbClr r="0" g="0" b="0"/>
-        </a:lnRef>
-        <a:fillRef idx="1">
-          <a:scrgbClr r="0" g="0" b="0"/>
-        </a:fillRef>
-        <a:effectRef idx="0">
-          <a:scrgbClr r="0" g="0" b="0"/>
-        </a:effectRef>
-        <a:fontRef idx="minor">
-          <a:schemeClr val="lt1"/>
-        </a:fontRef>
-      </dsp:style>
-      <dsp:txBody>
-        <a:bodyPr spcFirstLastPara="0" vert="horz" wrap="square" lIns="163576" tIns="93472" rIns="163576" bIns="93472" numCol="1" spcCol="1270" rtlCol="0" anchor="ctr" anchorCtr="0">
-          <a:noAutofit/>
-        </a:bodyPr>
-        <a:lstStyle/>
-        <a:p>
-          <a:pPr lvl="0" algn="ctr" defTabSz="1022350" rtl="0">
-            <a:lnSpc>
-              <a:spcPct val="90000"/>
-            </a:lnSpc>
-            <a:spcBef>
-              <a:spcPct val="0"/>
-            </a:spcBef>
-            <a:spcAft>
-              <a:spcPct val="35000"/>
-            </a:spcAft>
-          </a:pPr>
-          <a:r>
-            <a:rPr lang="fr" sz="2300" kern="1200">
-              <a:latin typeface="Tahoma" panose="020B0604030504040204" pitchFamily="34" charset="0"/>
-              <a:ea typeface="Tahoma" panose="020B0604030504040204" pitchFamily="34" charset="0"/>
-              <a:cs typeface="Tahoma" panose="020B0604030504040204" pitchFamily="34" charset="0"/>
-            </a:rPr>
-            <a:t>Solution 1</a:t>
-          </a:r>
-        </a:p>
-      </dsp:txBody>
-      <dsp:txXfrm>
-        <a:off x="3535" y="115580"/>
-        <a:ext cx="3447370" cy="662400"/>
-      </dsp:txXfrm>
-    </dsp:sp>
-    <dsp:sp modelId="{17CA1487-CDD9-4364-92F6-A11DBDAFE16C}">
-      <dsp:nvSpPr>
-        <dsp:cNvPr id="0" name=""/>
-        <dsp:cNvSpPr/>
-      </dsp:nvSpPr>
-      <dsp:spPr>
-        <a:xfrm>
-          <a:off x="3535" y="777980"/>
-          <a:ext cx="3447370" cy="3598695"/>
-        </a:xfrm>
-        <a:prstGeom prst="rect">
-          <a:avLst/>
-        </a:prstGeom>
-        <a:solidFill>
-          <a:schemeClr val="accent1">
-            <a:alpha val="90000"/>
-            <a:tint val="40000"/>
-            <a:hueOff val="0"/>
-            <a:satOff val="0"/>
-            <a:lumOff val="0"/>
-            <a:alphaOff val="0"/>
-          </a:schemeClr>
-        </a:solidFill>
-        <a:ln w="15875" cap="flat" cmpd="sng" algn="ctr">
-          <a:solidFill>
-            <a:schemeClr val="accent1">
-              <a:alpha val="90000"/>
-              <a:tint val="40000"/>
-              <a:hueOff val="0"/>
-              <a:satOff val="0"/>
-              <a:lumOff val="0"/>
-              <a:alphaOff val="0"/>
-            </a:schemeClr>
-          </a:solidFill>
-          <a:prstDash val="solid"/>
-        </a:ln>
-        <a:effectLst/>
-      </dsp:spPr>
-      <dsp:style>
-        <a:lnRef idx="2">
-          <a:scrgbClr r="0" g="0" b="0"/>
-        </a:lnRef>
-        <a:fillRef idx="1">
-          <a:scrgbClr r="0" g="0" b="0"/>
-        </a:fillRef>
-        <a:effectRef idx="0">
-          <a:scrgbClr r="0" g="0" b="0"/>
-        </a:effectRef>
-        <a:fontRef idx="minor"/>
-      </dsp:style>
-      <dsp:txBody>
-        <a:bodyPr spcFirstLastPara="0" vert="horz" wrap="square" lIns="122682" tIns="122682" rIns="163576" bIns="184023" numCol="1" spcCol="1270" rtlCol="0" anchor="t" anchorCtr="0">
-          <a:noAutofit/>
-        </a:bodyPr>
-        <a:lstStyle/>
-        <a:p>
-          <a:pPr marL="228600" lvl="1" indent="-228600" algn="l" defTabSz="1022350" rtl="0">
-            <a:lnSpc>
-              <a:spcPct val="90000"/>
-            </a:lnSpc>
-            <a:spcBef>
-              <a:spcPct val="0"/>
-            </a:spcBef>
-            <a:spcAft>
-              <a:spcPct val="15000"/>
-            </a:spcAft>
-            <a:buFont typeface="Wingdings" panose="05000000000000000000" pitchFamily="2" charset="2"/>
-            <a:buChar char="••"/>
-          </a:pPr>
-          <a:r>
-            <a:rPr lang="fr" sz="2300" kern="1200">
-              <a:latin typeface="Tahoma" panose="020B0604030504040204" pitchFamily="34" charset="0"/>
-              <a:ea typeface="Tahoma" panose="020B0604030504040204" pitchFamily="34" charset="0"/>
-              <a:cs typeface="Tahoma" panose="020B0604030504040204" pitchFamily="34" charset="0"/>
-            </a:rPr>
-            <a:t>Quels matériaux cette solution requiert-elle ?</a:t>
-          </a:r>
-        </a:p>
-        <a:p>
-          <a:pPr marL="228600" lvl="1" indent="-228600" algn="l" defTabSz="1022350" rtl="0">
-            <a:lnSpc>
-              <a:spcPct val="90000"/>
-            </a:lnSpc>
-            <a:spcBef>
-              <a:spcPct val="0"/>
-            </a:spcBef>
-            <a:spcAft>
-              <a:spcPct val="15000"/>
-            </a:spcAft>
-            <a:buFont typeface="Wingdings" panose="05000000000000000000" pitchFamily="2" charset="2"/>
-            <a:buChar char="••"/>
-          </a:pPr>
-          <a:r>
-            <a:rPr lang="fr" sz="2300" kern="1200">
-              <a:latin typeface="Tahoma" panose="020B0604030504040204" pitchFamily="34" charset="0"/>
-              <a:ea typeface="Tahoma" panose="020B0604030504040204" pitchFamily="34" charset="0"/>
-              <a:cs typeface="Tahoma" panose="020B0604030504040204" pitchFamily="34" charset="0"/>
-            </a:rPr>
-            <a:t>À quoi cette solution ressemblera-t-elle (dessin, images, texte, etc.) ?</a:t>
-          </a:r>
-        </a:p>
-        <a:p>
-          <a:pPr marL="228600" lvl="1" indent="-228600" algn="l" defTabSz="1022350" rtl="0">
-            <a:lnSpc>
-              <a:spcPct val="90000"/>
-            </a:lnSpc>
-            <a:spcBef>
-              <a:spcPct val="0"/>
-            </a:spcBef>
-            <a:spcAft>
-              <a:spcPct val="15000"/>
-            </a:spcAft>
-            <a:buFont typeface="Wingdings" panose="05000000000000000000" pitchFamily="2" charset="2"/>
-            <a:buChar char="••"/>
-          </a:pPr>
-          <a:r>
-            <a:rPr lang="fr" sz="2300" kern="1200">
-              <a:latin typeface="Tahoma" panose="020B0604030504040204" pitchFamily="34" charset="0"/>
-              <a:ea typeface="Tahoma" panose="020B0604030504040204" pitchFamily="34" charset="0"/>
-              <a:cs typeface="Tahoma" panose="020B0604030504040204" pitchFamily="34" charset="0"/>
-            </a:rPr>
-            <a:t>Quels obstacles pouvez-vous rencontrer avec cette solution ?</a:t>
-          </a:r>
-        </a:p>
-      </dsp:txBody>
-      <dsp:txXfrm>
-        <a:off x="3535" y="777980"/>
-        <a:ext cx="3447370" cy="3598695"/>
-      </dsp:txXfrm>
-    </dsp:sp>
-    <dsp:sp modelId="{055A5EAB-EAE0-4501-8649-31F112FF9AD5}">
-      <dsp:nvSpPr>
-        <dsp:cNvPr id="0" name=""/>
-        <dsp:cNvSpPr/>
-      </dsp:nvSpPr>
-      <dsp:spPr>
-        <a:xfrm>
-          <a:off x="3933537" y="115580"/>
-          <a:ext cx="3447370" cy="662400"/>
-        </a:xfrm>
-        <a:prstGeom prst="rect">
-          <a:avLst/>
-        </a:prstGeom>
-        <a:solidFill>
-          <a:schemeClr val="accent1">
-            <a:hueOff val="0"/>
-            <a:satOff val="0"/>
-            <a:lumOff val="0"/>
-            <a:alphaOff val="0"/>
-          </a:schemeClr>
-        </a:solidFill>
-        <a:ln w="15875" cap="flat" cmpd="sng" algn="ctr">
-          <a:solidFill>
-            <a:schemeClr val="accent1">
-              <a:hueOff val="0"/>
-              <a:satOff val="0"/>
-              <a:lumOff val="0"/>
-              <a:alphaOff val="0"/>
-            </a:schemeClr>
-          </a:solidFill>
-          <a:prstDash val="solid"/>
-        </a:ln>
-        <a:effectLst/>
-      </dsp:spPr>
-      <dsp:style>
-        <a:lnRef idx="2">
-          <a:scrgbClr r="0" g="0" b="0"/>
-        </a:lnRef>
-        <a:fillRef idx="1">
-          <a:scrgbClr r="0" g="0" b="0"/>
-        </a:fillRef>
-        <a:effectRef idx="0">
-          <a:scrgbClr r="0" g="0" b="0"/>
-        </a:effectRef>
-        <a:fontRef idx="minor">
-          <a:schemeClr val="lt1"/>
-        </a:fontRef>
-      </dsp:style>
-      <dsp:txBody>
-        <a:bodyPr spcFirstLastPara="0" vert="horz" wrap="square" lIns="163576" tIns="93472" rIns="163576" bIns="93472" numCol="1" spcCol="1270" rtlCol="0" anchor="ctr" anchorCtr="0">
-          <a:noAutofit/>
-        </a:bodyPr>
-        <a:lstStyle/>
-        <a:p>
-          <a:pPr lvl="0" algn="ctr" defTabSz="1022350" rtl="0">
-            <a:lnSpc>
-              <a:spcPct val="90000"/>
-            </a:lnSpc>
-            <a:spcBef>
-              <a:spcPct val="0"/>
-            </a:spcBef>
-            <a:spcAft>
-              <a:spcPct val="35000"/>
-            </a:spcAft>
-          </a:pPr>
-          <a:r>
-            <a:rPr lang="fr" sz="2300" kern="1200">
-              <a:latin typeface="Tahoma" panose="020B0604030504040204" pitchFamily="34" charset="0"/>
-              <a:ea typeface="Tahoma" panose="020B0604030504040204" pitchFamily="34" charset="0"/>
-              <a:cs typeface="Tahoma" panose="020B0604030504040204" pitchFamily="34" charset="0"/>
-            </a:rPr>
-            <a:t>Solution 2</a:t>
-          </a:r>
-        </a:p>
-      </dsp:txBody>
-      <dsp:txXfrm>
-        <a:off x="3933537" y="115580"/>
-        <a:ext cx="3447370" cy="662400"/>
-      </dsp:txXfrm>
-    </dsp:sp>
-    <dsp:sp modelId="{E4FD5043-5612-43C5-B6AE-CCD431549399}">
-      <dsp:nvSpPr>
-        <dsp:cNvPr id="0" name=""/>
-        <dsp:cNvSpPr/>
-      </dsp:nvSpPr>
-      <dsp:spPr>
-        <a:xfrm>
-          <a:off x="3933537" y="777980"/>
-          <a:ext cx="3447370" cy="3598695"/>
-        </a:xfrm>
-        <a:prstGeom prst="rect">
-          <a:avLst/>
-        </a:prstGeom>
-        <a:solidFill>
-          <a:schemeClr val="accent1">
-            <a:alpha val="90000"/>
-            <a:tint val="40000"/>
-            <a:hueOff val="0"/>
-            <a:satOff val="0"/>
-            <a:lumOff val="0"/>
-            <a:alphaOff val="0"/>
-          </a:schemeClr>
-        </a:solidFill>
-        <a:ln w="15875" cap="flat" cmpd="sng" algn="ctr">
-          <a:solidFill>
-            <a:schemeClr val="accent1">
-              <a:alpha val="90000"/>
-              <a:tint val="40000"/>
-              <a:hueOff val="0"/>
-              <a:satOff val="0"/>
-              <a:lumOff val="0"/>
-              <a:alphaOff val="0"/>
-            </a:schemeClr>
-          </a:solidFill>
-          <a:prstDash val="solid"/>
-        </a:ln>
-        <a:effectLst/>
-      </dsp:spPr>
-      <dsp:style>
-        <a:lnRef idx="2">
-          <a:scrgbClr r="0" g="0" b="0"/>
-        </a:lnRef>
-        <a:fillRef idx="1">
-          <a:scrgbClr r="0" g="0" b="0"/>
-        </a:fillRef>
-        <a:effectRef idx="0">
-          <a:scrgbClr r="0" g="0" b="0"/>
-        </a:effectRef>
-        <a:fontRef idx="minor"/>
-      </dsp:style>
-      <dsp:txBody>
-        <a:bodyPr spcFirstLastPara="0" vert="horz" wrap="square" lIns="122682" tIns="122682" rIns="163576" bIns="184023" numCol="1" spcCol="1270" rtlCol="0" anchor="t" anchorCtr="0">
-          <a:noAutofit/>
-        </a:bodyPr>
-        <a:lstStyle/>
-        <a:p>
-          <a:pPr marL="228600" lvl="1" indent="-228600" algn="l" defTabSz="1022350" rtl="0">
-            <a:lnSpc>
-              <a:spcPct val="90000"/>
-            </a:lnSpc>
-            <a:spcBef>
-              <a:spcPct val="0"/>
-            </a:spcBef>
-            <a:spcAft>
-              <a:spcPct val="15000"/>
-            </a:spcAft>
-            <a:buFont typeface="Wingdings" panose="05000000000000000000" pitchFamily="2" charset="2"/>
-            <a:buChar char="••"/>
-          </a:pPr>
-          <a:r>
-            <a:rPr lang="fr" sz="2300" kern="1200">
-              <a:latin typeface="Tahoma" panose="020B0604030504040204" pitchFamily="34" charset="0"/>
-              <a:ea typeface="Tahoma" panose="020B0604030504040204" pitchFamily="34" charset="0"/>
-              <a:cs typeface="Tahoma" panose="020B0604030504040204" pitchFamily="34" charset="0"/>
-            </a:rPr>
-            <a:t>Quels matériaux cette solution requiert-elle ?</a:t>
-          </a:r>
-        </a:p>
-        <a:p>
-          <a:pPr marL="228600" lvl="1" indent="-228600" algn="l" defTabSz="1022350" rtl="0">
-            <a:lnSpc>
-              <a:spcPct val="90000"/>
-            </a:lnSpc>
-            <a:spcBef>
-              <a:spcPct val="0"/>
-            </a:spcBef>
-            <a:spcAft>
-              <a:spcPct val="15000"/>
-            </a:spcAft>
-            <a:buFont typeface="Wingdings" panose="05000000000000000000" pitchFamily="2" charset="2"/>
-            <a:buChar char="••"/>
-          </a:pPr>
-          <a:r>
-            <a:rPr lang="fr" sz="2300" kern="1200">
-              <a:latin typeface="Tahoma" panose="020B0604030504040204" pitchFamily="34" charset="0"/>
-              <a:ea typeface="Tahoma" panose="020B0604030504040204" pitchFamily="34" charset="0"/>
-              <a:cs typeface="Tahoma" panose="020B0604030504040204" pitchFamily="34" charset="0"/>
-            </a:rPr>
-            <a:t>À quoi cette solution ressemblera-t-elle (dessin, images, texte, etc.) ?</a:t>
-          </a:r>
-        </a:p>
-        <a:p>
-          <a:pPr marL="228600" lvl="1" indent="-228600" algn="l" defTabSz="1022350" rtl="0">
-            <a:lnSpc>
-              <a:spcPct val="90000"/>
-            </a:lnSpc>
-            <a:spcBef>
-              <a:spcPct val="0"/>
-            </a:spcBef>
-            <a:spcAft>
-              <a:spcPct val="15000"/>
-            </a:spcAft>
-            <a:buFont typeface="Wingdings" panose="05000000000000000000" pitchFamily="2" charset="2"/>
-            <a:buChar char="••"/>
-          </a:pPr>
-          <a:r>
-            <a:rPr lang="fr" sz="2300" kern="1200">
-              <a:latin typeface="Tahoma" panose="020B0604030504040204" pitchFamily="34" charset="0"/>
-              <a:ea typeface="Tahoma" panose="020B0604030504040204" pitchFamily="34" charset="0"/>
-              <a:cs typeface="Tahoma" panose="020B0604030504040204" pitchFamily="34" charset="0"/>
-            </a:rPr>
-            <a:t>Quels obstacles pouvez-vous rencontrer avec cette solution ?</a:t>
-          </a:r>
-        </a:p>
-      </dsp:txBody>
-      <dsp:txXfrm>
-        <a:off x="3933537" y="777980"/>
-        <a:ext cx="3447370" cy="3598695"/>
-      </dsp:txXfrm>
-    </dsp:sp>
-    <dsp:sp modelId="{23D06E36-F688-4B37-8BB8-73015E665B0E}">
-      <dsp:nvSpPr>
-        <dsp:cNvPr id="0" name=""/>
-        <dsp:cNvSpPr/>
-      </dsp:nvSpPr>
-      <dsp:spPr>
-        <a:xfrm>
-          <a:off x="7863539" y="115580"/>
-          <a:ext cx="3447370" cy="662400"/>
-        </a:xfrm>
-        <a:prstGeom prst="rect">
-          <a:avLst/>
-        </a:prstGeom>
-        <a:solidFill>
-          <a:schemeClr val="accent1">
-            <a:hueOff val="0"/>
-            <a:satOff val="0"/>
-            <a:lumOff val="0"/>
-            <a:alphaOff val="0"/>
-          </a:schemeClr>
-        </a:solidFill>
-        <a:ln w="15875" cap="flat" cmpd="sng" algn="ctr">
-          <a:solidFill>
-            <a:schemeClr val="accent1">
-              <a:hueOff val="0"/>
-              <a:satOff val="0"/>
-              <a:lumOff val="0"/>
-              <a:alphaOff val="0"/>
-            </a:schemeClr>
-          </a:solidFill>
-          <a:prstDash val="solid"/>
-        </a:ln>
-        <a:effectLst/>
-      </dsp:spPr>
-      <dsp:style>
-        <a:lnRef idx="2">
-          <a:scrgbClr r="0" g="0" b="0"/>
-        </a:lnRef>
-        <a:fillRef idx="1">
-          <a:scrgbClr r="0" g="0" b="0"/>
-        </a:fillRef>
-        <a:effectRef idx="0">
-          <a:scrgbClr r="0" g="0" b="0"/>
-        </a:effectRef>
-        <a:fontRef idx="minor">
-          <a:schemeClr val="lt1"/>
-        </a:fontRef>
-      </dsp:style>
-      <dsp:txBody>
-        <a:bodyPr spcFirstLastPara="0" vert="horz" wrap="square" lIns="163576" tIns="93472" rIns="163576" bIns="93472" numCol="1" spcCol="1270" rtlCol="0" anchor="ctr" anchorCtr="0">
-          <a:noAutofit/>
-        </a:bodyPr>
-        <a:lstStyle/>
-        <a:p>
-          <a:pPr lvl="0" algn="ctr" defTabSz="1022350" rtl="0">
-            <a:lnSpc>
-              <a:spcPct val="90000"/>
-            </a:lnSpc>
-            <a:spcBef>
-              <a:spcPct val="0"/>
-            </a:spcBef>
-            <a:spcAft>
-              <a:spcPct val="35000"/>
-            </a:spcAft>
-          </a:pPr>
-          <a:r>
-            <a:rPr lang="fr" sz="2300" kern="1200">
-              <a:latin typeface="Tahoma" panose="020B0604030504040204" pitchFamily="34" charset="0"/>
-              <a:ea typeface="Tahoma" panose="020B0604030504040204" pitchFamily="34" charset="0"/>
-              <a:cs typeface="Tahoma" panose="020B0604030504040204" pitchFamily="34" charset="0"/>
-            </a:rPr>
-            <a:t>Solution 3</a:t>
-          </a:r>
-        </a:p>
-      </dsp:txBody>
-      <dsp:txXfrm>
-        <a:off x="7863539" y="115580"/>
-        <a:ext cx="3447370" cy="662400"/>
-      </dsp:txXfrm>
-    </dsp:sp>
-    <dsp:sp modelId="{EA81ED6A-A7EA-4137-A3DC-D16E79F1B938}">
-      <dsp:nvSpPr>
-        <dsp:cNvPr id="0" name=""/>
-        <dsp:cNvSpPr/>
-      </dsp:nvSpPr>
-      <dsp:spPr>
-        <a:xfrm>
-          <a:off x="7863539" y="777980"/>
-          <a:ext cx="3447370" cy="3598695"/>
-        </a:xfrm>
-        <a:prstGeom prst="rect">
-          <a:avLst/>
-        </a:prstGeom>
-        <a:solidFill>
-          <a:schemeClr val="accent1">
-            <a:alpha val="90000"/>
-            <a:tint val="40000"/>
-            <a:hueOff val="0"/>
-            <a:satOff val="0"/>
-            <a:lumOff val="0"/>
-            <a:alphaOff val="0"/>
-          </a:schemeClr>
-        </a:solidFill>
-        <a:ln w="15875" cap="flat" cmpd="sng" algn="ctr">
-          <a:solidFill>
-            <a:schemeClr val="accent1">
-              <a:alpha val="90000"/>
-              <a:tint val="40000"/>
-              <a:hueOff val="0"/>
-              <a:satOff val="0"/>
-              <a:lumOff val="0"/>
-              <a:alphaOff val="0"/>
-            </a:schemeClr>
-          </a:solidFill>
-          <a:prstDash val="solid"/>
-        </a:ln>
-        <a:effectLst/>
-      </dsp:spPr>
-      <dsp:style>
-        <a:lnRef idx="2">
-          <a:scrgbClr r="0" g="0" b="0"/>
-        </a:lnRef>
-        <a:fillRef idx="1">
-          <a:scrgbClr r="0" g="0" b="0"/>
-        </a:fillRef>
-        <a:effectRef idx="0">
-          <a:scrgbClr r="0" g="0" b="0"/>
-        </a:effectRef>
-        <a:fontRef idx="minor"/>
-      </dsp:style>
-      <dsp:txBody>
-        <a:bodyPr spcFirstLastPara="0" vert="horz" wrap="square" lIns="122682" tIns="122682" rIns="163576" bIns="184023" numCol="1" spcCol="1270" rtlCol="0" anchor="t" anchorCtr="0">
-          <a:noAutofit/>
-        </a:bodyPr>
-        <a:lstStyle/>
-        <a:p>
-          <a:pPr marL="228600" lvl="1" indent="-228600" algn="l" defTabSz="1022350" rtl="0">
-            <a:lnSpc>
-              <a:spcPct val="90000"/>
-            </a:lnSpc>
-            <a:spcBef>
-              <a:spcPct val="0"/>
-            </a:spcBef>
-            <a:spcAft>
-              <a:spcPct val="15000"/>
-            </a:spcAft>
-            <a:buFont typeface="Wingdings" panose="05000000000000000000" pitchFamily="2" charset="2"/>
-            <a:buChar char="••"/>
-          </a:pPr>
-          <a:r>
-            <a:rPr lang="fr" sz="2300" kern="1200">
-              <a:latin typeface="Tahoma" panose="020B0604030504040204" pitchFamily="34" charset="0"/>
-              <a:ea typeface="Tahoma" panose="020B0604030504040204" pitchFamily="34" charset="0"/>
-              <a:cs typeface="Tahoma" panose="020B0604030504040204" pitchFamily="34" charset="0"/>
-            </a:rPr>
-            <a:t>Quels matériaux cette solution requiert-elle ?</a:t>
-          </a:r>
-        </a:p>
-        <a:p>
-          <a:pPr marL="228600" lvl="1" indent="-228600" algn="l" defTabSz="1022350" rtl="0">
-            <a:lnSpc>
-              <a:spcPct val="90000"/>
-            </a:lnSpc>
-            <a:spcBef>
-              <a:spcPct val="0"/>
-            </a:spcBef>
-            <a:spcAft>
-              <a:spcPct val="15000"/>
-            </a:spcAft>
-            <a:buFont typeface="Wingdings" panose="05000000000000000000" pitchFamily="2" charset="2"/>
-            <a:buChar char="••"/>
-          </a:pPr>
-          <a:r>
-            <a:rPr lang="fr" sz="2300" kern="1200">
-              <a:latin typeface="Tahoma" panose="020B0604030504040204" pitchFamily="34" charset="0"/>
-              <a:ea typeface="Tahoma" panose="020B0604030504040204" pitchFamily="34" charset="0"/>
-              <a:cs typeface="Tahoma" panose="020B0604030504040204" pitchFamily="34" charset="0"/>
-            </a:rPr>
-            <a:t>À quoi cette solution ressemblera-t-elle (dessin, images, texte, etc.) ?</a:t>
-          </a:r>
-        </a:p>
-        <a:p>
-          <a:pPr marL="228600" lvl="1" indent="-228600" algn="l" defTabSz="1022350" rtl="0">
-            <a:lnSpc>
-              <a:spcPct val="90000"/>
-            </a:lnSpc>
-            <a:spcBef>
-              <a:spcPct val="0"/>
-            </a:spcBef>
-            <a:spcAft>
-              <a:spcPct val="15000"/>
-            </a:spcAft>
-            <a:buFont typeface="Wingdings" panose="05000000000000000000" pitchFamily="2" charset="2"/>
-            <a:buChar char="••"/>
-          </a:pPr>
-          <a:r>
-            <a:rPr lang="fr" sz="2300" kern="1200">
-              <a:latin typeface="Tahoma" panose="020B0604030504040204" pitchFamily="34" charset="0"/>
-              <a:ea typeface="Tahoma" panose="020B0604030504040204" pitchFamily="34" charset="0"/>
-              <a:cs typeface="Tahoma" panose="020B0604030504040204" pitchFamily="34" charset="0"/>
-            </a:rPr>
-            <a:t>Quels obstacles pouvez-vous rencontrer avec cette solution ?</a:t>
-          </a:r>
-        </a:p>
-      </dsp:txBody>
-      <dsp:txXfrm>
-        <a:off x="7863539" y="777980"/>
-        <a:ext cx="3447370" cy="3598695"/>
-      </dsp:txXfrm>
-    </dsp:sp>
-  </dsp:spTree>
-</dsp:drawing>
-</file>
-
 <file path=ppt/diagrams/layout1.xml><?xml version="1.0" encoding="utf-8"?>
 <dgm:layoutDef xmlns:dgm="http://schemas.openxmlformats.org/drawingml/2006/diagram" xmlns:a="http://schemas.openxmlformats.org/drawingml/2006/main" uniqueId="urn:microsoft.com/office/officeart/2005/8/layout/vList5">
   <dgm:title val=""/>
@@ -4554,1258 +2424,7 @@
 </dgm:layoutDef>
 </file>
 
-<file path=ppt/diagrams/layout2.xml><?xml version="1.0" encoding="utf-8"?>
-<dgm:layoutDef xmlns:dgm="http://schemas.openxmlformats.org/drawingml/2006/diagram" xmlns:a="http://schemas.openxmlformats.org/drawingml/2006/main" uniqueId="urn:microsoft.com/office/officeart/2005/8/layout/hList1">
-  <dgm:title val=""/>
-  <dgm:desc val=""/>
-  <dgm:catLst>
-    <dgm:cat type="list" pri="5000"/>
-    <dgm:cat type="convert" pri="5000"/>
-  </dgm:catLst>
-  <dgm:sampData>
-    <dgm:dataModel>
-      <dgm:ptLst>
-        <dgm:pt modelId="0" type="doc"/>
-        <dgm:pt modelId="1">
-          <dgm:prSet phldr="1"/>
-        </dgm:pt>
-        <dgm:pt modelId="11">
-          <dgm:prSet phldr="1"/>
-        </dgm:pt>
-        <dgm:pt modelId="12">
-          <dgm:prSet phldr="1"/>
-        </dgm:pt>
-        <dgm:pt modelId="2">
-          <dgm:prSet phldr="1"/>
-        </dgm:pt>
-        <dgm:pt modelId="21">
-          <dgm:prSet phldr="1"/>
-        </dgm:pt>
-        <dgm:pt modelId="22">
-          <dgm:prSet phldr="1"/>
-        </dgm:pt>
-        <dgm:pt modelId="3">
-          <dgm:prSet phldr="1"/>
-        </dgm:pt>
-        <dgm:pt modelId="31">
-          <dgm:prSet phldr="1"/>
-        </dgm:pt>
-        <dgm:pt modelId="32">
-          <dgm:prSet phldr="1"/>
-        </dgm:pt>
-      </dgm:ptLst>
-      <dgm:cxnLst>
-        <dgm:cxn modelId="4" srcId="0" destId="1" srcOrd="0" destOrd="0"/>
-        <dgm:cxn modelId="5" srcId="0" destId="2" srcOrd="1" destOrd="0"/>
-        <dgm:cxn modelId="6" srcId="0" destId="3" srcOrd="2" destOrd="0"/>
-        <dgm:cxn modelId="13" srcId="1" destId="11" srcOrd="0" destOrd="0"/>
-        <dgm:cxn modelId="14" srcId="1" destId="12" srcOrd="1" destOrd="0"/>
-        <dgm:cxn modelId="23" srcId="2" destId="21" srcOrd="0" destOrd="0"/>
-        <dgm:cxn modelId="24" srcId="2" destId="22" srcOrd="1" destOrd="0"/>
-        <dgm:cxn modelId="33" srcId="3" destId="31" srcOrd="0" destOrd="0"/>
-        <dgm:cxn modelId="34" srcId="3" destId="32" srcOrd="1" destOrd="0"/>
-      </dgm:cxnLst>
-      <dgm:bg/>
-      <dgm:whole/>
-    </dgm:dataModel>
-  </dgm:sampData>
-  <dgm:styleData>
-    <dgm:dataModel>
-      <dgm:ptLst>
-        <dgm:pt modelId="0" type="doc"/>
-        <dgm:pt modelId="1">
-          <dgm:prSet phldr="1"/>
-        </dgm:pt>
-        <dgm:pt modelId="2">
-          <dgm:prSet phldr="1"/>
-        </dgm:pt>
-      </dgm:ptLst>
-      <dgm:cxnLst>
-        <dgm:cxn modelId="3" srcId="0" destId="1" srcOrd="0" destOrd="0"/>
-        <dgm:cxn modelId="4" srcId="0" destId="2" srcOrd="1" destOrd="0"/>
-      </dgm:cxnLst>
-      <dgm:bg/>
-      <dgm:whole/>
-    </dgm:dataModel>
-  </dgm:styleData>
-  <dgm:clrData>
-    <dgm:dataModel>
-      <dgm:ptLst>
-        <dgm:pt modelId="0" type="doc"/>
-        <dgm:pt modelId="1">
-          <dgm:prSet phldr="1"/>
-        </dgm:pt>
-        <dgm:pt modelId="2">
-          <dgm:prSet phldr="1"/>
-        </dgm:pt>
-        <dgm:pt modelId="3">
-          <dgm:prSet phldr="1"/>
-        </dgm:pt>
-        <dgm:pt modelId="4">
-          <dgm:prSet phldr="1"/>
-        </dgm:pt>
-      </dgm:ptLst>
-      <dgm:cxnLst>
-        <dgm:cxn modelId="5" srcId="0" destId="1" srcOrd="0" destOrd="0"/>
-        <dgm:cxn modelId="6" srcId="0" destId="2" srcOrd="1" destOrd="0"/>
-        <dgm:cxn modelId="7" srcId="0" destId="3" srcOrd="2" destOrd="0"/>
-        <dgm:cxn modelId="8" srcId="0" destId="4" srcOrd="3" destOrd="0"/>
-      </dgm:cxnLst>
-      <dgm:bg/>
-      <dgm:whole/>
-    </dgm:dataModel>
-  </dgm:clrData>
-  <dgm:layoutNode name="Name0">
-    <dgm:varLst>
-      <dgm:dir/>
-      <dgm:animLvl val="lvl"/>
-      <dgm:resizeHandles val="exact"/>
-    </dgm:varLst>
-    <dgm:choose name="Name1">
-      <dgm:if name="Name2" func="var" arg="dir" op="equ" val="norm">
-        <dgm:alg type="lin"/>
-      </dgm:if>
-      <dgm:else name="Name3">
-        <dgm:alg type="lin">
-          <dgm:param type="linDir" val="fromR"/>
-        </dgm:alg>
-      </dgm:else>
-    </dgm:choose>
-    <dgm:shape xmlns:r="http://schemas.openxmlformats.org/officeDocument/2006/relationships" r:blip="">
-      <dgm:adjLst/>
-    </dgm:shape>
-    <dgm:presOf/>
-    <dgm:constrLst>
-      <dgm:constr type="h" for="ch" forName="composite" refType="h"/>
-      <dgm:constr type="w" for="ch" forName="composite" refType="w"/>
-      <dgm:constr type="w" for="des" forName="parTx"/>
-      <dgm:constr type="h" for="des" forName="parTx" op="equ"/>
-      <dgm:constr type="w" for="des" forName="desTx"/>
-      <dgm:constr type="h" for="des" forName="desTx" op="equ"/>
-      <dgm:constr type="primFontSz" for="des" forName="parTx" val="65"/>
-      <dgm:constr type="secFontSz" for="des" forName="desTx" refType="primFontSz" refFor="des" refForName="parTx" op="equ"/>
-      <dgm:constr type="h" for="des" forName="parTx" refType="primFontSz" refFor="des" refForName="parTx" fact="0.8"/>
-      <dgm:constr type="h" for="des" forName="desTx" refType="primFontSz" refFor="des" refForName="parTx" fact="1.22"/>
-      <dgm:constr type="w" for="ch" forName="space" refType="w" refFor="ch" refForName="composite" op="equ" fact="0.14"/>
-    </dgm:constrLst>
-    <dgm:ruleLst>
-      <dgm:rule type="w" for="ch" forName="composite" val="0" fact="NaN" max="NaN"/>
-      <dgm:rule type="primFontSz" for="des" forName="parTx" val="5" fact="NaN" max="NaN"/>
-    </dgm:ruleLst>
-    <dgm:forEach name="Name4" axis="ch" ptType="node">
-      <dgm:layoutNode name="composite">
-        <dgm:alg type="composite"/>
-        <dgm:shape xmlns:r="http://schemas.openxmlformats.org/officeDocument/2006/relationships" r:blip="">
-          <dgm:adjLst/>
-        </dgm:shape>
-        <dgm:presOf/>
-        <dgm:constrLst>
-          <dgm:constr type="l" for="ch" forName="parTx"/>
-          <dgm:constr type="w" for="ch" forName="parTx" refType="w"/>
-          <dgm:constr type="t" for="ch" forName="parTx"/>
-          <dgm:constr type="l" for="ch" forName="desTx"/>
-          <dgm:constr type="w" for="ch" forName="desTx" refType="w" refFor="ch" refForName="parTx"/>
-          <dgm:constr type="t" for="ch" forName="desTx" refType="h" refFor="ch" refForName="parTx"/>
-        </dgm:constrLst>
-        <dgm:ruleLst>
-          <dgm:rule type="h" val="INF" fact="NaN" max="NaN"/>
-        </dgm:ruleLst>
-        <dgm:layoutNode name="parTx" styleLbl="alignNode1">
-          <dgm:varLst>
-            <dgm:chMax val="0"/>
-            <dgm:chPref val="0"/>
-            <dgm:bulletEnabled val="1"/>
-          </dgm:varLst>
-          <dgm:alg type="tx"/>
-          <dgm:shape xmlns:r="http://schemas.openxmlformats.org/officeDocument/2006/relationships" type="rect" r:blip="">
-            <dgm:adjLst/>
-          </dgm:shape>
-          <dgm:presOf axis="self" ptType="node"/>
-          <dgm:constrLst>
-            <dgm:constr type="h" refType="w" op="lte" fact="0.4"/>
-            <dgm:constr type="h"/>
-            <dgm:constr type="tMarg" refType="primFontSz" fact="0.32"/>
-            <dgm:constr type="bMarg" refType="primFontSz" fact="0.32"/>
-          </dgm:constrLst>
-          <dgm:ruleLst>
-            <dgm:rule type="h" val="INF" fact="NaN" max="NaN"/>
-          </dgm:ruleLst>
-        </dgm:layoutNode>
-        <dgm:layoutNode name="desTx" styleLbl="alignAccFollowNode1">
-          <dgm:varLst>
-            <dgm:bulletEnabled val="1"/>
-          </dgm:varLst>
-          <dgm:alg type="tx">
-            <dgm:param type="stBulletLvl" val="1"/>
-          </dgm:alg>
-          <dgm:shape xmlns:r="http://schemas.openxmlformats.org/officeDocument/2006/relationships" type="rect" r:blip="">
-            <dgm:adjLst/>
-          </dgm:shape>
-          <dgm:presOf axis="des" ptType="node"/>
-          <dgm:constrLst>
-            <dgm:constr type="secFontSz" val="65"/>
-            <dgm:constr type="primFontSz" refType="secFontSz"/>
-            <dgm:constr type="h"/>
-            <dgm:constr type="lMarg" refType="primFontSz" fact="0.42"/>
-            <dgm:constr type="tMarg" refType="primFontSz" fact="0.42"/>
-            <dgm:constr type="bMarg" refType="primFontSz" fact="0.63"/>
-          </dgm:constrLst>
-          <dgm:ruleLst>
-            <dgm:rule type="h" val="INF" fact="NaN" max="NaN"/>
-          </dgm:ruleLst>
-        </dgm:layoutNode>
-      </dgm:layoutNode>
-      <dgm:forEach name="Name5" axis="followSib" ptType="sibTrans" cnt="1">
-        <dgm:layoutNode name="space">
-          <dgm:alg type="sp"/>
-          <dgm:shape xmlns:r="http://schemas.openxmlformats.org/officeDocument/2006/relationships" r:blip="">
-            <dgm:adjLst/>
-          </dgm:shape>
-          <dgm:presOf/>
-          <dgm:constrLst/>
-          <dgm:ruleLst/>
-        </dgm:layoutNode>
-      </dgm:forEach>
-    </dgm:forEach>
-  </dgm:layoutNode>
-</dgm:layoutDef>
-</file>
-
 <file path=ppt/diagrams/quickStyle1.xml><?xml version="1.0" encoding="utf-8"?>
-<dgm:styleDef xmlns:dgm="http://schemas.openxmlformats.org/drawingml/2006/diagram" xmlns:a="http://schemas.openxmlformats.org/drawingml/2006/main" uniqueId="urn:microsoft.com/office/officeart/2005/8/quickstyle/simple1">
-  <dgm:title val=""/>
-  <dgm:desc val=""/>
-  <dgm:catLst>
-    <dgm:cat type="simple" pri="10100"/>
-  </dgm:catLst>
-  <dgm:scene3d>
-    <a:camera prst="orthographicFront"/>
-    <a:lightRig rig="threePt" dir="t"/>
-  </dgm:scene3d>
-  <dgm:styleLbl name="node0">
-    <dgm:scene3d>
-      <a:camera prst="orthographicFront"/>
-      <a:lightRig rig="threePt" dir="t"/>
-    </dgm:scene3d>
-    <dgm:sp3d/>
-    <dgm:txPr/>
-    <dgm:style>
-      <a:lnRef idx="2">
-        <a:scrgbClr r="0" g="0" b="0"/>
-      </a:lnRef>
-      <a:fillRef idx="1">
-        <a:scrgbClr r="0" g="0" b="0"/>
-      </a:fillRef>
-      <a:effectRef idx="0">
-        <a:scrgbClr r="0" g="0" b="0"/>
-      </a:effectRef>
-      <a:fontRef idx="minor">
-        <a:schemeClr val="lt1"/>
-      </a:fontRef>
-    </dgm:style>
-  </dgm:styleLbl>
-  <dgm:styleLbl name="lnNode1">
-    <dgm:scene3d>
-      <a:camera prst="orthographicFront"/>
-      <a:lightRig rig="threePt" dir="t"/>
-    </dgm:scene3d>
-    <dgm:sp3d/>
-    <dgm:txPr/>
-    <dgm:style>
-      <a:lnRef idx="2">
-        <a:scrgbClr r="0" g="0" b="0"/>
-      </a:lnRef>
-      <a:fillRef idx="1">
-        <a:scrgbClr r="0" g="0" b="0"/>
-      </a:fillRef>
-      <a:effectRef idx="0">
-        <a:scrgbClr r="0" g="0" b="0"/>
-      </a:effectRef>
-      <a:fontRef idx="minor">
-        <a:schemeClr val="lt1"/>
-      </a:fontRef>
-    </dgm:style>
-  </dgm:styleLbl>
-  <dgm:styleLbl name="vennNode1">
-    <dgm:scene3d>
-      <a:camera prst="orthographicFront"/>
-      <a:lightRig rig="threePt" dir="t"/>
-    </dgm:scene3d>
-    <dgm:sp3d/>
-    <dgm:txPr/>
-    <dgm:style>
-      <a:lnRef idx="2">
-        <a:scrgbClr r="0" g="0" b="0"/>
-      </a:lnRef>
-      <a:fillRef idx="1">
-        <a:scrgbClr r="0" g="0" b="0"/>
-      </a:fillRef>
-      <a:effectRef idx="0">
-        <a:scrgbClr r="0" g="0" b="0"/>
-      </a:effectRef>
-      <a:fontRef idx="minor">
-        <a:schemeClr val="tx1"/>
-      </a:fontRef>
-    </dgm:style>
-  </dgm:styleLbl>
-  <dgm:styleLbl name="alignNode1">
-    <dgm:scene3d>
-      <a:camera prst="orthographicFront"/>
-      <a:lightRig rig="threePt" dir="t"/>
-    </dgm:scene3d>
-    <dgm:sp3d/>
-    <dgm:txPr/>
-    <dgm:style>
-      <a:lnRef idx="2">
-        <a:scrgbClr r="0" g="0" b="0"/>
-      </a:lnRef>
-      <a:fillRef idx="1">
-        <a:scrgbClr r="0" g="0" b="0"/>
-      </a:fillRef>
-      <a:effectRef idx="0">
-        <a:scrgbClr r="0" g="0" b="0"/>
-      </a:effectRef>
-      <a:fontRef idx="minor">
-        <a:schemeClr val="lt1"/>
-      </a:fontRef>
-    </dgm:style>
-  </dgm:styleLbl>
-  <dgm:styleLbl name="node1">
-    <dgm:scene3d>
-      <a:camera prst="orthographicFront"/>
-      <a:lightRig rig="threePt" dir="t"/>
-    </dgm:scene3d>
-    <dgm:sp3d/>
-    <dgm:txPr/>
-    <dgm:style>
-      <a:lnRef idx="2">
-        <a:scrgbClr r="0" g="0" b="0"/>
-      </a:lnRef>
-      <a:fillRef idx="1">
-        <a:scrgbClr r="0" g="0" b="0"/>
-      </a:fillRef>
-      <a:effectRef idx="0">
-        <a:scrgbClr r="0" g="0" b="0"/>
-      </a:effectRef>
-      <a:fontRef idx="minor">
-        <a:schemeClr val="lt1"/>
-      </a:fontRef>
-    </dgm:style>
-  </dgm:styleLbl>
-  <dgm:styleLbl name="node2">
-    <dgm:scene3d>
-      <a:camera prst="orthographicFront"/>
-      <a:lightRig rig="threePt" dir="t"/>
-    </dgm:scene3d>
-    <dgm:sp3d/>
-    <dgm:txPr/>
-    <dgm:style>
-      <a:lnRef idx="2">
-        <a:scrgbClr r="0" g="0" b="0"/>
-      </a:lnRef>
-      <a:fillRef idx="1">
-        <a:scrgbClr r="0" g="0" b="0"/>
-      </a:fillRef>
-      <a:effectRef idx="0">
-        <a:scrgbClr r="0" g="0" b="0"/>
-      </a:effectRef>
-      <a:fontRef idx="minor">
-        <a:schemeClr val="lt1"/>
-      </a:fontRef>
-    </dgm:style>
-  </dgm:styleLbl>
-  <dgm:styleLbl name="node3">
-    <dgm:scene3d>
-      <a:camera prst="orthographicFront"/>
-      <a:lightRig rig="threePt" dir="t"/>
-    </dgm:scene3d>
-    <dgm:sp3d/>
-    <dgm:txPr/>
-    <dgm:style>
-      <a:lnRef idx="2">
-        <a:scrgbClr r="0" g="0" b="0"/>
-      </a:lnRef>
-      <a:fillRef idx="1">
-        <a:scrgbClr r="0" g="0" b="0"/>
-      </a:fillRef>
-      <a:effectRef idx="0">
-        <a:scrgbClr r="0" g="0" b="0"/>
-      </a:effectRef>
-      <a:fontRef idx="minor">
-        <a:schemeClr val="lt1"/>
-      </a:fontRef>
-    </dgm:style>
-  </dgm:styleLbl>
-  <dgm:styleLbl name="node4">
-    <dgm:scene3d>
-      <a:camera prst="orthographicFront"/>
-      <a:lightRig rig="threePt" dir="t"/>
-    </dgm:scene3d>
-    <dgm:sp3d/>
-    <dgm:txPr/>
-    <dgm:style>
-      <a:lnRef idx="2">
-        <a:scrgbClr r="0" g="0" b="0"/>
-      </a:lnRef>
-      <a:fillRef idx="1">
-        <a:scrgbClr r="0" g="0" b="0"/>
-      </a:fillRef>
-      <a:effectRef idx="0">
-        <a:scrgbClr r="0" g="0" b="0"/>
-      </a:effectRef>
-      <a:fontRef idx="minor">
-        <a:schemeClr val="lt1"/>
-      </a:fontRef>
-    </dgm:style>
-  </dgm:styleLbl>
-  <dgm:styleLbl name="fgImgPlace1">
-    <dgm:scene3d>
-      <a:camera prst="orthographicFront"/>
-      <a:lightRig rig="threePt" dir="t"/>
-    </dgm:scene3d>
-    <dgm:sp3d/>
-    <dgm:txPr/>
-    <dgm:style>
-      <a:lnRef idx="2">
-        <a:scrgbClr r="0" g="0" b="0"/>
-      </a:lnRef>
-      <a:fillRef idx="1">
-        <a:scrgbClr r="0" g="0" b="0"/>
-      </a:fillRef>
-      <a:effectRef idx="0">
-        <a:scrgbClr r="0" g="0" b="0"/>
-      </a:effectRef>
-      <a:fontRef idx="minor"/>
-    </dgm:style>
-  </dgm:styleLbl>
-  <dgm:styleLbl name="alignImgPlace1">
-    <dgm:scene3d>
-      <a:camera prst="orthographicFront"/>
-      <a:lightRig rig="threePt" dir="t"/>
-    </dgm:scene3d>
-    <dgm:sp3d/>
-    <dgm:txPr/>
-    <dgm:style>
-      <a:lnRef idx="2">
-        <a:scrgbClr r="0" g="0" b="0"/>
-      </a:lnRef>
-      <a:fillRef idx="1">
-        <a:scrgbClr r="0" g="0" b="0"/>
-      </a:fillRef>
-      <a:effectRef idx="0">
-        <a:scrgbClr r="0" g="0" b="0"/>
-      </a:effectRef>
-      <a:fontRef idx="minor"/>
-    </dgm:style>
-  </dgm:styleLbl>
-  <dgm:styleLbl name="bgImgPlace1">
-    <dgm:scene3d>
-      <a:camera prst="orthographicFront"/>
-      <a:lightRig rig="threePt" dir="t"/>
-    </dgm:scene3d>
-    <dgm:sp3d/>
-    <dgm:txPr/>
-    <dgm:style>
-      <a:lnRef idx="2">
-        <a:scrgbClr r="0" g="0" b="0"/>
-      </a:lnRef>
-      <a:fillRef idx="1">
-        <a:scrgbClr r="0" g="0" b="0"/>
-      </a:fillRef>
-      <a:effectRef idx="0">
-        <a:scrgbClr r="0" g="0" b="0"/>
-      </a:effectRef>
-      <a:fontRef idx="minor"/>
-    </dgm:style>
-  </dgm:styleLbl>
-  <dgm:styleLbl name="sibTrans2D1">
-    <dgm:scene3d>
-      <a:camera prst="orthographicFront"/>
-      <a:lightRig rig="threePt" dir="t"/>
-    </dgm:scene3d>
-    <dgm:sp3d/>
-    <dgm:txPr/>
-    <dgm:style>
-      <a:lnRef idx="0">
-        <a:scrgbClr r="0" g="0" b="0"/>
-      </a:lnRef>
-      <a:fillRef idx="1">
-        <a:scrgbClr r="0" g="0" b="0"/>
-      </a:fillRef>
-      <a:effectRef idx="0">
-        <a:scrgbClr r="0" g="0" b="0"/>
-      </a:effectRef>
-      <a:fontRef idx="minor">
-        <a:schemeClr val="lt1"/>
-      </a:fontRef>
-    </dgm:style>
-  </dgm:styleLbl>
-  <dgm:styleLbl name="fgSibTrans2D1">
-    <dgm:scene3d>
-      <a:camera prst="orthographicFront"/>
-      <a:lightRig rig="threePt" dir="t"/>
-    </dgm:scene3d>
-    <dgm:sp3d/>
-    <dgm:txPr/>
-    <dgm:style>
-      <a:lnRef idx="0">
-        <a:scrgbClr r="0" g="0" b="0"/>
-      </a:lnRef>
-      <a:fillRef idx="1">
-        <a:scrgbClr r="0" g="0" b="0"/>
-      </a:fillRef>
-      <a:effectRef idx="0">
-        <a:scrgbClr r="0" g="0" b="0"/>
-      </a:effectRef>
-      <a:fontRef idx="minor">
-        <a:schemeClr val="lt1"/>
-      </a:fontRef>
-    </dgm:style>
-  </dgm:styleLbl>
-  <dgm:styleLbl name="bgSibTrans2D1">
-    <dgm:scene3d>
-      <a:camera prst="orthographicFront"/>
-      <a:lightRig rig="threePt" dir="t"/>
-    </dgm:scene3d>
-    <dgm:sp3d/>
-    <dgm:txPr/>
-    <dgm:style>
-      <a:lnRef idx="0">
-        <a:scrgbClr r="0" g="0" b="0"/>
-      </a:lnRef>
-      <a:fillRef idx="1">
-        <a:scrgbClr r="0" g="0" b="0"/>
-      </a:fillRef>
-      <a:effectRef idx="0">
-        <a:scrgbClr r="0" g="0" b="0"/>
-      </a:effectRef>
-      <a:fontRef idx="minor">
-        <a:schemeClr val="lt1"/>
-      </a:fontRef>
-    </dgm:style>
-  </dgm:styleLbl>
-  <dgm:styleLbl name="sibTrans1D1">
-    <dgm:scene3d>
-      <a:camera prst="orthographicFront"/>
-      <a:lightRig rig="threePt" dir="t"/>
-    </dgm:scene3d>
-    <dgm:sp3d/>
-    <dgm:txPr/>
-    <dgm:style>
-      <a:lnRef idx="1">
-        <a:scrgbClr r="0" g="0" b="0"/>
-      </a:lnRef>
-      <a:fillRef idx="0">
-        <a:scrgbClr r="0" g="0" b="0"/>
-      </a:fillRef>
-      <a:effectRef idx="0">
-        <a:scrgbClr r="0" g="0" b="0"/>
-      </a:effectRef>
-      <a:fontRef idx="minor"/>
-    </dgm:style>
-  </dgm:styleLbl>
-  <dgm:styleLbl name="callout">
-    <dgm:scene3d>
-      <a:camera prst="orthographicFront"/>
-      <a:lightRig rig="threePt" dir="t"/>
-    </dgm:scene3d>
-    <dgm:sp3d/>
-    <dgm:txPr/>
-    <dgm:style>
-      <a:lnRef idx="2">
-        <a:scrgbClr r="0" g="0" b="0"/>
-      </a:lnRef>
-      <a:fillRef idx="1">
-        <a:scrgbClr r="0" g="0" b="0"/>
-      </a:fillRef>
-      <a:effectRef idx="0">
-        <a:scrgbClr r="0" g="0" b="0"/>
-      </a:effectRef>
-      <a:fontRef idx="minor"/>
-    </dgm:style>
-  </dgm:styleLbl>
-  <dgm:styleLbl name="asst0">
-    <dgm:scene3d>
-      <a:camera prst="orthographicFront"/>
-      <a:lightRig rig="threePt" dir="t"/>
-    </dgm:scene3d>
-    <dgm:sp3d/>
-    <dgm:txPr/>
-    <dgm:style>
-      <a:lnRef idx="2">
-        <a:scrgbClr r="0" g="0" b="0"/>
-      </a:lnRef>
-      <a:fillRef idx="1">
-        <a:scrgbClr r="0" g="0" b="0"/>
-      </a:fillRef>
-      <a:effectRef idx="0">
-        <a:scrgbClr r="0" g="0" b="0"/>
-      </a:effectRef>
-      <a:fontRef idx="minor">
-        <a:schemeClr val="lt1"/>
-      </a:fontRef>
-    </dgm:style>
-  </dgm:styleLbl>
-  <dgm:styleLbl name="asst1">
-    <dgm:scene3d>
-      <a:camera prst="orthographicFront"/>
-      <a:lightRig rig="threePt" dir="t"/>
-    </dgm:scene3d>
-    <dgm:sp3d/>
-    <dgm:txPr/>
-    <dgm:style>
-      <a:lnRef idx="2">
-        <a:scrgbClr r="0" g="0" b="0"/>
-      </a:lnRef>
-      <a:fillRef idx="1">
-        <a:scrgbClr r="0" g="0" b="0"/>
-      </a:fillRef>
-      <a:effectRef idx="0">
-        <a:scrgbClr r="0" g="0" b="0"/>
-      </a:effectRef>
-      <a:fontRef idx="minor">
-        <a:schemeClr val="lt1"/>
-      </a:fontRef>
-    </dgm:style>
-  </dgm:styleLbl>
-  <dgm:styleLbl name="asst2">
-    <dgm:scene3d>
-      <a:camera prst="orthographicFront"/>
-      <a:lightRig rig="threePt" dir="t"/>
-    </dgm:scene3d>
-    <dgm:sp3d/>
-    <dgm:txPr/>
-    <dgm:style>
-      <a:lnRef idx="2">
-        <a:scrgbClr r="0" g="0" b="0"/>
-      </a:lnRef>
-      <a:fillRef idx="1">
-        <a:scrgbClr r="0" g="0" b="0"/>
-      </a:fillRef>
-      <a:effectRef idx="0">
-        <a:scrgbClr r="0" g="0" b="0"/>
-      </a:effectRef>
-      <a:fontRef idx="minor">
-        <a:schemeClr val="lt1"/>
-      </a:fontRef>
-    </dgm:style>
-  </dgm:styleLbl>
-  <dgm:styleLbl name="asst3">
-    <dgm:scene3d>
-      <a:camera prst="orthographicFront"/>
-      <a:lightRig rig="threePt" dir="t"/>
-    </dgm:scene3d>
-    <dgm:sp3d/>
-    <dgm:txPr/>
-    <dgm:style>
-      <a:lnRef idx="2">
-        <a:scrgbClr r="0" g="0" b="0"/>
-      </a:lnRef>
-      <a:fillRef idx="1">
-        <a:scrgbClr r="0" g="0" b="0"/>
-      </a:fillRef>
-      <a:effectRef idx="0">
-        <a:scrgbClr r="0" g="0" b="0"/>
-      </a:effectRef>
-      <a:fontRef idx="minor">
-        <a:schemeClr val="lt1"/>
-      </a:fontRef>
-    </dgm:style>
-  </dgm:styleLbl>
-  <dgm:styleLbl name="asst4">
-    <dgm:scene3d>
-      <a:camera prst="orthographicFront"/>
-      <a:lightRig rig="threePt" dir="t"/>
-    </dgm:scene3d>
-    <dgm:sp3d/>
-    <dgm:txPr/>
-    <dgm:style>
-      <a:lnRef idx="2">
-        <a:scrgbClr r="0" g="0" b="0"/>
-      </a:lnRef>
-      <a:fillRef idx="1">
-        <a:scrgbClr r="0" g="0" b="0"/>
-      </a:fillRef>
-      <a:effectRef idx="0">
-        <a:scrgbClr r="0" g="0" b="0"/>
-      </a:effectRef>
-      <a:fontRef idx="minor">
-        <a:schemeClr val="lt1"/>
-      </a:fontRef>
-    </dgm:style>
-  </dgm:styleLbl>
-  <dgm:styleLbl name="parChTrans2D1">
-    <dgm:scene3d>
-      <a:camera prst="orthographicFront"/>
-      <a:lightRig rig="threePt" dir="t"/>
-    </dgm:scene3d>
-    <dgm:sp3d/>
-    <dgm:txPr/>
-    <dgm:style>
-      <a:lnRef idx="2">
-        <a:scrgbClr r="0" g="0" b="0"/>
-      </a:lnRef>
-      <a:fillRef idx="1">
-        <a:scrgbClr r="0" g="0" b="0"/>
-      </a:fillRef>
-      <a:effectRef idx="0">
-        <a:scrgbClr r="0" g="0" b="0"/>
-      </a:effectRef>
-      <a:fontRef idx="minor">
-        <a:schemeClr val="lt1"/>
-      </a:fontRef>
-    </dgm:style>
-  </dgm:styleLbl>
-  <dgm:styleLbl name="parChTrans2D2">
-    <dgm:scene3d>
-      <a:camera prst="orthographicFront"/>
-      <a:lightRig rig="threePt" dir="t"/>
-    </dgm:scene3d>
-    <dgm:sp3d/>
-    <dgm:txPr/>
-    <dgm:style>
-      <a:lnRef idx="2">
-        <a:scrgbClr r="0" g="0" b="0"/>
-      </a:lnRef>
-      <a:fillRef idx="1">
-        <a:scrgbClr r="0" g="0" b="0"/>
-      </a:fillRef>
-      <a:effectRef idx="0">
-        <a:scrgbClr r="0" g="0" b="0"/>
-      </a:effectRef>
-      <a:fontRef idx="minor">
-        <a:schemeClr val="lt1"/>
-      </a:fontRef>
-    </dgm:style>
-  </dgm:styleLbl>
-  <dgm:styleLbl name="parChTrans2D3">
-    <dgm:scene3d>
-      <a:camera prst="orthographicFront"/>
-      <a:lightRig rig="threePt" dir="t"/>
-    </dgm:scene3d>
-    <dgm:sp3d/>
-    <dgm:txPr/>
-    <dgm:style>
-      <a:lnRef idx="2">
-        <a:scrgbClr r="0" g="0" b="0"/>
-      </a:lnRef>
-      <a:fillRef idx="1">
-        <a:scrgbClr r="0" g="0" b="0"/>
-      </a:fillRef>
-      <a:effectRef idx="0">
-        <a:scrgbClr r="0" g="0" b="0"/>
-      </a:effectRef>
-      <a:fontRef idx="minor">
-        <a:schemeClr val="lt1"/>
-      </a:fontRef>
-    </dgm:style>
-  </dgm:styleLbl>
-  <dgm:styleLbl name="parChTrans2D4">
-    <dgm:scene3d>
-      <a:camera prst="orthographicFront"/>
-      <a:lightRig rig="threePt" dir="t"/>
-    </dgm:scene3d>
-    <dgm:sp3d/>
-    <dgm:txPr/>
-    <dgm:style>
-      <a:lnRef idx="2">
-        <a:scrgbClr r="0" g="0" b="0"/>
-      </a:lnRef>
-      <a:fillRef idx="1">
-        <a:scrgbClr r="0" g="0" b="0"/>
-      </a:fillRef>
-      <a:effectRef idx="0">
-        <a:scrgbClr r="0" g="0" b="0"/>
-      </a:effectRef>
-      <a:fontRef idx="minor">
-        <a:schemeClr val="lt1"/>
-      </a:fontRef>
-    </dgm:style>
-  </dgm:styleLbl>
-  <dgm:styleLbl name="parChTrans1D1">
-    <dgm:scene3d>
-      <a:camera prst="orthographicFront"/>
-      <a:lightRig rig="threePt" dir="t"/>
-    </dgm:scene3d>
-    <dgm:sp3d/>
-    <dgm:txPr/>
-    <dgm:style>
-      <a:lnRef idx="2">
-        <a:scrgbClr r="0" g="0" b="0"/>
-      </a:lnRef>
-      <a:fillRef idx="0">
-        <a:scrgbClr r="0" g="0" b="0"/>
-      </a:fillRef>
-      <a:effectRef idx="0">
-        <a:scrgbClr r="0" g="0" b="0"/>
-      </a:effectRef>
-      <a:fontRef idx="minor"/>
-    </dgm:style>
-  </dgm:styleLbl>
-  <dgm:styleLbl name="parChTrans1D2">
-    <dgm:scene3d>
-      <a:camera prst="orthographicFront"/>
-      <a:lightRig rig="threePt" dir="t"/>
-    </dgm:scene3d>
-    <dgm:sp3d/>
-    <dgm:txPr/>
-    <dgm:style>
-      <a:lnRef idx="2">
-        <a:scrgbClr r="0" g="0" b="0"/>
-      </a:lnRef>
-      <a:fillRef idx="0">
-        <a:scrgbClr r="0" g="0" b="0"/>
-      </a:fillRef>
-      <a:effectRef idx="0">
-        <a:scrgbClr r="0" g="0" b="0"/>
-      </a:effectRef>
-      <a:fontRef idx="minor"/>
-    </dgm:style>
-  </dgm:styleLbl>
-  <dgm:styleLbl name="parChTrans1D3">
-    <dgm:scene3d>
-      <a:camera prst="orthographicFront"/>
-      <a:lightRig rig="threePt" dir="t"/>
-    </dgm:scene3d>
-    <dgm:sp3d/>
-    <dgm:txPr/>
-    <dgm:style>
-      <a:lnRef idx="2">
-        <a:scrgbClr r="0" g="0" b="0"/>
-      </a:lnRef>
-      <a:fillRef idx="0">
-        <a:scrgbClr r="0" g="0" b="0"/>
-      </a:fillRef>
-      <a:effectRef idx="0">
-        <a:scrgbClr r="0" g="0" b="0"/>
-      </a:effectRef>
-      <a:fontRef idx="minor"/>
-    </dgm:style>
-  </dgm:styleLbl>
-  <dgm:styleLbl name="parChTrans1D4">
-    <dgm:scene3d>
-      <a:camera prst="orthographicFront"/>
-      <a:lightRig rig="threePt" dir="t"/>
-    </dgm:scene3d>
-    <dgm:sp3d/>
-    <dgm:txPr/>
-    <dgm:style>
-      <a:lnRef idx="2">
-        <a:scrgbClr r="0" g="0" b="0"/>
-      </a:lnRef>
-      <a:fillRef idx="0">
-        <a:scrgbClr r="0" g="0" b="0"/>
-      </a:fillRef>
-      <a:effectRef idx="0">
-        <a:scrgbClr r="0" g="0" b="0"/>
-      </a:effectRef>
-      <a:fontRef idx="minor"/>
-    </dgm:style>
-  </dgm:styleLbl>
-  <dgm:styleLbl name="fgAcc1">
-    <dgm:scene3d>
-      <a:camera prst="orthographicFront"/>
-      <a:lightRig rig="threePt" dir="t"/>
-    </dgm:scene3d>
-    <dgm:sp3d/>
-    <dgm:txPr/>
-    <dgm:style>
-      <a:lnRef idx="2">
-        <a:scrgbClr r="0" g="0" b="0"/>
-      </a:lnRef>
-      <a:fillRef idx="1">
-        <a:scrgbClr r="0" g="0" b="0"/>
-      </a:fillRef>
-      <a:effectRef idx="0">
-        <a:scrgbClr r="0" g="0" b="0"/>
-      </a:effectRef>
-      <a:fontRef idx="minor"/>
-    </dgm:style>
-  </dgm:styleLbl>
-  <dgm:styleLbl name="conFgAcc1">
-    <dgm:scene3d>
-      <a:camera prst="orthographicFront"/>
-      <a:lightRig rig="threePt" dir="t"/>
-    </dgm:scene3d>
-    <dgm:sp3d/>
-    <dgm:txPr/>
-    <dgm:style>
-      <a:lnRef idx="2">
-        <a:scrgbClr r="0" g="0" b="0"/>
-      </a:lnRef>
-      <a:fillRef idx="1">
-        <a:scrgbClr r="0" g="0" b="0"/>
-      </a:fillRef>
-      <a:effectRef idx="0">
-        <a:scrgbClr r="0" g="0" b="0"/>
-      </a:effectRef>
-      <a:fontRef idx="minor"/>
-    </dgm:style>
-  </dgm:styleLbl>
-  <dgm:styleLbl name="alignAcc1">
-    <dgm:scene3d>
-      <a:camera prst="orthographicFront"/>
-      <a:lightRig rig="threePt" dir="t"/>
-    </dgm:scene3d>
-    <dgm:sp3d/>
-    <dgm:txPr/>
-    <dgm:style>
-      <a:lnRef idx="2">
-        <a:scrgbClr r="0" g="0" b="0"/>
-      </a:lnRef>
-      <a:fillRef idx="1">
-        <a:scrgbClr r="0" g="0" b="0"/>
-      </a:fillRef>
-      <a:effectRef idx="0">
-        <a:scrgbClr r="0" g="0" b="0"/>
-      </a:effectRef>
-      <a:fontRef idx="minor"/>
-    </dgm:style>
-  </dgm:styleLbl>
-  <dgm:styleLbl name="trAlignAcc1">
-    <dgm:scene3d>
-      <a:camera prst="orthographicFront"/>
-      <a:lightRig rig="threePt" dir="t"/>
-    </dgm:scene3d>
-    <dgm:sp3d/>
-    <dgm:txPr/>
-    <dgm:style>
-      <a:lnRef idx="1">
-        <a:scrgbClr r="0" g="0" b="0"/>
-      </a:lnRef>
-      <a:fillRef idx="1">
-        <a:scrgbClr r="0" g="0" b="0"/>
-      </a:fillRef>
-      <a:effectRef idx="0">
-        <a:scrgbClr r="0" g="0" b="0"/>
-      </a:effectRef>
-      <a:fontRef idx="minor"/>
-    </dgm:style>
-  </dgm:styleLbl>
-  <dgm:styleLbl name="bgAcc1">
-    <dgm:scene3d>
-      <a:camera prst="orthographicFront"/>
-      <a:lightRig rig="threePt" dir="t"/>
-    </dgm:scene3d>
-    <dgm:sp3d/>
-    <dgm:txPr/>
-    <dgm:style>
-      <a:lnRef idx="2">
-        <a:scrgbClr r="0" g="0" b="0"/>
-      </a:lnRef>
-      <a:fillRef idx="1">
-        <a:scrgbClr r="0" g="0" b="0"/>
-      </a:fillRef>
-      <a:effectRef idx="0">
-        <a:scrgbClr r="0" g="0" b="0"/>
-      </a:effectRef>
-      <a:fontRef idx="minor"/>
-    </dgm:style>
-  </dgm:styleLbl>
-  <dgm:styleLbl name="solidFgAcc1">
-    <dgm:scene3d>
-      <a:camera prst="orthographicFront"/>
-      <a:lightRig rig="threePt" dir="t"/>
-    </dgm:scene3d>
-    <dgm:sp3d/>
-    <dgm:txPr/>
-    <dgm:style>
-      <a:lnRef idx="2">
-        <a:scrgbClr r="0" g="0" b="0"/>
-      </a:lnRef>
-      <a:fillRef idx="1">
-        <a:scrgbClr r="0" g="0" b="0"/>
-      </a:fillRef>
-      <a:effectRef idx="0">
-        <a:scrgbClr r="0" g="0" b="0"/>
-      </a:effectRef>
-      <a:fontRef idx="minor"/>
-    </dgm:style>
-  </dgm:styleLbl>
-  <dgm:styleLbl name="solidAlignAcc1">
-    <dgm:scene3d>
-      <a:camera prst="orthographicFront"/>
-      <a:lightRig rig="threePt" dir="t"/>
-    </dgm:scene3d>
-    <dgm:sp3d/>
-    <dgm:txPr/>
-    <dgm:style>
-      <a:lnRef idx="2">
-        <a:scrgbClr r="0" g="0" b="0"/>
-      </a:lnRef>
-      <a:fillRef idx="1">
-        <a:scrgbClr r="0" g="0" b="0"/>
-      </a:fillRef>
-      <a:effectRef idx="0">
-        <a:scrgbClr r="0" g="0" b="0"/>
-      </a:effectRef>
-      <a:fontRef idx="minor"/>
-    </dgm:style>
-  </dgm:styleLbl>
-  <dgm:styleLbl name="solidBgAcc1">
-    <dgm:scene3d>
-      <a:camera prst="orthographicFront"/>
-      <a:lightRig rig="threePt" dir="t"/>
-    </dgm:scene3d>
-    <dgm:sp3d/>
-    <dgm:txPr/>
-    <dgm:style>
-      <a:lnRef idx="2">
-        <a:scrgbClr r="0" g="0" b="0"/>
-      </a:lnRef>
-      <a:fillRef idx="1">
-        <a:scrgbClr r="0" g="0" b="0"/>
-      </a:fillRef>
-      <a:effectRef idx="0">
-        <a:scrgbClr r="0" g="0" b="0"/>
-      </a:effectRef>
-      <a:fontRef idx="minor"/>
-    </dgm:style>
-  </dgm:styleLbl>
-  <dgm:styleLbl name="fgAccFollowNode1">
-    <dgm:scene3d>
-      <a:camera prst="orthographicFront"/>
-      <a:lightRig rig="threePt" dir="t"/>
-    </dgm:scene3d>
-    <dgm:sp3d/>
-    <dgm:txPr/>
-    <dgm:style>
-      <a:lnRef idx="2">
-        <a:scrgbClr r="0" g="0" b="0"/>
-      </a:lnRef>
-      <a:fillRef idx="1">
-        <a:scrgbClr r="0" g="0" b="0"/>
-      </a:fillRef>
-      <a:effectRef idx="0">
-        <a:scrgbClr r="0" g="0" b="0"/>
-      </a:effectRef>
-      <a:fontRef idx="minor"/>
-    </dgm:style>
-  </dgm:styleLbl>
-  <dgm:styleLbl name="alignAccFollowNode1">
-    <dgm:scene3d>
-      <a:camera prst="orthographicFront"/>
-      <a:lightRig rig="threePt" dir="t"/>
-    </dgm:scene3d>
-    <dgm:sp3d/>
-    <dgm:txPr/>
-    <dgm:style>
-      <a:lnRef idx="2">
-        <a:scrgbClr r="0" g="0" b="0"/>
-      </a:lnRef>
-      <a:fillRef idx="1">
-        <a:scrgbClr r="0" g="0" b="0"/>
-      </a:fillRef>
-      <a:effectRef idx="0">
-        <a:scrgbClr r="0" g="0" b="0"/>
-      </a:effectRef>
-      <a:fontRef idx="minor"/>
-    </dgm:style>
-  </dgm:styleLbl>
-  <dgm:styleLbl name="bgAccFollowNode1">
-    <dgm:scene3d>
-      <a:camera prst="orthographicFront"/>
-      <a:lightRig rig="threePt" dir="t"/>
-    </dgm:scene3d>
-    <dgm:sp3d/>
-    <dgm:txPr/>
-    <dgm:style>
-      <a:lnRef idx="2">
-        <a:scrgbClr r="0" g="0" b="0"/>
-      </a:lnRef>
-      <a:fillRef idx="1">
-        <a:scrgbClr r="0" g="0" b="0"/>
-      </a:fillRef>
-      <a:effectRef idx="0">
-        <a:scrgbClr r="0" g="0" b="0"/>
-      </a:effectRef>
-      <a:fontRef idx="minor"/>
-    </dgm:style>
-  </dgm:styleLbl>
-  <dgm:styleLbl name="fgAcc0">
-    <dgm:scene3d>
-      <a:camera prst="orthographicFront"/>
-      <a:lightRig rig="threePt" dir="t"/>
-    </dgm:scene3d>
-    <dgm:sp3d/>
-    <dgm:txPr/>
-    <dgm:style>
-      <a:lnRef idx="2">
-        <a:scrgbClr r="0" g="0" b="0"/>
-      </a:lnRef>
-      <a:fillRef idx="1">
-        <a:scrgbClr r="0" g="0" b="0"/>
-      </a:fillRef>
-      <a:effectRef idx="0">
-        <a:scrgbClr r="0" g="0" b="0"/>
-      </a:effectRef>
-      <a:fontRef idx="minor"/>
-    </dgm:style>
-  </dgm:styleLbl>
-  <dgm:styleLbl name="fgAcc2">
-    <dgm:scene3d>
-      <a:camera prst="orthographicFront"/>
-      <a:lightRig rig="threePt" dir="t"/>
-    </dgm:scene3d>
-    <dgm:sp3d/>
-    <dgm:txPr/>
-    <dgm:style>
-      <a:lnRef idx="2">
-        <a:scrgbClr r="0" g="0" b="0"/>
-      </a:lnRef>
-      <a:fillRef idx="1">
-        <a:scrgbClr r="0" g="0" b="0"/>
-      </a:fillRef>
-      <a:effectRef idx="0">
-        <a:scrgbClr r="0" g="0" b="0"/>
-      </a:effectRef>
-      <a:fontRef idx="minor"/>
-    </dgm:style>
-  </dgm:styleLbl>
-  <dgm:styleLbl name="fgAcc3">
-    <dgm:scene3d>
-      <a:camera prst="orthographicFront"/>
-      <a:lightRig rig="threePt" dir="t"/>
-    </dgm:scene3d>
-    <dgm:sp3d/>
-    <dgm:txPr/>
-    <dgm:style>
-      <a:lnRef idx="2">
-        <a:scrgbClr r="0" g="0" b="0"/>
-      </a:lnRef>
-      <a:fillRef idx="1">
-        <a:scrgbClr r="0" g="0" b="0"/>
-      </a:fillRef>
-      <a:effectRef idx="0">
-        <a:scrgbClr r="0" g="0" b="0"/>
-      </a:effectRef>
-      <a:fontRef idx="minor"/>
-    </dgm:style>
-  </dgm:styleLbl>
-  <dgm:styleLbl name="fgAcc4">
-    <dgm:scene3d>
-      <a:camera prst="orthographicFront"/>
-      <a:lightRig rig="threePt" dir="t"/>
-    </dgm:scene3d>
-    <dgm:sp3d/>
-    <dgm:txPr/>
-    <dgm:style>
-      <a:lnRef idx="2">
-        <a:scrgbClr r="0" g="0" b="0"/>
-      </a:lnRef>
-      <a:fillRef idx="1">
-        <a:scrgbClr r="0" g="0" b="0"/>
-      </a:fillRef>
-      <a:effectRef idx="0">
-        <a:scrgbClr r="0" g="0" b="0"/>
-      </a:effectRef>
-      <a:fontRef idx="minor"/>
-    </dgm:style>
-  </dgm:styleLbl>
-  <dgm:styleLbl name="bgShp">
-    <dgm:scene3d>
-      <a:camera prst="orthographicFront"/>
-      <a:lightRig rig="threePt" dir="t"/>
-    </dgm:scene3d>
-    <dgm:sp3d/>
-    <dgm:txPr/>
-    <dgm:style>
-      <a:lnRef idx="0">
-        <a:scrgbClr r="0" g="0" b="0"/>
-      </a:lnRef>
-      <a:fillRef idx="1">
-        <a:scrgbClr r="0" g="0" b="0"/>
-      </a:fillRef>
-      <a:effectRef idx="0">
-        <a:scrgbClr r="0" g="0" b="0"/>
-      </a:effectRef>
-      <a:fontRef idx="minor"/>
-    </dgm:style>
-  </dgm:styleLbl>
-  <dgm:styleLbl name="dkBgShp">
-    <dgm:scene3d>
-      <a:camera prst="orthographicFront"/>
-      <a:lightRig rig="threePt" dir="t"/>
-    </dgm:scene3d>
-    <dgm:sp3d/>
-    <dgm:txPr/>
-    <dgm:style>
-      <a:lnRef idx="0">
-        <a:scrgbClr r="0" g="0" b="0"/>
-      </a:lnRef>
-      <a:fillRef idx="1">
-        <a:scrgbClr r="0" g="0" b="0"/>
-      </a:fillRef>
-      <a:effectRef idx="0">
-        <a:scrgbClr r="0" g="0" b="0"/>
-      </a:effectRef>
-      <a:fontRef idx="minor"/>
-    </dgm:style>
-  </dgm:styleLbl>
-  <dgm:styleLbl name="trBgShp">
-    <dgm:scene3d>
-      <a:camera prst="orthographicFront"/>
-      <a:lightRig rig="threePt" dir="t"/>
-    </dgm:scene3d>
-    <dgm:sp3d/>
-    <dgm:txPr/>
-    <dgm:style>
-      <a:lnRef idx="0">
-        <a:scrgbClr r="0" g="0" b="0"/>
-      </a:lnRef>
-      <a:fillRef idx="1">
-        <a:scrgbClr r="0" g="0" b="0"/>
-      </a:fillRef>
-      <a:effectRef idx="0">
-        <a:scrgbClr r="0" g="0" b="0"/>
-      </a:effectRef>
-      <a:fontRef idx="minor"/>
-    </dgm:style>
-  </dgm:styleLbl>
-  <dgm:styleLbl name="fgShp">
-    <dgm:scene3d>
-      <a:camera prst="orthographicFront"/>
-      <a:lightRig rig="threePt" dir="t"/>
-    </dgm:scene3d>
-    <dgm:sp3d/>
-    <dgm:txPr/>
-    <dgm:style>
-      <a:lnRef idx="2">
-        <a:scrgbClr r="0" g="0" b="0"/>
-      </a:lnRef>
-      <a:fillRef idx="1">
-        <a:scrgbClr r="0" g="0" b="0"/>
-      </a:fillRef>
-      <a:effectRef idx="0">
-        <a:scrgbClr r="0" g="0" b="0"/>
-      </a:effectRef>
-      <a:fontRef idx="minor"/>
-    </dgm:style>
-  </dgm:styleLbl>
-  <dgm:styleLbl name="revTx">
-    <dgm:scene3d>
-      <a:camera prst="orthographicFront"/>
-      <a:lightRig rig="threePt" dir="t"/>
-    </dgm:scene3d>
-    <dgm:sp3d/>
-    <dgm:txPr/>
-    <dgm:style>
-      <a:lnRef idx="0">
-        <a:scrgbClr r="0" g="0" b="0"/>
-      </a:lnRef>
-      <a:fillRef idx="0">
-        <a:scrgbClr r="0" g="0" b="0"/>
-      </a:fillRef>
-      <a:effectRef idx="0">
-        <a:scrgbClr r="0" g="0" b="0"/>
-      </a:effectRef>
-      <a:fontRef idx="minor"/>
-    </dgm:style>
-  </dgm:styleLbl>
-</dgm:styleDef>
-</file>
-
-<file path=ppt/diagrams/quickStyle2.xml><?xml version="1.0" encoding="utf-8"?>
 <dgm:styleDef xmlns:dgm="http://schemas.openxmlformats.org/drawingml/2006/diagram" xmlns:a="http://schemas.openxmlformats.org/drawingml/2006/main" uniqueId="urn:microsoft.com/office/officeart/2005/8/quickstyle/simple1">
   <dgm:title val=""/>
   <dgm:desc val=""/>
@@ -6933,7 +3552,7 @@
           <a:p>
             <a:fld id="{8A502FC4-2826-4189-9A5A-4802B82D90F9}" type="datetimeFigureOut">
               <a:rPr lang="fr-FR" smtClean="0"/>
-              <a:t>24/03/2026</a:t>
+              <a:t>25/03/2026</a:t>
             </a:fld>
             <a:endParaRPr lang="fr-FR"/>
           </a:p>
@@ -7111,7 +3730,7 @@
           <a:p>
             <a:fld id="{9AEA84B2-E620-4EFC-AE95-6DDE4155F805}" type="datetimeFigureOut">
               <a:rPr lang="fr-FR" noProof="0" smtClean="0"/>
-              <a:t>24/03/2026</a:t>
+              <a:t>25/03/2026</a:t>
             </a:fld>
             <a:endParaRPr lang="fr-FR" noProof="0"/>
           </a:p>
@@ -7705,7 +4324,7 @@
     </p:spTree>
     <p:extLst>
       <p:ext uri="{BB962C8B-B14F-4D97-AF65-F5344CB8AC3E}">
-        <p14:creationId xmlns:p14="http://schemas.microsoft.com/office/powerpoint/2010/main" val="732477395"/>
+        <p14:creationId xmlns:p14="http://schemas.microsoft.com/office/powerpoint/2010/main" val="2242989266"/>
       </p:ext>
     </p:extLst>
   </p:cSld>
@@ -7789,7 +4408,7 @@
     </p:spTree>
     <p:extLst>
       <p:ext uri="{BB962C8B-B14F-4D97-AF65-F5344CB8AC3E}">
-        <p14:creationId xmlns:p14="http://schemas.microsoft.com/office/powerpoint/2010/main" val="2242989266"/>
+        <p14:creationId xmlns:p14="http://schemas.microsoft.com/office/powerpoint/2010/main" val="3197724140"/>
       </p:ext>
     </p:extLst>
   </p:cSld>
@@ -7873,7 +4492,7 @@
     </p:spTree>
     <p:extLst>
       <p:ext uri="{BB962C8B-B14F-4D97-AF65-F5344CB8AC3E}">
-        <p14:creationId xmlns:p14="http://schemas.microsoft.com/office/powerpoint/2010/main" val="3197724140"/>
+        <p14:creationId xmlns:p14="http://schemas.microsoft.com/office/powerpoint/2010/main" val="1726438925"/>
       </p:ext>
     </p:extLst>
   </p:cSld>
@@ -7949,90 +4568,6 @@
             <a:fld id="{C7E15328-2FD5-4AB1-B846-CCAE8EA09498}" type="slidenum">
               <a:rPr lang="fr-FR" smtClean="0"/>
               <a:t>7</a:t>
-            </a:fld>
-            <a:endParaRPr lang="fr-FR"/>
-          </a:p>
-        </p:txBody>
-      </p:sp>
-    </p:spTree>
-    <p:extLst>
-      <p:ext uri="{BB962C8B-B14F-4D97-AF65-F5344CB8AC3E}">
-        <p14:creationId xmlns:p14="http://schemas.microsoft.com/office/powerpoint/2010/main" val="1726438925"/>
-      </p:ext>
-    </p:extLst>
-  </p:cSld>
-  <p:clrMapOvr>
-    <a:masterClrMapping/>
-  </p:clrMapOvr>
-</p:notes>
-</file>
-
-<file path=ppt/notesSlides/notesSlide8.xml><?xml version="1.0" encoding="utf-8"?>
-<p:notes xmlns:a="http://schemas.openxmlformats.org/drawingml/2006/main" xmlns:r="http://schemas.openxmlformats.org/officeDocument/2006/relationships" xmlns:p="http://schemas.openxmlformats.org/presentationml/2006/main">
-  <p:cSld>
-    <p:spTree>
-      <p:nvGrpSpPr>
-        <p:cNvPr id="1" name=""/>
-        <p:cNvGrpSpPr/>
-        <p:nvPr/>
-      </p:nvGrpSpPr>
-      <p:grpSpPr>
-        <a:xfrm>
-          <a:off x="0" y="0"/>
-          <a:ext cx="0" cy="0"/>
-          <a:chOff x="0" y="0"/>
-          <a:chExt cx="0" cy="0"/>
-        </a:xfrm>
-      </p:grpSpPr>
-      <p:sp>
-        <p:nvSpPr>
-          <p:cNvPr id="2" name="Espace réservé de l'image des diapositives 1"/>
-          <p:cNvSpPr>
-            <a:spLocks noGrp="1" noRot="1" noChangeAspect="1"/>
-          </p:cNvSpPr>
-          <p:nvPr>
-            <p:ph type="sldImg"/>
-          </p:nvPr>
-        </p:nvSpPr>
-        <p:spPr/>
-      </p:sp>
-      <p:sp>
-        <p:nvSpPr>
-          <p:cNvPr id="3" name="Espace réservé des notes 2"/>
-          <p:cNvSpPr>
-            <a:spLocks noGrp="1"/>
-          </p:cNvSpPr>
-          <p:nvPr>
-            <p:ph type="body" idx="1"/>
-          </p:nvPr>
-        </p:nvSpPr>
-        <p:spPr/>
-        <p:txBody>
-          <a:bodyPr/>
-          <a:lstStyle/>
-          <a:p>
-            <a:endParaRPr lang="fr-FR"/>
-          </a:p>
-        </p:txBody>
-      </p:sp>
-      <p:sp>
-        <p:nvSpPr>
-          <p:cNvPr id="4" name="Espace réservé du numéro de diapositive 3"/>
-          <p:cNvSpPr>
-            <a:spLocks noGrp="1"/>
-          </p:cNvSpPr>
-          <p:nvPr>
-            <p:ph type="sldNum" sz="quarter" idx="5"/>
-          </p:nvPr>
-        </p:nvSpPr>
-        <p:spPr/>
-        <p:txBody>
-          <a:bodyPr/>
-          <a:lstStyle/>
-          <a:p>
-            <a:fld id="{C7E15328-2FD5-4AB1-B846-CCAE8EA09498}" type="slidenum">
-              <a:rPr lang="fr-FR" smtClean="0"/>
-              <a:t>8</a:t>
             </a:fld>
             <a:endParaRPr lang="fr-FR"/>
           </a:p>
@@ -8108,7 +4643,7 @@
           <a:noFill/>
           <a:extLst>
             <a:ext uri="{909E8E84-426E-40dd-AFC4-6F175D3DCCD1}">
-              <a14:hiddenFill xmlns="" xmlns:a14="http://schemas.microsoft.com/office/drawing/2010/main">
+              <a14:hiddenFill xmlns:a14="http://schemas.microsoft.com/office/drawing/2010/main" xmlns="">
                 <a:solidFill>
                   <a:srgbClr val="FFFFFF"/>
                 </a:solidFill>
@@ -8167,7 +4702,7 @@
             </a:ln>
             <a:extLst>
               <a:ext uri="{91240B29-F687-4f45-9708-019B960494DF}">
-                <a14:hiddenLine xmlns="" xmlns:a14="http://schemas.microsoft.com/office/drawing/2010/main" w="9525">
+                <a14:hiddenLine xmlns:a14="http://schemas.microsoft.com/office/drawing/2010/main" xmlns="" w="9525">
                   <a:solidFill>
                     <a:srgbClr val="000000"/>
                   </a:solidFill>
@@ -8257,7 +4792,7 @@
             </a:ln>
             <a:extLst>
               <a:ext uri="{91240B29-F687-4f45-9708-019B960494DF}">
-                <a14:hiddenLine xmlns="" xmlns:a14="http://schemas.microsoft.com/office/drawing/2010/main" w="9525">
+                <a14:hiddenLine xmlns:a14="http://schemas.microsoft.com/office/drawing/2010/main" xmlns="" w="9525">
                   <a:solidFill>
                     <a:srgbClr val="000000"/>
                   </a:solidFill>
@@ -8347,7 +4882,7 @@
             </a:ln>
             <a:extLst>
               <a:ext uri="{91240B29-F687-4f45-9708-019B960494DF}">
-                <a14:hiddenLine xmlns="" xmlns:a14="http://schemas.microsoft.com/office/drawing/2010/main" w="9525">
+                <a14:hiddenLine xmlns:a14="http://schemas.microsoft.com/office/drawing/2010/main" xmlns="" w="9525">
                   <a:solidFill>
                     <a:srgbClr val="000000"/>
                   </a:solidFill>
@@ -8381,7 +4916,7 @@
             </a:ln>
             <a:extLst>
               <a:ext uri="{91240B29-F687-4f45-9708-019B960494DF}">
-                <a14:hiddenLine xmlns="" xmlns:a14="http://schemas.microsoft.com/office/drawing/2010/main" w="9525">
+                <a14:hiddenLine xmlns:a14="http://schemas.microsoft.com/office/drawing/2010/main" xmlns="" w="9525">
                   <a:solidFill>
                     <a:srgbClr val="000000"/>
                   </a:solidFill>
@@ -8471,7 +5006,7 @@
             </a:ln>
             <a:extLst>
               <a:ext uri="{91240B29-F687-4f45-9708-019B960494DF}">
-                <a14:hiddenLine xmlns="" xmlns:a14="http://schemas.microsoft.com/office/drawing/2010/main" w="9525">
+                <a14:hiddenLine xmlns:a14="http://schemas.microsoft.com/office/drawing/2010/main" xmlns="" w="9525">
                   <a:solidFill>
                     <a:srgbClr val="000000"/>
                   </a:solidFill>
@@ -8533,7 +5068,7 @@
             </a:ln>
             <a:extLst>
               <a:ext uri="{91240B29-F687-4f45-9708-019B960494DF}">
-                <a14:hiddenLine xmlns="" xmlns:a14="http://schemas.microsoft.com/office/drawing/2010/main" w="9525">
+                <a14:hiddenLine xmlns:a14="http://schemas.microsoft.com/office/drawing/2010/main" xmlns="" w="9525">
                   <a:solidFill>
                     <a:srgbClr val="000000"/>
                   </a:solidFill>
@@ -8595,7 +5130,7 @@
             </a:ln>
             <a:extLst>
               <a:ext uri="{91240B29-F687-4f45-9708-019B960494DF}">
-                <a14:hiddenLine xmlns="" xmlns:a14="http://schemas.microsoft.com/office/drawing/2010/main" w="9525">
+                <a14:hiddenLine xmlns:a14="http://schemas.microsoft.com/office/drawing/2010/main" xmlns="" w="9525">
                   <a:solidFill>
                     <a:srgbClr val="000000"/>
                   </a:solidFill>
@@ -8685,7 +5220,7 @@
             </a:ln>
             <a:extLst>
               <a:ext uri="{91240B29-F687-4f45-9708-019B960494DF}">
-                <a14:hiddenLine xmlns="" xmlns:a14="http://schemas.microsoft.com/office/drawing/2010/main" w="9525">
+                <a14:hiddenLine xmlns:a14="http://schemas.microsoft.com/office/drawing/2010/main" xmlns="" w="9525">
                   <a:solidFill>
                     <a:srgbClr val="000000"/>
                   </a:solidFill>
@@ -8747,7 +5282,7 @@
             </a:ln>
             <a:extLst>
               <a:ext uri="{91240B29-F687-4f45-9708-019B960494DF}">
-                <a14:hiddenLine xmlns="" xmlns:a14="http://schemas.microsoft.com/office/drawing/2010/main" w="9525">
+                <a14:hiddenLine xmlns:a14="http://schemas.microsoft.com/office/drawing/2010/main" xmlns="" w="9525">
                   <a:solidFill>
                     <a:srgbClr val="000000"/>
                   </a:solidFill>
@@ -8809,7 +5344,7 @@
             </a:ln>
             <a:extLst>
               <a:ext uri="{91240B29-F687-4f45-9708-019B960494DF}">
-                <a14:hiddenLine xmlns="" xmlns:a14="http://schemas.microsoft.com/office/drawing/2010/main" w="9525">
+                <a14:hiddenLine xmlns:a14="http://schemas.microsoft.com/office/drawing/2010/main" xmlns="" w="9525">
                   <a:solidFill>
                     <a:srgbClr val="000000"/>
                   </a:solidFill>
@@ -8899,7 +5434,7 @@
             </a:ln>
             <a:extLst>
               <a:ext uri="{91240B29-F687-4f45-9708-019B960494DF}">
-                <a14:hiddenLine xmlns="" xmlns:a14="http://schemas.microsoft.com/office/drawing/2010/main" w="9525">
+                <a14:hiddenLine xmlns:a14="http://schemas.microsoft.com/office/drawing/2010/main" xmlns="" w="9525">
                   <a:solidFill>
                     <a:srgbClr val="000000"/>
                   </a:solidFill>
@@ -8989,7 +5524,7 @@
             </a:ln>
             <a:extLst>
               <a:ext uri="{91240B29-F687-4f45-9708-019B960494DF}">
-                <a14:hiddenLine xmlns="" xmlns:a14="http://schemas.microsoft.com/office/drawing/2010/main" w="9525">
+                <a14:hiddenLine xmlns:a14="http://schemas.microsoft.com/office/drawing/2010/main" xmlns="" w="9525">
                   <a:solidFill>
                     <a:srgbClr val="000000"/>
                   </a:solidFill>
@@ -9051,7 +5586,7 @@
             </a:ln>
             <a:extLst>
               <a:ext uri="{91240B29-F687-4f45-9708-019B960494DF}">
-                <a14:hiddenLine xmlns="" xmlns:a14="http://schemas.microsoft.com/office/drawing/2010/main" w="9525">
+                <a14:hiddenLine xmlns:a14="http://schemas.microsoft.com/office/drawing/2010/main" xmlns="" w="9525">
                   <a:solidFill>
                     <a:srgbClr val="000000"/>
                   </a:solidFill>
@@ -9161,7 +5696,7 @@
             </a:ln>
             <a:extLst>
               <a:ext uri="{91240B29-F687-4f45-9708-019B960494DF}">
-                <a14:hiddenLine xmlns="" xmlns:a14="http://schemas.microsoft.com/office/drawing/2010/main" w="9525">
+                <a14:hiddenLine xmlns:a14="http://schemas.microsoft.com/office/drawing/2010/main" xmlns="" w="9525">
                   <a:solidFill>
                     <a:srgbClr val="000000"/>
                   </a:solidFill>
@@ -9223,7 +5758,7 @@
             </a:ln>
             <a:extLst>
               <a:ext uri="{91240B29-F687-4f45-9708-019B960494DF}">
-                <a14:hiddenLine xmlns="" xmlns:a14="http://schemas.microsoft.com/office/drawing/2010/main" w="9525">
+                <a14:hiddenLine xmlns:a14="http://schemas.microsoft.com/office/drawing/2010/main" xmlns="" w="9525">
                   <a:solidFill>
                     <a:srgbClr val="000000"/>
                   </a:solidFill>
@@ -9313,7 +5848,7 @@
             </a:ln>
             <a:extLst>
               <a:ext uri="{91240B29-F687-4f45-9708-019B960494DF}">
-                <a14:hiddenLine xmlns="" xmlns:a14="http://schemas.microsoft.com/office/drawing/2010/main" w="9525">
+                <a14:hiddenLine xmlns:a14="http://schemas.microsoft.com/office/drawing/2010/main" xmlns="" w="9525">
                   <a:solidFill>
                     <a:srgbClr val="000000"/>
                   </a:solidFill>
@@ -9403,7 +5938,7 @@
             </a:ln>
             <a:extLst>
               <a:ext uri="{91240B29-F687-4f45-9708-019B960494DF}">
-                <a14:hiddenLine xmlns="" xmlns:a14="http://schemas.microsoft.com/office/drawing/2010/main" w="9525">
+                <a14:hiddenLine xmlns:a14="http://schemas.microsoft.com/office/drawing/2010/main" xmlns="" w="9525">
                   <a:solidFill>
                     <a:srgbClr val="000000"/>
                   </a:solidFill>
@@ -9465,7 +6000,7 @@
             </a:ln>
             <a:extLst>
               <a:ext uri="{91240B29-F687-4f45-9708-019B960494DF}">
-                <a14:hiddenLine xmlns="" xmlns:a14="http://schemas.microsoft.com/office/drawing/2010/main" w="9525">
+                <a14:hiddenLine xmlns:a14="http://schemas.microsoft.com/office/drawing/2010/main" xmlns="" w="9525">
                   <a:solidFill>
                     <a:srgbClr val="000000"/>
                   </a:solidFill>
@@ -9555,7 +6090,7 @@
             </a:ln>
             <a:extLst>
               <a:ext uri="{91240B29-F687-4f45-9708-019B960494DF}">
-                <a14:hiddenLine xmlns="" xmlns:a14="http://schemas.microsoft.com/office/drawing/2010/main" w="9525">
+                <a14:hiddenLine xmlns:a14="http://schemas.microsoft.com/office/drawing/2010/main" xmlns="" w="9525">
                   <a:solidFill>
                     <a:srgbClr val="000000"/>
                   </a:solidFill>
@@ -9645,7 +6180,7 @@
             </a:ln>
             <a:extLst>
               <a:ext uri="{91240B29-F687-4f45-9708-019B960494DF}">
-                <a14:hiddenLine xmlns="" xmlns:a14="http://schemas.microsoft.com/office/drawing/2010/main" w="9525">
+                <a14:hiddenLine xmlns:a14="http://schemas.microsoft.com/office/drawing/2010/main" xmlns="" w="9525">
                   <a:solidFill>
                     <a:srgbClr val="000000"/>
                   </a:solidFill>
@@ -9701,7 +6236,7 @@
             </a:ln>
             <a:extLst>
               <a:ext uri="{91240B29-F687-4f45-9708-019B960494DF}">
-                <a14:hiddenLine xmlns="" xmlns:a14="http://schemas.microsoft.com/office/drawing/2010/main" w="9525">
+                <a14:hiddenLine xmlns:a14="http://schemas.microsoft.com/office/drawing/2010/main" xmlns="" w="9525">
                   <a:solidFill>
                     <a:srgbClr val="000000"/>
                   </a:solidFill>
@@ -9791,7 +6326,7 @@
             </a:ln>
             <a:extLst>
               <a:ext uri="{91240B29-F687-4f45-9708-019B960494DF}">
-                <a14:hiddenLine xmlns="" xmlns:a14="http://schemas.microsoft.com/office/drawing/2010/main" w="9525">
+                <a14:hiddenLine xmlns:a14="http://schemas.microsoft.com/office/drawing/2010/main" xmlns="" w="9525">
                   <a:solidFill>
                     <a:srgbClr val="000000"/>
                   </a:solidFill>
@@ -9847,7 +6382,7 @@
             </a:ln>
             <a:extLst>
               <a:ext uri="{91240B29-F687-4f45-9708-019B960494DF}">
-                <a14:hiddenLine xmlns="" xmlns:a14="http://schemas.microsoft.com/office/drawing/2010/main" w="9525">
+                <a14:hiddenLine xmlns:a14="http://schemas.microsoft.com/office/drawing/2010/main" xmlns="" w="9525">
                   <a:solidFill>
                     <a:srgbClr val="000000"/>
                   </a:solidFill>
@@ -9937,7 +6472,7 @@
             </a:ln>
             <a:extLst>
               <a:ext uri="{91240B29-F687-4f45-9708-019B960494DF}">
-                <a14:hiddenLine xmlns="" xmlns:a14="http://schemas.microsoft.com/office/drawing/2010/main" w="9525">
+                <a14:hiddenLine xmlns:a14="http://schemas.microsoft.com/office/drawing/2010/main" xmlns="" w="9525">
                   <a:solidFill>
                     <a:srgbClr val="000000"/>
                   </a:solidFill>
@@ -10005,7 +6540,7 @@
             </a:ln>
             <a:extLst>
               <a:ext uri="{91240B29-F687-4f45-9708-019B960494DF}">
-                <a14:hiddenLine xmlns="" xmlns:a14="http://schemas.microsoft.com/office/drawing/2010/main" w="9525">
+                <a14:hiddenLine xmlns:a14="http://schemas.microsoft.com/office/drawing/2010/main" xmlns="" w="9525">
                   <a:solidFill>
                     <a:srgbClr val="000000"/>
                   </a:solidFill>
@@ -10095,7 +6630,7 @@
             </a:ln>
             <a:extLst>
               <a:ext uri="{91240B29-F687-4f45-9708-019B960494DF}">
-                <a14:hiddenLine xmlns="" xmlns:a14="http://schemas.microsoft.com/office/drawing/2010/main" w="9525">
+                <a14:hiddenLine xmlns:a14="http://schemas.microsoft.com/office/drawing/2010/main" xmlns="" w="9525">
                   <a:solidFill>
                     <a:srgbClr val="000000"/>
                   </a:solidFill>
@@ -10163,7 +6698,7 @@
             </a:ln>
             <a:extLst>
               <a:ext uri="{91240B29-F687-4f45-9708-019B960494DF}">
-                <a14:hiddenLine xmlns="" xmlns:a14="http://schemas.microsoft.com/office/drawing/2010/main" w="9525">
+                <a14:hiddenLine xmlns:a14="http://schemas.microsoft.com/office/drawing/2010/main" xmlns="" w="9525">
                   <a:solidFill>
                     <a:srgbClr val="000000"/>
                   </a:solidFill>
@@ -10253,7 +6788,7 @@
             </a:ln>
             <a:extLst>
               <a:ext uri="{91240B29-F687-4f45-9708-019B960494DF}">
-                <a14:hiddenLine xmlns="" xmlns:a14="http://schemas.microsoft.com/office/drawing/2010/main" w="9525">
+                <a14:hiddenLine xmlns:a14="http://schemas.microsoft.com/office/drawing/2010/main" xmlns="" w="9525">
                   <a:solidFill>
                     <a:srgbClr val="000000"/>
                   </a:solidFill>
@@ -10287,7 +6822,7 @@
             </a:ln>
             <a:extLst>
               <a:ext uri="{91240B29-F687-4f45-9708-019B960494DF}">
-                <a14:hiddenLine xmlns="" xmlns:a14="http://schemas.microsoft.com/office/drawing/2010/main" w="9525">
+                <a14:hiddenLine xmlns:a14="http://schemas.microsoft.com/office/drawing/2010/main" xmlns="" w="9525">
                   <a:solidFill>
                     <a:srgbClr val="000000"/>
                   </a:solidFill>
@@ -10377,7 +6912,7 @@
             </a:ln>
             <a:extLst>
               <a:ext uri="{91240B29-F687-4f45-9708-019B960494DF}">
-                <a14:hiddenLine xmlns="" xmlns:a14="http://schemas.microsoft.com/office/drawing/2010/main" w="9525">
+                <a14:hiddenLine xmlns:a14="http://schemas.microsoft.com/office/drawing/2010/main" xmlns="" w="9525">
                   <a:solidFill>
                     <a:srgbClr val="000000"/>
                   </a:solidFill>
@@ -10439,7 +6974,7 @@
             </a:ln>
             <a:extLst>
               <a:ext uri="{91240B29-F687-4f45-9708-019B960494DF}">
-                <a14:hiddenLine xmlns="" xmlns:a14="http://schemas.microsoft.com/office/drawing/2010/main" w="9525">
+                <a14:hiddenLine xmlns:a14="http://schemas.microsoft.com/office/drawing/2010/main" xmlns="" w="9525">
                   <a:solidFill>
                     <a:srgbClr val="000000"/>
                   </a:solidFill>
@@ -10501,7 +7036,7 @@
             </a:ln>
             <a:extLst>
               <a:ext uri="{91240B29-F687-4f45-9708-019B960494DF}">
-                <a14:hiddenLine xmlns="" xmlns:a14="http://schemas.microsoft.com/office/drawing/2010/main" w="9525">
+                <a14:hiddenLine xmlns:a14="http://schemas.microsoft.com/office/drawing/2010/main" xmlns="" w="9525">
                   <a:solidFill>
                     <a:srgbClr val="000000"/>
                   </a:solidFill>
@@ -10591,7 +7126,7 @@
             </a:ln>
             <a:extLst>
               <a:ext uri="{91240B29-F687-4f45-9708-019B960494DF}">
-                <a14:hiddenLine xmlns="" xmlns:a14="http://schemas.microsoft.com/office/drawing/2010/main" w="9525">
+                <a14:hiddenLine xmlns:a14="http://schemas.microsoft.com/office/drawing/2010/main" xmlns="" w="9525">
                   <a:solidFill>
                     <a:srgbClr val="000000"/>
                   </a:solidFill>
@@ -10659,7 +7194,7 @@
             </a:ln>
             <a:extLst>
               <a:ext uri="{91240B29-F687-4f45-9708-019B960494DF}">
-                <a14:hiddenLine xmlns="" xmlns:a14="http://schemas.microsoft.com/office/drawing/2010/main" w="9525">
+                <a14:hiddenLine xmlns:a14="http://schemas.microsoft.com/office/drawing/2010/main" xmlns="" w="9525">
                   <a:solidFill>
                     <a:srgbClr val="000000"/>
                   </a:solidFill>
@@ -10721,7 +7256,7 @@
             </a:ln>
             <a:extLst>
               <a:ext uri="{91240B29-F687-4f45-9708-019B960494DF}">
-                <a14:hiddenLine xmlns="" xmlns:a14="http://schemas.microsoft.com/office/drawing/2010/main" w="9525">
+                <a14:hiddenLine xmlns:a14="http://schemas.microsoft.com/office/drawing/2010/main" xmlns="" w="9525">
                   <a:solidFill>
                     <a:srgbClr val="000000"/>
                   </a:solidFill>
@@ -10811,7 +7346,7 @@
             </a:ln>
             <a:extLst>
               <a:ext uri="{91240B29-F687-4f45-9708-019B960494DF}">
-                <a14:hiddenLine xmlns="" xmlns:a14="http://schemas.microsoft.com/office/drawing/2010/main" w="9525">
+                <a14:hiddenLine xmlns:a14="http://schemas.microsoft.com/office/drawing/2010/main" xmlns="" w="9525">
                   <a:solidFill>
                     <a:srgbClr val="000000"/>
                   </a:solidFill>
@@ -10873,7 +7408,7 @@
             </a:ln>
             <a:extLst>
               <a:ext uri="{91240B29-F687-4f45-9708-019B960494DF}">
-                <a14:hiddenLine xmlns="" xmlns:a14="http://schemas.microsoft.com/office/drawing/2010/main" w="9525">
+                <a14:hiddenLine xmlns:a14="http://schemas.microsoft.com/office/drawing/2010/main" xmlns="" w="9525">
                   <a:solidFill>
                     <a:srgbClr val="000000"/>
                   </a:solidFill>
@@ -10963,7 +7498,7 @@
             </a:ln>
             <a:extLst>
               <a:ext uri="{91240B29-F687-4f45-9708-019B960494DF}">
-                <a14:hiddenLine xmlns="" xmlns:a14="http://schemas.microsoft.com/office/drawing/2010/main" w="9525">
+                <a14:hiddenLine xmlns:a14="http://schemas.microsoft.com/office/drawing/2010/main" xmlns="" w="9525">
                   <a:solidFill>
                     <a:srgbClr val="000000"/>
                   </a:solidFill>
@@ -11025,7 +7560,7 @@
             </a:ln>
             <a:extLst>
               <a:ext uri="{91240B29-F687-4f45-9708-019B960494DF}">
-                <a14:hiddenLine xmlns="" xmlns:a14="http://schemas.microsoft.com/office/drawing/2010/main" w="9525">
+                <a14:hiddenLine xmlns:a14="http://schemas.microsoft.com/office/drawing/2010/main" xmlns="" w="9525">
                   <a:solidFill>
                     <a:srgbClr val="000000"/>
                   </a:solidFill>
@@ -11115,7 +7650,7 @@
             </a:ln>
             <a:extLst>
               <a:ext uri="{91240B29-F687-4f45-9708-019B960494DF}">
-                <a14:hiddenLine xmlns="" xmlns:a14="http://schemas.microsoft.com/office/drawing/2010/main" w="9525">
+                <a14:hiddenLine xmlns:a14="http://schemas.microsoft.com/office/drawing/2010/main" xmlns="" w="9525">
                   <a:solidFill>
                     <a:srgbClr val="000000"/>
                   </a:solidFill>
@@ -11149,7 +7684,7 @@
             </a:ln>
             <a:extLst>
               <a:ext uri="{91240B29-F687-4f45-9708-019B960494DF}">
-                <a14:hiddenLine xmlns="" xmlns:a14="http://schemas.microsoft.com/office/drawing/2010/main" w="9525">
+                <a14:hiddenLine xmlns:a14="http://schemas.microsoft.com/office/drawing/2010/main" xmlns="" w="9525">
                   <a:solidFill>
                     <a:srgbClr val="000000"/>
                   </a:solidFill>
@@ -11214,7 +7749,7 @@
             </a:ln>
             <a:extLst>
               <a:ext uri="{91240B29-F687-4f45-9708-019B960494DF}">
-                <a14:hiddenLine xmlns="" xmlns:a14="http://schemas.microsoft.com/office/drawing/2010/main" w="9525">
+                <a14:hiddenLine xmlns:a14="http://schemas.microsoft.com/office/drawing/2010/main" xmlns="" w="9525">
                   <a:solidFill>
                     <a:srgbClr val="000000"/>
                   </a:solidFill>
@@ -11304,7 +7839,7 @@
             </a:ln>
             <a:extLst>
               <a:ext uri="{91240B29-F687-4f45-9708-019B960494DF}">
-                <a14:hiddenLine xmlns="" xmlns:a14="http://schemas.microsoft.com/office/drawing/2010/main" w="9525">
+                <a14:hiddenLine xmlns:a14="http://schemas.microsoft.com/office/drawing/2010/main" xmlns="" w="9525">
                   <a:solidFill>
                     <a:srgbClr val="000000"/>
                   </a:solidFill>
@@ -11366,7 +7901,7 @@
             </a:ln>
             <a:extLst>
               <a:ext uri="{91240B29-F687-4f45-9708-019B960494DF}">
-                <a14:hiddenLine xmlns="" xmlns:a14="http://schemas.microsoft.com/office/drawing/2010/main" w="9525">
+                <a14:hiddenLine xmlns:a14="http://schemas.microsoft.com/office/drawing/2010/main" xmlns="" w="9525">
                   <a:solidFill>
                     <a:srgbClr val="000000"/>
                   </a:solidFill>
@@ -11456,7 +7991,7 @@
             </a:ln>
             <a:extLst>
               <a:ext uri="{91240B29-F687-4f45-9708-019B960494DF}">
-                <a14:hiddenLine xmlns="" xmlns:a14="http://schemas.microsoft.com/office/drawing/2010/main" w="9525">
+                <a14:hiddenLine xmlns:a14="http://schemas.microsoft.com/office/drawing/2010/main" xmlns="" w="9525">
                   <a:solidFill>
                     <a:srgbClr val="000000"/>
                   </a:solidFill>
@@ -11546,7 +8081,7 @@
             </a:ln>
             <a:extLst>
               <a:ext uri="{91240B29-F687-4f45-9708-019B960494DF}">
-                <a14:hiddenLine xmlns="" xmlns:a14="http://schemas.microsoft.com/office/drawing/2010/main" w="9525">
+                <a14:hiddenLine xmlns:a14="http://schemas.microsoft.com/office/drawing/2010/main" xmlns="" w="9525">
                   <a:solidFill>
                     <a:srgbClr val="000000"/>
                   </a:solidFill>
@@ -11611,7 +8146,7 @@
             </a:ln>
             <a:extLst>
               <a:ext uri="{91240B29-F687-4f45-9708-019B960494DF}">
-                <a14:hiddenLine xmlns="" xmlns:a14="http://schemas.microsoft.com/office/drawing/2010/main" w="9525">
+                <a14:hiddenLine xmlns:a14="http://schemas.microsoft.com/office/drawing/2010/main" xmlns="" w="9525">
                   <a:solidFill>
                     <a:srgbClr val="000000"/>
                   </a:solidFill>
@@ -11673,7 +8208,7 @@
             </a:ln>
             <a:extLst>
               <a:ext uri="{91240B29-F687-4f45-9708-019B960494DF}">
-                <a14:hiddenLine xmlns="" xmlns:a14="http://schemas.microsoft.com/office/drawing/2010/main" w="9525">
+                <a14:hiddenLine xmlns:a14="http://schemas.microsoft.com/office/drawing/2010/main" xmlns="" w="9525">
                   <a:solidFill>
                     <a:srgbClr val="000000"/>
                   </a:solidFill>
@@ -11763,7 +8298,7 @@
             </a:ln>
             <a:extLst>
               <a:ext uri="{91240B29-F687-4f45-9708-019B960494DF}">
-                <a14:hiddenLine xmlns="" xmlns:a14="http://schemas.microsoft.com/office/drawing/2010/main" w="9525">
+                <a14:hiddenLine xmlns:a14="http://schemas.microsoft.com/office/drawing/2010/main" xmlns="" w="9525">
                   <a:solidFill>
                     <a:srgbClr val="000000"/>
                   </a:solidFill>
@@ -11853,7 +8388,7 @@
             </a:ln>
             <a:extLst>
               <a:ext uri="{91240B29-F687-4f45-9708-019B960494DF}">
-                <a14:hiddenLine xmlns="" xmlns:a14="http://schemas.microsoft.com/office/drawing/2010/main" w="9525">
+                <a14:hiddenLine xmlns:a14="http://schemas.microsoft.com/office/drawing/2010/main" xmlns="" w="9525">
                   <a:solidFill>
                     <a:srgbClr val="000000"/>
                   </a:solidFill>
@@ -11915,7 +8450,7 @@
             </a:ln>
             <a:extLst>
               <a:ext uri="{91240B29-F687-4f45-9708-019B960494DF}">
-                <a14:hiddenLine xmlns="" xmlns:a14="http://schemas.microsoft.com/office/drawing/2010/main" w="9525">
+                <a14:hiddenLine xmlns:a14="http://schemas.microsoft.com/office/drawing/2010/main" xmlns="" w="9525">
                   <a:solidFill>
                     <a:srgbClr val="000000"/>
                   </a:solidFill>
@@ -12035,7 +8570,7 @@
             </a:ln>
             <a:extLst>
               <a:ext uri="{91240B29-F687-4f45-9708-019B960494DF}">
-                <a14:hiddenLine xmlns="" xmlns:a14="http://schemas.microsoft.com/office/drawing/2010/main" w="9525">
+                <a14:hiddenLine xmlns:a14="http://schemas.microsoft.com/office/drawing/2010/main" xmlns="" w="9525">
                   <a:solidFill>
                     <a:srgbClr val="000000"/>
                   </a:solidFill>
@@ -12103,7 +8638,7 @@
             </a:ln>
             <a:extLst>
               <a:ext uri="{91240B29-F687-4f45-9708-019B960494DF}">
-                <a14:hiddenLine xmlns="" xmlns:a14="http://schemas.microsoft.com/office/drawing/2010/main" w="9525">
+                <a14:hiddenLine xmlns:a14="http://schemas.microsoft.com/office/drawing/2010/main" xmlns="" w="9525">
                   <a:solidFill>
                     <a:srgbClr val="000000"/>
                   </a:solidFill>
@@ -12193,7 +8728,7 @@
             </a:ln>
             <a:extLst>
               <a:ext uri="{91240B29-F687-4f45-9708-019B960494DF}">
-                <a14:hiddenLine xmlns="" xmlns:a14="http://schemas.microsoft.com/office/drawing/2010/main" w="9525">
+                <a14:hiddenLine xmlns:a14="http://schemas.microsoft.com/office/drawing/2010/main" xmlns="" w="9525">
                   <a:solidFill>
                     <a:srgbClr val="000000"/>
                   </a:solidFill>
@@ -12336,7 +8871,7 @@
             <a:pPr rtl="0"/>
             <a:fld id="{A02EAC81-5C99-4864-A0E8-CFA5C9ABA6C2}" type="datetime1">
               <a:rPr lang="fr-FR" noProof="0" smtClean="0"/>
-              <a:t>24/03/2026</a:t>
+              <a:t>25/03/2026</a:t>
             </a:fld>
             <a:endParaRPr lang="fr-FR" noProof="0"/>
           </a:p>
@@ -12606,7 +9141,7 @@
             <a:pPr rtl="0"/>
             <a:fld id="{0ACE44FF-5CD6-4B82-B1F5-6AE86C9907EB}" type="datetime1">
               <a:rPr lang="fr-FR" noProof="0" smtClean="0"/>
-              <a:t>24/03/2026</a:t>
+              <a:t>25/03/2026</a:t>
             </a:fld>
             <a:endParaRPr lang="fr-FR" noProof="0"/>
           </a:p>
@@ -12806,7 +9341,7 @@
             <a:pPr rtl="0"/>
             <a:fld id="{9B3B6F96-1DBA-403E-937D-37819E106CA7}" type="datetime1">
               <a:rPr lang="fr-FR" noProof="0" smtClean="0"/>
-              <a:t>24/03/2026</a:t>
+              <a:t>25/03/2026</a:t>
             </a:fld>
             <a:endParaRPr lang="fr-FR" noProof="0"/>
           </a:p>
@@ -13073,7 +9608,7 @@
             <a:pPr rtl="0"/>
             <a:fld id="{55413907-E3EB-48AE-AB86-05A8E02730C7}" type="datetime1">
               <a:rPr lang="fr-FR" noProof="0" smtClean="0"/>
-              <a:t>24/03/2026</a:t>
+              <a:t>25/03/2026</a:t>
             </a:fld>
             <a:endParaRPr lang="fr-FR" noProof="0"/>
           </a:p>
@@ -13511,7 +10046,7 @@
             <a:pPr rtl="0"/>
             <a:fld id="{72A7BD87-4162-417A-9B5A-2932BA9F7490}" type="datetime1">
               <a:rPr lang="fr-FR" noProof="0" smtClean="0"/>
-              <a:t>24/03/2026</a:t>
+              <a:t>25/03/2026</a:t>
             </a:fld>
             <a:endParaRPr lang="fr-FR" noProof="0"/>
           </a:p>
@@ -14061,7 +10596,7 @@
             <a:pPr rtl="0"/>
             <a:fld id="{20004DDE-15BB-4C4D-B4EA-C083161A9948}" type="datetime1">
               <a:rPr lang="fr-FR" noProof="0" smtClean="0"/>
-              <a:t>24/03/2026</a:t>
+              <a:t>25/03/2026</a:t>
             </a:fld>
             <a:endParaRPr lang="fr-FR" noProof="0"/>
           </a:p>
@@ -14782,7 +11317,7 @@
             <a:pPr rtl="0"/>
             <a:fld id="{9E1F3B7E-0513-428C-82D7-BDF3AA9A4EA5}" type="datetime1">
               <a:rPr lang="fr-FR" noProof="0" smtClean="0"/>
-              <a:t>24/03/2026</a:t>
+              <a:t>25/03/2026</a:t>
             </a:fld>
             <a:endParaRPr lang="fr-FR" noProof="0"/>
           </a:p>
@@ -14955,7 +11490,7 @@
             <a:pPr rtl="0"/>
             <a:fld id="{F2372795-7EAB-4160-A1B0-2F422ABD8E89}" type="datetime1">
               <a:rPr lang="fr-FR" noProof="0" smtClean="0"/>
-              <a:t>24/03/2026</a:t>
+              <a:t>25/03/2026</a:t>
             </a:fld>
             <a:endParaRPr lang="fr-FR" noProof="0"/>
           </a:p>
@@ -15138,7 +11673,7 @@
             <a:pPr rtl="0"/>
             <a:fld id="{4C2BF765-708F-4989-AE14-BAB9493E4588}" type="datetime1">
               <a:rPr lang="fr-FR" noProof="0" smtClean="0"/>
-              <a:t>24/03/2026</a:t>
+              <a:t>25/03/2026</a:t>
             </a:fld>
             <a:endParaRPr lang="fr-FR" noProof="0"/>
           </a:p>
@@ -15311,7 +11846,7 @@
             <a:pPr rtl="0"/>
             <a:fld id="{601D7A6B-BCC2-4C21-BAE3-6AF1B840E56D}" type="datetime1">
               <a:rPr lang="fr-FR" noProof="0" smtClean="0"/>
-              <a:t>24/03/2026</a:t>
+              <a:t>25/03/2026</a:t>
             </a:fld>
             <a:endParaRPr lang="fr-FR" noProof="0"/>
           </a:p>
@@ -15565,7 +12100,7 @@
             <a:pPr rtl="0"/>
             <a:fld id="{0635DD21-33A0-42C5-A2E5-7493465514B7}" type="datetime1">
               <a:rPr lang="fr-FR" noProof="0" smtClean="0"/>
-              <a:t>24/03/2026</a:t>
+              <a:t>25/03/2026</a:t>
             </a:fld>
             <a:endParaRPr lang="fr-FR" noProof="0"/>
           </a:p>
@@ -15799,7 +12334,7 @@
             <a:pPr rtl="0"/>
             <a:fld id="{E8BC33FA-CEBE-4502-9F9B-2F0989154353}" type="datetime1">
               <a:rPr lang="fr-FR" noProof="0" smtClean="0"/>
-              <a:t>24/03/2026</a:t>
+              <a:t>25/03/2026</a:t>
             </a:fld>
             <a:endParaRPr lang="fr-FR" noProof="0"/>
           </a:p>
@@ -16182,7 +12717,7 @@
             <a:pPr rtl="0"/>
             <a:fld id="{B3ECB3ED-4851-4DE7-9A6A-4D7485AC63E3}" type="datetime1">
               <a:rPr lang="fr-FR" noProof="0" smtClean="0"/>
-              <a:t>24/03/2026</a:t>
+              <a:t>25/03/2026</a:t>
             </a:fld>
             <a:endParaRPr lang="fr-FR" noProof="0"/>
           </a:p>
@@ -16304,7 +12839,7 @@
             <a:pPr rtl="0"/>
             <a:fld id="{DBDFEB93-A53E-490C-AF00-EDE3AFF9A36D}" type="datetime1">
               <a:rPr lang="fr-FR" noProof="0" smtClean="0"/>
-              <a:t>24/03/2026</a:t>
+              <a:t>25/03/2026</a:t>
             </a:fld>
             <a:endParaRPr lang="fr-FR" noProof="0"/>
           </a:p>
@@ -16402,7 +12937,7 @@
             <a:pPr rtl="0"/>
             <a:fld id="{969093F2-5574-4FF9-B1D2-E15C695A74EF}" type="datetime1">
               <a:rPr lang="fr-FR" noProof="0" smtClean="0"/>
-              <a:t>24/03/2026</a:t>
+              <a:t>25/03/2026</a:t>
             </a:fld>
             <a:endParaRPr lang="fr-FR" noProof="0"/>
           </a:p>
@@ -16654,7 +13189,7 @@
             <a:pPr rtl="0"/>
             <a:fld id="{575F6C24-568D-4917-863C-3B89D44003D5}" type="datetime1">
               <a:rPr lang="fr-FR" noProof="0" smtClean="0"/>
-              <a:t>24/03/2026</a:t>
+              <a:t>25/03/2026</a:t>
             </a:fld>
             <a:endParaRPr lang="fr-FR" noProof="0"/>
           </a:p>
@@ -16938,7 +13473,7 @@
             <a:pPr rtl="0"/>
             <a:fld id="{7A202532-655D-448B-BCCD-E52581A788ED}" type="datetime1">
               <a:rPr lang="fr-FR" noProof="0" smtClean="0"/>
-              <a:t>24/03/2026</a:t>
+              <a:t>25/03/2026</a:t>
             </a:fld>
             <a:endParaRPr lang="fr-FR" noProof="0"/>
           </a:p>
@@ -17063,7 +13598,7 @@
           <a:noFill/>
           <a:extLst>
             <a:ext uri="{909E8E84-426E-40dd-AFC4-6F175D3DCCD1}">
-              <a14:hiddenFill xmlns="" xmlns:a14="http://schemas.microsoft.com/office/drawing/2010/main">
+              <a14:hiddenFill xmlns:a14="http://schemas.microsoft.com/office/drawing/2010/main" xmlns="">
                 <a:solidFill>
                   <a:srgbClr val="FFFFFF"/>
                 </a:solidFill>
@@ -17137,7 +13672,7 @@
               </a:ln>
               <a:extLst>
                 <a:ext uri="{91240B29-F687-4f45-9708-019B960494DF}">
-                  <a14:hiddenLine xmlns="" xmlns:a14="http://schemas.microsoft.com/office/drawing/2010/main" w="9525">
+                  <a14:hiddenLine xmlns:a14="http://schemas.microsoft.com/office/drawing/2010/main" xmlns="" w="9525">
                     <a:solidFill>
                       <a:srgbClr val="000000"/>
                     </a:solidFill>
@@ -17227,7 +13762,7 @@
               </a:ln>
               <a:extLst>
                 <a:ext uri="{91240B29-F687-4f45-9708-019B960494DF}">
-                  <a14:hiddenLine xmlns="" xmlns:a14="http://schemas.microsoft.com/office/drawing/2010/main" w="9525">
+                  <a14:hiddenLine xmlns:a14="http://schemas.microsoft.com/office/drawing/2010/main" xmlns="" w="9525">
                     <a:solidFill>
                       <a:srgbClr val="000000"/>
                     </a:solidFill>
@@ -17317,7 +13852,7 @@
               </a:ln>
               <a:extLst>
                 <a:ext uri="{91240B29-F687-4f45-9708-019B960494DF}">
-                  <a14:hiddenLine xmlns="" xmlns:a14="http://schemas.microsoft.com/office/drawing/2010/main" w="9525">
+                  <a14:hiddenLine xmlns:a14="http://schemas.microsoft.com/office/drawing/2010/main" xmlns="" w="9525">
                     <a:solidFill>
                       <a:srgbClr val="000000"/>
                     </a:solidFill>
@@ -17379,7 +13914,7 @@
               </a:ln>
               <a:extLst>
                 <a:ext uri="{91240B29-F687-4f45-9708-019B960494DF}">
-                  <a14:hiddenLine xmlns="" xmlns:a14="http://schemas.microsoft.com/office/drawing/2010/main" w="9525">
+                  <a14:hiddenLine xmlns:a14="http://schemas.microsoft.com/office/drawing/2010/main" xmlns="" w="9525">
                     <a:solidFill>
                       <a:srgbClr val="000000"/>
                     </a:solidFill>
@@ -17469,7 +14004,7 @@
               </a:ln>
               <a:extLst>
                 <a:ext uri="{91240B29-F687-4f45-9708-019B960494DF}">
-                  <a14:hiddenLine xmlns="" xmlns:a14="http://schemas.microsoft.com/office/drawing/2010/main" w="9525">
+                  <a14:hiddenLine xmlns:a14="http://schemas.microsoft.com/office/drawing/2010/main" xmlns="" w="9525">
                     <a:solidFill>
                       <a:srgbClr val="000000"/>
                     </a:solidFill>
@@ -17531,7 +14066,7 @@
               </a:ln>
               <a:extLst>
                 <a:ext uri="{91240B29-F687-4f45-9708-019B960494DF}">
-                  <a14:hiddenLine xmlns="" xmlns:a14="http://schemas.microsoft.com/office/drawing/2010/main" w="9525">
+                  <a14:hiddenLine xmlns:a14="http://schemas.microsoft.com/office/drawing/2010/main" xmlns="" w="9525">
                     <a:solidFill>
                       <a:srgbClr val="000000"/>
                     </a:solidFill>
@@ -17593,7 +14128,7 @@
               </a:ln>
               <a:extLst>
                 <a:ext uri="{91240B29-F687-4f45-9708-019B960494DF}">
-                  <a14:hiddenLine xmlns="" xmlns:a14="http://schemas.microsoft.com/office/drawing/2010/main" w="9525">
+                  <a14:hiddenLine xmlns:a14="http://schemas.microsoft.com/office/drawing/2010/main" xmlns="" w="9525">
                     <a:solidFill>
                       <a:srgbClr val="000000"/>
                     </a:solidFill>
@@ -17683,7 +14218,7 @@
               </a:ln>
               <a:extLst>
                 <a:ext uri="{91240B29-F687-4f45-9708-019B960494DF}">
-                  <a14:hiddenLine xmlns="" xmlns:a14="http://schemas.microsoft.com/office/drawing/2010/main" w="9525">
+                  <a14:hiddenLine xmlns:a14="http://schemas.microsoft.com/office/drawing/2010/main" xmlns="" w="9525">
                     <a:solidFill>
                       <a:srgbClr val="000000"/>
                     </a:solidFill>
@@ -17773,7 +14308,7 @@
               </a:ln>
               <a:extLst>
                 <a:ext uri="{91240B29-F687-4f45-9708-019B960494DF}">
-                  <a14:hiddenLine xmlns="" xmlns:a14="http://schemas.microsoft.com/office/drawing/2010/main" w="9525">
+                  <a14:hiddenLine xmlns:a14="http://schemas.microsoft.com/office/drawing/2010/main" xmlns="" w="9525">
                     <a:solidFill>
                       <a:srgbClr val="000000"/>
                     </a:solidFill>
@@ -17835,7 +14370,7 @@
               </a:ln>
               <a:extLst>
                 <a:ext uri="{91240B29-F687-4f45-9708-019B960494DF}">
-                  <a14:hiddenLine xmlns="" xmlns:a14="http://schemas.microsoft.com/office/drawing/2010/main" w="9525">
+                  <a14:hiddenLine xmlns:a14="http://schemas.microsoft.com/office/drawing/2010/main" xmlns="" w="9525">
                     <a:solidFill>
                       <a:srgbClr val="000000"/>
                     </a:solidFill>
@@ -17945,7 +14480,7 @@
               </a:ln>
               <a:extLst>
                 <a:ext uri="{91240B29-F687-4f45-9708-019B960494DF}">
-                  <a14:hiddenLine xmlns="" xmlns:a14="http://schemas.microsoft.com/office/drawing/2010/main" w="9525">
+                  <a14:hiddenLine xmlns:a14="http://schemas.microsoft.com/office/drawing/2010/main" xmlns="" w="9525">
                     <a:solidFill>
                       <a:srgbClr val="000000"/>
                     </a:solidFill>
@@ -18029,7 +14564,7 @@
               </a:ln>
               <a:extLst>
                 <a:ext uri="{91240B29-F687-4f45-9708-019B960494DF}">
-                  <a14:hiddenLine xmlns="" xmlns:a14="http://schemas.microsoft.com/office/drawing/2010/main" w="9525">
+                  <a14:hiddenLine xmlns:a14="http://schemas.microsoft.com/office/drawing/2010/main" xmlns="" w="9525">
                     <a:solidFill>
                       <a:srgbClr val="000000"/>
                     </a:solidFill>
@@ -18091,7 +14626,7 @@
               </a:ln>
               <a:extLst>
                 <a:ext uri="{91240B29-F687-4f45-9708-019B960494DF}">
-                  <a14:hiddenLine xmlns="" xmlns:a14="http://schemas.microsoft.com/office/drawing/2010/main" w="9525">
+                  <a14:hiddenLine xmlns:a14="http://schemas.microsoft.com/office/drawing/2010/main" xmlns="" w="9525">
                     <a:solidFill>
                       <a:srgbClr val="000000"/>
                     </a:solidFill>
@@ -18153,7 +14688,7 @@
               </a:ln>
               <a:extLst>
                 <a:ext uri="{91240B29-F687-4f45-9708-019B960494DF}">
-                  <a14:hiddenLine xmlns="" xmlns:a14="http://schemas.microsoft.com/office/drawing/2010/main" w="9525">
+                  <a14:hiddenLine xmlns:a14="http://schemas.microsoft.com/office/drawing/2010/main" xmlns="" w="9525">
                     <a:solidFill>
                       <a:srgbClr val="000000"/>
                     </a:solidFill>
@@ -18243,7 +14778,7 @@
               </a:ln>
               <a:extLst>
                 <a:ext uri="{91240B29-F687-4f45-9708-019B960494DF}">
-                  <a14:hiddenLine xmlns="" xmlns:a14="http://schemas.microsoft.com/office/drawing/2010/main" w="9525">
+                  <a14:hiddenLine xmlns:a14="http://schemas.microsoft.com/office/drawing/2010/main" xmlns="" w="9525">
                     <a:solidFill>
                       <a:srgbClr val="000000"/>
                     </a:solidFill>
@@ -18277,7 +14812,7 @@
               </a:ln>
               <a:extLst>
                 <a:ext uri="{91240B29-F687-4f45-9708-019B960494DF}">
-                  <a14:hiddenLine xmlns="" xmlns:a14="http://schemas.microsoft.com/office/drawing/2010/main" w="9525">
+                  <a14:hiddenLine xmlns:a14="http://schemas.microsoft.com/office/drawing/2010/main" xmlns="" w="9525">
                     <a:solidFill>
                       <a:srgbClr val="000000"/>
                     </a:solidFill>
@@ -18342,7 +14877,7 @@
               </a:ln>
               <a:extLst>
                 <a:ext uri="{91240B29-F687-4f45-9708-019B960494DF}">
-                  <a14:hiddenLine xmlns="" xmlns:a14="http://schemas.microsoft.com/office/drawing/2010/main" w="9525">
+                  <a14:hiddenLine xmlns:a14="http://schemas.microsoft.com/office/drawing/2010/main" xmlns="" w="9525">
                     <a:solidFill>
                       <a:srgbClr val="000000"/>
                     </a:solidFill>
@@ -18432,7 +14967,7 @@
               </a:ln>
               <a:extLst>
                 <a:ext uri="{91240B29-F687-4f45-9708-019B960494DF}">
-                  <a14:hiddenLine xmlns="" xmlns:a14="http://schemas.microsoft.com/office/drawing/2010/main" w="9525">
+                  <a14:hiddenLine xmlns:a14="http://schemas.microsoft.com/office/drawing/2010/main" xmlns="" w="9525">
                     <a:solidFill>
                       <a:srgbClr val="000000"/>
                     </a:solidFill>
@@ -18494,7 +15029,7 @@
               </a:ln>
               <a:extLst>
                 <a:ext uri="{91240B29-F687-4f45-9708-019B960494DF}">
-                  <a14:hiddenLine xmlns="" xmlns:a14="http://schemas.microsoft.com/office/drawing/2010/main" w="9525">
+                  <a14:hiddenLine xmlns:a14="http://schemas.microsoft.com/office/drawing/2010/main" xmlns="" w="9525">
                     <a:solidFill>
                       <a:srgbClr val="000000"/>
                     </a:solidFill>
@@ -18584,7 +15119,7 @@
               </a:ln>
               <a:extLst>
                 <a:ext uri="{91240B29-F687-4f45-9708-019B960494DF}">
-                  <a14:hiddenLine xmlns="" xmlns:a14="http://schemas.microsoft.com/office/drawing/2010/main" w="9525">
+                  <a14:hiddenLine xmlns:a14="http://schemas.microsoft.com/office/drawing/2010/main" xmlns="" w="9525">
                     <a:solidFill>
                       <a:srgbClr val="000000"/>
                     </a:solidFill>
@@ -18649,7 +15184,7 @@
               </a:ln>
               <a:extLst>
                 <a:ext uri="{91240B29-F687-4f45-9708-019B960494DF}">
-                  <a14:hiddenLine xmlns="" xmlns:a14="http://schemas.microsoft.com/office/drawing/2010/main" w="9525">
+                  <a14:hiddenLine xmlns:a14="http://schemas.microsoft.com/office/drawing/2010/main" xmlns="" w="9525">
                     <a:solidFill>
                       <a:srgbClr val="000000"/>
                     </a:solidFill>
@@ -18711,7 +15246,7 @@
               </a:ln>
               <a:extLst>
                 <a:ext uri="{91240B29-F687-4f45-9708-019B960494DF}">
-                  <a14:hiddenLine xmlns="" xmlns:a14="http://schemas.microsoft.com/office/drawing/2010/main" w="9525">
+                  <a14:hiddenLine xmlns:a14="http://schemas.microsoft.com/office/drawing/2010/main" xmlns="" w="9525">
                     <a:solidFill>
                       <a:srgbClr val="000000"/>
                     </a:solidFill>
@@ -18801,7 +15336,7 @@
               </a:ln>
               <a:extLst>
                 <a:ext uri="{91240B29-F687-4f45-9708-019B960494DF}">
-                  <a14:hiddenLine xmlns="" xmlns:a14="http://schemas.microsoft.com/office/drawing/2010/main" w="9525">
+                  <a14:hiddenLine xmlns:a14="http://schemas.microsoft.com/office/drawing/2010/main" xmlns="" w="9525">
                     <a:solidFill>
                       <a:srgbClr val="000000"/>
                     </a:solidFill>
@@ -18891,7 +15426,7 @@
               </a:ln>
               <a:extLst>
                 <a:ext uri="{91240B29-F687-4f45-9708-019B960494DF}">
-                  <a14:hiddenLine xmlns="" xmlns:a14="http://schemas.microsoft.com/office/drawing/2010/main" w="9525">
+                  <a14:hiddenLine xmlns:a14="http://schemas.microsoft.com/office/drawing/2010/main" xmlns="" w="9525">
                     <a:solidFill>
                       <a:srgbClr val="000000"/>
                     </a:solidFill>
@@ -18956,7 +15491,7 @@
               </a:ln>
               <a:extLst>
                 <a:ext uri="{91240B29-F687-4f45-9708-019B960494DF}">
-                  <a14:hiddenLine xmlns="" xmlns:a14="http://schemas.microsoft.com/office/drawing/2010/main" w="9525">
+                  <a14:hiddenLine xmlns:a14="http://schemas.microsoft.com/office/drawing/2010/main" xmlns="" w="9525">
                     <a:solidFill>
                       <a:srgbClr val="000000"/>
                     </a:solidFill>
@@ -19076,7 +15611,7 @@
               </a:ln>
               <a:extLst>
                 <a:ext uri="{91240B29-F687-4f45-9708-019B960494DF}">
-                  <a14:hiddenLine xmlns="" xmlns:a14="http://schemas.microsoft.com/office/drawing/2010/main" w="9525">
+                  <a14:hiddenLine xmlns:a14="http://schemas.microsoft.com/office/drawing/2010/main" xmlns="" w="9525">
                     <a:solidFill>
                       <a:srgbClr val="000000"/>
                     </a:solidFill>
@@ -19157,7 +15692,7 @@
               </a:ln>
               <a:extLst>
                 <a:ext uri="{91240B29-F687-4f45-9708-019B960494DF}">
-                  <a14:hiddenLine xmlns="" xmlns:a14="http://schemas.microsoft.com/office/drawing/2010/main" w="9525">
+                  <a14:hiddenLine xmlns:a14="http://schemas.microsoft.com/office/drawing/2010/main" xmlns="" w="9525">
                     <a:solidFill>
                       <a:srgbClr val="000000"/>
                     </a:solidFill>
@@ -19272,7 +15807,7 @@
               </a:ln>
               <a:extLst>
                 <a:ext uri="{91240B29-F687-4f45-9708-019B960494DF}">
-                  <a14:hiddenLine xmlns="" xmlns:a14="http://schemas.microsoft.com/office/drawing/2010/main" w="9525">
+                  <a14:hiddenLine xmlns:a14="http://schemas.microsoft.com/office/drawing/2010/main" xmlns="" w="9525">
                     <a:solidFill>
                       <a:srgbClr val="000000"/>
                     </a:solidFill>
@@ -19362,7 +15897,7 @@
               </a:ln>
               <a:extLst>
                 <a:ext uri="{91240B29-F687-4f45-9708-019B960494DF}">
-                  <a14:hiddenLine xmlns="" xmlns:a14="http://schemas.microsoft.com/office/drawing/2010/main" w="9525">
+                  <a14:hiddenLine xmlns:a14="http://schemas.microsoft.com/office/drawing/2010/main" xmlns="" w="9525">
                     <a:solidFill>
                       <a:srgbClr val="000000"/>
                     </a:solidFill>
@@ -19427,7 +15962,7 @@
               </a:ln>
               <a:extLst>
                 <a:ext uri="{91240B29-F687-4f45-9708-019B960494DF}">
-                  <a14:hiddenLine xmlns="" xmlns:a14="http://schemas.microsoft.com/office/drawing/2010/main" w="9525">
+                  <a14:hiddenLine xmlns:a14="http://schemas.microsoft.com/office/drawing/2010/main" xmlns="" w="9525">
                     <a:solidFill>
                       <a:srgbClr val="000000"/>
                     </a:solidFill>
@@ -19517,7 +16052,7 @@
               </a:ln>
               <a:extLst>
                 <a:ext uri="{91240B29-F687-4f45-9708-019B960494DF}">
-                  <a14:hiddenLine xmlns="" xmlns:a14="http://schemas.microsoft.com/office/drawing/2010/main" w="9525">
+                  <a14:hiddenLine xmlns:a14="http://schemas.microsoft.com/office/drawing/2010/main" xmlns="" w="9525">
                     <a:solidFill>
                       <a:srgbClr val="000000"/>
                     </a:solidFill>
@@ -19585,7 +16120,7 @@
               </a:ln>
               <a:extLst>
                 <a:ext uri="{91240B29-F687-4f45-9708-019B960494DF}">
-                  <a14:hiddenLine xmlns="" xmlns:a14="http://schemas.microsoft.com/office/drawing/2010/main" w="9525">
+                  <a14:hiddenLine xmlns:a14="http://schemas.microsoft.com/office/drawing/2010/main" xmlns="" w="9525">
                     <a:solidFill>
                       <a:srgbClr val="000000"/>
                     </a:solidFill>
@@ -19675,7 +16210,7 @@
               </a:ln>
               <a:extLst>
                 <a:ext uri="{91240B29-F687-4f45-9708-019B960494DF}">
-                  <a14:hiddenLine xmlns="" xmlns:a14="http://schemas.microsoft.com/office/drawing/2010/main" w="9525">
+                  <a14:hiddenLine xmlns:a14="http://schemas.microsoft.com/office/drawing/2010/main" xmlns="" w="9525">
                     <a:solidFill>
                       <a:srgbClr val="000000"/>
                     </a:solidFill>
@@ -19743,7 +16278,7 @@
               </a:ln>
               <a:extLst>
                 <a:ext uri="{91240B29-F687-4f45-9708-019B960494DF}">
-                  <a14:hiddenLine xmlns="" xmlns:a14="http://schemas.microsoft.com/office/drawing/2010/main" w="9525">
+                  <a14:hiddenLine xmlns:a14="http://schemas.microsoft.com/office/drawing/2010/main" xmlns="" w="9525">
                     <a:solidFill>
                       <a:srgbClr val="000000"/>
                     </a:solidFill>
@@ -19833,7 +16368,7 @@
               </a:ln>
               <a:extLst>
                 <a:ext uri="{91240B29-F687-4f45-9708-019B960494DF}">
-                  <a14:hiddenLine xmlns="" xmlns:a14="http://schemas.microsoft.com/office/drawing/2010/main" w="9525">
+                  <a14:hiddenLine xmlns:a14="http://schemas.microsoft.com/office/drawing/2010/main" xmlns="" w="9525">
                     <a:solidFill>
                       <a:srgbClr val="000000"/>
                     </a:solidFill>
@@ -19867,7 +16402,7 @@
               </a:ln>
               <a:extLst>
                 <a:ext uri="{91240B29-F687-4f45-9708-019B960494DF}">
-                  <a14:hiddenLine xmlns="" xmlns:a14="http://schemas.microsoft.com/office/drawing/2010/main" w="9525">
+                  <a14:hiddenLine xmlns:a14="http://schemas.microsoft.com/office/drawing/2010/main" xmlns="" w="9525">
                     <a:solidFill>
                       <a:srgbClr val="000000"/>
                     </a:solidFill>
@@ -20008,7 +16543,7 @@
             <a:pPr rtl="0"/>
             <a:fld id="{CD282D03-1B0F-4808-A039-91C9E6CB118E}" type="datetime1">
               <a:rPr lang="fr-FR" noProof="0" smtClean="0"/>
-              <a:t>24/03/2026</a:t>
+              <a:t>25/03/2026</a:t>
             </a:fld>
             <a:endParaRPr lang="fr-FR" noProof="0" dirty="0"/>
           </a:p>
@@ -20626,7 +17161,7 @@
                 <a16:creationId xmlns:a16="http://schemas.microsoft.com/office/drawing/2014/main" id="{8D4F1745-A55E-4835-88EB-BC637121B608}"/>
               </a:ext>
               <a:ext uri="{C183D7F6-B498-43B3-948B-1728B52AA6E4}">
-                <adec:decorative xmlns:adec="http://schemas.microsoft.com/office/drawing/2017/decorative" xmlns="" val="1"/>
+                <adec:decorative xmlns="" xmlns:adec="http://schemas.microsoft.com/office/drawing/2017/decorative" val="1"/>
               </a:ext>
             </a:extLst>
           </p:cNvPr>
@@ -20821,15 +17356,23 @@
                 <a:ea typeface="Tahoma" panose="020B0604030504040204" pitchFamily="34" charset="0"/>
                 <a:cs typeface="Tahoma" panose="020B0604030504040204" pitchFamily="34" charset="0"/>
               </a:rPr>
-              <a:t> donc qui fonctionne </a:t>
-            </a:r>
-            <a:r>
-              <a:rPr lang="fr-FR" smtClean="0">
+              <a:t> </a:t>
+            </a:r>
+            <a:r>
+              <a:rPr lang="fr-FR" dirty="0" smtClean="0">
                 <a:latin typeface="Tahoma" panose="020B0604030504040204" pitchFamily="34" charset="0"/>
                 <a:ea typeface="Tahoma" panose="020B0604030504040204" pitchFamily="34" charset="0"/>
                 <a:cs typeface="Tahoma" panose="020B0604030504040204" pitchFamily="34" charset="0"/>
               </a:rPr>
-              <a:t>en ligne</a:t>
+              <a:t>qui </a:t>
+            </a:r>
+            <a:r>
+              <a:rPr lang="fr-FR" dirty="0" smtClean="0">
+                <a:latin typeface="Tahoma" panose="020B0604030504040204" pitchFamily="34" charset="0"/>
+                <a:ea typeface="Tahoma" panose="020B0604030504040204" pitchFamily="34" charset="0"/>
+                <a:cs typeface="Tahoma" panose="020B0604030504040204" pitchFamily="34" charset="0"/>
+              </a:rPr>
+              <a:t>fonctionne en ligne</a:t>
             </a:r>
             <a:r>
               <a:rPr lang="fr-FR" dirty="0">
@@ -20900,110 +17443,13 @@
           </a:bodyPr>
           <a:lstStyle/>
           <a:p>
-            <a:pPr rtl="0"/>
-            <a:r>
-              <a:rPr lang="fr-FR" sz="4400" dirty="0">
-                <a:latin typeface="Rockwell" panose="02060603020205020403" pitchFamily="18" charset="0"/>
-              </a:rPr>
-              <a:t>Solutions pratiques </a:t>
-            </a:r>
-          </a:p>
-        </p:txBody>
-      </p:sp>
-      <p:graphicFrame>
-        <p:nvGraphicFramePr>
-          <p:cNvPr id="4" name="Espace réservé du contenu 3">
-            <a:extLst>
-              <a:ext uri="{FF2B5EF4-FFF2-40B4-BE49-F238E27FC236}">
-                <a16:creationId xmlns:a16="http://schemas.microsoft.com/office/drawing/2014/main" id="{242FA989-6B7C-488C-85ED-CB8D01BA3254}"/>
-              </a:ext>
-              <a:ext uri="{C183D7F6-B498-43B3-948B-1728B52AA6E4}">
-                <adec:decorative xmlns:adec="http://schemas.microsoft.com/office/drawing/2017/decorative" xmlns="" val="1"/>
-              </a:ext>
-            </a:extLst>
-          </p:cNvPr>
-          <p:cNvGraphicFramePr>
-            <a:graphicFrameLocks noGrp="1"/>
-          </p:cNvGraphicFramePr>
-          <p:nvPr>
-            <p:ph idx="1"/>
-            <p:extLst>
-              <p:ext uri="{D42A27DB-BD31-4B8C-83A1-F6EECF244321}">
-                <p14:modId xmlns:p14="http://schemas.microsoft.com/office/powerpoint/2010/main" val="3612407184"/>
-              </p:ext>
-            </p:extLst>
-          </p:nvPr>
-        </p:nvGraphicFramePr>
-        <p:xfrm>
-          <a:off x="477061" y="1871331"/>
-          <a:ext cx="11314446" cy="4492256"/>
-        </p:xfrm>
-        <a:graphic>
-          <a:graphicData uri="http://schemas.openxmlformats.org/drawingml/2006/diagram">
-            <dgm:relIds xmlns:dgm="http://schemas.openxmlformats.org/drawingml/2006/diagram" xmlns:r="http://schemas.openxmlformats.org/officeDocument/2006/relationships" r:dm="rId3" r:lo="rId4" r:qs="rId5" r:cs="rId6"/>
-          </a:graphicData>
-        </a:graphic>
-      </p:graphicFrame>
-    </p:spTree>
-    <p:extLst>
-      <p:ext uri="{BB962C8B-B14F-4D97-AF65-F5344CB8AC3E}">
-        <p14:creationId xmlns:p14="http://schemas.microsoft.com/office/powerpoint/2010/main" val="1193417028"/>
-      </p:ext>
-    </p:extLst>
-  </p:cSld>
-  <p:clrMapOvr>
-    <a:masterClrMapping/>
-  </p:clrMapOvr>
-</p:sld>
-</file>
-
-<file path=ppt/slides/slide5.xml><?xml version="1.0" encoding="utf-8"?>
-<p:sld xmlns:a="http://schemas.openxmlformats.org/drawingml/2006/main" xmlns:r="http://schemas.openxmlformats.org/officeDocument/2006/relationships" xmlns:p="http://schemas.openxmlformats.org/presentationml/2006/main">
-  <p:cSld>
-    <p:spTree>
-      <p:nvGrpSpPr>
-        <p:cNvPr id="1" name=""/>
-        <p:cNvGrpSpPr/>
-        <p:nvPr/>
-      </p:nvGrpSpPr>
-      <p:grpSpPr>
-        <a:xfrm>
-          <a:off x="0" y="0"/>
-          <a:ext cx="0" cy="0"/>
-          <a:chOff x="0" y="0"/>
-          <a:chExt cx="0" cy="0"/>
-        </a:xfrm>
-      </p:grpSpPr>
-      <p:sp>
-        <p:nvSpPr>
-          <p:cNvPr id="2" name="Titre 1">
-            <a:extLst>
-              <a:ext uri="{FF2B5EF4-FFF2-40B4-BE49-F238E27FC236}">
-                <a16:creationId xmlns:a16="http://schemas.microsoft.com/office/drawing/2014/main" id="{34DB6CE4-2B13-4715-B5B2-615A55922CA1}"/>
-              </a:ext>
-            </a:extLst>
-          </p:cNvPr>
-          <p:cNvSpPr>
-            <a:spLocks noGrp="1"/>
-          </p:cNvSpPr>
-          <p:nvPr>
-            <p:ph type="title"/>
-          </p:nvPr>
-        </p:nvSpPr>
-        <p:spPr/>
-        <p:txBody>
-          <a:bodyPr rtlCol="0">
-            <a:normAutofit/>
-          </a:bodyPr>
-          <a:lstStyle/>
-          <a:p>
-            <a:pPr rtl="0"/>
-            <a:r>
-              <a:rPr lang="fr-FR" sz="4400">
-                <a:latin typeface="Rockwell" panose="02060603020205020403" pitchFamily="18" charset="0"/>
-              </a:rPr>
-              <a:t>Prototype</a:t>
-            </a:r>
+            <a:r>
+              <a:rPr lang="fr-FR" sz="4400" dirty="0"/>
+              <a:t>1. Le Concept du CDN : La Bibliothèque "Cloud"</a:t>
+            </a:r>
+            <a:endParaRPr lang="fr-FR" sz="4400" dirty="0">
+              <a:latin typeface="Rockwell" panose="02060603020205020403" pitchFamily="18" charset="0"/>
+            </a:endParaRPr>
           </a:p>
         </p:txBody>
       </p:sp>
@@ -21023,81 +17469,66 @@
             <p:ph sz="half" idx="1"/>
           </p:nvPr>
         </p:nvSpPr>
-        <p:spPr/>
+        <p:spPr>
+          <a:xfrm>
+            <a:off x="1141410" y="2249486"/>
+            <a:ext cx="10012545" cy="3541714"/>
+          </a:xfrm>
+        </p:spPr>
         <p:txBody>
           <a:bodyPr rtlCol="0">
-            <a:normAutofit fontScale="92500"/>
+            <a:normAutofit/>
           </a:bodyPr>
           <a:lstStyle/>
           <a:p>
-            <a:pPr lvl="1" rtl="0"/>
-            <a:r>
-              <a:rPr lang="fr-FR" sz="2400">
-                <a:latin typeface="Tahoma" panose="020B0604030504040204" pitchFamily="34" charset="0"/>
-                <a:ea typeface="Tahoma" panose="020B0604030504040204" pitchFamily="34" charset="0"/>
-                <a:cs typeface="Tahoma" panose="020B0604030504040204" pitchFamily="34" charset="0"/>
-              </a:rPr>
-              <a:t>Choisissez la meilleure solution pratique et créez un plan de conception d’un prototype</a:t>
-            </a:r>
-          </a:p>
-          <a:p>
-            <a:pPr lvl="1" rtl="0"/>
-            <a:r>
-              <a:rPr lang="fr-FR" sz="2400">
-                <a:latin typeface="Tahoma" panose="020B0604030504040204" pitchFamily="34" charset="0"/>
-                <a:ea typeface="Tahoma" panose="020B0604030504040204" pitchFamily="34" charset="0"/>
-                <a:cs typeface="Tahoma" panose="020B0604030504040204" pitchFamily="34" charset="0"/>
-              </a:rPr>
-              <a:t>Quels matériaux allez-vous utiliser pour le prototype ?</a:t>
-            </a:r>
-          </a:p>
-          <a:p>
-            <a:pPr lvl="1" rtl="0"/>
-            <a:r>
-              <a:rPr lang="fr-FR" sz="2400">
-                <a:latin typeface="Tahoma" panose="020B0604030504040204" pitchFamily="34" charset="0"/>
-                <a:ea typeface="Tahoma" panose="020B0604030504040204" pitchFamily="34" charset="0"/>
-                <a:cs typeface="Tahoma" panose="020B0604030504040204" pitchFamily="34" charset="0"/>
-              </a:rPr>
-              <a:t>Votre prototype aura-t-il une taille réelle ou sera-t-il un modèle ? Pourquoi ?</a:t>
-            </a:r>
-          </a:p>
-        </p:txBody>
-      </p:sp>
-      <p:sp>
-        <p:nvSpPr>
-          <p:cNvPr id="4" name="Espace réservé du contenu 3">
-            <a:extLst>
-              <a:ext uri="{FF2B5EF4-FFF2-40B4-BE49-F238E27FC236}">
-                <a16:creationId xmlns:a16="http://schemas.microsoft.com/office/drawing/2014/main" id="{7B7B7B7B-7D76-4749-8BC0-1A579CBD0BA6}"/>
-              </a:ext>
-            </a:extLst>
-          </p:cNvPr>
-          <p:cNvSpPr>
-            <a:spLocks noGrp="1"/>
-          </p:cNvSpPr>
-          <p:nvPr>
-            <p:ph sz="half" idx="2"/>
-          </p:nvPr>
-        </p:nvSpPr>
-        <p:spPr/>
-        <p:txBody>
-          <a:bodyPr rtlCol="0" anchor="ctr">
-            <a:normAutofit fontScale="92500"/>
-          </a:bodyPr>
-          <a:lstStyle/>
-          <a:p>
-            <a:pPr marL="0" indent="0" algn="ctr" rtl="0">
-              <a:buNone/>
-            </a:pPr>
-            <a:r>
-              <a:rPr lang="fr-FR">
-                <a:latin typeface="Tahoma" panose="020B0604030504040204" pitchFamily="34" charset="0"/>
-                <a:ea typeface="Tahoma" panose="020B0604030504040204" pitchFamily="34" charset="0"/>
-                <a:cs typeface="Tahoma" panose="020B0604030504040204" pitchFamily="34" charset="0"/>
-              </a:rPr>
-              <a:t>&lt;Insérez une image ou un dessin de votre prototype ici&gt;</a:t>
-            </a:r>
+            <a:pPr lvl="1"/>
+            <a:r>
+              <a:rPr lang="fr-FR" sz="2400" b="1" dirty="0"/>
+              <a:t>L'analogie :</a:t>
+            </a:r>
+            <a:r>
+              <a:rPr lang="fr-FR" sz="2400" dirty="0"/>
+              <a:t> C'est comme ne pas acheter un livre, mais consulter une bibliothèque géante en ligne. Tant qu'on a internet, on a accès à </a:t>
+            </a:r>
+            <a:r>
+              <a:rPr lang="fr-FR" sz="2400" dirty="0" err="1"/>
+              <a:t>Bootstrap</a:t>
+            </a:r>
+            <a:r>
+              <a:rPr lang="fr-FR" sz="2400" dirty="0" smtClean="0"/>
+              <a:t>.</a:t>
+            </a:r>
+          </a:p>
+          <a:p>
+            <a:pPr lvl="1"/>
+            <a:endParaRPr lang="fr-FR" sz="2400" b="1" dirty="0"/>
+          </a:p>
+          <a:p>
+            <a:pPr lvl="1"/>
+            <a:r>
+              <a:rPr lang="fr-FR" sz="2400" b="1" dirty="0" smtClean="0"/>
+              <a:t>Pourquoi </a:t>
+            </a:r>
+            <a:r>
+              <a:rPr lang="fr-FR" sz="2400" b="1" dirty="0"/>
+              <a:t>c'est moderne ?</a:t>
+            </a:r>
+            <a:r>
+              <a:rPr lang="fr-FR" sz="2400" dirty="0"/>
+              <a:t> Pas d'installation, mise à jour automatique et chargement ultra-rapide car le fichier est souvent déjà dans le cache du navigateur de l'utilisateur</a:t>
+            </a:r>
+            <a:r>
+              <a:rPr lang="fr-FR" sz="2400" dirty="0" smtClean="0"/>
+              <a:t>. </a:t>
+            </a:r>
+          </a:p>
+          <a:p>
+            <a:pPr lvl="1"/>
+            <a:endParaRPr lang="fr-FR" sz="2400" dirty="0">
+              <a:latin typeface="Tahoma" panose="020B0604030504040204" pitchFamily="34" charset="0"/>
+              <a:ea typeface="Tahoma" panose="020B0604030504040204" pitchFamily="34" charset="0"/>
+              <a:cs typeface="Tahoma" panose="020B0604030504040204" pitchFamily="34" charset="0"/>
+            </a:endParaRPr>
           </a:p>
         </p:txBody>
       </p:sp>
@@ -21114,7 +17545,7 @@
 </p:sld>
 </file>
 
-<file path=ppt/slides/slide6.xml><?xml version="1.0" encoding="utf-8"?>
+<file path=ppt/slides/slide5.xml><?xml version="1.0" encoding="utf-8"?>
 <p:sld xmlns:a="http://schemas.openxmlformats.org/drawingml/2006/main" xmlns:r="http://schemas.openxmlformats.org/officeDocument/2006/relationships" xmlns:p="http://schemas.openxmlformats.org/presentationml/2006/main">
   <p:cSld>
     <p:spTree>
@@ -21161,11 +17592,50 @@
           <a:p>
             <a:pPr rtl="0"/>
             <a:r>
-              <a:rPr lang="fr-FR" sz="4400">
+              <a:rPr lang="fr-FR" sz="4400" dirty="0" smtClean="0">
                 <a:latin typeface="Rockwell" panose="02060603020205020403" pitchFamily="18" charset="0"/>
               </a:rPr>
-              <a:t>Test du prototype</a:t>
-            </a:r>
+              <a:t>Comment utilisé </a:t>
+            </a:r>
+            <a:r>
+              <a:rPr lang="fr-FR" sz="4400" dirty="0" err="1" smtClean="0">
+                <a:latin typeface="Rockwell" panose="02060603020205020403" pitchFamily="18" charset="0"/>
+              </a:rPr>
+              <a:t>Boostrap</a:t>
+            </a:r>
+            <a:r>
+              <a:rPr lang="fr-FR" sz="4400" dirty="0" smtClean="0">
+                <a:latin typeface="Rockwell" panose="02060603020205020403" pitchFamily="18" charset="0"/>
+              </a:rPr>
+              <a:t> avec </a:t>
+            </a:r>
+            <a:r>
+              <a:rPr lang="fr-FR" sz="4400" dirty="0" err="1" smtClean="0">
+                <a:latin typeface="Rockwell" panose="02060603020205020403" pitchFamily="18" charset="0"/>
+              </a:rPr>
+              <a:t>cdn</a:t>
+            </a:r>
+            <a:r>
+              <a:rPr lang="fr-FR" sz="4400" dirty="0" smtClean="0">
+                <a:latin typeface="Rockwell" panose="02060603020205020403" pitchFamily="18" charset="0"/>
+              </a:rPr>
+              <a:t> ou sans </a:t>
+            </a:r>
+            <a:r>
+              <a:rPr lang="fr-FR" sz="4400" dirty="0" err="1" smtClean="0">
+                <a:latin typeface="Rockwell" panose="02060603020205020403" pitchFamily="18" charset="0"/>
+              </a:rPr>
+              <a:t>cdn</a:t>
+            </a:r>
+            <a:r>
+              <a:rPr lang="fr-FR" sz="4400" dirty="0" smtClean="0">
+                <a:latin typeface="Rockwell" panose="02060603020205020403" pitchFamily="18" charset="0"/>
+              </a:rPr>
+              <a:t> </a:t>
+            </a:r>
+            <a:endParaRPr lang="fr-FR" sz="4400" dirty="0">
+              <a:latin typeface="Rockwell" panose="02060603020205020403" pitchFamily="18" charset="0"/>
+            </a:endParaRPr>
           </a:p>
         </p:txBody>
       </p:sp>
@@ -21193,52 +17663,179 @@
         </p:spPr>
         <p:txBody>
           <a:bodyPr rtlCol="0">
-            <a:normAutofit fontScale="92500"/>
+            <a:normAutofit/>
           </a:bodyPr>
           <a:lstStyle/>
           <a:p>
-            <a:pPr lvl="1" rtl="0"/>
-            <a:r>
-              <a:rPr lang="fr-FR" sz="2400">
-                <a:latin typeface="Tahoma" panose="020B0604030504040204" pitchFamily="34" charset="0"/>
-                <a:ea typeface="Tahoma" panose="020B0604030504040204" pitchFamily="34" charset="0"/>
-                <a:cs typeface="Tahoma" panose="020B0604030504040204" pitchFamily="34" charset="0"/>
+            <a:pPr lvl="1"/>
+            <a:r>
+              <a:rPr lang="en-US" altLang="en-US" sz="2400" dirty="0" smtClean="0">
+                <a:latin typeface="Arial" panose="020B0604020202020204" pitchFamily="34" charset="0"/>
+                <a:hlinkClick r:id="rId3"/>
               </a:rPr>
-              <a:t>Qu’est-ce qui a fonctionné ? Qu’est-ce qui n’a pas fonctionné ? Pourquoi ?</a:t>
-            </a:r>
-          </a:p>
-          <a:p>
-            <a:pPr lvl="1" rtl="0"/>
-            <a:r>
-              <a:rPr lang="fr-FR" sz="2400">
-                <a:latin typeface="Tahoma" panose="020B0604030504040204" pitchFamily="34" charset="0"/>
-                <a:ea typeface="Tahoma" panose="020B0604030504040204" pitchFamily="34" charset="0"/>
-                <a:cs typeface="Tahoma" panose="020B0604030504040204" pitchFamily="34" charset="0"/>
+              <a:t>getbootstrap.com</a:t>
+            </a:r>
+            <a:r>
+              <a:rPr lang="en-US" altLang="en-US" sz="2400" dirty="0" smtClean="0">
+                <a:latin typeface="Arial" panose="020B0604020202020204" pitchFamily="34" charset="0"/>
               </a:rPr>
-              <a:t>Quels matériaux doivent être modifiés et/ou conservés ? Pourquoi ?</a:t>
-            </a:r>
-          </a:p>
-          <a:p>
-            <a:pPr lvl="1" rtl="0"/>
-            <a:r>
-              <a:rPr lang="fr-FR" sz="2400">
-                <a:latin typeface="Tahoma" panose="020B0604030504040204" pitchFamily="34" charset="0"/>
-                <a:ea typeface="Tahoma" panose="020B0604030504040204" pitchFamily="34" charset="0"/>
-                <a:cs typeface="Tahoma" panose="020B0604030504040204" pitchFamily="34" charset="0"/>
+              <a:t> </a:t>
+            </a:r>
+            <a:r>
+              <a:rPr lang="en-US" altLang="en-US" sz="2400" dirty="0" err="1" smtClean="0">
+                <a:latin typeface="Arial" panose="020B0604020202020204" pitchFamily="34" charset="0"/>
               </a:rPr>
-              <a:t>La taille de votre prototype vous a-t-elle donné des informations suffisantes pour évoluer vers un produit finalisé ? Pourquoi ou pourquoi pas ?</a:t>
-            </a:r>
-          </a:p>
-          <a:p>
-            <a:pPr lvl="1" rtl="0"/>
-            <a:r>
-              <a:rPr lang="fr-FR" sz="2400">
-                <a:latin typeface="Tahoma" panose="020B0604030504040204" pitchFamily="34" charset="0"/>
-                <a:ea typeface="Tahoma" panose="020B0604030504040204" pitchFamily="34" charset="0"/>
-                <a:cs typeface="Tahoma" panose="020B0604030504040204" pitchFamily="34" charset="0"/>
+              <a:t>voici</a:t>
+            </a:r>
+            <a:r>
+              <a:rPr lang="en-US" altLang="en-US" sz="2400" dirty="0" smtClean="0">
+                <a:latin typeface="Arial" panose="020B0604020202020204" pitchFamily="34" charset="0"/>
               </a:rPr>
-              <a:t>Avez-vous demandé à d’autres personnes de tester votre création et de vous faire part de leurs commentaires ? Pourquoi ou pourquoi pas ?</a:t>
-            </a:r>
+              <a:t> le lien </a:t>
+            </a:r>
+            <a:r>
+              <a:rPr lang="en-US" altLang="en-US" sz="2400" dirty="0" err="1" smtClean="0">
+                <a:latin typeface="Arial" panose="020B0604020202020204" pitchFamily="34" charset="0"/>
+              </a:rPr>
+              <a:t>vers</a:t>
+            </a:r>
+            <a:r>
+              <a:rPr lang="en-US" altLang="en-US" sz="2400" dirty="0" smtClean="0">
+                <a:latin typeface="Arial" panose="020B0604020202020204" pitchFamily="34" charset="0"/>
+              </a:rPr>
+              <a:t> le site de </a:t>
+            </a:r>
+            <a:r>
+              <a:rPr lang="en-US" altLang="en-US" sz="2400" dirty="0" err="1" smtClean="0">
+                <a:latin typeface="Arial" panose="020B0604020202020204" pitchFamily="34" charset="0"/>
+              </a:rPr>
+              <a:t>boostrapp</a:t>
+            </a:r>
+            <a:r>
+              <a:rPr lang="en-US" altLang="en-US" sz="2400" dirty="0" smtClean="0">
+                <a:latin typeface="Arial" panose="020B0604020202020204" pitchFamily="34" charset="0"/>
+              </a:rPr>
+              <a:t> </a:t>
+            </a:r>
+            <a:r>
+              <a:rPr lang="en-US" altLang="en-US" sz="2400" dirty="0" err="1" smtClean="0">
+                <a:latin typeface="Arial" panose="020B0604020202020204" pitchFamily="34" charset="0"/>
+              </a:rPr>
+              <a:t>officiel</a:t>
+            </a:r>
+            <a:r>
+              <a:rPr lang="en-US" altLang="en-US" sz="2400" dirty="0" smtClean="0">
+                <a:latin typeface="Arial" panose="020B0604020202020204" pitchFamily="34" charset="0"/>
+              </a:rPr>
+              <a:t>, </a:t>
+            </a:r>
+            <a:r>
+              <a:rPr lang="en-US" altLang="en-US" sz="2400" i="1" dirty="0">
+                <a:latin typeface="Arial" panose="020B0604020202020204" pitchFamily="34" charset="0"/>
+              </a:rPr>
+              <a:t>On ne </a:t>
+            </a:r>
+            <a:r>
+              <a:rPr lang="en-US" altLang="en-US" sz="2400" i="1" dirty="0" err="1">
+                <a:latin typeface="Arial" panose="020B0604020202020204" pitchFamily="34" charset="0"/>
+              </a:rPr>
+              <a:t>devine</a:t>
+            </a:r>
+            <a:r>
+              <a:rPr lang="en-US" altLang="en-US" sz="2400" i="1" dirty="0">
+                <a:latin typeface="Arial" panose="020B0604020202020204" pitchFamily="34" charset="0"/>
+              </a:rPr>
+              <a:t> pas le code, on </a:t>
+            </a:r>
+            <a:r>
+              <a:rPr lang="en-US" altLang="en-US" sz="2400" i="1" dirty="0" err="1">
+                <a:latin typeface="Arial" panose="020B0604020202020204" pitchFamily="34" charset="0"/>
+              </a:rPr>
+              <a:t>va</a:t>
+            </a:r>
+            <a:r>
+              <a:rPr lang="en-US" altLang="en-US" sz="2400" i="1" dirty="0">
+                <a:latin typeface="Arial" panose="020B0604020202020204" pitchFamily="34" charset="0"/>
+              </a:rPr>
+              <a:t> le </a:t>
+            </a:r>
+            <a:r>
+              <a:rPr lang="en-US" altLang="en-US" sz="2400" i="1" dirty="0" err="1">
+                <a:latin typeface="Arial" panose="020B0604020202020204" pitchFamily="34" charset="0"/>
+              </a:rPr>
+              <a:t>chercher</a:t>
+            </a:r>
+            <a:r>
+              <a:rPr lang="en-US" altLang="en-US" sz="2400" i="1" dirty="0" smtClean="0">
+                <a:latin typeface="Arial" panose="020B0604020202020204" pitchFamily="34" charset="0"/>
+              </a:rPr>
+              <a:t>."</a:t>
+            </a:r>
+            <a:endParaRPr lang="fr-FR" sz="2400" dirty="0">
+              <a:latin typeface="Tahoma" panose="020B0604030504040204" pitchFamily="34" charset="0"/>
+              <a:ea typeface="Tahoma" panose="020B0604030504040204" pitchFamily="34" charset="0"/>
+              <a:cs typeface="Tahoma" panose="020B0604030504040204" pitchFamily="34" charset="0"/>
+            </a:endParaRPr>
+          </a:p>
+          <a:p>
+            <a:pPr lvl="1"/>
+            <a:endParaRPr lang="fr-FR" sz="2400" b="1" dirty="0" smtClean="0"/>
+          </a:p>
+          <a:p>
+            <a:pPr lvl="1"/>
+            <a:endParaRPr lang="fr-FR" sz="2400" b="1" dirty="0" smtClean="0"/>
+          </a:p>
+          <a:p>
+            <a:pPr lvl="1"/>
+            <a:r>
+              <a:rPr lang="fr-FR" sz="2400" b="1" dirty="0" smtClean="0"/>
+              <a:t>Copier/Coller </a:t>
+            </a:r>
+            <a:r>
+              <a:rPr lang="fr-FR" sz="2400" b="1" dirty="0"/>
+              <a:t>Intelligent :</a:t>
+            </a:r>
+            <a:r>
+              <a:rPr lang="fr-FR" sz="2400" dirty="0"/>
+              <a:t> </a:t>
+            </a:r>
+            <a:r>
+              <a:rPr lang="fr-FR" sz="2400" dirty="0" smtClean="0"/>
+              <a:t>Le développeur </a:t>
+            </a:r>
+            <a:r>
+              <a:rPr lang="fr-FR" sz="2400" dirty="0"/>
+              <a:t>moderne, c'est savoir naviguer dans la documentation pour trouver le composant (</a:t>
+            </a:r>
+            <a:r>
+              <a:rPr lang="fr-FR" sz="2400" dirty="0" err="1"/>
+              <a:t>Card</a:t>
+            </a:r>
+            <a:r>
+              <a:rPr lang="fr-FR" sz="2400" dirty="0"/>
+              <a:t>, </a:t>
+            </a:r>
+            <a:r>
+              <a:rPr lang="fr-FR" sz="2400" dirty="0" err="1"/>
+              <a:t>Navbar</a:t>
+            </a:r>
+            <a:r>
+              <a:rPr lang="fr-FR" sz="2400" dirty="0"/>
+              <a:t>, </a:t>
+            </a:r>
+            <a:r>
+              <a:rPr lang="fr-FR" sz="2400" dirty="0" err="1"/>
+              <a:t>Carousel</a:t>
+            </a:r>
+            <a:r>
+              <a:rPr lang="fr-FR" sz="2400" dirty="0" smtClean="0"/>
+              <a:t>)</a:t>
+            </a:r>
+            <a:endParaRPr lang="fr-FR" sz="2400" dirty="0">
+              <a:latin typeface="Tahoma" panose="020B0604030504040204" pitchFamily="34" charset="0"/>
+              <a:ea typeface="Tahoma" panose="020B0604030504040204" pitchFamily="34" charset="0"/>
+              <a:cs typeface="Tahoma" panose="020B0604030504040204" pitchFamily="34" charset="0"/>
+            </a:endParaRPr>
           </a:p>
         </p:txBody>
       </p:sp>
@@ -21255,7 +17852,7 @@
 </p:sld>
 </file>
 
-<file path=ppt/slides/slide7.xml><?xml version="1.0" encoding="utf-8"?>
+<file path=ppt/slides/slide6.xml><?xml version="1.0" encoding="utf-8"?>
 <p:sld xmlns:a="http://schemas.openxmlformats.org/drawingml/2006/main" xmlns:r="http://schemas.openxmlformats.org/officeDocument/2006/relationships" xmlns:p="http://schemas.openxmlformats.org/presentationml/2006/main">
   <p:cSld>
     <p:spTree>
@@ -21295,13 +17892,17 @@
           </a:bodyPr>
           <a:lstStyle/>
           <a:p>
-            <a:pPr rtl="0"/>
-            <a:r>
-              <a:rPr lang="fr-FR" sz="4400">
-                <a:latin typeface="Rockwell" panose="02060603020205020403" pitchFamily="18" charset="0"/>
-              </a:rPr>
-              <a:t>Modification de la conception du prototype</a:t>
-            </a:r>
+            <a:r>
+              <a:rPr lang="fr-FR" sz="4400" dirty="0"/>
+              <a:t>Les Fondations : Anatomie d'une </a:t>
+            </a:r>
+            <a:r>
+              <a:rPr lang="fr-FR" sz="4400" dirty="0" smtClean="0"/>
+              <a:t>Page.</a:t>
+            </a:r>
+            <a:endParaRPr lang="fr-FR" sz="4400" dirty="0">
+              <a:latin typeface="Rockwell" panose="02060603020205020403" pitchFamily="18" charset="0"/>
+            </a:endParaRPr>
           </a:p>
         </p:txBody>
       </p:sp>
@@ -21324,62 +17925,121 @@
         <p:spPr/>
         <p:txBody>
           <a:bodyPr rtlCol="0">
-            <a:normAutofit/>
+            <a:normAutofit fontScale="92500" lnSpcReduction="20000"/>
           </a:bodyPr>
           <a:lstStyle/>
           <a:p>
+            <a:pPr lvl="1"/>
+            <a:r>
+              <a:rPr lang="en-US" sz="2400" dirty="0"/>
+              <a:t>Les Sections et </a:t>
+            </a:r>
+            <a:r>
+              <a:rPr lang="en-US" sz="2400" dirty="0" err="1" smtClean="0"/>
+              <a:t>Conteneurs</a:t>
+            </a:r>
+            <a:endParaRPr lang="en-US" sz="2400" dirty="0" smtClean="0"/>
+          </a:p>
+          <a:p>
+            <a:pPr lvl="1"/>
+            <a:r>
+              <a:rPr lang="fr-FR" b="1" dirty="0" err="1"/>
+              <a:t>Bootstrap</a:t>
+            </a:r>
+            <a:r>
+              <a:rPr lang="fr-FR" b="1" dirty="0"/>
+              <a:t> organise tout dans des boîtes</a:t>
+            </a:r>
+            <a:r>
+              <a:rPr lang="fr-FR" dirty="0" smtClean="0"/>
+              <a:t>.</a:t>
+            </a:r>
+          </a:p>
+          <a:p>
+            <a:pPr lvl="1"/>
+            <a:r>
+              <a:rPr lang="fr-FR" dirty="0" smtClean="0"/>
+              <a:t>Le Container: C'est </a:t>
+            </a:r>
+            <a:r>
+              <a:rPr lang="fr-FR" dirty="0"/>
+              <a:t>la base. Elle centre le contenu et laisse des marges sur les côtés. Sans elle, le texte touche les bords de l'écran (c'est moche </a:t>
+            </a:r>
+            <a:r>
+              <a:rPr lang="fr-FR" dirty="0" smtClean="0"/>
+              <a:t>!).</a:t>
+            </a:r>
+          </a:p>
+          <a:p>
+            <a:pPr lvl="1"/>
+            <a:r>
+              <a:rPr lang="en-US" dirty="0" smtClean="0"/>
+              <a:t>La Section: </a:t>
+            </a:r>
+            <a:r>
+              <a:rPr lang="fr-FR" dirty="0" smtClean="0"/>
+              <a:t>On </a:t>
+            </a:r>
+            <a:r>
+              <a:rPr lang="fr-FR" dirty="0"/>
+              <a:t>utilise la balise </a:t>
+            </a:r>
+            <a:r>
+              <a:rPr lang="fr-FR" dirty="0" smtClean="0"/>
+              <a:t>HTML5 </a:t>
+            </a:r>
+            <a:r>
+              <a:rPr lang="en-US" dirty="0"/>
+              <a:t>&lt;section</a:t>
+            </a:r>
+            <a:r>
+              <a:rPr lang="en-US" dirty="0" smtClean="0"/>
+              <a:t>&gt; </a:t>
+            </a:r>
+            <a:r>
+              <a:rPr lang="fr-FR" dirty="0"/>
+              <a:t>combinée aux classes </a:t>
+            </a:r>
+            <a:r>
+              <a:rPr lang="fr-FR" dirty="0" err="1"/>
+              <a:t>Bootstrap</a:t>
+            </a:r>
+            <a:r>
+              <a:rPr lang="fr-FR" dirty="0"/>
+              <a:t> pour séparer les parties du portfolio (Accueil, Projets, Contact</a:t>
+            </a:r>
+            <a:r>
+              <a:rPr lang="fr-FR" dirty="0" smtClean="0"/>
+              <a:t>). </a:t>
+            </a:r>
+          </a:p>
+          <a:p>
+            <a:pPr lvl="1"/>
+            <a:endParaRPr lang="fr-FR" dirty="0" smtClean="0"/>
+          </a:p>
+          <a:p>
+            <a:pPr marL="457200" lvl="1" indent="0">
+              <a:buNone/>
+            </a:pPr>
+            <a:endParaRPr lang="fr-FR" dirty="0" smtClean="0"/>
+          </a:p>
+          <a:p>
             <a:pPr lvl="1" rtl="0"/>
             <a:r>
-              <a:rPr lang="fr-FR" sz="2400">
+              <a:rPr lang="fr-FR" sz="2400" dirty="0" smtClean="0">
                 <a:latin typeface="Tahoma" panose="020B0604030504040204" pitchFamily="34" charset="0"/>
                 <a:ea typeface="Tahoma" panose="020B0604030504040204" pitchFamily="34" charset="0"/>
                 <a:cs typeface="Tahoma" panose="020B0604030504040204" pitchFamily="34" charset="0"/>
               </a:rPr>
-              <a:t>Utilisez les données issues des tests pour modifier la conception avec...</a:t>
-            </a:r>
-          </a:p>
-          <a:p>
-            <a:pPr lvl="2" rtl="0"/>
-            <a:r>
-              <a:rPr lang="fr-FR" sz="2000">
+              <a:t>Décrivez </a:t>
+            </a:r>
+            <a:r>
+              <a:rPr lang="fr-FR" sz="2400" dirty="0">
                 <a:latin typeface="Tahoma" panose="020B0604030504040204" pitchFamily="34" charset="0"/>
                 <a:ea typeface="Tahoma" panose="020B0604030504040204" pitchFamily="34" charset="0"/>
                 <a:cs typeface="Tahoma" panose="020B0604030504040204" pitchFamily="34" charset="0"/>
               </a:rPr>
-              <a:t>D’autres matériaux</a:t>
-            </a:r>
-          </a:p>
-          <a:p>
-            <a:pPr lvl="2" rtl="0"/>
-            <a:r>
-              <a:rPr lang="fr-FR" sz="2000">
-                <a:latin typeface="Tahoma" panose="020B0604030504040204" pitchFamily="34" charset="0"/>
-                <a:ea typeface="Tahoma" panose="020B0604030504040204" pitchFamily="34" charset="0"/>
-                <a:cs typeface="Tahoma" panose="020B0604030504040204" pitchFamily="34" charset="0"/>
-              </a:rPr>
-              <a:t>D’autres versions</a:t>
-            </a:r>
-          </a:p>
-          <a:p>
-            <a:pPr lvl="2" rtl="0"/>
-            <a:r>
-              <a:rPr lang="fr-FR" sz="2000">
-                <a:latin typeface="Tahoma" panose="020B0604030504040204" pitchFamily="34" charset="0"/>
-                <a:ea typeface="Tahoma" panose="020B0604030504040204" pitchFamily="34" charset="0"/>
-                <a:cs typeface="Tahoma" panose="020B0604030504040204" pitchFamily="34" charset="0"/>
-              </a:rPr>
-              <a:t>D’autres tailles</a:t>
-            </a:r>
-          </a:p>
-          <a:p>
-            <a:pPr lvl="1" rtl="0"/>
-            <a:r>
-              <a:rPr lang="fr-FR" sz="2400">
-                <a:latin typeface="Tahoma" panose="020B0604030504040204" pitchFamily="34" charset="0"/>
-                <a:ea typeface="Tahoma" panose="020B0604030504040204" pitchFamily="34" charset="0"/>
-                <a:cs typeface="Tahoma" panose="020B0604030504040204" pitchFamily="34" charset="0"/>
-              </a:rPr>
-              <a:t>Décrivez ou illustrez à l’aide de photos le processus de modification de votre prototype et le résultat</a:t>
+              <a:t>ou illustrez à l’aide de photos le processus de modification de votre prototype et le résultat</a:t>
             </a:r>
           </a:p>
         </p:txBody>
@@ -21397,7 +18057,7 @@
 </p:sld>
 </file>
 
-<file path=ppt/slides/slide8.xml><?xml version="1.0" encoding="utf-8"?>
+<file path=ppt/slides/slide7.xml><?xml version="1.0" encoding="utf-8"?>
 <p:sld xmlns:a="http://schemas.openxmlformats.org/drawingml/2006/main" xmlns:r="http://schemas.openxmlformats.org/officeDocument/2006/relationships" xmlns:p="http://schemas.openxmlformats.org/presentationml/2006/main">
   <p:cSld>
     <p:spTree>

--- a/GACI FORUM SUR L’APPRENTISSAGE DU frame work boostrap.pptx
+++ b/GACI FORUM SUR L’APPRENTISSAGE DU frame work boostrap.pptx
@@ -17,7 +17,7 @@
     <p:sldId id="260" r:id="rId5"/>
     <p:sldId id="261" r:id="rId6"/>
     <p:sldId id="262" r:id="rId7"/>
-    <p:sldId id="263" r:id="rId8"/>
+    <p:sldId id="264" r:id="rId8"/>
   </p:sldIdLst>
   <p:sldSz cx="12192000" cy="6858000"/>
   <p:notesSz cx="6858000" cy="9144000"/>
@@ -4576,7 +4576,7 @@
     </p:spTree>
     <p:extLst>
       <p:ext uri="{BB962C8B-B14F-4D97-AF65-F5344CB8AC3E}">
-        <p14:creationId xmlns:p14="http://schemas.microsoft.com/office/powerpoint/2010/main" val="4193590996"/>
+        <p14:creationId xmlns:p14="http://schemas.microsoft.com/office/powerpoint/2010/main" val="4032237223"/>
       </p:ext>
     </p:extLst>
   </p:cSld>
@@ -17925,7 +17925,7 @@
         <p:spPr/>
         <p:txBody>
           <a:bodyPr rtlCol="0">
-            <a:normAutofit fontScale="92500" lnSpcReduction="20000"/>
+            <a:normAutofit/>
           </a:bodyPr>
           <a:lstStyle/>
           <a:p>
@@ -18014,33 +18014,10 @@
             </a:r>
           </a:p>
           <a:p>
-            <a:pPr lvl="1"/>
-            <a:endParaRPr lang="fr-FR" dirty="0" smtClean="0"/>
-          </a:p>
-          <a:p>
             <a:pPr marL="457200" lvl="1" indent="0">
               <a:buNone/>
             </a:pPr>
             <a:endParaRPr lang="fr-FR" dirty="0" smtClean="0"/>
-          </a:p>
-          <a:p>
-            <a:pPr lvl="1" rtl="0"/>
-            <a:r>
-              <a:rPr lang="fr-FR" sz="2400" dirty="0" smtClean="0">
-                <a:latin typeface="Tahoma" panose="020B0604030504040204" pitchFamily="34" charset="0"/>
-                <a:ea typeface="Tahoma" panose="020B0604030504040204" pitchFamily="34" charset="0"/>
-                <a:cs typeface="Tahoma" panose="020B0604030504040204" pitchFamily="34" charset="0"/>
-              </a:rPr>
-              <a:t>Décrivez </a:t>
-            </a:r>
-            <a:r>
-              <a:rPr lang="fr-FR" sz="2400" dirty="0">
-                <a:latin typeface="Tahoma" panose="020B0604030504040204" pitchFamily="34" charset="0"/>
-                <a:ea typeface="Tahoma" panose="020B0604030504040204" pitchFamily="34" charset="0"/>
-                <a:cs typeface="Tahoma" panose="020B0604030504040204" pitchFamily="34" charset="0"/>
-              </a:rPr>
-              <a:t>ou illustrez à l’aide de photos le processus de modification de votre prototype et le résultat</a:t>
-            </a:r>
           </a:p>
         </p:txBody>
       </p:sp>
@@ -18097,13 +18074,17 @@
           </a:bodyPr>
           <a:lstStyle/>
           <a:p>
-            <a:pPr rtl="0"/>
             <a:r>
-              <a:rPr lang="fr-FR" sz="4400">
-                <a:latin typeface="Rockwell" panose="02060603020205020403" pitchFamily="18" charset="0"/>
-              </a:rPr>
-              <a:t>Résultat final</a:t>
+              <a:rPr lang="fr-FR" sz="4400" dirty="0"/>
+              <a:t>Les Fondations : Anatomie d'une </a:t>
             </a:r>
+            <a:r>
+              <a:rPr lang="fr-FR" sz="4400" dirty="0" smtClean="0"/>
+              <a:t>Page.</a:t>
+            </a:r>
+            <a:endParaRPr lang="fr-FR" sz="4400" dirty="0">
+              <a:latin typeface="Rockwell" panose="02060603020205020403" pitchFamily="18" charset="0"/>
+            </a:endParaRPr>
           </a:p>
         </p:txBody>
       </p:sp>
@@ -18125,109 +18106,1010 @@
         </p:nvSpPr>
         <p:spPr/>
         <p:txBody>
-          <a:bodyPr vert="horz" lIns="91440" tIns="45720" rIns="91440" bIns="45720" rtlCol="0" anchor="t">
-            <a:normAutofit fontScale="85000" lnSpcReduction="20000"/>
+          <a:bodyPr rtlCol="0">
+            <a:normAutofit/>
           </a:bodyPr>
           <a:lstStyle/>
           <a:p>
-            <a:pPr lvl="0" rtl="0"/>
+            <a:pPr lvl="1"/>
             <a:r>
-              <a:rPr lang="fr-FR">
-                <a:latin typeface="Tahoma" panose="020B0604030504040204" pitchFamily="34" charset="0"/>
-                <a:ea typeface="Tahoma" panose="020B0604030504040204" pitchFamily="34" charset="0"/>
-                <a:cs typeface="Tahoma" panose="020B0604030504040204" pitchFamily="34" charset="0"/>
-              </a:rPr>
-              <a:t>Une fois que vous êtes parvenu à un produit final, revenez à votre deuxième diapositive et passez en revue les questions initiales auxquelles vous avez répondu</a:t>
+              <a:rPr lang="fr-FR" sz="2400" dirty="0"/>
+              <a:t>La Typographie (Titres et Paragraphes)</a:t>
             </a:r>
-          </a:p>
-          <a:p>
-            <a:pPr lvl="1" rtl="0"/>
+            <a:endParaRPr lang="en-US" sz="2400" dirty="0" smtClean="0"/>
+          </a:p>
+          <a:p>
+            <a:pPr lvl="1"/>
             <a:r>
-              <a:rPr lang="fr-FR">
-                <a:latin typeface="Tahoma" panose="020B0604030504040204" pitchFamily="34" charset="0"/>
-                <a:ea typeface="Tahoma" panose="020B0604030504040204" pitchFamily="34" charset="0"/>
-                <a:cs typeface="Tahoma" panose="020B0604030504040204" pitchFamily="34" charset="0"/>
-              </a:rPr>
-              <a:t>Votre prototype final a-t-il résolu votre problème pour la ou les personnes ciblées ?</a:t>
-            </a:r>
-          </a:p>
-          <a:p>
-            <a:pPr lvl="2" rtl="0"/>
-            <a:r>
-              <a:rPr lang="fr-FR">
-                <a:latin typeface="Tahoma" panose="020B0604030504040204" pitchFamily="34" charset="0"/>
-                <a:ea typeface="Tahoma" panose="020B0604030504040204" pitchFamily="34" charset="0"/>
-                <a:cs typeface="Tahoma" panose="020B0604030504040204" pitchFamily="34" charset="0"/>
-              </a:rPr>
-              <a:t>Si c’est le cas, </a:t>
+              <a:rPr lang="en-US" dirty="0"/>
+              <a:t>Les </a:t>
             </a:r>
             <a:r>
-              <a:rPr lang="fr-FR" b="1">
-                <a:latin typeface="Tahoma" panose="020B0604030504040204" pitchFamily="34" charset="0"/>
-                <a:ea typeface="Tahoma" panose="020B0604030504040204" pitchFamily="34" charset="0"/>
-                <a:cs typeface="Tahoma" panose="020B0604030504040204" pitchFamily="34" charset="0"/>
-              </a:rPr>
-              <a:t>félicitations </a:t>
+              <a:rPr lang="en-US" dirty="0" err="1" smtClean="0"/>
+              <a:t>Titres</a:t>
             </a:r>
             <a:r>
-              <a:rPr lang="fr-FR">
-                <a:latin typeface="Tahoma" panose="020B0604030504040204" pitchFamily="34" charset="0"/>
-                <a:ea typeface="Tahoma" panose="020B0604030504040204" pitchFamily="34" charset="0"/>
-                <a:cs typeface="Tahoma" panose="020B0604030504040204" pitchFamily="34" charset="0"/>
-              </a:rPr>
-              <a:t>! Continuez toutefois à réfléchir à la manière dont vous pouvez encore l’améliorer !</a:t>
+              <a:rPr lang="en-US" dirty="0" smtClean="0"/>
+              <a:t> (h1 à h6) </a:t>
             </a:r>
-          </a:p>
-          <a:p>
-            <a:pPr lvl="2" rtl="0"/>
             <a:r>
-              <a:rPr lang="fr-FR">
-                <a:latin typeface="Tahoma" panose="020B0604030504040204" pitchFamily="34" charset="0"/>
-                <a:ea typeface="Tahoma" panose="020B0604030504040204" pitchFamily="34" charset="0"/>
-                <a:cs typeface="Tahoma" panose="020B0604030504040204" pitchFamily="34" charset="0"/>
-              </a:rPr>
-              <a:t>Si ce n’est pas le cas, copiez cette présentation et redémarrez le cycle problème/solution </a:t>
+              <a:rPr lang="fr-FR" dirty="0" err="1"/>
+              <a:t>Bootstrap</a:t>
             </a:r>
-          </a:p>
-          <a:p>
-            <a:pPr rtl="0"/>
             <a:r>
-              <a:rPr lang="fr-FR">
-                <a:latin typeface="Tahoma" panose="020B0604030504040204" pitchFamily="34" charset="0"/>
-                <a:ea typeface="Tahoma" panose="020B0604030504040204" pitchFamily="34" charset="0"/>
-                <a:cs typeface="Tahoma" panose="020B0604030504040204" pitchFamily="34" charset="0"/>
-              </a:rPr>
-              <a:t>Insérez des photos de votre conception finalisée</a:t>
+              <a:rPr lang="fr-FR" dirty="0"/>
+              <a:t> leur donne une police propre et un espacement par défaut.</a:t>
             </a:r>
-          </a:p>
-          <a:p>
-            <a:pPr rtl="0"/>
+            <a:endParaRPr lang="fr-FR" dirty="0" smtClean="0"/>
+          </a:p>
+          <a:p>
+            <a:pPr lvl="1"/>
             <a:r>
-              <a:rPr lang="fr-FR">
-                <a:latin typeface="Tahoma" panose="020B0604030504040204" pitchFamily="34" charset="0"/>
-                <a:ea typeface="Tahoma" panose="020B0604030504040204" pitchFamily="34" charset="0"/>
-                <a:cs typeface="Tahoma" panose="020B0604030504040204" pitchFamily="34" charset="0"/>
-              </a:rPr>
-              <a:t>Indiquez pourquoi cette conception résout le problème</a:t>
+              <a:rPr lang="fr-FR" dirty="0" smtClean="0"/>
+              <a:t>.display-1 </a:t>
             </a:r>
-          </a:p>
-          <a:p>
-            <a:pPr rtl="0"/>
             <a:r>
-              <a:rPr lang="fr-FR">
-                <a:latin typeface="Tahoma" panose="020B0604030504040204" pitchFamily="34" charset="0"/>
-                <a:ea typeface="Tahoma" panose="020B0604030504040204" pitchFamily="34" charset="0"/>
-                <a:cs typeface="Tahoma" panose="020B0604030504040204" pitchFamily="34" charset="0"/>
-              </a:rPr>
-              <a:t>Livrez vos impressions concernant l’ensemble du processus dans le cadre de ce projet</a:t>
+              <a:rPr lang="fr-FR" dirty="0"/>
+              <a:t>: Pour des titres géants (très moderne pour le "</a:t>
             </a:r>
+            <a:r>
+              <a:rPr lang="fr-FR" dirty="0" err="1"/>
+              <a:t>Hero</a:t>
+            </a:r>
+            <a:r>
+              <a:rPr lang="fr-FR" dirty="0" smtClean="0"/>
+              <a:t>").</a:t>
+            </a:r>
+          </a:p>
+          <a:p>
+            <a:pPr lvl="1"/>
+            <a:r>
+              <a:rPr lang="en-US" dirty="0" smtClean="0"/>
+              <a:t>.lead: </a:t>
+            </a:r>
+            <a:r>
+              <a:rPr lang="fr-FR" dirty="0"/>
+              <a:t>Pour rendre un paragraphe plus lisible et élégant (idéal pour l'introduction</a:t>
+            </a:r>
+            <a:r>
+              <a:rPr lang="fr-FR" dirty="0" smtClean="0"/>
+              <a:t>).</a:t>
+            </a:r>
+          </a:p>
+          <a:p>
+            <a:pPr lvl="1"/>
+            <a:r>
+              <a:rPr lang="fr-FR" dirty="0"/>
+              <a:t>Les Couleurs et le </a:t>
+            </a:r>
+            <a:r>
+              <a:rPr lang="fr-FR" dirty="0" smtClean="0"/>
+              <a:t>Design</a:t>
+            </a:r>
+          </a:p>
+          <a:p>
+            <a:pPr lvl="1"/>
+            <a:endParaRPr lang="fr-FR" dirty="0" smtClean="0"/>
+          </a:p>
+          <a:p>
+            <a:pPr marL="457200" lvl="1" indent="0">
+              <a:buNone/>
+            </a:pPr>
+            <a:endParaRPr lang="fr-FR" dirty="0" smtClean="0"/>
           </a:p>
         </p:txBody>
       </p:sp>
+      <p:graphicFrame>
+        <p:nvGraphicFramePr>
+          <p:cNvPr id="6" name="Tableau 5"/>
+          <p:cNvGraphicFramePr>
+            <a:graphicFrameLocks noGrp="1"/>
+          </p:cNvGraphicFramePr>
+          <p:nvPr>
+            <p:extLst>
+              <p:ext uri="{D42A27DB-BD31-4B8C-83A1-F6EECF244321}">
+                <p14:modId xmlns:p14="http://schemas.microsoft.com/office/powerpoint/2010/main" val="2359291629"/>
+              </p:ext>
+            </p:extLst>
+          </p:nvPr>
+        </p:nvGraphicFramePr>
+        <p:xfrm>
+          <a:off x="1141412" y="4366264"/>
+          <a:ext cx="9906000" cy="2103120"/>
+        </p:xfrm>
+        <a:graphic>
+          <a:graphicData uri="http://schemas.openxmlformats.org/drawingml/2006/table">
+            <a:tbl>
+              <a:tblPr/>
+              <a:tblGrid>
+                <a:gridCol w="3302000">
+                  <a:extLst>
+                    <a:ext uri="{9D8B030D-6E8A-4147-A177-3AD203B41FA5}">
+                      <a16:colId xmlns:a16="http://schemas.microsoft.com/office/drawing/2014/main" val="3754373341"/>
+                    </a:ext>
+                  </a:extLst>
+                </a:gridCol>
+                <a:gridCol w="3302000">
+                  <a:extLst>
+                    <a:ext uri="{9D8B030D-6E8A-4147-A177-3AD203B41FA5}">
+                      <a16:colId xmlns:a16="http://schemas.microsoft.com/office/drawing/2014/main" val="4152385261"/>
+                    </a:ext>
+                  </a:extLst>
+                </a:gridCol>
+                <a:gridCol w="3302000">
+                  <a:extLst>
+                    <a:ext uri="{9D8B030D-6E8A-4147-A177-3AD203B41FA5}">
+                      <a16:colId xmlns:a16="http://schemas.microsoft.com/office/drawing/2014/main" val="91137114"/>
+                    </a:ext>
+                  </a:extLst>
+                </a:gridCol>
+              </a:tblGrid>
+              <a:tr h="0">
+                <a:tc>
+                  <a:txBody>
+                    <a:bodyPr/>
+                    <a:lstStyle/>
+                    <a:p>
+                      <a:r>
+                        <a:rPr lang="en-US" b="1">
+                          <a:effectLst/>
+                          <a:latin typeface="Google Sans Text"/>
+                        </a:rPr>
+                        <a:t>Classe</a:t>
+                      </a:r>
+                      <a:endParaRPr lang="en-US">
+                        <a:effectLst/>
+                        <a:latin typeface="Google Sans Text"/>
+                      </a:endParaRPr>
+                    </a:p>
+                  </a:txBody>
+                  <a:tcPr anchor="ctr">
+                    <a:lnL w="6350" cap="flat" cmpd="sng" algn="ctr">
+                      <a:solidFill>
+                        <a:schemeClr val="bg1"/>
+                      </a:solidFill>
+                      <a:prstDash val="solid"/>
+                      <a:round/>
+                      <a:headEnd type="none" w="med" len="med"/>
+                      <a:tailEnd type="none" w="med" len="med"/>
+                    </a:lnL>
+                    <a:lnR w="6350" cap="flat" cmpd="sng" algn="ctr">
+                      <a:solidFill>
+                        <a:schemeClr val="bg1"/>
+                      </a:solidFill>
+                      <a:prstDash val="solid"/>
+                      <a:round/>
+                      <a:headEnd type="none" w="med" len="med"/>
+                      <a:tailEnd type="none" w="med" len="med"/>
+                    </a:lnR>
+                    <a:lnT w="6350" cap="flat" cmpd="sng" algn="ctr">
+                      <a:solidFill>
+                        <a:schemeClr val="bg1"/>
+                      </a:solidFill>
+                      <a:prstDash val="solid"/>
+                      <a:round/>
+                      <a:headEnd type="none" w="med" len="med"/>
+                      <a:tailEnd type="none" w="med" len="med"/>
+                    </a:lnT>
+                    <a:lnB w="6350" cap="flat" cmpd="sng" algn="ctr">
+                      <a:solidFill>
+                        <a:schemeClr val="bg1"/>
+                      </a:solidFill>
+                      <a:prstDash val="solid"/>
+                      <a:round/>
+                      <a:headEnd type="none" w="med" len="med"/>
+                      <a:tailEnd type="none" w="med" len="med"/>
+                    </a:lnB>
+                  </a:tcPr>
+                </a:tc>
+                <a:tc>
+                  <a:txBody>
+                    <a:bodyPr/>
+                    <a:lstStyle/>
+                    <a:p>
+                      <a:r>
+                        <a:rPr lang="en-US" b="1">
+                          <a:effectLst/>
+                          <a:latin typeface="Google Sans Text"/>
+                        </a:rPr>
+                        <a:t>Couleur</a:t>
+                      </a:r>
+                      <a:endParaRPr lang="en-US">
+                        <a:effectLst/>
+                        <a:latin typeface="Google Sans Text"/>
+                      </a:endParaRPr>
+                    </a:p>
+                  </a:txBody>
+                  <a:tcPr anchor="ctr">
+                    <a:lnL w="6350" cap="flat" cmpd="sng" algn="ctr">
+                      <a:solidFill>
+                        <a:schemeClr val="bg1"/>
+                      </a:solidFill>
+                      <a:prstDash val="solid"/>
+                      <a:round/>
+                      <a:headEnd type="none" w="med" len="med"/>
+                      <a:tailEnd type="none" w="med" len="med"/>
+                    </a:lnL>
+                    <a:lnR w="6350" cap="flat" cmpd="sng" algn="ctr">
+                      <a:solidFill>
+                        <a:schemeClr val="bg1"/>
+                      </a:solidFill>
+                      <a:prstDash val="solid"/>
+                      <a:round/>
+                      <a:headEnd type="none" w="med" len="med"/>
+                      <a:tailEnd type="none" w="med" len="med"/>
+                    </a:lnR>
+                    <a:lnT w="6350" cap="flat" cmpd="sng" algn="ctr">
+                      <a:solidFill>
+                        <a:schemeClr val="bg1"/>
+                      </a:solidFill>
+                      <a:prstDash val="solid"/>
+                      <a:round/>
+                      <a:headEnd type="none" w="med" len="med"/>
+                      <a:tailEnd type="none" w="med" len="med"/>
+                    </a:lnT>
+                    <a:lnB w="6350" cap="flat" cmpd="sng" algn="ctr">
+                      <a:solidFill>
+                        <a:schemeClr val="bg1"/>
+                      </a:solidFill>
+                      <a:prstDash val="solid"/>
+                      <a:round/>
+                      <a:headEnd type="none" w="med" len="med"/>
+                      <a:tailEnd type="none" w="med" len="med"/>
+                    </a:lnB>
+                  </a:tcPr>
+                </a:tc>
+                <a:tc>
+                  <a:txBody>
+                    <a:bodyPr/>
+                    <a:lstStyle/>
+                    <a:p>
+                      <a:r>
+                        <a:rPr lang="en-US" b="1">
+                          <a:effectLst/>
+                          <a:latin typeface="Google Sans Text"/>
+                        </a:rPr>
+                        <a:t>Signification</a:t>
+                      </a:r>
+                      <a:endParaRPr lang="en-US">
+                        <a:effectLst/>
+                        <a:latin typeface="Google Sans Text"/>
+                      </a:endParaRPr>
+                    </a:p>
+                  </a:txBody>
+                  <a:tcPr anchor="ctr">
+                    <a:lnL w="6350" cap="flat" cmpd="sng" algn="ctr">
+                      <a:solidFill>
+                        <a:schemeClr val="bg1"/>
+                      </a:solidFill>
+                      <a:prstDash val="solid"/>
+                      <a:round/>
+                      <a:headEnd type="none" w="med" len="med"/>
+                      <a:tailEnd type="none" w="med" len="med"/>
+                    </a:lnL>
+                    <a:lnR w="6350" cap="flat" cmpd="sng" algn="ctr">
+                      <a:solidFill>
+                        <a:schemeClr val="bg1"/>
+                      </a:solidFill>
+                      <a:prstDash val="solid"/>
+                      <a:round/>
+                      <a:headEnd type="none" w="med" len="med"/>
+                      <a:tailEnd type="none" w="med" len="med"/>
+                    </a:lnR>
+                    <a:lnT w="6350" cap="flat" cmpd="sng" algn="ctr">
+                      <a:solidFill>
+                        <a:schemeClr val="bg1"/>
+                      </a:solidFill>
+                      <a:prstDash val="solid"/>
+                      <a:round/>
+                      <a:headEnd type="none" w="med" len="med"/>
+                      <a:tailEnd type="none" w="med" len="med"/>
+                    </a:lnT>
+                    <a:lnB w="6350" cap="flat" cmpd="sng" algn="ctr">
+                      <a:solidFill>
+                        <a:schemeClr val="bg1"/>
+                      </a:solidFill>
+                      <a:prstDash val="solid"/>
+                      <a:round/>
+                      <a:headEnd type="none" w="med" len="med"/>
+                      <a:tailEnd type="none" w="med" len="med"/>
+                    </a:lnB>
+                  </a:tcPr>
+                </a:tc>
+                <a:extLst>
+                  <a:ext uri="{0D108BD9-81ED-4DB2-BD59-A6C34878D82A}">
+                    <a16:rowId xmlns:a16="http://schemas.microsoft.com/office/drawing/2014/main" val="2313737279"/>
+                  </a:ext>
+                </a:extLst>
+              </a:tr>
+              <a:tr h="0">
+                <a:tc>
+                  <a:txBody>
+                    <a:bodyPr/>
+                    <a:lstStyle/>
+                    <a:p>
+                      <a:r>
+                        <a:rPr lang="en-US">
+                          <a:effectLst/>
+                          <a:latin typeface="Google Sans Text"/>
+                        </a:rPr>
+                        <a:t>.text-primary</a:t>
+                      </a:r>
+                    </a:p>
+                  </a:txBody>
+                  <a:tcPr anchor="ctr">
+                    <a:lnL w="6350" cap="flat" cmpd="sng" algn="ctr">
+                      <a:solidFill>
+                        <a:schemeClr val="bg1"/>
+                      </a:solidFill>
+                      <a:prstDash val="solid"/>
+                      <a:round/>
+                      <a:headEnd type="none" w="med" len="med"/>
+                      <a:tailEnd type="none" w="med" len="med"/>
+                    </a:lnL>
+                    <a:lnR w="6350" cap="flat" cmpd="sng" algn="ctr">
+                      <a:solidFill>
+                        <a:schemeClr val="bg1"/>
+                      </a:solidFill>
+                      <a:prstDash val="solid"/>
+                      <a:round/>
+                      <a:headEnd type="none" w="med" len="med"/>
+                      <a:tailEnd type="none" w="med" len="med"/>
+                    </a:lnR>
+                    <a:lnT w="6350" cap="flat" cmpd="sng" algn="ctr">
+                      <a:solidFill>
+                        <a:schemeClr val="bg1"/>
+                      </a:solidFill>
+                      <a:prstDash val="solid"/>
+                      <a:round/>
+                      <a:headEnd type="none" w="med" len="med"/>
+                      <a:tailEnd type="none" w="med" len="med"/>
+                    </a:lnT>
+                    <a:lnB w="6350" cap="flat" cmpd="sng" algn="ctr">
+                      <a:solidFill>
+                        <a:schemeClr val="bg1"/>
+                      </a:solidFill>
+                      <a:prstDash val="solid"/>
+                      <a:round/>
+                      <a:headEnd type="none" w="med" len="med"/>
+                      <a:tailEnd type="none" w="med" len="med"/>
+                    </a:lnB>
+                  </a:tcPr>
+                </a:tc>
+                <a:tc>
+                  <a:txBody>
+                    <a:bodyPr/>
+                    <a:lstStyle/>
+                    <a:p>
+                      <a:r>
+                        <a:rPr lang="en-US" b="1">
+                          <a:effectLst/>
+                          <a:latin typeface="Google Sans Text"/>
+                        </a:rPr>
+                        <a:t>Bleu</a:t>
+                      </a:r>
+                      <a:endParaRPr lang="en-US">
+                        <a:effectLst/>
+                        <a:latin typeface="Google Sans Text"/>
+                      </a:endParaRPr>
+                    </a:p>
+                  </a:txBody>
+                  <a:tcPr anchor="ctr">
+                    <a:lnL w="6350" cap="flat" cmpd="sng" algn="ctr">
+                      <a:solidFill>
+                        <a:schemeClr val="bg1"/>
+                      </a:solidFill>
+                      <a:prstDash val="solid"/>
+                      <a:round/>
+                      <a:headEnd type="none" w="med" len="med"/>
+                      <a:tailEnd type="none" w="med" len="med"/>
+                    </a:lnL>
+                    <a:lnR w="6350" cap="flat" cmpd="sng" algn="ctr">
+                      <a:solidFill>
+                        <a:schemeClr val="bg1"/>
+                      </a:solidFill>
+                      <a:prstDash val="solid"/>
+                      <a:round/>
+                      <a:headEnd type="none" w="med" len="med"/>
+                      <a:tailEnd type="none" w="med" len="med"/>
+                    </a:lnR>
+                    <a:lnT w="6350" cap="flat" cmpd="sng" algn="ctr">
+                      <a:solidFill>
+                        <a:schemeClr val="bg1"/>
+                      </a:solidFill>
+                      <a:prstDash val="solid"/>
+                      <a:round/>
+                      <a:headEnd type="none" w="med" len="med"/>
+                      <a:tailEnd type="none" w="med" len="med"/>
+                    </a:lnT>
+                    <a:lnB w="6350" cap="flat" cmpd="sng" algn="ctr">
+                      <a:solidFill>
+                        <a:schemeClr val="bg1"/>
+                      </a:solidFill>
+                      <a:prstDash val="solid"/>
+                      <a:round/>
+                      <a:headEnd type="none" w="med" len="med"/>
+                      <a:tailEnd type="none" w="med" len="med"/>
+                    </a:lnB>
+                  </a:tcPr>
+                </a:tc>
+                <a:tc>
+                  <a:txBody>
+                    <a:bodyPr/>
+                    <a:lstStyle/>
+                    <a:p>
+                      <a:r>
+                        <a:rPr lang="en-US">
+                          <a:effectLst/>
+                          <a:latin typeface="Google Sans Text"/>
+                        </a:rPr>
+                        <a:t>Couleur principale (Action)</a:t>
+                      </a:r>
+                    </a:p>
+                  </a:txBody>
+                  <a:tcPr anchor="ctr">
+                    <a:lnL w="6350" cap="flat" cmpd="sng" algn="ctr">
+                      <a:solidFill>
+                        <a:schemeClr val="bg1"/>
+                      </a:solidFill>
+                      <a:prstDash val="solid"/>
+                      <a:round/>
+                      <a:headEnd type="none" w="med" len="med"/>
+                      <a:tailEnd type="none" w="med" len="med"/>
+                    </a:lnL>
+                    <a:lnR w="6350" cap="flat" cmpd="sng" algn="ctr">
+                      <a:solidFill>
+                        <a:schemeClr val="bg1"/>
+                      </a:solidFill>
+                      <a:prstDash val="solid"/>
+                      <a:round/>
+                      <a:headEnd type="none" w="med" len="med"/>
+                      <a:tailEnd type="none" w="med" len="med"/>
+                    </a:lnR>
+                    <a:lnT w="6350" cap="flat" cmpd="sng" algn="ctr">
+                      <a:solidFill>
+                        <a:schemeClr val="bg1"/>
+                      </a:solidFill>
+                      <a:prstDash val="solid"/>
+                      <a:round/>
+                      <a:headEnd type="none" w="med" len="med"/>
+                      <a:tailEnd type="none" w="med" len="med"/>
+                    </a:lnT>
+                    <a:lnB w="6350" cap="flat" cmpd="sng" algn="ctr">
+                      <a:solidFill>
+                        <a:schemeClr val="bg1"/>
+                      </a:solidFill>
+                      <a:prstDash val="solid"/>
+                      <a:round/>
+                      <a:headEnd type="none" w="med" len="med"/>
+                      <a:tailEnd type="none" w="med" len="med"/>
+                    </a:lnB>
+                  </a:tcPr>
+                </a:tc>
+                <a:extLst>
+                  <a:ext uri="{0D108BD9-81ED-4DB2-BD59-A6C34878D82A}">
+                    <a16:rowId xmlns:a16="http://schemas.microsoft.com/office/drawing/2014/main" val="768209107"/>
+                  </a:ext>
+                </a:extLst>
+              </a:tr>
+              <a:tr h="0">
+                <a:tc>
+                  <a:txBody>
+                    <a:bodyPr/>
+                    <a:lstStyle/>
+                    <a:p>
+                      <a:r>
+                        <a:rPr lang="en-US">
+                          <a:effectLst/>
+                          <a:latin typeface="Google Sans Text"/>
+                        </a:rPr>
+                        <a:t>.bg-dark</a:t>
+                      </a:r>
+                    </a:p>
+                  </a:txBody>
+                  <a:tcPr anchor="ctr">
+                    <a:lnL w="6350" cap="flat" cmpd="sng" algn="ctr">
+                      <a:solidFill>
+                        <a:schemeClr val="bg1"/>
+                      </a:solidFill>
+                      <a:prstDash val="solid"/>
+                      <a:round/>
+                      <a:headEnd type="none" w="med" len="med"/>
+                      <a:tailEnd type="none" w="med" len="med"/>
+                    </a:lnL>
+                    <a:lnR w="6350" cap="flat" cmpd="sng" algn="ctr">
+                      <a:solidFill>
+                        <a:schemeClr val="bg1"/>
+                      </a:solidFill>
+                      <a:prstDash val="solid"/>
+                      <a:round/>
+                      <a:headEnd type="none" w="med" len="med"/>
+                      <a:tailEnd type="none" w="med" len="med"/>
+                    </a:lnR>
+                    <a:lnT w="6350" cap="flat" cmpd="sng" algn="ctr">
+                      <a:solidFill>
+                        <a:schemeClr val="bg1"/>
+                      </a:solidFill>
+                      <a:prstDash val="solid"/>
+                      <a:round/>
+                      <a:headEnd type="none" w="med" len="med"/>
+                      <a:tailEnd type="none" w="med" len="med"/>
+                    </a:lnT>
+                    <a:lnB w="6350" cap="flat" cmpd="sng" algn="ctr">
+                      <a:solidFill>
+                        <a:schemeClr val="bg1"/>
+                      </a:solidFill>
+                      <a:prstDash val="solid"/>
+                      <a:round/>
+                      <a:headEnd type="none" w="med" len="med"/>
+                      <a:tailEnd type="none" w="med" len="med"/>
+                    </a:lnB>
+                  </a:tcPr>
+                </a:tc>
+                <a:tc>
+                  <a:txBody>
+                    <a:bodyPr/>
+                    <a:lstStyle/>
+                    <a:p>
+                      <a:r>
+                        <a:rPr lang="en-US" b="1">
+                          <a:effectLst/>
+                          <a:latin typeface="Google Sans Text"/>
+                        </a:rPr>
+                        <a:t>Noir/Gris foncé</a:t>
+                      </a:r>
+                      <a:endParaRPr lang="en-US">
+                        <a:effectLst/>
+                        <a:latin typeface="Google Sans Text"/>
+                      </a:endParaRPr>
+                    </a:p>
+                  </a:txBody>
+                  <a:tcPr anchor="ctr">
+                    <a:lnL w="6350" cap="flat" cmpd="sng" algn="ctr">
+                      <a:solidFill>
+                        <a:schemeClr val="bg1"/>
+                      </a:solidFill>
+                      <a:prstDash val="solid"/>
+                      <a:round/>
+                      <a:headEnd type="none" w="med" len="med"/>
+                      <a:tailEnd type="none" w="med" len="med"/>
+                    </a:lnL>
+                    <a:lnR w="6350" cap="flat" cmpd="sng" algn="ctr">
+                      <a:solidFill>
+                        <a:schemeClr val="bg1"/>
+                      </a:solidFill>
+                      <a:prstDash val="solid"/>
+                      <a:round/>
+                      <a:headEnd type="none" w="med" len="med"/>
+                      <a:tailEnd type="none" w="med" len="med"/>
+                    </a:lnR>
+                    <a:lnT w="6350" cap="flat" cmpd="sng" algn="ctr">
+                      <a:solidFill>
+                        <a:schemeClr val="bg1"/>
+                      </a:solidFill>
+                      <a:prstDash val="solid"/>
+                      <a:round/>
+                      <a:headEnd type="none" w="med" len="med"/>
+                      <a:tailEnd type="none" w="med" len="med"/>
+                    </a:lnT>
+                    <a:lnB w="6350" cap="flat" cmpd="sng" algn="ctr">
+                      <a:solidFill>
+                        <a:schemeClr val="bg1"/>
+                      </a:solidFill>
+                      <a:prstDash val="solid"/>
+                      <a:round/>
+                      <a:headEnd type="none" w="med" len="med"/>
+                      <a:tailEnd type="none" w="med" len="med"/>
+                    </a:lnB>
+                  </a:tcPr>
+                </a:tc>
+                <a:tc>
+                  <a:txBody>
+                    <a:bodyPr/>
+                    <a:lstStyle/>
+                    <a:p>
+                      <a:r>
+                        <a:rPr lang="en-US">
+                          <a:effectLst/>
+                          <a:latin typeface="Google Sans Text"/>
+                        </a:rPr>
+                        <a:t>Fond sombre (Élégance)</a:t>
+                      </a:r>
+                    </a:p>
+                  </a:txBody>
+                  <a:tcPr anchor="ctr">
+                    <a:lnL w="6350" cap="flat" cmpd="sng" algn="ctr">
+                      <a:solidFill>
+                        <a:schemeClr val="bg1"/>
+                      </a:solidFill>
+                      <a:prstDash val="solid"/>
+                      <a:round/>
+                      <a:headEnd type="none" w="med" len="med"/>
+                      <a:tailEnd type="none" w="med" len="med"/>
+                    </a:lnL>
+                    <a:lnR w="6350" cap="flat" cmpd="sng" algn="ctr">
+                      <a:solidFill>
+                        <a:schemeClr val="bg1"/>
+                      </a:solidFill>
+                      <a:prstDash val="solid"/>
+                      <a:round/>
+                      <a:headEnd type="none" w="med" len="med"/>
+                      <a:tailEnd type="none" w="med" len="med"/>
+                    </a:lnR>
+                    <a:lnT w="6350" cap="flat" cmpd="sng" algn="ctr">
+                      <a:solidFill>
+                        <a:schemeClr val="bg1"/>
+                      </a:solidFill>
+                      <a:prstDash val="solid"/>
+                      <a:round/>
+                      <a:headEnd type="none" w="med" len="med"/>
+                      <a:tailEnd type="none" w="med" len="med"/>
+                    </a:lnT>
+                    <a:lnB w="6350" cap="flat" cmpd="sng" algn="ctr">
+                      <a:solidFill>
+                        <a:schemeClr val="bg1"/>
+                      </a:solidFill>
+                      <a:prstDash val="solid"/>
+                      <a:round/>
+                      <a:headEnd type="none" w="med" len="med"/>
+                      <a:tailEnd type="none" w="med" len="med"/>
+                    </a:lnB>
+                  </a:tcPr>
+                </a:tc>
+                <a:extLst>
+                  <a:ext uri="{0D108BD9-81ED-4DB2-BD59-A6C34878D82A}">
+                    <a16:rowId xmlns:a16="http://schemas.microsoft.com/office/drawing/2014/main" val="887132192"/>
+                  </a:ext>
+                </a:extLst>
+              </a:tr>
+              <a:tr h="0">
+                <a:tc>
+                  <a:txBody>
+                    <a:bodyPr/>
+                    <a:lstStyle/>
+                    <a:p>
+                      <a:r>
+                        <a:rPr lang="en-US">
+                          <a:effectLst/>
+                          <a:latin typeface="Google Sans Text"/>
+                        </a:rPr>
+                        <a:t>.text-white</a:t>
+                      </a:r>
+                    </a:p>
+                  </a:txBody>
+                  <a:tcPr anchor="ctr">
+                    <a:lnL w="6350" cap="flat" cmpd="sng" algn="ctr">
+                      <a:solidFill>
+                        <a:schemeClr val="bg1"/>
+                      </a:solidFill>
+                      <a:prstDash val="solid"/>
+                      <a:round/>
+                      <a:headEnd type="none" w="med" len="med"/>
+                      <a:tailEnd type="none" w="med" len="med"/>
+                    </a:lnL>
+                    <a:lnR w="6350" cap="flat" cmpd="sng" algn="ctr">
+                      <a:solidFill>
+                        <a:schemeClr val="bg1"/>
+                      </a:solidFill>
+                      <a:prstDash val="solid"/>
+                      <a:round/>
+                      <a:headEnd type="none" w="med" len="med"/>
+                      <a:tailEnd type="none" w="med" len="med"/>
+                    </a:lnR>
+                    <a:lnT w="6350" cap="flat" cmpd="sng" algn="ctr">
+                      <a:solidFill>
+                        <a:schemeClr val="bg1"/>
+                      </a:solidFill>
+                      <a:prstDash val="solid"/>
+                      <a:round/>
+                      <a:headEnd type="none" w="med" len="med"/>
+                      <a:tailEnd type="none" w="med" len="med"/>
+                    </a:lnT>
+                    <a:lnB w="6350" cap="flat" cmpd="sng" algn="ctr">
+                      <a:solidFill>
+                        <a:schemeClr val="bg1"/>
+                      </a:solidFill>
+                      <a:prstDash val="solid"/>
+                      <a:round/>
+                      <a:headEnd type="none" w="med" len="med"/>
+                      <a:tailEnd type="none" w="med" len="med"/>
+                    </a:lnB>
+                  </a:tcPr>
+                </a:tc>
+                <a:tc>
+                  <a:txBody>
+                    <a:bodyPr/>
+                    <a:lstStyle/>
+                    <a:p>
+                      <a:r>
+                        <a:rPr lang="en-US" b="1">
+                          <a:effectLst/>
+                          <a:latin typeface="Google Sans Text"/>
+                        </a:rPr>
+                        <a:t>Blanc</a:t>
+                      </a:r>
+                      <a:endParaRPr lang="en-US">
+                        <a:effectLst/>
+                        <a:latin typeface="Google Sans Text"/>
+                      </a:endParaRPr>
+                    </a:p>
+                  </a:txBody>
+                  <a:tcPr anchor="ctr">
+                    <a:lnL w="6350" cap="flat" cmpd="sng" algn="ctr">
+                      <a:solidFill>
+                        <a:schemeClr val="bg1"/>
+                      </a:solidFill>
+                      <a:prstDash val="solid"/>
+                      <a:round/>
+                      <a:headEnd type="none" w="med" len="med"/>
+                      <a:tailEnd type="none" w="med" len="med"/>
+                    </a:lnL>
+                    <a:lnR w="6350" cap="flat" cmpd="sng" algn="ctr">
+                      <a:solidFill>
+                        <a:schemeClr val="bg1"/>
+                      </a:solidFill>
+                      <a:prstDash val="solid"/>
+                      <a:round/>
+                      <a:headEnd type="none" w="med" len="med"/>
+                      <a:tailEnd type="none" w="med" len="med"/>
+                    </a:lnR>
+                    <a:lnT w="6350" cap="flat" cmpd="sng" algn="ctr">
+                      <a:solidFill>
+                        <a:schemeClr val="bg1"/>
+                      </a:solidFill>
+                      <a:prstDash val="solid"/>
+                      <a:round/>
+                      <a:headEnd type="none" w="med" len="med"/>
+                      <a:tailEnd type="none" w="med" len="med"/>
+                    </a:lnT>
+                    <a:lnB w="6350" cap="flat" cmpd="sng" algn="ctr">
+                      <a:solidFill>
+                        <a:schemeClr val="bg1"/>
+                      </a:solidFill>
+                      <a:prstDash val="solid"/>
+                      <a:round/>
+                      <a:headEnd type="none" w="med" len="med"/>
+                      <a:tailEnd type="none" w="med" len="med"/>
+                    </a:lnB>
+                  </a:tcPr>
+                </a:tc>
+                <a:tc>
+                  <a:txBody>
+                    <a:bodyPr/>
+                    <a:lstStyle/>
+                    <a:p>
+                      <a:r>
+                        <a:rPr lang="fr-FR">
+                          <a:effectLst/>
+                          <a:latin typeface="Google Sans Text"/>
+                        </a:rPr>
+                        <a:t>Texte clair sur fond sombre</a:t>
+                      </a:r>
+                    </a:p>
+                  </a:txBody>
+                  <a:tcPr anchor="ctr">
+                    <a:lnL w="6350" cap="flat" cmpd="sng" algn="ctr">
+                      <a:solidFill>
+                        <a:schemeClr val="bg1"/>
+                      </a:solidFill>
+                      <a:prstDash val="solid"/>
+                      <a:round/>
+                      <a:headEnd type="none" w="med" len="med"/>
+                      <a:tailEnd type="none" w="med" len="med"/>
+                    </a:lnL>
+                    <a:lnR w="6350" cap="flat" cmpd="sng" algn="ctr">
+                      <a:solidFill>
+                        <a:schemeClr val="bg1"/>
+                      </a:solidFill>
+                      <a:prstDash val="solid"/>
+                      <a:round/>
+                      <a:headEnd type="none" w="med" len="med"/>
+                      <a:tailEnd type="none" w="med" len="med"/>
+                    </a:lnR>
+                    <a:lnT w="6350" cap="flat" cmpd="sng" algn="ctr">
+                      <a:solidFill>
+                        <a:schemeClr val="bg1"/>
+                      </a:solidFill>
+                      <a:prstDash val="solid"/>
+                      <a:round/>
+                      <a:headEnd type="none" w="med" len="med"/>
+                      <a:tailEnd type="none" w="med" len="med"/>
+                    </a:lnT>
+                    <a:lnB w="6350" cap="flat" cmpd="sng" algn="ctr">
+                      <a:solidFill>
+                        <a:schemeClr val="bg1"/>
+                      </a:solidFill>
+                      <a:prstDash val="solid"/>
+                      <a:round/>
+                      <a:headEnd type="none" w="med" len="med"/>
+                      <a:tailEnd type="none" w="med" len="med"/>
+                    </a:lnB>
+                  </a:tcPr>
+                </a:tc>
+                <a:extLst>
+                  <a:ext uri="{0D108BD9-81ED-4DB2-BD59-A6C34878D82A}">
+                    <a16:rowId xmlns:a16="http://schemas.microsoft.com/office/drawing/2014/main" val="2183972812"/>
+                  </a:ext>
+                </a:extLst>
+              </a:tr>
+              <a:tr h="0">
+                <a:tc>
+                  <a:txBody>
+                    <a:bodyPr/>
+                    <a:lstStyle/>
+                    <a:p>
+                      <a:r>
+                        <a:rPr lang="en-US">
+                          <a:effectLst/>
+                          <a:latin typeface="Google Sans Text"/>
+                        </a:rPr>
+                        <a:t>.bg-light</a:t>
+                      </a:r>
+                    </a:p>
+                  </a:txBody>
+                  <a:tcPr anchor="ctr">
+                    <a:lnL w="6350" cap="flat" cmpd="sng" algn="ctr">
+                      <a:solidFill>
+                        <a:schemeClr val="bg1"/>
+                      </a:solidFill>
+                      <a:prstDash val="solid"/>
+                      <a:round/>
+                      <a:headEnd type="none" w="med" len="med"/>
+                      <a:tailEnd type="none" w="med" len="med"/>
+                    </a:lnL>
+                    <a:lnR w="6350" cap="flat" cmpd="sng" algn="ctr">
+                      <a:solidFill>
+                        <a:schemeClr val="bg1"/>
+                      </a:solidFill>
+                      <a:prstDash val="solid"/>
+                      <a:round/>
+                      <a:headEnd type="none" w="med" len="med"/>
+                      <a:tailEnd type="none" w="med" len="med"/>
+                    </a:lnR>
+                    <a:lnT w="6350" cap="flat" cmpd="sng" algn="ctr">
+                      <a:solidFill>
+                        <a:schemeClr val="bg1"/>
+                      </a:solidFill>
+                      <a:prstDash val="solid"/>
+                      <a:round/>
+                      <a:headEnd type="none" w="med" len="med"/>
+                      <a:tailEnd type="none" w="med" len="med"/>
+                    </a:lnT>
+                    <a:lnB w="6350" cap="flat" cmpd="sng" algn="ctr">
+                      <a:solidFill>
+                        <a:schemeClr val="bg1"/>
+                      </a:solidFill>
+                      <a:prstDash val="solid"/>
+                      <a:round/>
+                      <a:headEnd type="none" w="med" len="med"/>
+                      <a:tailEnd type="none" w="med" len="med"/>
+                    </a:lnB>
+                  </a:tcPr>
+                </a:tc>
+                <a:tc>
+                  <a:txBody>
+                    <a:bodyPr/>
+                    <a:lstStyle/>
+                    <a:p>
+                      <a:r>
+                        <a:rPr lang="en-US" b="1">
+                          <a:effectLst/>
+                          <a:latin typeface="Google Sans Text"/>
+                        </a:rPr>
+                        <a:t>Gris très clair</a:t>
+                      </a:r>
+                      <a:endParaRPr lang="en-US">
+                        <a:effectLst/>
+                        <a:latin typeface="Google Sans Text"/>
+                      </a:endParaRPr>
+                    </a:p>
+                  </a:txBody>
+                  <a:tcPr anchor="ctr">
+                    <a:lnL w="6350" cap="flat" cmpd="sng" algn="ctr">
+                      <a:solidFill>
+                        <a:schemeClr val="bg1"/>
+                      </a:solidFill>
+                      <a:prstDash val="solid"/>
+                      <a:round/>
+                      <a:headEnd type="none" w="med" len="med"/>
+                      <a:tailEnd type="none" w="med" len="med"/>
+                    </a:lnL>
+                    <a:lnR w="6350" cap="flat" cmpd="sng" algn="ctr">
+                      <a:solidFill>
+                        <a:schemeClr val="bg1"/>
+                      </a:solidFill>
+                      <a:prstDash val="solid"/>
+                      <a:round/>
+                      <a:headEnd type="none" w="med" len="med"/>
+                      <a:tailEnd type="none" w="med" len="med"/>
+                    </a:lnR>
+                    <a:lnT w="6350" cap="flat" cmpd="sng" algn="ctr">
+                      <a:solidFill>
+                        <a:schemeClr val="bg1"/>
+                      </a:solidFill>
+                      <a:prstDash val="solid"/>
+                      <a:round/>
+                      <a:headEnd type="none" w="med" len="med"/>
+                      <a:tailEnd type="none" w="med" len="med"/>
+                    </a:lnT>
+                    <a:lnB w="6350" cap="flat" cmpd="sng" algn="ctr">
+                      <a:solidFill>
+                        <a:schemeClr val="bg1"/>
+                      </a:solidFill>
+                      <a:prstDash val="solid"/>
+                      <a:round/>
+                      <a:headEnd type="none" w="med" len="med"/>
+                      <a:tailEnd type="none" w="med" len="med"/>
+                    </a:lnB>
+                  </a:tcPr>
+                </a:tc>
+                <a:tc>
+                  <a:txBody>
+                    <a:bodyPr/>
+                    <a:lstStyle/>
+                    <a:p>
+                      <a:r>
+                        <a:rPr lang="fr-FR" dirty="0">
+                          <a:effectLst/>
+                          <a:latin typeface="Google Sans Text"/>
+                        </a:rPr>
+                        <a:t>Pour séparer deux sections blanches</a:t>
+                      </a:r>
+                    </a:p>
+                  </a:txBody>
+                  <a:tcPr anchor="ctr">
+                    <a:lnL w="6350" cap="flat" cmpd="sng" algn="ctr">
+                      <a:solidFill>
+                        <a:schemeClr val="bg1"/>
+                      </a:solidFill>
+                      <a:prstDash val="solid"/>
+                      <a:round/>
+                      <a:headEnd type="none" w="med" len="med"/>
+                      <a:tailEnd type="none" w="med" len="med"/>
+                    </a:lnL>
+                    <a:lnR w="6350" cap="flat" cmpd="sng" algn="ctr">
+                      <a:solidFill>
+                        <a:schemeClr val="bg1"/>
+                      </a:solidFill>
+                      <a:prstDash val="solid"/>
+                      <a:round/>
+                      <a:headEnd type="none" w="med" len="med"/>
+                      <a:tailEnd type="none" w="med" len="med"/>
+                    </a:lnR>
+                    <a:lnT w="6350" cap="flat" cmpd="sng" algn="ctr">
+                      <a:solidFill>
+                        <a:schemeClr val="bg1"/>
+                      </a:solidFill>
+                      <a:prstDash val="solid"/>
+                      <a:round/>
+                      <a:headEnd type="none" w="med" len="med"/>
+                      <a:tailEnd type="none" w="med" len="med"/>
+                    </a:lnT>
+                    <a:lnB w="6350" cap="flat" cmpd="sng" algn="ctr">
+                      <a:solidFill>
+                        <a:schemeClr val="bg1"/>
+                      </a:solidFill>
+                      <a:prstDash val="solid"/>
+                      <a:round/>
+                      <a:headEnd type="none" w="med" len="med"/>
+                      <a:tailEnd type="none" w="med" len="med"/>
+                    </a:lnB>
+                  </a:tcPr>
+                </a:tc>
+                <a:extLst>
+                  <a:ext uri="{0D108BD9-81ED-4DB2-BD59-A6C34878D82A}">
+                    <a16:rowId xmlns:a16="http://schemas.microsoft.com/office/drawing/2014/main" val="2925765829"/>
+                  </a:ext>
+                </a:extLst>
+              </a:tr>
+            </a:tbl>
+          </a:graphicData>
+        </a:graphic>
+      </p:graphicFrame>
     </p:spTree>
     <p:extLst>
       <p:ext uri="{BB962C8B-B14F-4D97-AF65-F5344CB8AC3E}">
-        <p14:creationId xmlns:p14="http://schemas.microsoft.com/office/powerpoint/2010/main" val="1902613301"/>
+        <p14:creationId xmlns:p14="http://schemas.microsoft.com/office/powerpoint/2010/main" val="272806974"/>
       </p:ext>
     </p:extLst>
   </p:cSld>

--- a/GACI FORUM SUR L’APPRENTISSAGE DU frame work boostrap.pptx
+++ b/GACI FORUM SUR L’APPRENTISSAGE DU frame work boostrap.pptx
@@ -5,10 +5,10 @@
     <p:sldMasterId id="2147483669" r:id="rId1"/>
   </p:sldMasterIdLst>
   <p:notesMasterIdLst>
-    <p:notesMasterId r:id="rId9"/>
+    <p:notesMasterId r:id="rId12"/>
   </p:notesMasterIdLst>
   <p:handoutMasterIdLst>
-    <p:handoutMasterId r:id="rId10"/>
+    <p:handoutMasterId r:id="rId13"/>
   </p:handoutMasterIdLst>
   <p:sldIdLst>
     <p:sldId id="256" r:id="rId2"/>
@@ -18,6 +18,9 @@
     <p:sldId id="261" r:id="rId6"/>
     <p:sldId id="262" r:id="rId7"/>
     <p:sldId id="264" r:id="rId8"/>
+    <p:sldId id="266" r:id="rId9"/>
+    <p:sldId id="268" r:id="rId10"/>
+    <p:sldId id="269" r:id="rId11"/>
   </p:sldIdLst>
   <p:sldSz cx="12192000" cy="6858000"/>
   <p:notesSz cx="6858000" cy="9144000"/>
@@ -4586,6 +4589,174 @@
 </p:notes>
 </file>
 
+<file path=ppt/notesSlides/notesSlide8.xml><?xml version="1.0" encoding="utf-8"?>
+<p:notes xmlns:a="http://schemas.openxmlformats.org/drawingml/2006/main" xmlns:r="http://schemas.openxmlformats.org/officeDocument/2006/relationships" xmlns:p="http://schemas.openxmlformats.org/presentationml/2006/main">
+  <p:cSld>
+    <p:spTree>
+      <p:nvGrpSpPr>
+        <p:cNvPr id="1" name=""/>
+        <p:cNvGrpSpPr/>
+        <p:nvPr/>
+      </p:nvGrpSpPr>
+      <p:grpSpPr>
+        <a:xfrm>
+          <a:off x="0" y="0"/>
+          <a:ext cx="0" cy="0"/>
+          <a:chOff x="0" y="0"/>
+          <a:chExt cx="0" cy="0"/>
+        </a:xfrm>
+      </p:grpSpPr>
+      <p:sp>
+        <p:nvSpPr>
+          <p:cNvPr id="2" name="Espace réservé de l'image des diapositives 1"/>
+          <p:cNvSpPr>
+            <a:spLocks noGrp="1" noRot="1" noChangeAspect="1"/>
+          </p:cNvSpPr>
+          <p:nvPr>
+            <p:ph type="sldImg"/>
+          </p:nvPr>
+        </p:nvSpPr>
+        <p:spPr/>
+      </p:sp>
+      <p:sp>
+        <p:nvSpPr>
+          <p:cNvPr id="3" name="Espace réservé des notes 2"/>
+          <p:cNvSpPr>
+            <a:spLocks noGrp="1"/>
+          </p:cNvSpPr>
+          <p:nvPr>
+            <p:ph type="body" idx="1"/>
+          </p:nvPr>
+        </p:nvSpPr>
+        <p:spPr/>
+        <p:txBody>
+          <a:bodyPr/>
+          <a:lstStyle/>
+          <a:p>
+            <a:endParaRPr lang="fr-FR"/>
+          </a:p>
+        </p:txBody>
+      </p:sp>
+      <p:sp>
+        <p:nvSpPr>
+          <p:cNvPr id="4" name="Espace réservé du numéro de diapositive 3"/>
+          <p:cNvSpPr>
+            <a:spLocks noGrp="1"/>
+          </p:cNvSpPr>
+          <p:nvPr>
+            <p:ph type="sldNum" sz="quarter" idx="5"/>
+          </p:nvPr>
+        </p:nvSpPr>
+        <p:spPr/>
+        <p:txBody>
+          <a:bodyPr/>
+          <a:lstStyle/>
+          <a:p>
+            <a:fld id="{C7E15328-2FD5-4AB1-B846-CCAE8EA09498}" type="slidenum">
+              <a:rPr lang="fr-FR" smtClean="0"/>
+              <a:t>8</a:t>
+            </a:fld>
+            <a:endParaRPr lang="fr-FR"/>
+          </a:p>
+        </p:txBody>
+      </p:sp>
+    </p:spTree>
+    <p:extLst>
+      <p:ext uri="{BB962C8B-B14F-4D97-AF65-F5344CB8AC3E}">
+        <p14:creationId xmlns:p14="http://schemas.microsoft.com/office/powerpoint/2010/main" val="2411445250"/>
+      </p:ext>
+    </p:extLst>
+  </p:cSld>
+  <p:clrMapOvr>
+    <a:masterClrMapping/>
+  </p:clrMapOvr>
+</p:notes>
+</file>
+
+<file path=ppt/notesSlides/notesSlide9.xml><?xml version="1.0" encoding="utf-8"?>
+<p:notes xmlns:a="http://schemas.openxmlformats.org/drawingml/2006/main" xmlns:r="http://schemas.openxmlformats.org/officeDocument/2006/relationships" xmlns:p="http://schemas.openxmlformats.org/presentationml/2006/main">
+  <p:cSld>
+    <p:spTree>
+      <p:nvGrpSpPr>
+        <p:cNvPr id="1" name=""/>
+        <p:cNvGrpSpPr/>
+        <p:nvPr/>
+      </p:nvGrpSpPr>
+      <p:grpSpPr>
+        <a:xfrm>
+          <a:off x="0" y="0"/>
+          <a:ext cx="0" cy="0"/>
+          <a:chOff x="0" y="0"/>
+          <a:chExt cx="0" cy="0"/>
+        </a:xfrm>
+      </p:grpSpPr>
+      <p:sp>
+        <p:nvSpPr>
+          <p:cNvPr id="2" name="Espace réservé de l'image des diapositives 1"/>
+          <p:cNvSpPr>
+            <a:spLocks noGrp="1" noRot="1" noChangeAspect="1"/>
+          </p:cNvSpPr>
+          <p:nvPr>
+            <p:ph type="sldImg"/>
+          </p:nvPr>
+        </p:nvSpPr>
+        <p:spPr/>
+      </p:sp>
+      <p:sp>
+        <p:nvSpPr>
+          <p:cNvPr id="3" name="Espace réservé des notes 2"/>
+          <p:cNvSpPr>
+            <a:spLocks noGrp="1"/>
+          </p:cNvSpPr>
+          <p:nvPr>
+            <p:ph type="body" idx="1"/>
+          </p:nvPr>
+        </p:nvSpPr>
+        <p:spPr/>
+        <p:txBody>
+          <a:bodyPr/>
+          <a:lstStyle/>
+          <a:p>
+            <a:endParaRPr lang="fr-FR"/>
+          </a:p>
+        </p:txBody>
+      </p:sp>
+      <p:sp>
+        <p:nvSpPr>
+          <p:cNvPr id="4" name="Espace réservé du numéro de diapositive 3"/>
+          <p:cNvSpPr>
+            <a:spLocks noGrp="1"/>
+          </p:cNvSpPr>
+          <p:nvPr>
+            <p:ph type="sldNum" sz="quarter" idx="5"/>
+          </p:nvPr>
+        </p:nvSpPr>
+        <p:spPr/>
+        <p:txBody>
+          <a:bodyPr/>
+          <a:lstStyle/>
+          <a:p>
+            <a:fld id="{C7E15328-2FD5-4AB1-B846-CCAE8EA09498}" type="slidenum">
+              <a:rPr lang="fr-FR" smtClean="0"/>
+              <a:t>9</a:t>
+            </a:fld>
+            <a:endParaRPr lang="fr-FR"/>
+          </a:p>
+        </p:txBody>
+      </p:sp>
+    </p:spTree>
+    <p:extLst>
+      <p:ext uri="{BB962C8B-B14F-4D97-AF65-F5344CB8AC3E}">
+        <p14:creationId xmlns:p14="http://schemas.microsoft.com/office/powerpoint/2010/main" val="2633719251"/>
+      </p:ext>
+    </p:extLst>
+  </p:cSld>
+  <p:clrMapOvr>
+    <a:masterClrMapping/>
+  </p:clrMapOvr>
+</p:notes>
+</file>
+
 <file path=ppt/slideLayouts/slideLayout1.xml><?xml version="1.0" encoding="utf-8"?>
 <p:sldLayout xmlns:a="http://schemas.openxmlformats.org/drawingml/2006/main" xmlns:r="http://schemas.openxmlformats.org/officeDocument/2006/relationships" xmlns:p="http://schemas.openxmlformats.org/presentationml/2006/main" showMasterSp="0" type="title" preserve="1">
   <p:cSld name="Diapositive de titre">
@@ -17103,6 +17274,146 @@
 </p:sld>
 </file>
 
+<file path=ppt/slides/slide10.xml><?xml version="1.0" encoding="utf-8"?>
+<p:sld xmlns:a="http://schemas.openxmlformats.org/drawingml/2006/main" xmlns:r="http://schemas.openxmlformats.org/officeDocument/2006/relationships" xmlns:p="http://schemas.openxmlformats.org/presentationml/2006/main">
+  <p:cSld>
+    <p:spTree>
+      <p:nvGrpSpPr>
+        <p:cNvPr id="1" name=""/>
+        <p:cNvGrpSpPr/>
+        <p:nvPr/>
+      </p:nvGrpSpPr>
+      <p:grpSpPr>
+        <a:xfrm>
+          <a:off x="0" y="0"/>
+          <a:ext cx="0" cy="0"/>
+          <a:chOff x="0" y="0"/>
+          <a:chExt cx="0" cy="0"/>
+        </a:xfrm>
+      </p:grpSpPr>
+      <p:sp>
+        <p:nvSpPr>
+          <p:cNvPr id="2" name="Titre 1"/>
+          <p:cNvSpPr>
+            <a:spLocks noGrp="1"/>
+          </p:cNvSpPr>
+          <p:nvPr>
+            <p:ph type="title"/>
+          </p:nvPr>
+        </p:nvSpPr>
+        <p:spPr/>
+        <p:txBody>
+          <a:bodyPr/>
+          <a:lstStyle/>
+          <a:p>
+            <a:r>
+              <a:rPr lang="fr-FR" dirty="0" smtClean="0"/>
+              <a:t>CONCLUSION </a:t>
+            </a:r>
+            <a:endParaRPr lang="en-US" dirty="0"/>
+          </a:p>
+        </p:txBody>
+      </p:sp>
+      <p:sp>
+        <p:nvSpPr>
+          <p:cNvPr id="3" name="Espace réservé du contenu 2"/>
+          <p:cNvSpPr>
+            <a:spLocks noGrp="1"/>
+          </p:cNvSpPr>
+          <p:nvPr>
+            <p:ph idx="1"/>
+          </p:nvPr>
+        </p:nvSpPr>
+        <p:spPr/>
+        <p:txBody>
+          <a:bodyPr/>
+          <a:lstStyle/>
+          <a:p>
+            <a:r>
+              <a:rPr lang="fr-FR" dirty="0" smtClean="0"/>
+              <a:t>De nos jours apprendre un </a:t>
+            </a:r>
+            <a:r>
+              <a:rPr lang="fr-FR" dirty="0" err="1" smtClean="0"/>
+              <a:t>framework</a:t>
+            </a:r>
+            <a:r>
+              <a:rPr lang="fr-FR" dirty="0" smtClean="0"/>
+              <a:t> c’est gagné doublement le temps de travail.</a:t>
+            </a:r>
+          </a:p>
+          <a:p>
+            <a:r>
+              <a:rPr lang="fr-FR" dirty="0" err="1" smtClean="0"/>
+              <a:t>Boostrapp</a:t>
+            </a:r>
+            <a:r>
+              <a:rPr lang="fr-FR" dirty="0" smtClean="0"/>
+              <a:t> est </a:t>
+            </a:r>
+            <a:r>
+              <a:rPr lang="fr-FR" dirty="0" err="1" smtClean="0"/>
+              <a:t>parmis</a:t>
+            </a:r>
+            <a:r>
+              <a:rPr lang="fr-FR" dirty="0" smtClean="0"/>
+              <a:t> les </a:t>
+            </a:r>
+            <a:r>
+              <a:rPr lang="fr-FR" dirty="0" err="1" smtClean="0"/>
+              <a:t>frameworks</a:t>
+            </a:r>
+            <a:r>
+              <a:rPr lang="fr-FR" dirty="0" smtClean="0"/>
+              <a:t> les plus utilisés dans le monde du </a:t>
+            </a:r>
+            <a:r>
+              <a:rPr lang="fr-FR" dirty="0" err="1" smtClean="0"/>
+              <a:t>developpement</a:t>
+            </a:r>
+            <a:r>
+              <a:rPr lang="fr-FR" dirty="0" smtClean="0"/>
+              <a:t> web car il est très facile à apprendre et offre ses données gratuitement. Il est un </a:t>
+            </a:r>
+            <a:r>
+              <a:rPr lang="fr-FR" dirty="0" err="1" smtClean="0"/>
+              <a:t>framework</a:t>
+            </a:r>
+            <a:r>
+              <a:rPr lang="fr-FR" dirty="0" smtClean="0"/>
+              <a:t> Open sources</a:t>
+            </a:r>
+          </a:p>
+          <a:p>
+            <a:r>
+              <a:rPr lang="fr-FR" dirty="0" smtClean="0"/>
+              <a:t>On vous </a:t>
+            </a:r>
+            <a:r>
+              <a:rPr lang="fr-FR" dirty="0" err="1" smtClean="0"/>
+              <a:t>remerci</a:t>
+            </a:r>
+            <a:r>
+              <a:rPr lang="fr-FR" dirty="0" smtClean="0"/>
+              <a:t> pour votre attention.  </a:t>
+            </a:r>
+            <a:endParaRPr lang="en-US" dirty="0"/>
+          </a:p>
+        </p:txBody>
+      </p:sp>
+    </p:spTree>
+    <p:extLst>
+      <p:ext uri="{BB962C8B-B14F-4D97-AF65-F5344CB8AC3E}">
+        <p14:creationId xmlns:p14="http://schemas.microsoft.com/office/powerpoint/2010/main" val="1366885277"/>
+      </p:ext>
+    </p:extLst>
+  </p:cSld>
+  <p:clrMapOvr>
+    <a:masterClrMapping/>
+  </p:clrMapOvr>
+</p:sld>
+</file>
+
 <file path=ppt/slides/slide2.xml><?xml version="1.0" encoding="utf-8"?>
 <p:sld xmlns:a="http://schemas.openxmlformats.org/drawingml/2006/main" xmlns:r="http://schemas.openxmlformats.org/officeDocument/2006/relationships" xmlns:p="http://schemas.openxmlformats.org/presentationml/2006/main">
   <p:cSld>
@@ -19119,6 +19430,531 @@
 </p:sld>
 </file>
 
+<file path=ppt/slides/slide8.xml><?xml version="1.0" encoding="utf-8"?>
+<p:sld xmlns:a="http://schemas.openxmlformats.org/drawingml/2006/main" xmlns:r="http://schemas.openxmlformats.org/officeDocument/2006/relationships" xmlns:p="http://schemas.openxmlformats.org/presentationml/2006/main">
+  <p:cSld>
+    <p:spTree>
+      <p:nvGrpSpPr>
+        <p:cNvPr id="1" name=""/>
+        <p:cNvGrpSpPr/>
+        <p:nvPr/>
+      </p:nvGrpSpPr>
+      <p:grpSpPr>
+        <a:xfrm>
+          <a:off x="0" y="0"/>
+          <a:ext cx="0" cy="0"/>
+          <a:chOff x="0" y="0"/>
+          <a:chExt cx="0" cy="0"/>
+        </a:xfrm>
+      </p:grpSpPr>
+      <p:sp>
+        <p:nvSpPr>
+          <p:cNvPr id="2" name="Titre 1">
+            <a:extLst>
+              <a:ext uri="{FF2B5EF4-FFF2-40B4-BE49-F238E27FC236}">
+                <a16:creationId xmlns:a16="http://schemas.microsoft.com/office/drawing/2014/main" id="{34DB6CE4-2B13-4715-B5B2-615A55922CA1}"/>
+              </a:ext>
+            </a:extLst>
+          </p:cNvPr>
+          <p:cNvSpPr>
+            <a:spLocks noGrp="1"/>
+          </p:cNvSpPr>
+          <p:nvPr>
+            <p:ph type="title"/>
+          </p:nvPr>
+        </p:nvSpPr>
+        <p:spPr/>
+        <p:txBody>
+          <a:bodyPr rtlCol="0">
+            <a:normAutofit/>
+          </a:bodyPr>
+          <a:lstStyle/>
+          <a:p>
+            <a:r>
+              <a:rPr lang="fr-FR" sz="4400" dirty="0"/>
+              <a:t>Les Fondations : Anatomie d'une </a:t>
+            </a:r>
+            <a:r>
+              <a:rPr lang="fr-FR" sz="4400" dirty="0" smtClean="0"/>
+              <a:t>Page.</a:t>
+            </a:r>
+            <a:endParaRPr lang="fr-FR" sz="4400" dirty="0">
+              <a:latin typeface="Rockwell" panose="02060603020205020403" pitchFamily="18" charset="0"/>
+            </a:endParaRPr>
+          </a:p>
+        </p:txBody>
+      </p:sp>
+      <p:sp>
+        <p:nvSpPr>
+          <p:cNvPr id="3" name="Espace réservé du contenu 2">
+            <a:extLst>
+              <a:ext uri="{FF2B5EF4-FFF2-40B4-BE49-F238E27FC236}">
+                <a16:creationId xmlns:a16="http://schemas.microsoft.com/office/drawing/2014/main" id="{143F5361-68C0-4BF5-80C8-F1E7BF92B2DB}"/>
+              </a:ext>
+            </a:extLst>
+          </p:cNvPr>
+          <p:cNvSpPr>
+            <a:spLocks noGrp="1"/>
+          </p:cNvSpPr>
+          <p:nvPr>
+            <p:ph idx="1"/>
+          </p:nvPr>
+        </p:nvSpPr>
+        <p:spPr/>
+        <p:txBody>
+          <a:bodyPr rtlCol="0">
+            <a:normAutofit lnSpcReduction="10000"/>
+          </a:bodyPr>
+          <a:lstStyle/>
+          <a:p>
+            <a:pPr lvl="1"/>
+            <a:r>
+              <a:rPr lang="fr-FR" b="1" dirty="0"/>
+              <a:t>Les Marges : La respiration du site (</a:t>
+            </a:r>
+            <a:r>
+              <a:rPr lang="fr-FR" b="1" dirty="0" err="1"/>
+              <a:t>Spacing</a:t>
+            </a:r>
+            <a:r>
+              <a:rPr lang="fr-FR" b="1" dirty="0" smtClean="0"/>
+              <a:t>)</a:t>
+            </a:r>
+          </a:p>
+          <a:p>
+            <a:pPr lvl="1"/>
+            <a:r>
+              <a:rPr lang="fr-FR" dirty="0"/>
+              <a:t>C'est le point le plus important pour un rendu "pro". Explique la règle du </a:t>
+            </a:r>
+            <a:r>
+              <a:rPr lang="fr-FR" b="1" dirty="0"/>
+              <a:t>M-P-T-B-S-E</a:t>
+            </a:r>
+            <a:r>
+              <a:rPr lang="fr-FR" dirty="0"/>
+              <a:t> :</a:t>
+            </a:r>
+            <a:endParaRPr lang="fr-FR" b="1" dirty="0" smtClean="0"/>
+          </a:p>
+          <a:p>
+            <a:pPr lvl="1"/>
+            <a:r>
+              <a:rPr lang="fr-FR" b="1" dirty="0"/>
+              <a:t>M</a:t>
+            </a:r>
+            <a:r>
+              <a:rPr lang="fr-FR" dirty="0"/>
+              <a:t> = </a:t>
+            </a:r>
+            <a:r>
+              <a:rPr lang="fr-FR" dirty="0" err="1"/>
+              <a:t>Margin</a:t>
+            </a:r>
+            <a:r>
+              <a:rPr lang="fr-FR" dirty="0"/>
+              <a:t> (extérieur) / </a:t>
+            </a:r>
+            <a:r>
+              <a:rPr lang="fr-FR" b="1" dirty="0"/>
+              <a:t>P</a:t>
+            </a:r>
+            <a:r>
+              <a:rPr lang="fr-FR" dirty="0"/>
+              <a:t> = </a:t>
+            </a:r>
+            <a:r>
+              <a:rPr lang="fr-FR" dirty="0" err="1"/>
+              <a:t>Padding</a:t>
+            </a:r>
+            <a:r>
+              <a:rPr lang="fr-FR" dirty="0"/>
+              <a:t> (intérieur</a:t>
+            </a:r>
+            <a:r>
+              <a:rPr lang="fr-FR" dirty="0" smtClean="0"/>
+              <a:t>).</a:t>
+            </a:r>
+          </a:p>
+          <a:p>
+            <a:pPr lvl="1"/>
+            <a:r>
+              <a:rPr lang="fr-FR" b="1" dirty="0"/>
+              <a:t>T</a:t>
+            </a:r>
+            <a:r>
+              <a:rPr lang="fr-FR" dirty="0"/>
+              <a:t> = Top (haut) / </a:t>
+            </a:r>
+            <a:r>
+              <a:rPr lang="fr-FR" b="1" dirty="0"/>
+              <a:t>B</a:t>
+            </a:r>
+            <a:r>
+              <a:rPr lang="fr-FR" dirty="0"/>
+              <a:t> = </a:t>
+            </a:r>
+            <a:r>
+              <a:rPr lang="fr-FR" dirty="0" err="1"/>
+              <a:t>Bottom</a:t>
+            </a:r>
+            <a:r>
+              <a:rPr lang="fr-FR" dirty="0"/>
+              <a:t> (bas) / </a:t>
+            </a:r>
+            <a:r>
+              <a:rPr lang="fr-FR" b="1" dirty="0"/>
+              <a:t>S</a:t>
+            </a:r>
+            <a:r>
+              <a:rPr lang="fr-FR" dirty="0"/>
+              <a:t> = Start (gauche) / </a:t>
+            </a:r>
+            <a:r>
+              <a:rPr lang="fr-FR" b="1" dirty="0"/>
+              <a:t>E</a:t>
+            </a:r>
+            <a:r>
+              <a:rPr lang="fr-FR" dirty="0"/>
+              <a:t> = End (droite</a:t>
+            </a:r>
+            <a:r>
+              <a:rPr lang="fr-FR" dirty="0" smtClean="0"/>
+              <a:t>).</a:t>
+            </a:r>
+          </a:p>
+          <a:p>
+            <a:pPr lvl="1"/>
+            <a:r>
+              <a:rPr lang="en-US" b="1" dirty="0" err="1"/>
+              <a:t>L'échelle</a:t>
+            </a:r>
+            <a:r>
+              <a:rPr lang="en-US" b="1" dirty="0"/>
+              <a:t> (0 à 5)</a:t>
+            </a:r>
+            <a:r>
+              <a:rPr lang="en-US" dirty="0"/>
+              <a:t> </a:t>
+            </a:r>
+            <a:r>
+              <a:rPr lang="en-US" dirty="0" smtClean="0"/>
+              <a:t>:</a:t>
+            </a:r>
+          </a:p>
+          <a:p>
+            <a:pPr lvl="1"/>
+            <a:r>
+              <a:rPr lang="fr-FR" dirty="0" smtClean="0"/>
+              <a:t>Mt-5: </a:t>
+            </a:r>
+            <a:r>
+              <a:rPr lang="en-US" dirty="0" smtClean="0"/>
+              <a:t>Grosse </a:t>
+            </a:r>
+            <a:r>
+              <a:rPr lang="en-US" dirty="0"/>
+              <a:t>marge </a:t>
+            </a:r>
+            <a:r>
+              <a:rPr lang="en-US" dirty="0" err="1"/>
+              <a:t>en</a:t>
+            </a:r>
+            <a:r>
+              <a:rPr lang="en-US" dirty="0"/>
+              <a:t> </a:t>
+            </a:r>
+            <a:r>
+              <a:rPr lang="en-US" dirty="0" smtClean="0"/>
+              <a:t>haut, py-3: </a:t>
+            </a:r>
+            <a:r>
+              <a:rPr lang="fr-FR" dirty="0"/>
+              <a:t>Petit espacement intérieur en haut ET en bas, </a:t>
+            </a:r>
+            <a:r>
+              <a:rPr lang="fr-FR" dirty="0" smtClean="0"/>
+              <a:t>mb-4 : Marge </a:t>
+            </a:r>
+            <a:r>
+              <a:rPr lang="fr-FR" dirty="0"/>
+              <a:t>moyenne en bas pour séparer deux blocs.</a:t>
+            </a:r>
+            <a:endParaRPr lang="fr-FR" dirty="0" smtClean="0"/>
+          </a:p>
+          <a:p>
+            <a:pPr lvl="1"/>
+            <a:r>
+              <a:rPr lang="en-US" dirty="0" smtClean="0"/>
+              <a:t>La Section: </a:t>
+            </a:r>
+            <a:r>
+              <a:rPr lang="fr-FR" dirty="0" smtClean="0"/>
+              <a:t>On </a:t>
+            </a:r>
+            <a:r>
+              <a:rPr lang="fr-FR" dirty="0"/>
+              <a:t>utilise la balise </a:t>
+            </a:r>
+            <a:r>
+              <a:rPr lang="fr-FR" dirty="0" smtClean="0"/>
+              <a:t>HTML5 </a:t>
+            </a:r>
+            <a:r>
+              <a:rPr lang="en-US" dirty="0"/>
+              <a:t>&lt;section</a:t>
+            </a:r>
+            <a:r>
+              <a:rPr lang="en-US" dirty="0" smtClean="0"/>
+              <a:t>&gt; </a:t>
+            </a:r>
+            <a:r>
+              <a:rPr lang="fr-FR" dirty="0"/>
+              <a:t>combinée aux classes </a:t>
+            </a:r>
+            <a:r>
+              <a:rPr lang="fr-FR" dirty="0" err="1"/>
+              <a:t>Bootstrap</a:t>
+            </a:r>
+            <a:r>
+              <a:rPr lang="fr-FR" dirty="0"/>
+              <a:t> pour séparer les parties du portfolio (Accueil, Projets, Contact</a:t>
+            </a:r>
+            <a:r>
+              <a:rPr lang="fr-FR" dirty="0" smtClean="0"/>
+              <a:t>). </a:t>
+            </a:r>
+          </a:p>
+          <a:p>
+            <a:pPr marL="457200" lvl="1" indent="0">
+              <a:buNone/>
+            </a:pPr>
+            <a:endParaRPr lang="fr-FR" dirty="0" smtClean="0"/>
+          </a:p>
+        </p:txBody>
+      </p:sp>
+    </p:spTree>
+    <p:extLst>
+      <p:ext uri="{BB962C8B-B14F-4D97-AF65-F5344CB8AC3E}">
+        <p14:creationId xmlns:p14="http://schemas.microsoft.com/office/powerpoint/2010/main" val="2821440429"/>
+      </p:ext>
+    </p:extLst>
+  </p:cSld>
+  <p:clrMapOvr>
+    <a:masterClrMapping/>
+  </p:clrMapOvr>
+</p:sld>
+</file>
+
+<file path=ppt/slides/slide9.xml><?xml version="1.0" encoding="utf-8"?>
+<p:sld xmlns:a="http://schemas.openxmlformats.org/drawingml/2006/main" xmlns:r="http://schemas.openxmlformats.org/officeDocument/2006/relationships" xmlns:p="http://schemas.openxmlformats.org/presentationml/2006/main">
+  <p:cSld>
+    <p:spTree>
+      <p:nvGrpSpPr>
+        <p:cNvPr id="1" name=""/>
+        <p:cNvGrpSpPr/>
+        <p:nvPr/>
+      </p:nvGrpSpPr>
+      <p:grpSpPr>
+        <a:xfrm>
+          <a:off x="0" y="0"/>
+          <a:ext cx="0" cy="0"/>
+          <a:chOff x="0" y="0"/>
+          <a:chExt cx="0" cy="0"/>
+        </a:xfrm>
+      </p:grpSpPr>
+      <p:sp>
+        <p:nvSpPr>
+          <p:cNvPr id="2" name="Titre 1">
+            <a:extLst>
+              <a:ext uri="{FF2B5EF4-FFF2-40B4-BE49-F238E27FC236}">
+                <a16:creationId xmlns:a16="http://schemas.microsoft.com/office/drawing/2014/main" id="{34DB6CE4-2B13-4715-B5B2-615A55922CA1}"/>
+              </a:ext>
+            </a:extLst>
+          </p:cNvPr>
+          <p:cNvSpPr>
+            <a:spLocks noGrp="1"/>
+          </p:cNvSpPr>
+          <p:nvPr>
+            <p:ph type="title"/>
+          </p:nvPr>
+        </p:nvSpPr>
+        <p:spPr/>
+        <p:txBody>
+          <a:bodyPr rtlCol="0">
+            <a:normAutofit/>
+          </a:bodyPr>
+          <a:lstStyle/>
+          <a:p>
+            <a:r>
+              <a:rPr lang="fr-FR" sz="4400" dirty="0"/>
+              <a:t>Les Fondations : Anatomie d'une </a:t>
+            </a:r>
+            <a:r>
+              <a:rPr lang="fr-FR" sz="4400" dirty="0" smtClean="0"/>
+              <a:t>Page.</a:t>
+            </a:r>
+            <a:endParaRPr lang="fr-FR" sz="4400" dirty="0">
+              <a:latin typeface="Rockwell" panose="02060603020205020403" pitchFamily="18" charset="0"/>
+            </a:endParaRPr>
+          </a:p>
+        </p:txBody>
+      </p:sp>
+      <p:sp>
+        <p:nvSpPr>
+          <p:cNvPr id="3" name="Espace réservé du contenu 2">
+            <a:extLst>
+              <a:ext uri="{FF2B5EF4-FFF2-40B4-BE49-F238E27FC236}">
+                <a16:creationId xmlns:a16="http://schemas.microsoft.com/office/drawing/2014/main" id="{143F5361-68C0-4BF5-80C8-F1E7BF92B2DB}"/>
+              </a:ext>
+            </a:extLst>
+          </p:cNvPr>
+          <p:cNvSpPr>
+            <a:spLocks noGrp="1"/>
+          </p:cNvSpPr>
+          <p:nvPr>
+            <p:ph idx="1"/>
+          </p:nvPr>
+        </p:nvSpPr>
+        <p:spPr/>
+        <p:txBody>
+          <a:bodyPr rtlCol="0">
+            <a:normAutofit/>
+          </a:bodyPr>
+          <a:lstStyle/>
+          <a:p>
+            <a:pPr lvl="1"/>
+            <a:r>
+              <a:rPr lang="fr-FR" dirty="0"/>
+              <a:t>Le Système de Grille (</a:t>
+            </a:r>
+            <a:r>
+              <a:rPr lang="fr-FR" dirty="0" err="1"/>
+              <a:t>Grid</a:t>
+            </a:r>
+            <a:r>
+              <a:rPr lang="fr-FR" dirty="0"/>
+              <a:t> System</a:t>
+            </a:r>
+            <a:r>
+              <a:rPr lang="fr-FR" dirty="0" smtClean="0"/>
+              <a:t>)</a:t>
+            </a:r>
+          </a:p>
+          <a:p>
+            <a:pPr lvl="1"/>
+            <a:r>
+              <a:rPr lang="fr-FR" dirty="0" smtClean="0"/>
+              <a:t>.</a:t>
+            </a:r>
+            <a:r>
+              <a:rPr lang="fr-FR" dirty="0" err="1" smtClean="0"/>
+              <a:t>row</a:t>
+            </a:r>
+            <a:r>
+              <a:rPr lang="fr-FR" dirty="0" smtClean="0"/>
+              <a:t>: </a:t>
+            </a:r>
+            <a:r>
+              <a:rPr lang="en-US" dirty="0" err="1"/>
+              <a:t>Une</a:t>
+            </a:r>
+            <a:r>
+              <a:rPr lang="en-US" dirty="0"/>
+              <a:t> </a:t>
+            </a:r>
+            <a:r>
+              <a:rPr lang="en-US" dirty="0" err="1"/>
+              <a:t>ligne</a:t>
+            </a:r>
+            <a:r>
+              <a:rPr lang="en-US" dirty="0" smtClean="0"/>
+              <a:t>.</a:t>
+            </a:r>
+          </a:p>
+          <a:p>
+            <a:pPr lvl="1"/>
+            <a:r>
+              <a:rPr lang="en-US" dirty="0" smtClean="0"/>
+              <a:t>.col-md-4: </a:t>
+            </a:r>
+            <a:r>
+              <a:rPr lang="fr-FR" dirty="0" smtClean="0"/>
+              <a:t>Prends </a:t>
+            </a:r>
+            <a:r>
+              <a:rPr lang="fr-FR" dirty="0"/>
+              <a:t>4 colonnes sur 12" </a:t>
+            </a:r>
+            <a:endParaRPr lang="fr-FR" dirty="0" smtClean="0"/>
+          </a:p>
+          <a:p>
+            <a:pPr lvl="1"/>
+            <a:r>
+              <a:rPr lang="en-US" b="1" dirty="0"/>
+              <a:t>Responsive</a:t>
+            </a:r>
+            <a:r>
+              <a:rPr lang="en-US" dirty="0"/>
+              <a:t> : </a:t>
+            </a:r>
+            <a:r>
+              <a:rPr lang="en-US" dirty="0" err="1"/>
+              <a:t>Montre</a:t>
+            </a:r>
+            <a:r>
+              <a:rPr lang="en-US" dirty="0"/>
+              <a:t> </a:t>
+            </a:r>
+            <a:r>
+              <a:rPr lang="en-US" dirty="0" err="1"/>
+              <a:t>qu'en</a:t>
+            </a:r>
+            <a:r>
+              <a:rPr lang="en-US" dirty="0"/>
+              <a:t> </a:t>
+            </a:r>
+            <a:r>
+              <a:rPr lang="en-US" dirty="0" err="1"/>
+              <a:t>changeant</a:t>
+            </a:r>
+            <a:r>
+              <a:rPr lang="en-US" dirty="0"/>
+              <a:t> .</a:t>
+            </a:r>
+            <a:r>
+              <a:rPr lang="en-US" dirty="0" smtClean="0"/>
+              <a:t>col-md-4 par col-12 </a:t>
+            </a:r>
+            <a:r>
+              <a:rPr lang="fr-FR" dirty="0"/>
+              <a:t>sur mobile, </a:t>
+            </a:r>
+            <a:r>
+              <a:rPr lang="fr-FR" dirty="0" err="1"/>
+              <a:t>Bootstrap</a:t>
+            </a:r>
+            <a:r>
+              <a:rPr lang="fr-FR" dirty="0"/>
+              <a:t> empile les éléments automatiquement.</a:t>
+            </a:r>
+            <a:endParaRPr lang="fr-FR" dirty="0" smtClean="0"/>
+          </a:p>
+        </p:txBody>
+      </p:sp>
+    </p:spTree>
+    <p:extLst>
+      <p:ext uri="{BB962C8B-B14F-4D97-AF65-F5344CB8AC3E}">
+        <p14:creationId xmlns:p14="http://schemas.microsoft.com/office/powerpoint/2010/main" val="76651123"/>
+      </p:ext>
+    </p:extLst>
+  </p:cSld>
+  <p:clrMapOvr>
+    <a:masterClrMapping/>
+  </p:clrMapOvr>
+</p:sld>
+</file>
+
 <file path=ppt/theme/theme1.xml><?xml version="1.0" encoding="utf-8"?>
 <a:theme xmlns:a="http://schemas.openxmlformats.org/drawingml/2006/main" name="Circuit">
   <a:themeElements>
